--- a/docs/latest_changes.pptx
+++ b/docs/latest_changes.pptx
@@ -127,7 +127,7 @@
                 <a:latin typeface="Malgun Gothic"/>
                 <a:ea typeface="Malgun Gothic"/>
               </a:rPr>
-              <a:t>YUJIN SECURITIES | ACTIVE ETF RADAR</a:t>
+              <a:t>EUGENE SECURITIES | ACTIVE ETF RADAR</a:t>
             </a:r>
             <a:endParaRPr lang="ko-KR" sz="1300"/>
           </a:p>
@@ -167,7 +167,7 @@
                 <a:latin typeface="Malgun Gothic"/>
                 <a:ea typeface="Malgun Gothic"/>
               </a:rPr>
-              <a:t>오늘은 큰 손의 흔적이 조용했습니다</a:t>
+              <a:t>오늘 ETF 자금의 흔적, 여기서 갈렸습니다</a:t>
             </a:r>
             <a:endParaRPr lang="ko-KR" sz="3000"/>
           </a:p>
@@ -207,7 +207,7 @@
                 <a:latin typeface="Malgun Gothic"/>
                 <a:ea typeface="Malgun Gothic"/>
               </a:rPr>
-              <a:t>2026-04-21 KRX PDF 보유종목 변화 요약</a:t>
+              <a:t>2026-04-22 KRX PDF 보유종목 변화 요약</a:t>
             </a:r>
             <a:endParaRPr lang="ko-KR" sz="1500"/>
           </a:p>
@@ -512,7 +512,7 @@
                 <a:latin typeface="Malgun Gothic"/>
                 <a:ea typeface="Malgun Gothic"/>
               </a:rPr>
-              <a:t>0</a:t>
+              <a:t>105</a:t>
             </a:r>
             <a:endParaRPr lang="ko-KR" sz="3000"/>
           </a:p>
@@ -650,7 +650,7 @@
                 <a:latin typeface="Malgun Gothic"/>
                 <a:ea typeface="Malgun Gothic"/>
               </a:rPr>
-              <a:t>0</a:t>
+              <a:t>5165</a:t>
             </a:r>
             <a:endParaRPr lang="ko-KR" sz="3000"/>
           </a:p>
@@ -788,7 +788,7 @@
                 <a:latin typeface="Malgun Gothic"/>
                 <a:ea typeface="Malgun Gothic"/>
               </a:rPr>
-              <a:t>0</a:t>
+              <a:t>71</a:t>
             </a:r>
             <a:endParaRPr lang="ko-KR" sz="3000"/>
           </a:p>
@@ -926,7 +926,7 @@
                 <a:latin typeface="Malgun Gothic"/>
                 <a:ea typeface="Malgun Gothic"/>
               </a:rPr>
-              <a:t>0</a:t>
+              <a:t>3474</a:t>
             </a:r>
             <a:endParaRPr lang="ko-KR" sz="3000"/>
           </a:p>
@@ -1177,7 +1177,7 @@
                 <a:latin typeface="Malgun Gothic"/>
                 <a:ea typeface="Malgun Gothic"/>
               </a:rPr>
-              <a:t>변화 강도 상위 0개</a:t>
+              <a:t>변화 강도 상위 5개</a:t>
             </a:r>
             <a:endParaRPr lang="ko-KR" sz="1500"/>
           </a:p>
@@ -1214,14 +1214,43 @@
       </p:sp>
       <p:sp>
         <p:nvSpPr>
-          <p:cNvPr id="6" name="Text 6"/>
-          <p:cNvSpPr txBox="1"/>
-          <p:nvPr/>
-        </p:nvSpPr>
-        <p:spPr>
-          <a:xfrm>
-            <a:off x="762000" y="2190750"/>
-            <a:ext cx="10287000" cy="857250"/>
+          <p:cNvPr id="6" name="Panel 6"/>
+          <p:cNvSpPr/>
+          <p:nvPr/>
+        </p:nvSpPr>
+        <p:spPr>
+          <a:xfrm>
+            <a:off x="514350" y="1676400"/>
+            <a:ext cx="11125200" cy="685800"/>
+          </a:xfrm>
+          <a:prstGeom prst="rect">
+            <a:avLst/>
+          </a:prstGeom>
+          <a:solidFill>
+            <a:srgbClr val="101318"/>
+          </a:solidFill>
+          <a:ln w="9525">
+            <a:solidFill>
+              <a:srgbClr val="2A3038"/>
+            </a:solidFill>
+          </a:ln>
+        </p:spPr>
+        <p:txBody>
+          <a:bodyPr/>
+          <a:lstStyle/>
+          <a:p/>
+        </p:txBody>
+      </p:sp>
+      <p:sp>
+        <p:nvSpPr>
+          <p:cNvPr id="7" name="Text 7"/>
+          <p:cNvSpPr txBox="1"/>
+          <p:nvPr/>
+        </p:nvSpPr>
+        <p:spPr>
+          <a:xfrm>
+            <a:off x="685800" y="1809750"/>
+            <a:ext cx="514350" cy="285750"/>
           </a:xfrm>
           <a:prstGeom prst="rect">
             <a:avLst/>
@@ -1239,30 +1268,892 @@
           <a:p>
             <a:pPr algn="l"/>
             <a:r>
-              <a:rPr lang="ko-KR" sz="2600" b="1">
+              <a:rPr lang="ko-KR" sz="2300" b="1">
+                <a:solidFill>
+                  <a:srgbClr val="F5B301"/>
+                </a:solidFill>
+                <a:latin typeface="Malgun Gothic"/>
+                <a:ea typeface="Malgun Gothic"/>
+              </a:rPr>
+              <a:t>#1</a:t>
+            </a:r>
+            <a:endParaRPr lang="ko-KR" sz="2300"/>
+          </a:p>
+        </p:txBody>
+      </p:sp>
+      <p:sp>
+        <p:nvSpPr>
+          <p:cNvPr id="8" name="Text 8"/>
+          <p:cNvSpPr txBox="1"/>
+          <p:nvPr/>
+        </p:nvSpPr>
+        <p:spPr>
+          <a:xfrm>
+            <a:off x="1314450" y="1790700"/>
+            <a:ext cx="5334000" cy="228600"/>
+          </a:xfrm>
+          <a:prstGeom prst="rect">
+            <a:avLst/>
+          </a:prstGeom>
+          <a:noFill/>
+          <a:ln>
+            <a:noFill/>
+          </a:ln>
+        </p:spPr>
+        <p:txBody>
+          <a:bodyPr wrap="square" anchor="t">
+            <a:spAutoFit/>
+          </a:bodyPr>
+          <a:lstStyle/>
+          <a:p>
+            <a:pPr algn="l"/>
+            <a:r>
+              <a:rPr lang="ko-KR" sz="1800" b="1">
                 <a:solidFill>
                   <a:srgbClr val="F2F5F8"/>
                 </a:solidFill>
                 <a:latin typeface="Malgun Gothic"/>
                 <a:ea typeface="Malgun Gothic"/>
               </a:rPr>
-              <a:t>감지된 비중 변화가 없습니다.</a:t>
-            </a:r>
-            <a:endParaRPr lang="ko-KR" sz="2600"/>
-          </a:p>
+              <a:t>KoAct 코스닥액티브 (0163Y0)</a:t>
+            </a:r>
+            <a:endParaRPr lang="ko-KR" sz="1800"/>
+          </a:p>
+        </p:txBody>
+      </p:sp>
+      <p:sp>
+        <p:nvSpPr>
+          <p:cNvPr id="9" name="Text 9"/>
+          <p:cNvSpPr txBox="1"/>
+          <p:nvPr/>
+        </p:nvSpPr>
+        <p:spPr>
+          <a:xfrm>
+            <a:off x="1314450" y="2057400"/>
+            <a:ext cx="5905500" cy="190500"/>
+          </a:xfrm>
+          <a:prstGeom prst="rect">
+            <a:avLst/>
+          </a:prstGeom>
+          <a:noFill/>
+          <a:ln>
+            <a:noFill/>
+          </a:ln>
+        </p:spPr>
+        <p:txBody>
+          <a:bodyPr wrap="square" anchor="t">
+            <a:spAutoFit/>
+          </a:bodyPr>
+          <a:lstStyle/>
           <a:p>
             <a:pPr algn="l"/>
             <a:r>
-              <a:rPr lang="ko-KR" sz="2600" b="1">
+              <a:rPr lang="ko-KR" sz="1300">
+                <a:solidFill>
+                  <a:srgbClr val="9AA6B2"/>
+                </a:solidFill>
+                <a:latin typeface="Malgun Gothic"/>
+                <a:ea typeface="Malgun Gothic"/>
+              </a:rPr>
+              <a:t>변화 90건 | 매수/증가 1건 | 매도/감소 87건</a:t>
+            </a:r>
+            <a:endParaRPr lang="ko-KR" sz="1300"/>
+          </a:p>
+        </p:txBody>
+      </p:sp>
+      <p:sp>
+        <p:nvSpPr>
+          <p:cNvPr id="10" name="Text 10"/>
+          <p:cNvSpPr txBox="1"/>
+          <p:nvPr/>
+        </p:nvSpPr>
+        <p:spPr>
+          <a:xfrm>
+            <a:off x="9067800" y="1847850"/>
+            <a:ext cx="2190750" cy="247650"/>
+          </a:xfrm>
+          <a:prstGeom prst="rect">
+            <a:avLst/>
+          </a:prstGeom>
+          <a:noFill/>
+          <a:ln>
+            <a:noFill/>
+          </a:ln>
+        </p:spPr>
+        <p:txBody>
+          <a:bodyPr wrap="square" anchor="t">
+            <a:spAutoFit/>
+          </a:bodyPr>
+          <a:lstStyle/>
+          <a:p>
+            <a:pPr algn="r"/>
+            <a:r>
+              <a:rPr lang="ko-KR" sz="1800" b="1">
+                <a:solidFill>
+                  <a:srgbClr val="3DD6E8"/>
+                </a:solidFill>
+                <a:latin typeface="Malgun Gothic"/>
+                <a:ea typeface="Malgun Gothic"/>
+              </a:rPr>
+              <a:t>충격도 200.35pp</a:t>
+            </a:r>
+            <a:endParaRPr lang="ko-KR" sz="1800"/>
+          </a:p>
+        </p:txBody>
+      </p:sp>
+      <p:sp>
+        <p:nvSpPr>
+          <p:cNvPr id="11" name="Panel 11"/>
+          <p:cNvSpPr/>
+          <p:nvPr/>
+        </p:nvSpPr>
+        <p:spPr>
+          <a:xfrm>
+            <a:off x="514350" y="2533650"/>
+            <a:ext cx="11125200" cy="685800"/>
+          </a:xfrm>
+          <a:prstGeom prst="rect">
+            <a:avLst/>
+          </a:prstGeom>
+          <a:solidFill>
+            <a:srgbClr val="101318"/>
+          </a:solidFill>
+          <a:ln w="9525">
+            <a:solidFill>
+              <a:srgbClr val="2A3038"/>
+            </a:solidFill>
+          </a:ln>
+        </p:spPr>
+        <p:txBody>
+          <a:bodyPr/>
+          <a:lstStyle/>
+          <a:p/>
+        </p:txBody>
+      </p:sp>
+      <p:sp>
+        <p:nvSpPr>
+          <p:cNvPr id="12" name="Text 12"/>
+          <p:cNvSpPr txBox="1"/>
+          <p:nvPr/>
+        </p:nvSpPr>
+        <p:spPr>
+          <a:xfrm>
+            <a:off x="685800" y="2667000"/>
+            <a:ext cx="514350" cy="285750"/>
+          </a:xfrm>
+          <a:prstGeom prst="rect">
+            <a:avLst/>
+          </a:prstGeom>
+          <a:noFill/>
+          <a:ln>
+            <a:noFill/>
+          </a:ln>
+        </p:spPr>
+        <p:txBody>
+          <a:bodyPr wrap="square" anchor="t">
+            <a:spAutoFit/>
+          </a:bodyPr>
+          <a:lstStyle/>
+          <a:p>
+            <a:pPr algn="l"/>
+            <a:r>
+              <a:rPr lang="ko-KR" sz="2300" b="1">
+                <a:solidFill>
+                  <a:srgbClr val="F5B301"/>
+                </a:solidFill>
+                <a:latin typeface="Malgun Gothic"/>
+                <a:ea typeface="Malgun Gothic"/>
+              </a:rPr>
+              <a:t>#2</a:t>
+            </a:r>
+            <a:endParaRPr lang="ko-KR" sz="2300"/>
+          </a:p>
+        </p:txBody>
+      </p:sp>
+      <p:sp>
+        <p:nvSpPr>
+          <p:cNvPr id="13" name="Text 13"/>
+          <p:cNvSpPr txBox="1"/>
+          <p:nvPr/>
+        </p:nvSpPr>
+        <p:spPr>
+          <a:xfrm>
+            <a:off x="1314450" y="2647950"/>
+            <a:ext cx="5334000" cy="228600"/>
+          </a:xfrm>
+          <a:prstGeom prst="rect">
+            <a:avLst/>
+          </a:prstGeom>
+          <a:noFill/>
+          <a:ln>
+            <a:noFill/>
+          </a:ln>
+        </p:spPr>
+        <p:txBody>
+          <a:bodyPr wrap="square" anchor="t">
+            <a:spAutoFit/>
+          </a:bodyPr>
+          <a:lstStyle/>
+          <a:p>
+            <a:pPr algn="l"/>
+            <a:r>
+              <a:rPr lang="ko-KR" sz="1800" b="1">
                 <a:solidFill>
                   <a:srgbClr val="F2F5F8"/>
                 </a:solidFill>
                 <a:latin typeface="Malgun Gothic"/>
                 <a:ea typeface="Malgun Gothic"/>
               </a:rPr>
-              <a:t>이런 날은 전략의 변화보다 지속성을 확인하는 날입니다.</a:t>
-            </a:r>
-            <a:endParaRPr lang="ko-KR" sz="2600"/>
+              <a:t>RISE 2차전지액티브 (422420)</a:t>
+            </a:r>
+            <a:endParaRPr lang="ko-KR" sz="1800"/>
+          </a:p>
+        </p:txBody>
+      </p:sp>
+      <p:sp>
+        <p:nvSpPr>
+          <p:cNvPr id="14" name="Text 14"/>
+          <p:cNvSpPr txBox="1"/>
+          <p:nvPr/>
+        </p:nvSpPr>
+        <p:spPr>
+          <a:xfrm>
+            <a:off x="1314450" y="2914650"/>
+            <a:ext cx="5905500" cy="190500"/>
+          </a:xfrm>
+          <a:prstGeom prst="rect">
+            <a:avLst/>
+          </a:prstGeom>
+          <a:noFill/>
+          <a:ln>
+            <a:noFill/>
+          </a:ln>
+        </p:spPr>
+        <p:txBody>
+          <a:bodyPr wrap="square" anchor="t">
+            <a:spAutoFit/>
+          </a:bodyPr>
+          <a:lstStyle/>
+          <a:p>
+            <a:pPr algn="l"/>
+            <a:r>
+              <a:rPr lang="ko-KR" sz="1300">
+                <a:solidFill>
+                  <a:srgbClr val="9AA6B2"/>
+                </a:solidFill>
+                <a:latin typeface="Malgun Gothic"/>
+                <a:ea typeface="Malgun Gothic"/>
+              </a:rPr>
+              <a:t>변화 17건 | 매수/증가 1건 | 매도/감소 16건</a:t>
+            </a:r>
+            <a:endParaRPr lang="ko-KR" sz="1300"/>
+          </a:p>
+        </p:txBody>
+      </p:sp>
+      <p:sp>
+        <p:nvSpPr>
+          <p:cNvPr id="15" name="Text 15"/>
+          <p:cNvSpPr txBox="1"/>
+          <p:nvPr/>
+        </p:nvSpPr>
+        <p:spPr>
+          <a:xfrm>
+            <a:off x="9067800" y="2705100"/>
+            <a:ext cx="2190750" cy="247650"/>
+          </a:xfrm>
+          <a:prstGeom prst="rect">
+            <a:avLst/>
+          </a:prstGeom>
+          <a:noFill/>
+          <a:ln>
+            <a:noFill/>
+          </a:ln>
+        </p:spPr>
+        <p:txBody>
+          <a:bodyPr wrap="square" anchor="t">
+            <a:spAutoFit/>
+          </a:bodyPr>
+          <a:lstStyle/>
+          <a:p>
+            <a:pPr algn="r"/>
+            <a:r>
+              <a:rPr lang="ko-KR" sz="1800" b="1">
+                <a:solidFill>
+                  <a:srgbClr val="3DD6E8"/>
+                </a:solidFill>
+                <a:latin typeface="Malgun Gothic"/>
+                <a:ea typeface="Malgun Gothic"/>
+              </a:rPr>
+              <a:t>충격도 200.02pp</a:t>
+            </a:r>
+            <a:endParaRPr lang="ko-KR" sz="1800"/>
+          </a:p>
+        </p:txBody>
+      </p:sp>
+      <p:sp>
+        <p:nvSpPr>
+          <p:cNvPr id="16" name="Panel 16"/>
+          <p:cNvSpPr/>
+          <p:nvPr/>
+        </p:nvSpPr>
+        <p:spPr>
+          <a:xfrm>
+            <a:off x="514350" y="3390900"/>
+            <a:ext cx="11125200" cy="685800"/>
+          </a:xfrm>
+          <a:prstGeom prst="rect">
+            <a:avLst/>
+          </a:prstGeom>
+          <a:solidFill>
+            <a:srgbClr val="101318"/>
+          </a:solidFill>
+          <a:ln w="9525">
+            <a:solidFill>
+              <a:srgbClr val="2A3038"/>
+            </a:solidFill>
+          </a:ln>
+        </p:spPr>
+        <p:txBody>
+          <a:bodyPr/>
+          <a:lstStyle/>
+          <a:p/>
+        </p:txBody>
+      </p:sp>
+      <p:sp>
+        <p:nvSpPr>
+          <p:cNvPr id="17" name="Text 17"/>
+          <p:cNvSpPr txBox="1"/>
+          <p:nvPr/>
+        </p:nvSpPr>
+        <p:spPr>
+          <a:xfrm>
+            <a:off x="685800" y="3524250"/>
+            <a:ext cx="514350" cy="285750"/>
+          </a:xfrm>
+          <a:prstGeom prst="rect">
+            <a:avLst/>
+          </a:prstGeom>
+          <a:noFill/>
+          <a:ln>
+            <a:noFill/>
+          </a:ln>
+        </p:spPr>
+        <p:txBody>
+          <a:bodyPr wrap="square" anchor="t">
+            <a:spAutoFit/>
+          </a:bodyPr>
+          <a:lstStyle/>
+          <a:p>
+            <a:pPr algn="l"/>
+            <a:r>
+              <a:rPr lang="ko-KR" sz="2300" b="1">
+                <a:solidFill>
+                  <a:srgbClr val="F5B301"/>
+                </a:solidFill>
+                <a:latin typeface="Malgun Gothic"/>
+                <a:ea typeface="Malgun Gothic"/>
+              </a:rPr>
+              <a:t>#3</a:t>
+            </a:r>
+            <a:endParaRPr lang="ko-KR" sz="2300"/>
+          </a:p>
+        </p:txBody>
+      </p:sp>
+      <p:sp>
+        <p:nvSpPr>
+          <p:cNvPr id="18" name="Text 18"/>
+          <p:cNvSpPr txBox="1"/>
+          <p:nvPr/>
+        </p:nvSpPr>
+        <p:spPr>
+          <a:xfrm>
+            <a:off x="1314450" y="3505200"/>
+            <a:ext cx="5334000" cy="228600"/>
+          </a:xfrm>
+          <a:prstGeom prst="rect">
+            <a:avLst/>
+          </a:prstGeom>
+          <a:noFill/>
+          <a:ln>
+            <a:noFill/>
+          </a:ln>
+        </p:spPr>
+        <p:txBody>
+          <a:bodyPr wrap="square" anchor="t">
+            <a:spAutoFit/>
+          </a:bodyPr>
+          <a:lstStyle/>
+          <a:p>
+            <a:pPr algn="l"/>
+            <a:r>
+              <a:rPr lang="ko-KR" sz="1800" b="1">
+                <a:solidFill>
+                  <a:srgbClr val="F2F5F8"/>
+                </a:solidFill>
+                <a:latin typeface="Malgun Gothic"/>
+                <a:ea typeface="Malgun Gothic"/>
+              </a:rPr>
+              <a:t>PLUS K제조업핵심기업액티브 (0166S0)</a:t>
+            </a:r>
+            <a:endParaRPr lang="ko-KR" sz="1800"/>
+          </a:p>
+        </p:txBody>
+      </p:sp>
+      <p:sp>
+        <p:nvSpPr>
+          <p:cNvPr id="19" name="Text 19"/>
+          <p:cNvSpPr txBox="1"/>
+          <p:nvPr/>
+        </p:nvSpPr>
+        <p:spPr>
+          <a:xfrm>
+            <a:off x="1314450" y="3771900"/>
+            <a:ext cx="5905500" cy="190500"/>
+          </a:xfrm>
+          <a:prstGeom prst="rect">
+            <a:avLst/>
+          </a:prstGeom>
+          <a:noFill/>
+          <a:ln>
+            <a:noFill/>
+          </a:ln>
+        </p:spPr>
+        <p:txBody>
+          <a:bodyPr wrap="square" anchor="t">
+            <a:spAutoFit/>
+          </a:bodyPr>
+          <a:lstStyle/>
+          <a:p>
+            <a:pPr algn="l"/>
+            <a:r>
+              <a:rPr lang="ko-KR" sz="1300">
+                <a:solidFill>
+                  <a:srgbClr val="9AA6B2"/>
+                </a:solidFill>
+                <a:latin typeface="Malgun Gothic"/>
+                <a:ea typeface="Malgun Gothic"/>
+              </a:rPr>
+              <a:t>변화 38건 | 매수/증가 1건 | 매도/감소 37건</a:t>
+            </a:r>
+            <a:endParaRPr lang="ko-KR" sz="1300"/>
+          </a:p>
+        </p:txBody>
+      </p:sp>
+      <p:sp>
+        <p:nvSpPr>
+          <p:cNvPr id="20" name="Text 20"/>
+          <p:cNvSpPr txBox="1"/>
+          <p:nvPr/>
+        </p:nvSpPr>
+        <p:spPr>
+          <a:xfrm>
+            <a:off x="9067800" y="3562350"/>
+            <a:ext cx="2190750" cy="247650"/>
+          </a:xfrm>
+          <a:prstGeom prst="rect">
+            <a:avLst/>
+          </a:prstGeom>
+          <a:noFill/>
+          <a:ln>
+            <a:noFill/>
+          </a:ln>
+        </p:spPr>
+        <p:txBody>
+          <a:bodyPr wrap="square" anchor="t">
+            <a:spAutoFit/>
+          </a:bodyPr>
+          <a:lstStyle/>
+          <a:p>
+            <a:pPr algn="r"/>
+            <a:r>
+              <a:rPr lang="ko-KR" sz="1800" b="1">
+                <a:solidFill>
+                  <a:srgbClr val="3DD6E8"/>
+                </a:solidFill>
+                <a:latin typeface="Malgun Gothic"/>
+                <a:ea typeface="Malgun Gothic"/>
+              </a:rPr>
+              <a:t>충격도 200.01pp</a:t>
+            </a:r>
+            <a:endParaRPr lang="ko-KR" sz="1800"/>
+          </a:p>
+        </p:txBody>
+      </p:sp>
+      <p:sp>
+        <p:nvSpPr>
+          <p:cNvPr id="21" name="Panel 21"/>
+          <p:cNvSpPr/>
+          <p:nvPr/>
+        </p:nvSpPr>
+        <p:spPr>
+          <a:xfrm>
+            <a:off x="514350" y="4248150"/>
+            <a:ext cx="11125200" cy="685800"/>
+          </a:xfrm>
+          <a:prstGeom prst="rect">
+            <a:avLst/>
+          </a:prstGeom>
+          <a:solidFill>
+            <a:srgbClr val="101318"/>
+          </a:solidFill>
+          <a:ln w="9525">
+            <a:solidFill>
+              <a:srgbClr val="2A3038"/>
+            </a:solidFill>
+          </a:ln>
+        </p:spPr>
+        <p:txBody>
+          <a:bodyPr/>
+          <a:lstStyle/>
+          <a:p/>
+        </p:txBody>
+      </p:sp>
+      <p:sp>
+        <p:nvSpPr>
+          <p:cNvPr id="22" name="Text 22"/>
+          <p:cNvSpPr txBox="1"/>
+          <p:nvPr/>
+        </p:nvSpPr>
+        <p:spPr>
+          <a:xfrm>
+            <a:off x="685800" y="4381500"/>
+            <a:ext cx="514350" cy="285750"/>
+          </a:xfrm>
+          <a:prstGeom prst="rect">
+            <a:avLst/>
+          </a:prstGeom>
+          <a:noFill/>
+          <a:ln>
+            <a:noFill/>
+          </a:ln>
+        </p:spPr>
+        <p:txBody>
+          <a:bodyPr wrap="square" anchor="t">
+            <a:spAutoFit/>
+          </a:bodyPr>
+          <a:lstStyle/>
+          <a:p>
+            <a:pPr algn="l"/>
+            <a:r>
+              <a:rPr lang="ko-KR" sz="2300" b="1">
+                <a:solidFill>
+                  <a:srgbClr val="F5B301"/>
+                </a:solidFill>
+                <a:latin typeface="Malgun Gothic"/>
+                <a:ea typeface="Malgun Gothic"/>
+              </a:rPr>
+              <a:t>#4</a:t>
+            </a:r>
+            <a:endParaRPr lang="ko-KR" sz="2300"/>
+          </a:p>
+        </p:txBody>
+      </p:sp>
+      <p:sp>
+        <p:nvSpPr>
+          <p:cNvPr id="23" name="Text 23"/>
+          <p:cNvSpPr txBox="1"/>
+          <p:nvPr/>
+        </p:nvSpPr>
+        <p:spPr>
+          <a:xfrm>
+            <a:off x="1314450" y="4362450"/>
+            <a:ext cx="5334000" cy="228600"/>
+          </a:xfrm>
+          <a:prstGeom prst="rect">
+            <a:avLst/>
+          </a:prstGeom>
+          <a:noFill/>
+          <a:ln>
+            <a:noFill/>
+          </a:ln>
+        </p:spPr>
+        <p:txBody>
+          <a:bodyPr wrap="square" anchor="t">
+            <a:spAutoFit/>
+          </a:bodyPr>
+          <a:lstStyle/>
+          <a:p>
+            <a:pPr algn="l"/>
+            <a:r>
+              <a:rPr lang="ko-KR" sz="1800" b="1">
+                <a:solidFill>
+                  <a:srgbClr val="F2F5F8"/>
+                </a:solidFill>
+                <a:latin typeface="Malgun Gothic"/>
+                <a:ea typeface="Malgun Gothic"/>
+              </a:rPr>
+              <a:t>TIME 코스피액티브 (385720)</a:t>
+            </a:r>
+            <a:endParaRPr lang="ko-KR" sz="1800"/>
+          </a:p>
+        </p:txBody>
+      </p:sp>
+      <p:sp>
+        <p:nvSpPr>
+          <p:cNvPr id="24" name="Text 24"/>
+          <p:cNvSpPr txBox="1"/>
+          <p:nvPr/>
+        </p:nvSpPr>
+        <p:spPr>
+          <a:xfrm>
+            <a:off x="1314450" y="4629150"/>
+            <a:ext cx="5905500" cy="190500"/>
+          </a:xfrm>
+          <a:prstGeom prst="rect">
+            <a:avLst/>
+          </a:prstGeom>
+          <a:noFill/>
+          <a:ln>
+            <a:noFill/>
+          </a:ln>
+        </p:spPr>
+        <p:txBody>
+          <a:bodyPr wrap="square" anchor="t">
+            <a:spAutoFit/>
+          </a:bodyPr>
+          <a:lstStyle/>
+          <a:p>
+            <a:pPr algn="l"/>
+            <a:r>
+              <a:rPr lang="ko-KR" sz="1300">
+                <a:solidFill>
+                  <a:srgbClr val="9AA6B2"/>
+                </a:solidFill>
+                <a:latin typeface="Malgun Gothic"/>
+                <a:ea typeface="Malgun Gothic"/>
+              </a:rPr>
+              <a:t>변화 27건 | 매수/증가 1건 | 매도/감소 25건</a:t>
+            </a:r>
+            <a:endParaRPr lang="ko-KR" sz="1300"/>
+          </a:p>
+        </p:txBody>
+      </p:sp>
+      <p:sp>
+        <p:nvSpPr>
+          <p:cNvPr id="25" name="Text 25"/>
+          <p:cNvSpPr txBox="1"/>
+          <p:nvPr/>
+        </p:nvSpPr>
+        <p:spPr>
+          <a:xfrm>
+            <a:off x="9067800" y="4419600"/>
+            <a:ext cx="2190750" cy="247650"/>
+          </a:xfrm>
+          <a:prstGeom prst="rect">
+            <a:avLst/>
+          </a:prstGeom>
+          <a:noFill/>
+          <a:ln>
+            <a:noFill/>
+          </a:ln>
+        </p:spPr>
+        <p:txBody>
+          <a:bodyPr wrap="square" anchor="t">
+            <a:spAutoFit/>
+          </a:bodyPr>
+          <a:lstStyle/>
+          <a:p>
+            <a:pPr algn="r"/>
+            <a:r>
+              <a:rPr lang="ko-KR" sz="1800" b="1">
+                <a:solidFill>
+                  <a:srgbClr val="3DD6E8"/>
+                </a:solidFill>
+                <a:latin typeface="Malgun Gothic"/>
+                <a:ea typeface="Malgun Gothic"/>
+              </a:rPr>
+              <a:t>충격도 199.90pp</a:t>
+            </a:r>
+            <a:endParaRPr lang="ko-KR" sz="1800"/>
+          </a:p>
+        </p:txBody>
+      </p:sp>
+      <p:sp>
+        <p:nvSpPr>
+          <p:cNvPr id="26" name="Panel 26"/>
+          <p:cNvSpPr/>
+          <p:nvPr/>
+        </p:nvSpPr>
+        <p:spPr>
+          <a:xfrm>
+            <a:off x="514350" y="5105400"/>
+            <a:ext cx="11125200" cy="685800"/>
+          </a:xfrm>
+          <a:prstGeom prst="rect">
+            <a:avLst/>
+          </a:prstGeom>
+          <a:solidFill>
+            <a:srgbClr val="101318"/>
+          </a:solidFill>
+          <a:ln w="9525">
+            <a:solidFill>
+              <a:srgbClr val="2A3038"/>
+            </a:solidFill>
+          </a:ln>
+        </p:spPr>
+        <p:txBody>
+          <a:bodyPr/>
+          <a:lstStyle/>
+          <a:p/>
+        </p:txBody>
+      </p:sp>
+      <p:sp>
+        <p:nvSpPr>
+          <p:cNvPr id="27" name="Text 27"/>
+          <p:cNvSpPr txBox="1"/>
+          <p:nvPr/>
+        </p:nvSpPr>
+        <p:spPr>
+          <a:xfrm>
+            <a:off x="685800" y="5238750"/>
+            <a:ext cx="514350" cy="285750"/>
+          </a:xfrm>
+          <a:prstGeom prst="rect">
+            <a:avLst/>
+          </a:prstGeom>
+          <a:noFill/>
+          <a:ln>
+            <a:noFill/>
+          </a:ln>
+        </p:spPr>
+        <p:txBody>
+          <a:bodyPr wrap="square" anchor="t">
+            <a:spAutoFit/>
+          </a:bodyPr>
+          <a:lstStyle/>
+          <a:p>
+            <a:pPr algn="l"/>
+            <a:r>
+              <a:rPr lang="ko-KR" sz="2300" b="1">
+                <a:solidFill>
+                  <a:srgbClr val="F5B301"/>
+                </a:solidFill>
+                <a:latin typeface="Malgun Gothic"/>
+                <a:ea typeface="Malgun Gothic"/>
+              </a:rPr>
+              <a:t>#5</a:t>
+            </a:r>
+            <a:endParaRPr lang="ko-KR" sz="2300"/>
+          </a:p>
+        </p:txBody>
+      </p:sp>
+      <p:sp>
+        <p:nvSpPr>
+          <p:cNvPr id="28" name="Text 28"/>
+          <p:cNvSpPr txBox="1"/>
+          <p:nvPr/>
+        </p:nvSpPr>
+        <p:spPr>
+          <a:xfrm>
+            <a:off x="1314450" y="5219700"/>
+            <a:ext cx="5334000" cy="228600"/>
+          </a:xfrm>
+          <a:prstGeom prst="rect">
+            <a:avLst/>
+          </a:prstGeom>
+          <a:noFill/>
+          <a:ln>
+            <a:noFill/>
+          </a:ln>
+        </p:spPr>
+        <p:txBody>
+          <a:bodyPr wrap="square" anchor="t">
+            <a:spAutoFit/>
+          </a:bodyPr>
+          <a:lstStyle/>
+          <a:p>
+            <a:pPr algn="l"/>
+            <a:r>
+              <a:rPr lang="ko-KR" sz="1800" b="1">
+                <a:solidFill>
+                  <a:srgbClr val="F2F5F8"/>
+                </a:solidFill>
+                <a:latin typeface="Malgun Gothic"/>
+                <a:ea typeface="Malgun Gothic"/>
+              </a:rPr>
+              <a:t>TIGER AI코리아그로스액티브 (365040)</a:t>
+            </a:r>
+            <a:endParaRPr lang="ko-KR" sz="1800"/>
+          </a:p>
+        </p:txBody>
+      </p:sp>
+      <p:sp>
+        <p:nvSpPr>
+          <p:cNvPr id="29" name="Text 29"/>
+          <p:cNvSpPr txBox="1"/>
+          <p:nvPr/>
+        </p:nvSpPr>
+        <p:spPr>
+          <a:xfrm>
+            <a:off x="1314450" y="5486400"/>
+            <a:ext cx="5905500" cy="190500"/>
+          </a:xfrm>
+          <a:prstGeom prst="rect">
+            <a:avLst/>
+          </a:prstGeom>
+          <a:noFill/>
+          <a:ln>
+            <a:noFill/>
+          </a:ln>
+        </p:spPr>
+        <p:txBody>
+          <a:bodyPr wrap="square" anchor="t">
+            <a:spAutoFit/>
+          </a:bodyPr>
+          <a:lstStyle/>
+          <a:p>
+            <a:pPr algn="l"/>
+            <a:r>
+              <a:rPr lang="ko-KR" sz="1300">
+                <a:solidFill>
+                  <a:srgbClr val="9AA6B2"/>
+                </a:solidFill>
+                <a:latin typeface="Malgun Gothic"/>
+                <a:ea typeface="Malgun Gothic"/>
+              </a:rPr>
+              <a:t>변화 182건 | 매수/증가 1건 | 매도/감소 181건</a:t>
+            </a:r>
+            <a:endParaRPr lang="ko-KR" sz="1300"/>
+          </a:p>
+        </p:txBody>
+      </p:sp>
+      <p:sp>
+        <p:nvSpPr>
+          <p:cNvPr id="30" name="Text 30"/>
+          <p:cNvSpPr txBox="1"/>
+          <p:nvPr/>
+        </p:nvSpPr>
+        <p:spPr>
+          <a:xfrm>
+            <a:off x="9067800" y="5276850"/>
+            <a:ext cx="2190750" cy="247650"/>
+          </a:xfrm>
+          <a:prstGeom prst="rect">
+            <a:avLst/>
+          </a:prstGeom>
+          <a:noFill/>
+          <a:ln>
+            <a:noFill/>
+          </a:ln>
+        </p:spPr>
+        <p:txBody>
+          <a:bodyPr wrap="square" anchor="t">
+            <a:spAutoFit/>
+          </a:bodyPr>
+          <a:lstStyle/>
+          <a:p>
+            <a:pPr algn="r"/>
+            <a:r>
+              <a:rPr lang="ko-KR" sz="1800" b="1">
+                <a:solidFill>
+                  <a:srgbClr val="3DD6E8"/>
+                </a:solidFill>
+                <a:latin typeface="Malgun Gothic"/>
+                <a:ea typeface="Malgun Gothic"/>
+              </a:rPr>
+              <a:t>충격도 199.89pp</a:t>
+            </a:r>
+            <a:endParaRPr lang="ko-KR" sz="1800"/>
           </a:p>
         </p:txBody>
       </p:sp>
@@ -1925,7 +2816,7 @@
                 <a:latin typeface="Malgun Gothic"/>
                 <a:ea typeface="Malgun Gothic"/>
               </a:rPr>
-              <a:t>-</a:t>
+              <a:t>KoAct 코스닥액티브</a:t>
             </a:r>
             <a:endParaRPr lang="ko-KR" sz="1100"/>
           </a:p>
@@ -1994,7 +2885,7 @@
                 <a:latin typeface="Malgun Gothic"/>
                 <a:ea typeface="Malgun Gothic"/>
               </a:rPr>
-              <a:t>해당 변화 없음</a:t>
+              <a:t>증가 원화현금</a:t>
             </a:r>
             <a:endParaRPr lang="ko-KR" sz="1100"/>
           </a:p>
@@ -2063,7 +2954,7 @@
                 <a:latin typeface="Malgun Gothic"/>
                 <a:ea typeface="Malgun Gothic"/>
               </a:rPr>
-              <a:t>-</a:t>
+              <a:t>010010</a:t>
             </a:r>
             <a:endParaRPr lang="ko-KR" sz="1100"/>
           </a:p>
@@ -2132,7 +3023,7 @@
                 <a:latin typeface="Malgun Gothic"/>
                 <a:ea typeface="Malgun Gothic"/>
               </a:rPr>
-              <a:t>-</a:t>
+              <a:t>-0.18%</a:t>
             </a:r>
             <a:endParaRPr lang="ko-KR" sz="1100"/>
           </a:p>
@@ -2201,7 +3092,7 @@
                 <a:latin typeface="Malgun Gothic"/>
                 <a:ea typeface="Malgun Gothic"/>
               </a:rPr>
-              <a:t>-</a:t>
+              <a:t>100.00%</a:t>
             </a:r>
             <a:endParaRPr lang="ko-KR" sz="1100"/>
           </a:p>
@@ -2265,12 +3156,3738 @@
             <a:r>
               <a:rPr lang="ko-KR" sz="1100" b="1">
                 <a:solidFill>
-                  <a:srgbClr val="FF4D5E"/>
-                </a:solidFill>
-                <a:latin typeface="Malgun Gothic"/>
-                <a:ea typeface="Malgun Gothic"/>
-              </a:rPr>
-              <a:t>-</a:t>
+                  <a:srgbClr val="19C37D"/>
+                </a:solidFill>
+                <a:latin typeface="Malgun Gothic"/>
+                <a:ea typeface="Malgun Gothic"/>
+              </a:rPr>
+              <a:t>+100.18pp</a:t>
+            </a:r>
+            <a:endParaRPr lang="ko-KR" sz="1100"/>
+          </a:p>
+        </p:txBody>
+      </p:sp>
+      <p:sp>
+        <p:nvSpPr>
+          <p:cNvPr id="30" name="Panel 30"/>
+          <p:cNvSpPr/>
+          <p:nvPr/>
+        </p:nvSpPr>
+        <p:spPr>
+          <a:xfrm>
+            <a:off x="400050" y="2390775"/>
+            <a:ext cx="2381250" cy="361950"/>
+          </a:xfrm>
+          <a:prstGeom prst="rect">
+            <a:avLst/>
+          </a:prstGeom>
+          <a:solidFill>
+            <a:srgbClr val="101318"/>
+          </a:solidFill>
+          <a:ln w="9525">
+            <a:solidFill>
+              <a:srgbClr val="2A3038"/>
+            </a:solidFill>
+          </a:ln>
+        </p:spPr>
+        <p:txBody>
+          <a:bodyPr/>
+          <a:lstStyle/>
+          <a:p/>
+        </p:txBody>
+      </p:sp>
+      <p:sp>
+        <p:nvSpPr>
+          <p:cNvPr id="31" name="Text 31"/>
+          <p:cNvSpPr txBox="1"/>
+          <p:nvPr/>
+        </p:nvSpPr>
+        <p:spPr>
+          <a:xfrm>
+            <a:off x="466725" y="2476500"/>
+            <a:ext cx="2247900" cy="171450"/>
+          </a:xfrm>
+          <a:prstGeom prst="rect">
+            <a:avLst/>
+          </a:prstGeom>
+          <a:noFill/>
+          <a:ln>
+            <a:noFill/>
+          </a:ln>
+        </p:spPr>
+        <p:txBody>
+          <a:bodyPr wrap="square" anchor="t">
+            <a:spAutoFit/>
+          </a:bodyPr>
+          <a:lstStyle/>
+          <a:p>
+            <a:pPr algn="l"/>
+            <a:r>
+              <a:rPr lang="ko-KR" sz="1100">
+                <a:solidFill>
+                  <a:srgbClr val="F2F5F8"/>
+                </a:solidFill>
+                <a:latin typeface="Malgun Gothic"/>
+                <a:ea typeface="Malgun Gothic"/>
+              </a:rPr>
+              <a:t>TIGER AI코리아그로스액티브</a:t>
+            </a:r>
+            <a:endParaRPr lang="ko-KR" sz="1100"/>
+          </a:p>
+        </p:txBody>
+      </p:sp>
+      <p:sp>
+        <p:nvSpPr>
+          <p:cNvPr id="32" name="Panel 32"/>
+          <p:cNvSpPr/>
+          <p:nvPr/>
+        </p:nvSpPr>
+        <p:spPr>
+          <a:xfrm>
+            <a:off x="2781300" y="2390775"/>
+            <a:ext cx="3095625" cy="361950"/>
+          </a:xfrm>
+          <a:prstGeom prst="rect">
+            <a:avLst/>
+          </a:prstGeom>
+          <a:solidFill>
+            <a:srgbClr val="101318"/>
+          </a:solidFill>
+          <a:ln w="9525">
+            <a:solidFill>
+              <a:srgbClr val="2A3038"/>
+            </a:solidFill>
+          </a:ln>
+        </p:spPr>
+        <p:txBody>
+          <a:bodyPr/>
+          <a:lstStyle/>
+          <a:p/>
+        </p:txBody>
+      </p:sp>
+      <p:sp>
+        <p:nvSpPr>
+          <p:cNvPr id="33" name="Text 33"/>
+          <p:cNvSpPr txBox="1"/>
+          <p:nvPr/>
+        </p:nvSpPr>
+        <p:spPr>
+          <a:xfrm>
+            <a:off x="2847975" y="2476500"/>
+            <a:ext cx="2962275" cy="171450"/>
+          </a:xfrm>
+          <a:prstGeom prst="rect">
+            <a:avLst/>
+          </a:prstGeom>
+          <a:noFill/>
+          <a:ln>
+            <a:noFill/>
+          </a:ln>
+        </p:spPr>
+        <p:txBody>
+          <a:bodyPr wrap="square" anchor="t">
+            <a:spAutoFit/>
+          </a:bodyPr>
+          <a:lstStyle/>
+          <a:p>
+            <a:pPr algn="l"/>
+            <a:r>
+              <a:rPr lang="ko-KR" sz="1100">
+                <a:solidFill>
+                  <a:srgbClr val="F2F5F8"/>
+                </a:solidFill>
+                <a:latin typeface="Malgun Gothic"/>
+                <a:ea typeface="Malgun Gothic"/>
+              </a:rPr>
+              <a:t>증가 원화현금</a:t>
+            </a:r>
+            <a:endParaRPr lang="ko-KR" sz="1100"/>
+          </a:p>
+        </p:txBody>
+      </p:sp>
+      <p:sp>
+        <p:nvSpPr>
+          <p:cNvPr id="34" name="Panel 34"/>
+          <p:cNvSpPr/>
+          <p:nvPr/>
+        </p:nvSpPr>
+        <p:spPr>
+          <a:xfrm>
+            <a:off x="5876925" y="2390775"/>
+            <a:ext cx="1047750" cy="361950"/>
+          </a:xfrm>
+          <a:prstGeom prst="rect">
+            <a:avLst/>
+          </a:prstGeom>
+          <a:solidFill>
+            <a:srgbClr val="101318"/>
+          </a:solidFill>
+          <a:ln w="9525">
+            <a:solidFill>
+              <a:srgbClr val="2A3038"/>
+            </a:solidFill>
+          </a:ln>
+        </p:spPr>
+        <p:txBody>
+          <a:bodyPr/>
+          <a:lstStyle/>
+          <a:p/>
+        </p:txBody>
+      </p:sp>
+      <p:sp>
+        <p:nvSpPr>
+          <p:cNvPr id="35" name="Text 35"/>
+          <p:cNvSpPr txBox="1"/>
+          <p:nvPr/>
+        </p:nvSpPr>
+        <p:spPr>
+          <a:xfrm>
+            <a:off x="5943600" y="2476500"/>
+            <a:ext cx="914400" cy="171450"/>
+          </a:xfrm>
+          <a:prstGeom prst="rect">
+            <a:avLst/>
+          </a:prstGeom>
+          <a:noFill/>
+          <a:ln>
+            <a:noFill/>
+          </a:ln>
+        </p:spPr>
+        <p:txBody>
+          <a:bodyPr wrap="square" anchor="t">
+            <a:spAutoFit/>
+          </a:bodyPr>
+          <a:lstStyle/>
+          <a:p>
+            <a:pPr algn="l"/>
+            <a:r>
+              <a:rPr lang="ko-KR" sz="1100">
+                <a:solidFill>
+                  <a:srgbClr val="F2F5F8"/>
+                </a:solidFill>
+                <a:latin typeface="Malgun Gothic"/>
+                <a:ea typeface="Malgun Gothic"/>
+              </a:rPr>
+              <a:t>010010</a:t>
+            </a:r>
+            <a:endParaRPr lang="ko-KR" sz="1100"/>
+          </a:p>
+        </p:txBody>
+      </p:sp>
+      <p:sp>
+        <p:nvSpPr>
+          <p:cNvPr id="36" name="Panel 36"/>
+          <p:cNvSpPr/>
+          <p:nvPr/>
+        </p:nvSpPr>
+        <p:spPr>
+          <a:xfrm>
+            <a:off x="6924675" y="2390775"/>
+            <a:ext cx="1143000" cy="361950"/>
+          </a:xfrm>
+          <a:prstGeom prst="rect">
+            <a:avLst/>
+          </a:prstGeom>
+          <a:solidFill>
+            <a:srgbClr val="101318"/>
+          </a:solidFill>
+          <a:ln w="9525">
+            <a:solidFill>
+              <a:srgbClr val="2A3038"/>
+            </a:solidFill>
+          </a:ln>
+        </p:spPr>
+        <p:txBody>
+          <a:bodyPr/>
+          <a:lstStyle/>
+          <a:p/>
+        </p:txBody>
+      </p:sp>
+      <p:sp>
+        <p:nvSpPr>
+          <p:cNvPr id="37" name="Text 37"/>
+          <p:cNvSpPr txBox="1"/>
+          <p:nvPr/>
+        </p:nvSpPr>
+        <p:spPr>
+          <a:xfrm>
+            <a:off x="6991350" y="2476500"/>
+            <a:ext cx="1009650" cy="171450"/>
+          </a:xfrm>
+          <a:prstGeom prst="rect">
+            <a:avLst/>
+          </a:prstGeom>
+          <a:noFill/>
+          <a:ln>
+            <a:noFill/>
+          </a:ln>
+        </p:spPr>
+        <p:txBody>
+          <a:bodyPr wrap="square" anchor="t">
+            <a:spAutoFit/>
+          </a:bodyPr>
+          <a:lstStyle/>
+          <a:p>
+            <a:pPr algn="r"/>
+            <a:r>
+              <a:rPr lang="ko-KR" sz="1100">
+                <a:solidFill>
+                  <a:srgbClr val="F2F5F8"/>
+                </a:solidFill>
+                <a:latin typeface="Malgun Gothic"/>
+                <a:ea typeface="Malgun Gothic"/>
+              </a:rPr>
+              <a:t>-0.08%</a:t>
+            </a:r>
+            <a:endParaRPr lang="ko-KR" sz="1100"/>
+          </a:p>
+        </p:txBody>
+      </p:sp>
+      <p:sp>
+        <p:nvSpPr>
+          <p:cNvPr id="38" name="Panel 38"/>
+          <p:cNvSpPr/>
+          <p:nvPr/>
+        </p:nvSpPr>
+        <p:spPr>
+          <a:xfrm>
+            <a:off x="8067675" y="2390775"/>
+            <a:ext cx="1143000" cy="361950"/>
+          </a:xfrm>
+          <a:prstGeom prst="rect">
+            <a:avLst/>
+          </a:prstGeom>
+          <a:solidFill>
+            <a:srgbClr val="101318"/>
+          </a:solidFill>
+          <a:ln w="9525">
+            <a:solidFill>
+              <a:srgbClr val="2A3038"/>
+            </a:solidFill>
+          </a:ln>
+        </p:spPr>
+        <p:txBody>
+          <a:bodyPr/>
+          <a:lstStyle/>
+          <a:p/>
+        </p:txBody>
+      </p:sp>
+      <p:sp>
+        <p:nvSpPr>
+          <p:cNvPr id="39" name="Text 39"/>
+          <p:cNvSpPr txBox="1"/>
+          <p:nvPr/>
+        </p:nvSpPr>
+        <p:spPr>
+          <a:xfrm>
+            <a:off x="8134350" y="2476500"/>
+            <a:ext cx="1009650" cy="171450"/>
+          </a:xfrm>
+          <a:prstGeom prst="rect">
+            <a:avLst/>
+          </a:prstGeom>
+          <a:noFill/>
+          <a:ln>
+            <a:noFill/>
+          </a:ln>
+        </p:spPr>
+        <p:txBody>
+          <a:bodyPr wrap="square" anchor="t">
+            <a:spAutoFit/>
+          </a:bodyPr>
+          <a:lstStyle/>
+          <a:p>
+            <a:pPr algn="r"/>
+            <a:r>
+              <a:rPr lang="ko-KR" sz="1100">
+                <a:solidFill>
+                  <a:srgbClr val="F2F5F8"/>
+                </a:solidFill>
+                <a:latin typeface="Malgun Gothic"/>
+                <a:ea typeface="Malgun Gothic"/>
+              </a:rPr>
+              <a:t>100.00%</a:t>
+            </a:r>
+            <a:endParaRPr lang="ko-KR" sz="1100"/>
+          </a:p>
+        </p:txBody>
+      </p:sp>
+      <p:sp>
+        <p:nvSpPr>
+          <p:cNvPr id="40" name="Panel 40"/>
+          <p:cNvSpPr/>
+          <p:nvPr/>
+        </p:nvSpPr>
+        <p:spPr>
+          <a:xfrm>
+            <a:off x="9210675" y="2390775"/>
+            <a:ext cx="1285875" cy="361950"/>
+          </a:xfrm>
+          <a:prstGeom prst="rect">
+            <a:avLst/>
+          </a:prstGeom>
+          <a:solidFill>
+            <a:srgbClr val="101318"/>
+          </a:solidFill>
+          <a:ln w="9525">
+            <a:solidFill>
+              <a:srgbClr val="2A3038"/>
+            </a:solidFill>
+          </a:ln>
+        </p:spPr>
+        <p:txBody>
+          <a:bodyPr/>
+          <a:lstStyle/>
+          <a:p/>
+        </p:txBody>
+      </p:sp>
+      <p:sp>
+        <p:nvSpPr>
+          <p:cNvPr id="41" name="Text 41"/>
+          <p:cNvSpPr txBox="1"/>
+          <p:nvPr/>
+        </p:nvSpPr>
+        <p:spPr>
+          <a:xfrm>
+            <a:off x="9277350" y="2476500"/>
+            <a:ext cx="1152525" cy="171450"/>
+          </a:xfrm>
+          <a:prstGeom prst="rect">
+            <a:avLst/>
+          </a:prstGeom>
+          <a:noFill/>
+          <a:ln>
+            <a:noFill/>
+          </a:ln>
+        </p:spPr>
+        <p:txBody>
+          <a:bodyPr wrap="square" anchor="t">
+            <a:spAutoFit/>
+          </a:bodyPr>
+          <a:lstStyle/>
+          <a:p>
+            <a:pPr algn="r"/>
+            <a:r>
+              <a:rPr lang="ko-KR" sz="1100" b="1">
+                <a:solidFill>
+                  <a:srgbClr val="19C37D"/>
+                </a:solidFill>
+                <a:latin typeface="Malgun Gothic"/>
+                <a:ea typeface="Malgun Gothic"/>
+              </a:rPr>
+              <a:t>+100.08pp</a:t>
+            </a:r>
+            <a:endParaRPr lang="ko-KR" sz="1100"/>
+          </a:p>
+        </p:txBody>
+      </p:sp>
+      <p:sp>
+        <p:nvSpPr>
+          <p:cNvPr id="42" name="Panel 42"/>
+          <p:cNvSpPr/>
+          <p:nvPr/>
+        </p:nvSpPr>
+        <p:spPr>
+          <a:xfrm>
+            <a:off x="400050" y="2752725"/>
+            <a:ext cx="2381250" cy="361950"/>
+          </a:xfrm>
+          <a:prstGeom prst="rect">
+            <a:avLst/>
+          </a:prstGeom>
+          <a:solidFill>
+            <a:srgbClr val="0B0E12"/>
+          </a:solidFill>
+          <a:ln w="9525">
+            <a:solidFill>
+              <a:srgbClr val="2A3038"/>
+            </a:solidFill>
+          </a:ln>
+        </p:spPr>
+        <p:txBody>
+          <a:bodyPr/>
+          <a:lstStyle/>
+          <a:p/>
+        </p:txBody>
+      </p:sp>
+      <p:sp>
+        <p:nvSpPr>
+          <p:cNvPr id="43" name="Text 43"/>
+          <p:cNvSpPr txBox="1"/>
+          <p:nvPr/>
+        </p:nvSpPr>
+        <p:spPr>
+          <a:xfrm>
+            <a:off x="466725" y="2838450"/>
+            <a:ext cx="2247900" cy="171450"/>
+          </a:xfrm>
+          <a:prstGeom prst="rect">
+            <a:avLst/>
+          </a:prstGeom>
+          <a:noFill/>
+          <a:ln>
+            <a:noFill/>
+          </a:ln>
+        </p:spPr>
+        <p:txBody>
+          <a:bodyPr wrap="square" anchor="t">
+            <a:spAutoFit/>
+          </a:bodyPr>
+          <a:lstStyle/>
+          <a:p>
+            <a:pPr algn="l"/>
+            <a:r>
+              <a:rPr lang="ko-KR" sz="1100">
+                <a:solidFill>
+                  <a:srgbClr val="F2F5F8"/>
+                </a:solidFill>
+                <a:latin typeface="Malgun Gothic"/>
+                <a:ea typeface="Malgun Gothic"/>
+              </a:rPr>
+              <a:t>KODEX 200액티브</a:t>
+            </a:r>
+            <a:endParaRPr lang="ko-KR" sz="1100"/>
+          </a:p>
+        </p:txBody>
+      </p:sp>
+      <p:sp>
+        <p:nvSpPr>
+          <p:cNvPr id="44" name="Panel 44"/>
+          <p:cNvSpPr/>
+          <p:nvPr/>
+        </p:nvSpPr>
+        <p:spPr>
+          <a:xfrm>
+            <a:off x="2781300" y="2752725"/>
+            <a:ext cx="3095625" cy="361950"/>
+          </a:xfrm>
+          <a:prstGeom prst="rect">
+            <a:avLst/>
+          </a:prstGeom>
+          <a:solidFill>
+            <a:srgbClr val="0B0E12"/>
+          </a:solidFill>
+          <a:ln w="9525">
+            <a:solidFill>
+              <a:srgbClr val="2A3038"/>
+            </a:solidFill>
+          </a:ln>
+        </p:spPr>
+        <p:txBody>
+          <a:bodyPr/>
+          <a:lstStyle/>
+          <a:p/>
+        </p:txBody>
+      </p:sp>
+      <p:sp>
+        <p:nvSpPr>
+          <p:cNvPr id="45" name="Text 45"/>
+          <p:cNvSpPr txBox="1"/>
+          <p:nvPr/>
+        </p:nvSpPr>
+        <p:spPr>
+          <a:xfrm>
+            <a:off x="2847975" y="2838450"/>
+            <a:ext cx="2962275" cy="171450"/>
+          </a:xfrm>
+          <a:prstGeom prst="rect">
+            <a:avLst/>
+          </a:prstGeom>
+          <a:noFill/>
+          <a:ln>
+            <a:noFill/>
+          </a:ln>
+        </p:spPr>
+        <p:txBody>
+          <a:bodyPr wrap="square" anchor="t">
+            <a:spAutoFit/>
+          </a:bodyPr>
+          <a:lstStyle/>
+          <a:p>
+            <a:pPr algn="l"/>
+            <a:r>
+              <a:rPr lang="ko-KR" sz="1100">
+                <a:solidFill>
+                  <a:srgbClr val="F2F5F8"/>
+                </a:solidFill>
+                <a:latin typeface="Malgun Gothic"/>
+                <a:ea typeface="Malgun Gothic"/>
+              </a:rPr>
+              <a:t>증가 원화현금</a:t>
+            </a:r>
+            <a:endParaRPr lang="ko-KR" sz="1100"/>
+          </a:p>
+        </p:txBody>
+      </p:sp>
+      <p:sp>
+        <p:nvSpPr>
+          <p:cNvPr id="46" name="Panel 46"/>
+          <p:cNvSpPr/>
+          <p:nvPr/>
+        </p:nvSpPr>
+        <p:spPr>
+          <a:xfrm>
+            <a:off x="5876925" y="2752725"/>
+            <a:ext cx="1047750" cy="361950"/>
+          </a:xfrm>
+          <a:prstGeom prst="rect">
+            <a:avLst/>
+          </a:prstGeom>
+          <a:solidFill>
+            <a:srgbClr val="0B0E12"/>
+          </a:solidFill>
+          <a:ln w="9525">
+            <a:solidFill>
+              <a:srgbClr val="2A3038"/>
+            </a:solidFill>
+          </a:ln>
+        </p:spPr>
+        <p:txBody>
+          <a:bodyPr/>
+          <a:lstStyle/>
+          <a:p/>
+        </p:txBody>
+      </p:sp>
+      <p:sp>
+        <p:nvSpPr>
+          <p:cNvPr id="47" name="Text 47"/>
+          <p:cNvSpPr txBox="1"/>
+          <p:nvPr/>
+        </p:nvSpPr>
+        <p:spPr>
+          <a:xfrm>
+            <a:off x="5943600" y="2838450"/>
+            <a:ext cx="914400" cy="171450"/>
+          </a:xfrm>
+          <a:prstGeom prst="rect">
+            <a:avLst/>
+          </a:prstGeom>
+          <a:noFill/>
+          <a:ln>
+            <a:noFill/>
+          </a:ln>
+        </p:spPr>
+        <p:txBody>
+          <a:bodyPr wrap="square" anchor="t">
+            <a:spAutoFit/>
+          </a:bodyPr>
+          <a:lstStyle/>
+          <a:p>
+            <a:pPr algn="l"/>
+            <a:r>
+              <a:rPr lang="ko-KR" sz="1100">
+                <a:solidFill>
+                  <a:srgbClr val="F2F5F8"/>
+                </a:solidFill>
+                <a:latin typeface="Malgun Gothic"/>
+                <a:ea typeface="Malgun Gothic"/>
+              </a:rPr>
+              <a:t>010010</a:t>
+            </a:r>
+            <a:endParaRPr lang="ko-KR" sz="1100"/>
+          </a:p>
+        </p:txBody>
+      </p:sp>
+      <p:sp>
+        <p:nvSpPr>
+          <p:cNvPr id="48" name="Panel 48"/>
+          <p:cNvSpPr/>
+          <p:nvPr/>
+        </p:nvSpPr>
+        <p:spPr>
+          <a:xfrm>
+            <a:off x="6924675" y="2752725"/>
+            <a:ext cx="1143000" cy="361950"/>
+          </a:xfrm>
+          <a:prstGeom prst="rect">
+            <a:avLst/>
+          </a:prstGeom>
+          <a:solidFill>
+            <a:srgbClr val="0B0E12"/>
+          </a:solidFill>
+          <a:ln w="9525">
+            <a:solidFill>
+              <a:srgbClr val="2A3038"/>
+            </a:solidFill>
+          </a:ln>
+        </p:spPr>
+        <p:txBody>
+          <a:bodyPr/>
+          <a:lstStyle/>
+          <a:p/>
+        </p:txBody>
+      </p:sp>
+      <p:sp>
+        <p:nvSpPr>
+          <p:cNvPr id="49" name="Text 49"/>
+          <p:cNvSpPr txBox="1"/>
+          <p:nvPr/>
+        </p:nvSpPr>
+        <p:spPr>
+          <a:xfrm>
+            <a:off x="6991350" y="2838450"/>
+            <a:ext cx="1009650" cy="171450"/>
+          </a:xfrm>
+          <a:prstGeom prst="rect">
+            <a:avLst/>
+          </a:prstGeom>
+          <a:noFill/>
+          <a:ln>
+            <a:noFill/>
+          </a:ln>
+        </p:spPr>
+        <p:txBody>
+          <a:bodyPr wrap="square" anchor="t">
+            <a:spAutoFit/>
+          </a:bodyPr>
+          <a:lstStyle/>
+          <a:p>
+            <a:pPr algn="r"/>
+            <a:r>
+              <a:rPr lang="ko-KR" sz="1100">
+                <a:solidFill>
+                  <a:srgbClr val="F2F5F8"/>
+                </a:solidFill>
+                <a:latin typeface="Malgun Gothic"/>
+                <a:ea typeface="Malgun Gothic"/>
+              </a:rPr>
+              <a:t>-0.07%</a:t>
+            </a:r>
+            <a:endParaRPr lang="ko-KR" sz="1100"/>
+          </a:p>
+        </p:txBody>
+      </p:sp>
+      <p:sp>
+        <p:nvSpPr>
+          <p:cNvPr id="50" name="Panel 50"/>
+          <p:cNvSpPr/>
+          <p:nvPr/>
+        </p:nvSpPr>
+        <p:spPr>
+          <a:xfrm>
+            <a:off x="8067675" y="2752725"/>
+            <a:ext cx="1143000" cy="361950"/>
+          </a:xfrm>
+          <a:prstGeom prst="rect">
+            <a:avLst/>
+          </a:prstGeom>
+          <a:solidFill>
+            <a:srgbClr val="0B0E12"/>
+          </a:solidFill>
+          <a:ln w="9525">
+            <a:solidFill>
+              <a:srgbClr val="2A3038"/>
+            </a:solidFill>
+          </a:ln>
+        </p:spPr>
+        <p:txBody>
+          <a:bodyPr/>
+          <a:lstStyle/>
+          <a:p/>
+        </p:txBody>
+      </p:sp>
+      <p:sp>
+        <p:nvSpPr>
+          <p:cNvPr id="51" name="Text 51"/>
+          <p:cNvSpPr txBox="1"/>
+          <p:nvPr/>
+        </p:nvSpPr>
+        <p:spPr>
+          <a:xfrm>
+            <a:off x="8134350" y="2838450"/>
+            <a:ext cx="1009650" cy="171450"/>
+          </a:xfrm>
+          <a:prstGeom prst="rect">
+            <a:avLst/>
+          </a:prstGeom>
+          <a:noFill/>
+          <a:ln>
+            <a:noFill/>
+          </a:ln>
+        </p:spPr>
+        <p:txBody>
+          <a:bodyPr wrap="square" anchor="t">
+            <a:spAutoFit/>
+          </a:bodyPr>
+          <a:lstStyle/>
+          <a:p>
+            <a:pPr algn="r"/>
+            <a:r>
+              <a:rPr lang="ko-KR" sz="1100">
+                <a:solidFill>
+                  <a:srgbClr val="F2F5F8"/>
+                </a:solidFill>
+                <a:latin typeface="Malgun Gothic"/>
+                <a:ea typeface="Malgun Gothic"/>
+              </a:rPr>
+              <a:t>100.00%</a:t>
+            </a:r>
+            <a:endParaRPr lang="ko-KR" sz="1100"/>
+          </a:p>
+        </p:txBody>
+      </p:sp>
+      <p:sp>
+        <p:nvSpPr>
+          <p:cNvPr id="52" name="Panel 52"/>
+          <p:cNvSpPr/>
+          <p:nvPr/>
+        </p:nvSpPr>
+        <p:spPr>
+          <a:xfrm>
+            <a:off x="9210675" y="2752725"/>
+            <a:ext cx="1285875" cy="361950"/>
+          </a:xfrm>
+          <a:prstGeom prst="rect">
+            <a:avLst/>
+          </a:prstGeom>
+          <a:solidFill>
+            <a:srgbClr val="0B0E12"/>
+          </a:solidFill>
+          <a:ln w="9525">
+            <a:solidFill>
+              <a:srgbClr val="2A3038"/>
+            </a:solidFill>
+          </a:ln>
+        </p:spPr>
+        <p:txBody>
+          <a:bodyPr/>
+          <a:lstStyle/>
+          <a:p/>
+        </p:txBody>
+      </p:sp>
+      <p:sp>
+        <p:nvSpPr>
+          <p:cNvPr id="53" name="Text 53"/>
+          <p:cNvSpPr txBox="1"/>
+          <p:nvPr/>
+        </p:nvSpPr>
+        <p:spPr>
+          <a:xfrm>
+            <a:off x="9277350" y="2838450"/>
+            <a:ext cx="1152525" cy="171450"/>
+          </a:xfrm>
+          <a:prstGeom prst="rect">
+            <a:avLst/>
+          </a:prstGeom>
+          <a:noFill/>
+          <a:ln>
+            <a:noFill/>
+          </a:ln>
+        </p:spPr>
+        <p:txBody>
+          <a:bodyPr wrap="square" anchor="t">
+            <a:spAutoFit/>
+          </a:bodyPr>
+          <a:lstStyle/>
+          <a:p>
+            <a:pPr algn="r"/>
+            <a:r>
+              <a:rPr lang="ko-KR" sz="1100" b="1">
+                <a:solidFill>
+                  <a:srgbClr val="19C37D"/>
+                </a:solidFill>
+                <a:latin typeface="Malgun Gothic"/>
+                <a:ea typeface="Malgun Gothic"/>
+              </a:rPr>
+              <a:t>+100.07pp</a:t>
+            </a:r>
+            <a:endParaRPr lang="ko-KR" sz="1100"/>
+          </a:p>
+        </p:txBody>
+      </p:sp>
+      <p:sp>
+        <p:nvSpPr>
+          <p:cNvPr id="54" name="Panel 54"/>
+          <p:cNvSpPr/>
+          <p:nvPr/>
+        </p:nvSpPr>
+        <p:spPr>
+          <a:xfrm>
+            <a:off x="400050" y="3114675"/>
+            <a:ext cx="2381250" cy="361950"/>
+          </a:xfrm>
+          <a:prstGeom prst="rect">
+            <a:avLst/>
+          </a:prstGeom>
+          <a:solidFill>
+            <a:srgbClr val="101318"/>
+          </a:solidFill>
+          <a:ln w="9525">
+            <a:solidFill>
+              <a:srgbClr val="2A3038"/>
+            </a:solidFill>
+          </a:ln>
+        </p:spPr>
+        <p:txBody>
+          <a:bodyPr/>
+          <a:lstStyle/>
+          <a:p/>
+        </p:txBody>
+      </p:sp>
+      <p:sp>
+        <p:nvSpPr>
+          <p:cNvPr id="55" name="Text 55"/>
+          <p:cNvSpPr txBox="1"/>
+          <p:nvPr/>
+        </p:nvSpPr>
+        <p:spPr>
+          <a:xfrm>
+            <a:off x="466725" y="3200400"/>
+            <a:ext cx="2247900" cy="171450"/>
+          </a:xfrm>
+          <a:prstGeom prst="rect">
+            <a:avLst/>
+          </a:prstGeom>
+          <a:noFill/>
+          <a:ln>
+            <a:noFill/>
+          </a:ln>
+        </p:spPr>
+        <p:txBody>
+          <a:bodyPr wrap="square" anchor="t">
+            <a:spAutoFit/>
+          </a:bodyPr>
+          <a:lstStyle/>
+          <a:p>
+            <a:pPr algn="l"/>
+            <a:r>
+              <a:rPr lang="ko-KR" sz="1100">
+                <a:solidFill>
+                  <a:srgbClr val="F2F5F8"/>
+                </a:solidFill>
+                <a:latin typeface="Malgun Gothic"/>
+                <a:ea typeface="Malgun Gothic"/>
+              </a:rPr>
+              <a:t>RISE 2차전지액티브</a:t>
+            </a:r>
+            <a:endParaRPr lang="ko-KR" sz="1100"/>
+          </a:p>
+        </p:txBody>
+      </p:sp>
+      <p:sp>
+        <p:nvSpPr>
+          <p:cNvPr id="56" name="Panel 56"/>
+          <p:cNvSpPr/>
+          <p:nvPr/>
+        </p:nvSpPr>
+        <p:spPr>
+          <a:xfrm>
+            <a:off x="2781300" y="3114675"/>
+            <a:ext cx="3095625" cy="361950"/>
+          </a:xfrm>
+          <a:prstGeom prst="rect">
+            <a:avLst/>
+          </a:prstGeom>
+          <a:solidFill>
+            <a:srgbClr val="101318"/>
+          </a:solidFill>
+          <a:ln w="9525">
+            <a:solidFill>
+              <a:srgbClr val="2A3038"/>
+            </a:solidFill>
+          </a:ln>
+        </p:spPr>
+        <p:txBody>
+          <a:bodyPr/>
+          <a:lstStyle/>
+          <a:p/>
+        </p:txBody>
+      </p:sp>
+      <p:sp>
+        <p:nvSpPr>
+          <p:cNvPr id="57" name="Text 57"/>
+          <p:cNvSpPr txBox="1"/>
+          <p:nvPr/>
+        </p:nvSpPr>
+        <p:spPr>
+          <a:xfrm>
+            <a:off x="2847975" y="3200400"/>
+            <a:ext cx="2962275" cy="171450"/>
+          </a:xfrm>
+          <a:prstGeom prst="rect">
+            <a:avLst/>
+          </a:prstGeom>
+          <a:noFill/>
+          <a:ln>
+            <a:noFill/>
+          </a:ln>
+        </p:spPr>
+        <p:txBody>
+          <a:bodyPr wrap="square" anchor="t">
+            <a:spAutoFit/>
+          </a:bodyPr>
+          <a:lstStyle/>
+          <a:p>
+            <a:pPr algn="l"/>
+            <a:r>
+              <a:rPr lang="ko-KR" sz="1100">
+                <a:solidFill>
+                  <a:srgbClr val="F2F5F8"/>
+                </a:solidFill>
+                <a:latin typeface="Malgun Gothic"/>
+                <a:ea typeface="Malgun Gothic"/>
+              </a:rPr>
+              <a:t>증가 원화현금</a:t>
+            </a:r>
+            <a:endParaRPr lang="ko-KR" sz="1100"/>
+          </a:p>
+        </p:txBody>
+      </p:sp>
+      <p:sp>
+        <p:nvSpPr>
+          <p:cNvPr id="58" name="Panel 58"/>
+          <p:cNvSpPr/>
+          <p:nvPr/>
+        </p:nvSpPr>
+        <p:spPr>
+          <a:xfrm>
+            <a:off x="5876925" y="3114675"/>
+            <a:ext cx="1047750" cy="361950"/>
+          </a:xfrm>
+          <a:prstGeom prst="rect">
+            <a:avLst/>
+          </a:prstGeom>
+          <a:solidFill>
+            <a:srgbClr val="101318"/>
+          </a:solidFill>
+          <a:ln w="9525">
+            <a:solidFill>
+              <a:srgbClr val="2A3038"/>
+            </a:solidFill>
+          </a:ln>
+        </p:spPr>
+        <p:txBody>
+          <a:bodyPr/>
+          <a:lstStyle/>
+          <a:p/>
+        </p:txBody>
+      </p:sp>
+      <p:sp>
+        <p:nvSpPr>
+          <p:cNvPr id="59" name="Text 59"/>
+          <p:cNvSpPr txBox="1"/>
+          <p:nvPr/>
+        </p:nvSpPr>
+        <p:spPr>
+          <a:xfrm>
+            <a:off x="5943600" y="3200400"/>
+            <a:ext cx="914400" cy="171450"/>
+          </a:xfrm>
+          <a:prstGeom prst="rect">
+            <a:avLst/>
+          </a:prstGeom>
+          <a:noFill/>
+          <a:ln>
+            <a:noFill/>
+          </a:ln>
+        </p:spPr>
+        <p:txBody>
+          <a:bodyPr wrap="square" anchor="t">
+            <a:spAutoFit/>
+          </a:bodyPr>
+          <a:lstStyle/>
+          <a:p>
+            <a:pPr algn="l"/>
+            <a:r>
+              <a:rPr lang="ko-KR" sz="1100">
+                <a:solidFill>
+                  <a:srgbClr val="F2F5F8"/>
+                </a:solidFill>
+                <a:latin typeface="Malgun Gothic"/>
+                <a:ea typeface="Malgun Gothic"/>
+              </a:rPr>
+              <a:t>010010</a:t>
+            </a:r>
+            <a:endParaRPr lang="ko-KR" sz="1100"/>
+          </a:p>
+        </p:txBody>
+      </p:sp>
+      <p:sp>
+        <p:nvSpPr>
+          <p:cNvPr id="60" name="Panel 60"/>
+          <p:cNvSpPr/>
+          <p:nvPr/>
+        </p:nvSpPr>
+        <p:spPr>
+          <a:xfrm>
+            <a:off x="6924675" y="3114675"/>
+            <a:ext cx="1143000" cy="361950"/>
+          </a:xfrm>
+          <a:prstGeom prst="rect">
+            <a:avLst/>
+          </a:prstGeom>
+          <a:solidFill>
+            <a:srgbClr val="101318"/>
+          </a:solidFill>
+          <a:ln w="9525">
+            <a:solidFill>
+              <a:srgbClr val="2A3038"/>
+            </a:solidFill>
+          </a:ln>
+        </p:spPr>
+        <p:txBody>
+          <a:bodyPr/>
+          <a:lstStyle/>
+          <a:p/>
+        </p:txBody>
+      </p:sp>
+      <p:sp>
+        <p:nvSpPr>
+          <p:cNvPr id="61" name="Text 61"/>
+          <p:cNvSpPr txBox="1"/>
+          <p:nvPr/>
+        </p:nvSpPr>
+        <p:spPr>
+          <a:xfrm>
+            <a:off x="6991350" y="3200400"/>
+            <a:ext cx="1009650" cy="171450"/>
+          </a:xfrm>
+          <a:prstGeom prst="rect">
+            <a:avLst/>
+          </a:prstGeom>
+          <a:noFill/>
+          <a:ln>
+            <a:noFill/>
+          </a:ln>
+        </p:spPr>
+        <p:txBody>
+          <a:bodyPr wrap="square" anchor="t">
+            <a:spAutoFit/>
+          </a:bodyPr>
+          <a:lstStyle/>
+          <a:p>
+            <a:pPr algn="r"/>
+            <a:r>
+              <a:rPr lang="ko-KR" sz="1100">
+                <a:solidFill>
+                  <a:srgbClr val="F2F5F8"/>
+                </a:solidFill>
+                <a:latin typeface="Malgun Gothic"/>
+                <a:ea typeface="Malgun Gothic"/>
+              </a:rPr>
+              <a:t>-0.01%</a:t>
+            </a:r>
+            <a:endParaRPr lang="ko-KR" sz="1100"/>
+          </a:p>
+        </p:txBody>
+      </p:sp>
+      <p:sp>
+        <p:nvSpPr>
+          <p:cNvPr id="62" name="Panel 62"/>
+          <p:cNvSpPr/>
+          <p:nvPr/>
+        </p:nvSpPr>
+        <p:spPr>
+          <a:xfrm>
+            <a:off x="8067675" y="3114675"/>
+            <a:ext cx="1143000" cy="361950"/>
+          </a:xfrm>
+          <a:prstGeom prst="rect">
+            <a:avLst/>
+          </a:prstGeom>
+          <a:solidFill>
+            <a:srgbClr val="101318"/>
+          </a:solidFill>
+          <a:ln w="9525">
+            <a:solidFill>
+              <a:srgbClr val="2A3038"/>
+            </a:solidFill>
+          </a:ln>
+        </p:spPr>
+        <p:txBody>
+          <a:bodyPr/>
+          <a:lstStyle/>
+          <a:p/>
+        </p:txBody>
+      </p:sp>
+      <p:sp>
+        <p:nvSpPr>
+          <p:cNvPr id="63" name="Text 63"/>
+          <p:cNvSpPr txBox="1"/>
+          <p:nvPr/>
+        </p:nvSpPr>
+        <p:spPr>
+          <a:xfrm>
+            <a:off x="8134350" y="3200400"/>
+            <a:ext cx="1009650" cy="171450"/>
+          </a:xfrm>
+          <a:prstGeom prst="rect">
+            <a:avLst/>
+          </a:prstGeom>
+          <a:noFill/>
+          <a:ln>
+            <a:noFill/>
+          </a:ln>
+        </p:spPr>
+        <p:txBody>
+          <a:bodyPr wrap="square" anchor="t">
+            <a:spAutoFit/>
+          </a:bodyPr>
+          <a:lstStyle/>
+          <a:p>
+            <a:pPr algn="r"/>
+            <a:r>
+              <a:rPr lang="ko-KR" sz="1100">
+                <a:solidFill>
+                  <a:srgbClr val="F2F5F8"/>
+                </a:solidFill>
+                <a:latin typeface="Malgun Gothic"/>
+                <a:ea typeface="Malgun Gothic"/>
+              </a:rPr>
+              <a:t>100.00%</a:t>
+            </a:r>
+            <a:endParaRPr lang="ko-KR" sz="1100"/>
+          </a:p>
+        </p:txBody>
+      </p:sp>
+      <p:sp>
+        <p:nvSpPr>
+          <p:cNvPr id="64" name="Panel 64"/>
+          <p:cNvSpPr/>
+          <p:nvPr/>
+        </p:nvSpPr>
+        <p:spPr>
+          <a:xfrm>
+            <a:off x="9210675" y="3114675"/>
+            <a:ext cx="1285875" cy="361950"/>
+          </a:xfrm>
+          <a:prstGeom prst="rect">
+            <a:avLst/>
+          </a:prstGeom>
+          <a:solidFill>
+            <a:srgbClr val="101318"/>
+          </a:solidFill>
+          <a:ln w="9525">
+            <a:solidFill>
+              <a:srgbClr val="2A3038"/>
+            </a:solidFill>
+          </a:ln>
+        </p:spPr>
+        <p:txBody>
+          <a:bodyPr/>
+          <a:lstStyle/>
+          <a:p/>
+        </p:txBody>
+      </p:sp>
+      <p:sp>
+        <p:nvSpPr>
+          <p:cNvPr id="65" name="Text 65"/>
+          <p:cNvSpPr txBox="1"/>
+          <p:nvPr/>
+        </p:nvSpPr>
+        <p:spPr>
+          <a:xfrm>
+            <a:off x="9277350" y="3200400"/>
+            <a:ext cx="1152525" cy="171450"/>
+          </a:xfrm>
+          <a:prstGeom prst="rect">
+            <a:avLst/>
+          </a:prstGeom>
+          <a:noFill/>
+          <a:ln>
+            <a:noFill/>
+          </a:ln>
+        </p:spPr>
+        <p:txBody>
+          <a:bodyPr wrap="square" anchor="t">
+            <a:spAutoFit/>
+          </a:bodyPr>
+          <a:lstStyle/>
+          <a:p>
+            <a:pPr algn="r"/>
+            <a:r>
+              <a:rPr lang="ko-KR" sz="1100" b="1">
+                <a:solidFill>
+                  <a:srgbClr val="19C37D"/>
+                </a:solidFill>
+                <a:latin typeface="Malgun Gothic"/>
+                <a:ea typeface="Malgun Gothic"/>
+              </a:rPr>
+              <a:t>+100.01pp</a:t>
+            </a:r>
+            <a:endParaRPr lang="ko-KR" sz="1100"/>
+          </a:p>
+        </p:txBody>
+      </p:sp>
+      <p:sp>
+        <p:nvSpPr>
+          <p:cNvPr id="66" name="Panel 66"/>
+          <p:cNvSpPr/>
+          <p:nvPr/>
+        </p:nvSpPr>
+        <p:spPr>
+          <a:xfrm>
+            <a:off x="400050" y="3476625"/>
+            <a:ext cx="2381250" cy="361950"/>
+          </a:xfrm>
+          <a:prstGeom prst="rect">
+            <a:avLst/>
+          </a:prstGeom>
+          <a:solidFill>
+            <a:srgbClr val="0B0E12"/>
+          </a:solidFill>
+          <a:ln w="9525">
+            <a:solidFill>
+              <a:srgbClr val="2A3038"/>
+            </a:solidFill>
+          </a:ln>
+        </p:spPr>
+        <p:txBody>
+          <a:bodyPr/>
+          <a:lstStyle/>
+          <a:p/>
+        </p:txBody>
+      </p:sp>
+      <p:sp>
+        <p:nvSpPr>
+          <p:cNvPr id="67" name="Text 67"/>
+          <p:cNvSpPr txBox="1"/>
+          <p:nvPr/>
+        </p:nvSpPr>
+        <p:spPr>
+          <a:xfrm>
+            <a:off x="466725" y="3562350"/>
+            <a:ext cx="2247900" cy="171450"/>
+          </a:xfrm>
+          <a:prstGeom prst="rect">
+            <a:avLst/>
+          </a:prstGeom>
+          <a:noFill/>
+          <a:ln>
+            <a:noFill/>
+          </a:ln>
+        </p:spPr>
+        <p:txBody>
+          <a:bodyPr wrap="square" anchor="t">
+            <a:spAutoFit/>
+          </a:bodyPr>
+          <a:lstStyle/>
+          <a:p>
+            <a:pPr algn="l"/>
+            <a:r>
+              <a:rPr lang="ko-KR" sz="1100">
+                <a:solidFill>
+                  <a:srgbClr val="F2F5F8"/>
+                </a:solidFill>
+                <a:latin typeface="Malgun Gothic"/>
+                <a:ea typeface="Malgun Gothic"/>
+              </a:rPr>
+              <a:t>PLUS K제조업핵심기업액티브</a:t>
+            </a:r>
+            <a:endParaRPr lang="ko-KR" sz="1100"/>
+          </a:p>
+        </p:txBody>
+      </p:sp>
+      <p:sp>
+        <p:nvSpPr>
+          <p:cNvPr id="68" name="Panel 68"/>
+          <p:cNvSpPr/>
+          <p:nvPr/>
+        </p:nvSpPr>
+        <p:spPr>
+          <a:xfrm>
+            <a:off x="2781300" y="3476625"/>
+            <a:ext cx="3095625" cy="361950"/>
+          </a:xfrm>
+          <a:prstGeom prst="rect">
+            <a:avLst/>
+          </a:prstGeom>
+          <a:solidFill>
+            <a:srgbClr val="0B0E12"/>
+          </a:solidFill>
+          <a:ln w="9525">
+            <a:solidFill>
+              <a:srgbClr val="2A3038"/>
+            </a:solidFill>
+          </a:ln>
+        </p:spPr>
+        <p:txBody>
+          <a:bodyPr/>
+          <a:lstStyle/>
+          <a:p/>
+        </p:txBody>
+      </p:sp>
+      <p:sp>
+        <p:nvSpPr>
+          <p:cNvPr id="69" name="Text 69"/>
+          <p:cNvSpPr txBox="1"/>
+          <p:nvPr/>
+        </p:nvSpPr>
+        <p:spPr>
+          <a:xfrm>
+            <a:off x="2847975" y="3562350"/>
+            <a:ext cx="2962275" cy="171450"/>
+          </a:xfrm>
+          <a:prstGeom prst="rect">
+            <a:avLst/>
+          </a:prstGeom>
+          <a:noFill/>
+          <a:ln>
+            <a:noFill/>
+          </a:ln>
+        </p:spPr>
+        <p:txBody>
+          <a:bodyPr wrap="square" anchor="t">
+            <a:spAutoFit/>
+          </a:bodyPr>
+          <a:lstStyle/>
+          <a:p>
+            <a:pPr algn="l"/>
+            <a:r>
+              <a:rPr lang="ko-KR" sz="1100">
+                <a:solidFill>
+                  <a:srgbClr val="F2F5F8"/>
+                </a:solidFill>
+                <a:latin typeface="Malgun Gothic"/>
+                <a:ea typeface="Malgun Gothic"/>
+              </a:rPr>
+              <a:t>증가 원화현금</a:t>
+            </a:r>
+            <a:endParaRPr lang="ko-KR" sz="1100"/>
+          </a:p>
+        </p:txBody>
+      </p:sp>
+      <p:sp>
+        <p:nvSpPr>
+          <p:cNvPr id="70" name="Panel 70"/>
+          <p:cNvSpPr/>
+          <p:nvPr/>
+        </p:nvSpPr>
+        <p:spPr>
+          <a:xfrm>
+            <a:off x="5876925" y="3476625"/>
+            <a:ext cx="1047750" cy="361950"/>
+          </a:xfrm>
+          <a:prstGeom prst="rect">
+            <a:avLst/>
+          </a:prstGeom>
+          <a:solidFill>
+            <a:srgbClr val="0B0E12"/>
+          </a:solidFill>
+          <a:ln w="9525">
+            <a:solidFill>
+              <a:srgbClr val="2A3038"/>
+            </a:solidFill>
+          </a:ln>
+        </p:spPr>
+        <p:txBody>
+          <a:bodyPr/>
+          <a:lstStyle/>
+          <a:p/>
+        </p:txBody>
+      </p:sp>
+      <p:sp>
+        <p:nvSpPr>
+          <p:cNvPr id="71" name="Text 71"/>
+          <p:cNvSpPr txBox="1"/>
+          <p:nvPr/>
+        </p:nvSpPr>
+        <p:spPr>
+          <a:xfrm>
+            <a:off x="5943600" y="3562350"/>
+            <a:ext cx="914400" cy="171450"/>
+          </a:xfrm>
+          <a:prstGeom prst="rect">
+            <a:avLst/>
+          </a:prstGeom>
+          <a:noFill/>
+          <a:ln>
+            <a:noFill/>
+          </a:ln>
+        </p:spPr>
+        <p:txBody>
+          <a:bodyPr wrap="square" anchor="t">
+            <a:spAutoFit/>
+          </a:bodyPr>
+          <a:lstStyle/>
+          <a:p>
+            <a:pPr algn="l"/>
+            <a:r>
+              <a:rPr lang="ko-KR" sz="1100">
+                <a:solidFill>
+                  <a:srgbClr val="F2F5F8"/>
+                </a:solidFill>
+                <a:latin typeface="Malgun Gothic"/>
+                <a:ea typeface="Malgun Gothic"/>
+              </a:rPr>
+              <a:t>010010</a:t>
+            </a:r>
+            <a:endParaRPr lang="ko-KR" sz="1100"/>
+          </a:p>
+        </p:txBody>
+      </p:sp>
+      <p:sp>
+        <p:nvSpPr>
+          <p:cNvPr id="72" name="Panel 72"/>
+          <p:cNvSpPr/>
+          <p:nvPr/>
+        </p:nvSpPr>
+        <p:spPr>
+          <a:xfrm>
+            <a:off x="6924675" y="3476625"/>
+            <a:ext cx="1143000" cy="361950"/>
+          </a:xfrm>
+          <a:prstGeom prst="rect">
+            <a:avLst/>
+          </a:prstGeom>
+          <a:solidFill>
+            <a:srgbClr val="0B0E12"/>
+          </a:solidFill>
+          <a:ln w="9525">
+            <a:solidFill>
+              <a:srgbClr val="2A3038"/>
+            </a:solidFill>
+          </a:ln>
+        </p:spPr>
+        <p:txBody>
+          <a:bodyPr/>
+          <a:lstStyle/>
+          <a:p/>
+        </p:txBody>
+      </p:sp>
+      <p:sp>
+        <p:nvSpPr>
+          <p:cNvPr id="73" name="Text 73"/>
+          <p:cNvSpPr txBox="1"/>
+          <p:nvPr/>
+        </p:nvSpPr>
+        <p:spPr>
+          <a:xfrm>
+            <a:off x="6991350" y="3562350"/>
+            <a:ext cx="1009650" cy="171450"/>
+          </a:xfrm>
+          <a:prstGeom prst="rect">
+            <a:avLst/>
+          </a:prstGeom>
+          <a:noFill/>
+          <a:ln>
+            <a:noFill/>
+          </a:ln>
+        </p:spPr>
+        <p:txBody>
+          <a:bodyPr wrap="square" anchor="t">
+            <a:spAutoFit/>
+          </a:bodyPr>
+          <a:lstStyle/>
+          <a:p>
+            <a:pPr algn="r"/>
+            <a:r>
+              <a:rPr lang="ko-KR" sz="1100">
+                <a:solidFill>
+                  <a:srgbClr val="F2F5F8"/>
+                </a:solidFill>
+                <a:latin typeface="Malgun Gothic"/>
+                <a:ea typeface="Malgun Gothic"/>
+              </a:rPr>
+              <a:t>0.00%</a:t>
+            </a:r>
+            <a:endParaRPr lang="ko-KR" sz="1100"/>
+          </a:p>
+        </p:txBody>
+      </p:sp>
+      <p:sp>
+        <p:nvSpPr>
+          <p:cNvPr id="74" name="Panel 74"/>
+          <p:cNvSpPr/>
+          <p:nvPr/>
+        </p:nvSpPr>
+        <p:spPr>
+          <a:xfrm>
+            <a:off x="8067675" y="3476625"/>
+            <a:ext cx="1143000" cy="361950"/>
+          </a:xfrm>
+          <a:prstGeom prst="rect">
+            <a:avLst/>
+          </a:prstGeom>
+          <a:solidFill>
+            <a:srgbClr val="0B0E12"/>
+          </a:solidFill>
+          <a:ln w="9525">
+            <a:solidFill>
+              <a:srgbClr val="2A3038"/>
+            </a:solidFill>
+          </a:ln>
+        </p:spPr>
+        <p:txBody>
+          <a:bodyPr/>
+          <a:lstStyle/>
+          <a:p/>
+        </p:txBody>
+      </p:sp>
+      <p:sp>
+        <p:nvSpPr>
+          <p:cNvPr id="75" name="Text 75"/>
+          <p:cNvSpPr txBox="1"/>
+          <p:nvPr/>
+        </p:nvSpPr>
+        <p:spPr>
+          <a:xfrm>
+            <a:off x="8134350" y="3562350"/>
+            <a:ext cx="1009650" cy="171450"/>
+          </a:xfrm>
+          <a:prstGeom prst="rect">
+            <a:avLst/>
+          </a:prstGeom>
+          <a:noFill/>
+          <a:ln>
+            <a:noFill/>
+          </a:ln>
+        </p:spPr>
+        <p:txBody>
+          <a:bodyPr wrap="square" anchor="t">
+            <a:spAutoFit/>
+          </a:bodyPr>
+          <a:lstStyle/>
+          <a:p>
+            <a:pPr algn="r"/>
+            <a:r>
+              <a:rPr lang="ko-KR" sz="1100">
+                <a:solidFill>
+                  <a:srgbClr val="F2F5F8"/>
+                </a:solidFill>
+                <a:latin typeface="Malgun Gothic"/>
+                <a:ea typeface="Malgun Gothic"/>
+              </a:rPr>
+              <a:t>100.00%</a:t>
+            </a:r>
+            <a:endParaRPr lang="ko-KR" sz="1100"/>
+          </a:p>
+        </p:txBody>
+      </p:sp>
+      <p:sp>
+        <p:nvSpPr>
+          <p:cNvPr id="76" name="Panel 76"/>
+          <p:cNvSpPr/>
+          <p:nvPr/>
+        </p:nvSpPr>
+        <p:spPr>
+          <a:xfrm>
+            <a:off x="9210675" y="3476625"/>
+            <a:ext cx="1285875" cy="361950"/>
+          </a:xfrm>
+          <a:prstGeom prst="rect">
+            <a:avLst/>
+          </a:prstGeom>
+          <a:solidFill>
+            <a:srgbClr val="0B0E12"/>
+          </a:solidFill>
+          <a:ln w="9525">
+            <a:solidFill>
+              <a:srgbClr val="2A3038"/>
+            </a:solidFill>
+          </a:ln>
+        </p:spPr>
+        <p:txBody>
+          <a:bodyPr/>
+          <a:lstStyle/>
+          <a:p/>
+        </p:txBody>
+      </p:sp>
+      <p:sp>
+        <p:nvSpPr>
+          <p:cNvPr id="77" name="Text 77"/>
+          <p:cNvSpPr txBox="1"/>
+          <p:nvPr/>
+        </p:nvSpPr>
+        <p:spPr>
+          <a:xfrm>
+            <a:off x="9277350" y="3562350"/>
+            <a:ext cx="1152525" cy="171450"/>
+          </a:xfrm>
+          <a:prstGeom prst="rect">
+            <a:avLst/>
+          </a:prstGeom>
+          <a:noFill/>
+          <a:ln>
+            <a:noFill/>
+          </a:ln>
+        </p:spPr>
+        <p:txBody>
+          <a:bodyPr wrap="square" anchor="t">
+            <a:spAutoFit/>
+          </a:bodyPr>
+          <a:lstStyle/>
+          <a:p>
+            <a:pPr algn="r"/>
+            <a:r>
+              <a:rPr lang="ko-KR" sz="1100" b="1">
+                <a:solidFill>
+                  <a:srgbClr val="19C37D"/>
+                </a:solidFill>
+                <a:latin typeface="Malgun Gothic"/>
+                <a:ea typeface="Malgun Gothic"/>
+              </a:rPr>
+              <a:t>+100.00pp</a:t>
+            </a:r>
+            <a:endParaRPr lang="ko-KR" sz="1100"/>
+          </a:p>
+        </p:txBody>
+      </p:sp>
+      <p:sp>
+        <p:nvSpPr>
+          <p:cNvPr id="78" name="Panel 78"/>
+          <p:cNvSpPr/>
+          <p:nvPr/>
+        </p:nvSpPr>
+        <p:spPr>
+          <a:xfrm>
+            <a:off x="400050" y="3838575"/>
+            <a:ext cx="2381250" cy="361950"/>
+          </a:xfrm>
+          <a:prstGeom prst="rect">
+            <a:avLst/>
+          </a:prstGeom>
+          <a:solidFill>
+            <a:srgbClr val="101318"/>
+          </a:solidFill>
+          <a:ln w="9525">
+            <a:solidFill>
+              <a:srgbClr val="2A3038"/>
+            </a:solidFill>
+          </a:ln>
+        </p:spPr>
+        <p:txBody>
+          <a:bodyPr/>
+          <a:lstStyle/>
+          <a:p/>
+        </p:txBody>
+      </p:sp>
+      <p:sp>
+        <p:nvSpPr>
+          <p:cNvPr id="79" name="Text 79"/>
+          <p:cNvSpPr txBox="1"/>
+          <p:nvPr/>
+        </p:nvSpPr>
+        <p:spPr>
+          <a:xfrm>
+            <a:off x="466725" y="3924300"/>
+            <a:ext cx="2247900" cy="171450"/>
+          </a:xfrm>
+          <a:prstGeom prst="rect">
+            <a:avLst/>
+          </a:prstGeom>
+          <a:noFill/>
+          <a:ln>
+            <a:noFill/>
+          </a:ln>
+        </p:spPr>
+        <p:txBody>
+          <a:bodyPr wrap="square" anchor="t">
+            <a:spAutoFit/>
+          </a:bodyPr>
+          <a:lstStyle/>
+          <a:p>
+            <a:pPr algn="l"/>
+            <a:r>
+              <a:rPr lang="ko-KR" sz="1100">
+                <a:solidFill>
+                  <a:srgbClr val="F2F5F8"/>
+                </a:solidFill>
+                <a:latin typeface="Malgun Gothic"/>
+                <a:ea typeface="Malgun Gothic"/>
+              </a:rPr>
+              <a:t>1Q 200액티브</a:t>
+            </a:r>
+            <a:endParaRPr lang="ko-KR" sz="1100"/>
+          </a:p>
+        </p:txBody>
+      </p:sp>
+      <p:sp>
+        <p:nvSpPr>
+          <p:cNvPr id="80" name="Panel 80"/>
+          <p:cNvSpPr/>
+          <p:nvPr/>
+        </p:nvSpPr>
+        <p:spPr>
+          <a:xfrm>
+            <a:off x="2781300" y="3838575"/>
+            <a:ext cx="3095625" cy="361950"/>
+          </a:xfrm>
+          <a:prstGeom prst="rect">
+            <a:avLst/>
+          </a:prstGeom>
+          <a:solidFill>
+            <a:srgbClr val="101318"/>
+          </a:solidFill>
+          <a:ln w="9525">
+            <a:solidFill>
+              <a:srgbClr val="2A3038"/>
+            </a:solidFill>
+          </a:ln>
+        </p:spPr>
+        <p:txBody>
+          <a:bodyPr/>
+          <a:lstStyle/>
+          <a:p/>
+        </p:txBody>
+      </p:sp>
+      <p:sp>
+        <p:nvSpPr>
+          <p:cNvPr id="81" name="Text 81"/>
+          <p:cNvSpPr txBox="1"/>
+          <p:nvPr/>
+        </p:nvSpPr>
+        <p:spPr>
+          <a:xfrm>
+            <a:off x="2847975" y="3924300"/>
+            <a:ext cx="2962275" cy="171450"/>
+          </a:xfrm>
+          <a:prstGeom prst="rect">
+            <a:avLst/>
+          </a:prstGeom>
+          <a:noFill/>
+          <a:ln>
+            <a:noFill/>
+          </a:ln>
+        </p:spPr>
+        <p:txBody>
+          <a:bodyPr wrap="square" anchor="t">
+            <a:spAutoFit/>
+          </a:bodyPr>
+          <a:lstStyle/>
+          <a:p>
+            <a:pPr algn="l"/>
+            <a:r>
+              <a:rPr lang="ko-KR" sz="1100">
+                <a:solidFill>
+                  <a:srgbClr val="F2F5F8"/>
+                </a:solidFill>
+                <a:latin typeface="Malgun Gothic"/>
+                <a:ea typeface="Malgun Gothic"/>
+              </a:rPr>
+              <a:t>증가 원화현금</a:t>
+            </a:r>
+            <a:endParaRPr lang="ko-KR" sz="1100"/>
+          </a:p>
+        </p:txBody>
+      </p:sp>
+      <p:sp>
+        <p:nvSpPr>
+          <p:cNvPr id="82" name="Panel 82"/>
+          <p:cNvSpPr/>
+          <p:nvPr/>
+        </p:nvSpPr>
+        <p:spPr>
+          <a:xfrm>
+            <a:off x="5876925" y="3838575"/>
+            <a:ext cx="1047750" cy="361950"/>
+          </a:xfrm>
+          <a:prstGeom prst="rect">
+            <a:avLst/>
+          </a:prstGeom>
+          <a:solidFill>
+            <a:srgbClr val="101318"/>
+          </a:solidFill>
+          <a:ln w="9525">
+            <a:solidFill>
+              <a:srgbClr val="2A3038"/>
+            </a:solidFill>
+          </a:ln>
+        </p:spPr>
+        <p:txBody>
+          <a:bodyPr/>
+          <a:lstStyle/>
+          <a:p/>
+        </p:txBody>
+      </p:sp>
+      <p:sp>
+        <p:nvSpPr>
+          <p:cNvPr id="83" name="Text 83"/>
+          <p:cNvSpPr txBox="1"/>
+          <p:nvPr/>
+        </p:nvSpPr>
+        <p:spPr>
+          <a:xfrm>
+            <a:off x="5943600" y="3924300"/>
+            <a:ext cx="914400" cy="171450"/>
+          </a:xfrm>
+          <a:prstGeom prst="rect">
+            <a:avLst/>
+          </a:prstGeom>
+          <a:noFill/>
+          <a:ln>
+            <a:noFill/>
+          </a:ln>
+        </p:spPr>
+        <p:txBody>
+          <a:bodyPr wrap="square" anchor="t">
+            <a:spAutoFit/>
+          </a:bodyPr>
+          <a:lstStyle/>
+          <a:p>
+            <a:pPr algn="l"/>
+            <a:r>
+              <a:rPr lang="ko-KR" sz="1100">
+                <a:solidFill>
+                  <a:srgbClr val="F2F5F8"/>
+                </a:solidFill>
+                <a:latin typeface="Malgun Gothic"/>
+                <a:ea typeface="Malgun Gothic"/>
+              </a:rPr>
+              <a:t>010010</a:t>
+            </a:r>
+            <a:endParaRPr lang="ko-KR" sz="1100"/>
+          </a:p>
+        </p:txBody>
+      </p:sp>
+      <p:sp>
+        <p:nvSpPr>
+          <p:cNvPr id="84" name="Panel 84"/>
+          <p:cNvSpPr/>
+          <p:nvPr/>
+        </p:nvSpPr>
+        <p:spPr>
+          <a:xfrm>
+            <a:off x="6924675" y="3838575"/>
+            <a:ext cx="1143000" cy="361950"/>
+          </a:xfrm>
+          <a:prstGeom prst="rect">
+            <a:avLst/>
+          </a:prstGeom>
+          <a:solidFill>
+            <a:srgbClr val="101318"/>
+          </a:solidFill>
+          <a:ln w="9525">
+            <a:solidFill>
+              <a:srgbClr val="2A3038"/>
+            </a:solidFill>
+          </a:ln>
+        </p:spPr>
+        <p:txBody>
+          <a:bodyPr/>
+          <a:lstStyle/>
+          <a:p/>
+        </p:txBody>
+      </p:sp>
+      <p:sp>
+        <p:nvSpPr>
+          <p:cNvPr id="85" name="Text 85"/>
+          <p:cNvSpPr txBox="1"/>
+          <p:nvPr/>
+        </p:nvSpPr>
+        <p:spPr>
+          <a:xfrm>
+            <a:off x="6991350" y="3924300"/>
+            <a:ext cx="1009650" cy="171450"/>
+          </a:xfrm>
+          <a:prstGeom prst="rect">
+            <a:avLst/>
+          </a:prstGeom>
+          <a:noFill/>
+          <a:ln>
+            <a:noFill/>
+          </a:ln>
+        </p:spPr>
+        <p:txBody>
+          <a:bodyPr wrap="square" anchor="t">
+            <a:spAutoFit/>
+          </a:bodyPr>
+          <a:lstStyle/>
+          <a:p>
+            <a:pPr algn="r"/>
+            <a:r>
+              <a:rPr lang="ko-KR" sz="1100">
+                <a:solidFill>
+                  <a:srgbClr val="F2F5F8"/>
+                </a:solidFill>
+                <a:latin typeface="Malgun Gothic"/>
+                <a:ea typeface="Malgun Gothic"/>
+              </a:rPr>
+              <a:t>0.04%</a:t>
+            </a:r>
+            <a:endParaRPr lang="ko-KR" sz="1100"/>
+          </a:p>
+        </p:txBody>
+      </p:sp>
+      <p:sp>
+        <p:nvSpPr>
+          <p:cNvPr id="86" name="Panel 86"/>
+          <p:cNvSpPr/>
+          <p:nvPr/>
+        </p:nvSpPr>
+        <p:spPr>
+          <a:xfrm>
+            <a:off x="8067675" y="3838575"/>
+            <a:ext cx="1143000" cy="361950"/>
+          </a:xfrm>
+          <a:prstGeom prst="rect">
+            <a:avLst/>
+          </a:prstGeom>
+          <a:solidFill>
+            <a:srgbClr val="101318"/>
+          </a:solidFill>
+          <a:ln w="9525">
+            <a:solidFill>
+              <a:srgbClr val="2A3038"/>
+            </a:solidFill>
+          </a:ln>
+        </p:spPr>
+        <p:txBody>
+          <a:bodyPr/>
+          <a:lstStyle/>
+          <a:p/>
+        </p:txBody>
+      </p:sp>
+      <p:sp>
+        <p:nvSpPr>
+          <p:cNvPr id="87" name="Text 87"/>
+          <p:cNvSpPr txBox="1"/>
+          <p:nvPr/>
+        </p:nvSpPr>
+        <p:spPr>
+          <a:xfrm>
+            <a:off x="8134350" y="3924300"/>
+            <a:ext cx="1009650" cy="171450"/>
+          </a:xfrm>
+          <a:prstGeom prst="rect">
+            <a:avLst/>
+          </a:prstGeom>
+          <a:noFill/>
+          <a:ln>
+            <a:noFill/>
+          </a:ln>
+        </p:spPr>
+        <p:txBody>
+          <a:bodyPr wrap="square" anchor="t">
+            <a:spAutoFit/>
+          </a:bodyPr>
+          <a:lstStyle/>
+          <a:p>
+            <a:pPr algn="r"/>
+            <a:r>
+              <a:rPr lang="ko-KR" sz="1100">
+                <a:solidFill>
+                  <a:srgbClr val="F2F5F8"/>
+                </a:solidFill>
+                <a:latin typeface="Malgun Gothic"/>
+                <a:ea typeface="Malgun Gothic"/>
+              </a:rPr>
+              <a:t>100.00%</a:t>
+            </a:r>
+            <a:endParaRPr lang="ko-KR" sz="1100"/>
+          </a:p>
+        </p:txBody>
+      </p:sp>
+      <p:sp>
+        <p:nvSpPr>
+          <p:cNvPr id="88" name="Panel 88"/>
+          <p:cNvSpPr/>
+          <p:nvPr/>
+        </p:nvSpPr>
+        <p:spPr>
+          <a:xfrm>
+            <a:off x="9210675" y="3838575"/>
+            <a:ext cx="1285875" cy="361950"/>
+          </a:xfrm>
+          <a:prstGeom prst="rect">
+            <a:avLst/>
+          </a:prstGeom>
+          <a:solidFill>
+            <a:srgbClr val="101318"/>
+          </a:solidFill>
+          <a:ln w="9525">
+            <a:solidFill>
+              <a:srgbClr val="2A3038"/>
+            </a:solidFill>
+          </a:ln>
+        </p:spPr>
+        <p:txBody>
+          <a:bodyPr/>
+          <a:lstStyle/>
+          <a:p/>
+        </p:txBody>
+      </p:sp>
+      <p:sp>
+        <p:nvSpPr>
+          <p:cNvPr id="89" name="Text 89"/>
+          <p:cNvSpPr txBox="1"/>
+          <p:nvPr/>
+        </p:nvSpPr>
+        <p:spPr>
+          <a:xfrm>
+            <a:off x="9277350" y="3924300"/>
+            <a:ext cx="1152525" cy="171450"/>
+          </a:xfrm>
+          <a:prstGeom prst="rect">
+            <a:avLst/>
+          </a:prstGeom>
+          <a:noFill/>
+          <a:ln>
+            <a:noFill/>
+          </a:ln>
+        </p:spPr>
+        <p:txBody>
+          <a:bodyPr wrap="square" anchor="t">
+            <a:spAutoFit/>
+          </a:bodyPr>
+          <a:lstStyle/>
+          <a:p>
+            <a:pPr algn="r"/>
+            <a:r>
+              <a:rPr lang="ko-KR" sz="1100" b="1">
+                <a:solidFill>
+                  <a:srgbClr val="19C37D"/>
+                </a:solidFill>
+                <a:latin typeface="Malgun Gothic"/>
+                <a:ea typeface="Malgun Gothic"/>
+              </a:rPr>
+              <a:t>+99.96pp</a:t>
+            </a:r>
+            <a:endParaRPr lang="ko-KR" sz="1100"/>
+          </a:p>
+        </p:txBody>
+      </p:sp>
+      <p:sp>
+        <p:nvSpPr>
+          <p:cNvPr id="90" name="Panel 90"/>
+          <p:cNvSpPr/>
+          <p:nvPr/>
+        </p:nvSpPr>
+        <p:spPr>
+          <a:xfrm>
+            <a:off x="400050" y="4200525"/>
+            <a:ext cx="2381250" cy="361950"/>
+          </a:xfrm>
+          <a:prstGeom prst="rect">
+            <a:avLst/>
+          </a:prstGeom>
+          <a:solidFill>
+            <a:srgbClr val="0B0E12"/>
+          </a:solidFill>
+          <a:ln w="9525">
+            <a:solidFill>
+              <a:srgbClr val="2A3038"/>
+            </a:solidFill>
+          </a:ln>
+        </p:spPr>
+        <p:txBody>
+          <a:bodyPr/>
+          <a:lstStyle/>
+          <a:p/>
+        </p:txBody>
+      </p:sp>
+      <p:sp>
+        <p:nvSpPr>
+          <p:cNvPr id="91" name="Text 91"/>
+          <p:cNvSpPr txBox="1"/>
+          <p:nvPr/>
+        </p:nvSpPr>
+        <p:spPr>
+          <a:xfrm>
+            <a:off x="466725" y="4286250"/>
+            <a:ext cx="2247900" cy="171450"/>
+          </a:xfrm>
+          <a:prstGeom prst="rect">
+            <a:avLst/>
+          </a:prstGeom>
+          <a:noFill/>
+          <a:ln>
+            <a:noFill/>
+          </a:ln>
+        </p:spPr>
+        <p:txBody>
+          <a:bodyPr wrap="square" anchor="t">
+            <a:spAutoFit/>
+          </a:bodyPr>
+          <a:lstStyle/>
+          <a:p>
+            <a:pPr algn="l"/>
+            <a:r>
+              <a:rPr lang="ko-KR" sz="1100">
+                <a:solidFill>
+                  <a:srgbClr val="F2F5F8"/>
+                </a:solidFill>
+                <a:latin typeface="Malgun Gothic"/>
+                <a:ea typeface="Malgun Gothic"/>
+              </a:rPr>
+              <a:t>TIME 코스피액티브</a:t>
+            </a:r>
+            <a:endParaRPr lang="ko-KR" sz="1100"/>
+          </a:p>
+        </p:txBody>
+      </p:sp>
+      <p:sp>
+        <p:nvSpPr>
+          <p:cNvPr id="92" name="Panel 92"/>
+          <p:cNvSpPr/>
+          <p:nvPr/>
+        </p:nvSpPr>
+        <p:spPr>
+          <a:xfrm>
+            <a:off x="2781300" y="4200525"/>
+            <a:ext cx="3095625" cy="361950"/>
+          </a:xfrm>
+          <a:prstGeom prst="rect">
+            <a:avLst/>
+          </a:prstGeom>
+          <a:solidFill>
+            <a:srgbClr val="0B0E12"/>
+          </a:solidFill>
+          <a:ln w="9525">
+            <a:solidFill>
+              <a:srgbClr val="2A3038"/>
+            </a:solidFill>
+          </a:ln>
+        </p:spPr>
+        <p:txBody>
+          <a:bodyPr/>
+          <a:lstStyle/>
+          <a:p/>
+        </p:txBody>
+      </p:sp>
+      <p:sp>
+        <p:nvSpPr>
+          <p:cNvPr id="93" name="Text 93"/>
+          <p:cNvSpPr txBox="1"/>
+          <p:nvPr/>
+        </p:nvSpPr>
+        <p:spPr>
+          <a:xfrm>
+            <a:off x="2847975" y="4286250"/>
+            <a:ext cx="2962275" cy="171450"/>
+          </a:xfrm>
+          <a:prstGeom prst="rect">
+            <a:avLst/>
+          </a:prstGeom>
+          <a:noFill/>
+          <a:ln>
+            <a:noFill/>
+          </a:ln>
+        </p:spPr>
+        <p:txBody>
+          <a:bodyPr wrap="square" anchor="t">
+            <a:spAutoFit/>
+          </a:bodyPr>
+          <a:lstStyle/>
+          <a:p>
+            <a:pPr algn="l"/>
+            <a:r>
+              <a:rPr lang="ko-KR" sz="1100">
+                <a:solidFill>
+                  <a:srgbClr val="F2F5F8"/>
+                </a:solidFill>
+                <a:latin typeface="Malgun Gothic"/>
+                <a:ea typeface="Malgun Gothic"/>
+              </a:rPr>
+              <a:t>증가 원화현금</a:t>
+            </a:r>
+            <a:endParaRPr lang="ko-KR" sz="1100"/>
+          </a:p>
+        </p:txBody>
+      </p:sp>
+      <p:sp>
+        <p:nvSpPr>
+          <p:cNvPr id="94" name="Panel 94"/>
+          <p:cNvSpPr/>
+          <p:nvPr/>
+        </p:nvSpPr>
+        <p:spPr>
+          <a:xfrm>
+            <a:off x="5876925" y="4200525"/>
+            <a:ext cx="1047750" cy="361950"/>
+          </a:xfrm>
+          <a:prstGeom prst="rect">
+            <a:avLst/>
+          </a:prstGeom>
+          <a:solidFill>
+            <a:srgbClr val="0B0E12"/>
+          </a:solidFill>
+          <a:ln w="9525">
+            <a:solidFill>
+              <a:srgbClr val="2A3038"/>
+            </a:solidFill>
+          </a:ln>
+        </p:spPr>
+        <p:txBody>
+          <a:bodyPr/>
+          <a:lstStyle/>
+          <a:p/>
+        </p:txBody>
+      </p:sp>
+      <p:sp>
+        <p:nvSpPr>
+          <p:cNvPr id="95" name="Text 95"/>
+          <p:cNvSpPr txBox="1"/>
+          <p:nvPr/>
+        </p:nvSpPr>
+        <p:spPr>
+          <a:xfrm>
+            <a:off x="5943600" y="4286250"/>
+            <a:ext cx="914400" cy="171450"/>
+          </a:xfrm>
+          <a:prstGeom prst="rect">
+            <a:avLst/>
+          </a:prstGeom>
+          <a:noFill/>
+          <a:ln>
+            <a:noFill/>
+          </a:ln>
+        </p:spPr>
+        <p:txBody>
+          <a:bodyPr wrap="square" anchor="t">
+            <a:spAutoFit/>
+          </a:bodyPr>
+          <a:lstStyle/>
+          <a:p>
+            <a:pPr algn="l"/>
+            <a:r>
+              <a:rPr lang="ko-KR" sz="1100">
+                <a:solidFill>
+                  <a:srgbClr val="F2F5F8"/>
+                </a:solidFill>
+                <a:latin typeface="Malgun Gothic"/>
+                <a:ea typeface="Malgun Gothic"/>
+              </a:rPr>
+              <a:t>010010</a:t>
+            </a:r>
+            <a:endParaRPr lang="ko-KR" sz="1100"/>
+          </a:p>
+        </p:txBody>
+      </p:sp>
+      <p:sp>
+        <p:nvSpPr>
+          <p:cNvPr id="96" name="Panel 96"/>
+          <p:cNvSpPr/>
+          <p:nvPr/>
+        </p:nvSpPr>
+        <p:spPr>
+          <a:xfrm>
+            <a:off x="6924675" y="4200525"/>
+            <a:ext cx="1143000" cy="361950"/>
+          </a:xfrm>
+          <a:prstGeom prst="rect">
+            <a:avLst/>
+          </a:prstGeom>
+          <a:solidFill>
+            <a:srgbClr val="0B0E12"/>
+          </a:solidFill>
+          <a:ln w="9525">
+            <a:solidFill>
+              <a:srgbClr val="2A3038"/>
+            </a:solidFill>
+          </a:ln>
+        </p:spPr>
+        <p:txBody>
+          <a:bodyPr/>
+          <a:lstStyle/>
+          <a:p/>
+        </p:txBody>
+      </p:sp>
+      <p:sp>
+        <p:nvSpPr>
+          <p:cNvPr id="97" name="Text 97"/>
+          <p:cNvSpPr txBox="1"/>
+          <p:nvPr/>
+        </p:nvSpPr>
+        <p:spPr>
+          <a:xfrm>
+            <a:off x="6991350" y="4286250"/>
+            <a:ext cx="1009650" cy="171450"/>
+          </a:xfrm>
+          <a:prstGeom prst="rect">
+            <a:avLst/>
+          </a:prstGeom>
+          <a:noFill/>
+          <a:ln>
+            <a:noFill/>
+          </a:ln>
+        </p:spPr>
+        <p:txBody>
+          <a:bodyPr wrap="square" anchor="t">
+            <a:spAutoFit/>
+          </a:bodyPr>
+          <a:lstStyle/>
+          <a:p>
+            <a:pPr algn="r"/>
+            <a:r>
+              <a:rPr lang="ko-KR" sz="1100">
+                <a:solidFill>
+                  <a:srgbClr val="F2F5F8"/>
+                </a:solidFill>
+                <a:latin typeface="Malgun Gothic"/>
+                <a:ea typeface="Malgun Gothic"/>
+              </a:rPr>
+              <a:t>0.06%</a:t>
+            </a:r>
+            <a:endParaRPr lang="ko-KR" sz="1100"/>
+          </a:p>
+        </p:txBody>
+      </p:sp>
+      <p:sp>
+        <p:nvSpPr>
+          <p:cNvPr id="98" name="Panel 98"/>
+          <p:cNvSpPr/>
+          <p:nvPr/>
+        </p:nvSpPr>
+        <p:spPr>
+          <a:xfrm>
+            <a:off x="8067675" y="4200525"/>
+            <a:ext cx="1143000" cy="361950"/>
+          </a:xfrm>
+          <a:prstGeom prst="rect">
+            <a:avLst/>
+          </a:prstGeom>
+          <a:solidFill>
+            <a:srgbClr val="0B0E12"/>
+          </a:solidFill>
+          <a:ln w="9525">
+            <a:solidFill>
+              <a:srgbClr val="2A3038"/>
+            </a:solidFill>
+          </a:ln>
+        </p:spPr>
+        <p:txBody>
+          <a:bodyPr/>
+          <a:lstStyle/>
+          <a:p/>
+        </p:txBody>
+      </p:sp>
+      <p:sp>
+        <p:nvSpPr>
+          <p:cNvPr id="99" name="Text 99"/>
+          <p:cNvSpPr txBox="1"/>
+          <p:nvPr/>
+        </p:nvSpPr>
+        <p:spPr>
+          <a:xfrm>
+            <a:off x="8134350" y="4286250"/>
+            <a:ext cx="1009650" cy="171450"/>
+          </a:xfrm>
+          <a:prstGeom prst="rect">
+            <a:avLst/>
+          </a:prstGeom>
+          <a:noFill/>
+          <a:ln>
+            <a:noFill/>
+          </a:ln>
+        </p:spPr>
+        <p:txBody>
+          <a:bodyPr wrap="square" anchor="t">
+            <a:spAutoFit/>
+          </a:bodyPr>
+          <a:lstStyle/>
+          <a:p>
+            <a:pPr algn="r"/>
+            <a:r>
+              <a:rPr lang="ko-KR" sz="1100">
+                <a:solidFill>
+                  <a:srgbClr val="F2F5F8"/>
+                </a:solidFill>
+                <a:latin typeface="Malgun Gothic"/>
+                <a:ea typeface="Malgun Gothic"/>
+              </a:rPr>
+              <a:t>100.00%</a:t>
+            </a:r>
+            <a:endParaRPr lang="ko-KR" sz="1100"/>
+          </a:p>
+        </p:txBody>
+      </p:sp>
+      <p:sp>
+        <p:nvSpPr>
+          <p:cNvPr id="100" name="Panel 100"/>
+          <p:cNvSpPr/>
+          <p:nvPr/>
+        </p:nvSpPr>
+        <p:spPr>
+          <a:xfrm>
+            <a:off x="9210675" y="4200525"/>
+            <a:ext cx="1285875" cy="361950"/>
+          </a:xfrm>
+          <a:prstGeom prst="rect">
+            <a:avLst/>
+          </a:prstGeom>
+          <a:solidFill>
+            <a:srgbClr val="0B0E12"/>
+          </a:solidFill>
+          <a:ln w="9525">
+            <a:solidFill>
+              <a:srgbClr val="2A3038"/>
+            </a:solidFill>
+          </a:ln>
+        </p:spPr>
+        <p:txBody>
+          <a:bodyPr/>
+          <a:lstStyle/>
+          <a:p/>
+        </p:txBody>
+      </p:sp>
+      <p:sp>
+        <p:nvSpPr>
+          <p:cNvPr id="101" name="Text 101"/>
+          <p:cNvSpPr txBox="1"/>
+          <p:nvPr/>
+        </p:nvSpPr>
+        <p:spPr>
+          <a:xfrm>
+            <a:off x="9277350" y="4286250"/>
+            <a:ext cx="1152525" cy="171450"/>
+          </a:xfrm>
+          <a:prstGeom prst="rect">
+            <a:avLst/>
+          </a:prstGeom>
+          <a:noFill/>
+          <a:ln>
+            <a:noFill/>
+          </a:ln>
+        </p:spPr>
+        <p:txBody>
+          <a:bodyPr wrap="square" anchor="t">
+            <a:spAutoFit/>
+          </a:bodyPr>
+          <a:lstStyle/>
+          <a:p>
+            <a:pPr algn="r"/>
+            <a:r>
+              <a:rPr lang="ko-KR" sz="1100" b="1">
+                <a:solidFill>
+                  <a:srgbClr val="19C37D"/>
+                </a:solidFill>
+                <a:latin typeface="Malgun Gothic"/>
+                <a:ea typeface="Malgun Gothic"/>
+              </a:rPr>
+              <a:t>+99.94pp</a:t>
+            </a:r>
+            <a:endParaRPr lang="ko-KR" sz="1100"/>
+          </a:p>
+        </p:txBody>
+      </p:sp>
+      <p:sp>
+        <p:nvSpPr>
+          <p:cNvPr id="102" name="Panel 102"/>
+          <p:cNvSpPr/>
+          <p:nvPr/>
+        </p:nvSpPr>
+        <p:spPr>
+          <a:xfrm>
+            <a:off x="400050" y="4562475"/>
+            <a:ext cx="2381250" cy="361950"/>
+          </a:xfrm>
+          <a:prstGeom prst="rect">
+            <a:avLst/>
+          </a:prstGeom>
+          <a:solidFill>
+            <a:srgbClr val="101318"/>
+          </a:solidFill>
+          <a:ln w="9525">
+            <a:solidFill>
+              <a:srgbClr val="2A3038"/>
+            </a:solidFill>
+          </a:ln>
+        </p:spPr>
+        <p:txBody>
+          <a:bodyPr/>
+          <a:lstStyle/>
+          <a:p/>
+        </p:txBody>
+      </p:sp>
+      <p:sp>
+        <p:nvSpPr>
+          <p:cNvPr id="103" name="Text 103"/>
+          <p:cNvSpPr txBox="1"/>
+          <p:nvPr/>
+        </p:nvSpPr>
+        <p:spPr>
+          <a:xfrm>
+            <a:off x="466725" y="4648200"/>
+            <a:ext cx="2247900" cy="171450"/>
+          </a:xfrm>
+          <a:prstGeom prst="rect">
+            <a:avLst/>
+          </a:prstGeom>
+          <a:noFill/>
+          <a:ln>
+            <a:noFill/>
+          </a:ln>
+        </p:spPr>
+        <p:txBody>
+          <a:bodyPr wrap="square" anchor="t">
+            <a:spAutoFit/>
+          </a:bodyPr>
+          <a:lstStyle/>
+          <a:p>
+            <a:pPr algn="l"/>
+            <a:r>
+              <a:rPr lang="ko-KR" sz="1100">
+                <a:solidFill>
+                  <a:srgbClr val="F2F5F8"/>
+                </a:solidFill>
+                <a:latin typeface="Malgun Gothic"/>
+                <a:ea typeface="Malgun Gothic"/>
+              </a:rPr>
+              <a:t>ACE K수출핵심TOP10산업액티</a:t>
+            </a:r>
+            <a:endParaRPr lang="ko-KR" sz="1100"/>
+          </a:p>
+        </p:txBody>
+      </p:sp>
+      <p:sp>
+        <p:nvSpPr>
+          <p:cNvPr id="104" name="Panel 104"/>
+          <p:cNvSpPr/>
+          <p:nvPr/>
+        </p:nvSpPr>
+        <p:spPr>
+          <a:xfrm>
+            <a:off x="2781300" y="4562475"/>
+            <a:ext cx="3095625" cy="361950"/>
+          </a:xfrm>
+          <a:prstGeom prst="rect">
+            <a:avLst/>
+          </a:prstGeom>
+          <a:solidFill>
+            <a:srgbClr val="101318"/>
+          </a:solidFill>
+          <a:ln w="9525">
+            <a:solidFill>
+              <a:srgbClr val="2A3038"/>
+            </a:solidFill>
+          </a:ln>
+        </p:spPr>
+        <p:txBody>
+          <a:bodyPr/>
+          <a:lstStyle/>
+          <a:p/>
+        </p:txBody>
+      </p:sp>
+      <p:sp>
+        <p:nvSpPr>
+          <p:cNvPr id="105" name="Text 105"/>
+          <p:cNvSpPr txBox="1"/>
+          <p:nvPr/>
+        </p:nvSpPr>
+        <p:spPr>
+          <a:xfrm>
+            <a:off x="2847975" y="4648200"/>
+            <a:ext cx="2962275" cy="171450"/>
+          </a:xfrm>
+          <a:prstGeom prst="rect">
+            <a:avLst/>
+          </a:prstGeom>
+          <a:noFill/>
+          <a:ln>
+            <a:noFill/>
+          </a:ln>
+        </p:spPr>
+        <p:txBody>
+          <a:bodyPr wrap="square" anchor="t">
+            <a:spAutoFit/>
+          </a:bodyPr>
+          <a:lstStyle/>
+          <a:p>
+            <a:pPr algn="l"/>
+            <a:r>
+              <a:rPr lang="ko-KR" sz="1100">
+                <a:solidFill>
+                  <a:srgbClr val="F2F5F8"/>
+                </a:solidFill>
+                <a:latin typeface="Malgun Gothic"/>
+                <a:ea typeface="Malgun Gothic"/>
+              </a:rPr>
+              <a:t>증가 원화현금</a:t>
+            </a:r>
+            <a:endParaRPr lang="ko-KR" sz="1100"/>
+          </a:p>
+        </p:txBody>
+      </p:sp>
+      <p:sp>
+        <p:nvSpPr>
+          <p:cNvPr id="106" name="Panel 106"/>
+          <p:cNvSpPr/>
+          <p:nvPr/>
+        </p:nvSpPr>
+        <p:spPr>
+          <a:xfrm>
+            <a:off x="5876925" y="4562475"/>
+            <a:ext cx="1047750" cy="361950"/>
+          </a:xfrm>
+          <a:prstGeom prst="rect">
+            <a:avLst/>
+          </a:prstGeom>
+          <a:solidFill>
+            <a:srgbClr val="101318"/>
+          </a:solidFill>
+          <a:ln w="9525">
+            <a:solidFill>
+              <a:srgbClr val="2A3038"/>
+            </a:solidFill>
+          </a:ln>
+        </p:spPr>
+        <p:txBody>
+          <a:bodyPr/>
+          <a:lstStyle/>
+          <a:p/>
+        </p:txBody>
+      </p:sp>
+      <p:sp>
+        <p:nvSpPr>
+          <p:cNvPr id="107" name="Text 107"/>
+          <p:cNvSpPr txBox="1"/>
+          <p:nvPr/>
+        </p:nvSpPr>
+        <p:spPr>
+          <a:xfrm>
+            <a:off x="5943600" y="4648200"/>
+            <a:ext cx="914400" cy="171450"/>
+          </a:xfrm>
+          <a:prstGeom prst="rect">
+            <a:avLst/>
+          </a:prstGeom>
+          <a:noFill/>
+          <a:ln>
+            <a:noFill/>
+          </a:ln>
+        </p:spPr>
+        <p:txBody>
+          <a:bodyPr wrap="square" anchor="t">
+            <a:spAutoFit/>
+          </a:bodyPr>
+          <a:lstStyle/>
+          <a:p>
+            <a:pPr algn="l"/>
+            <a:r>
+              <a:rPr lang="ko-KR" sz="1100">
+                <a:solidFill>
+                  <a:srgbClr val="F2F5F8"/>
+                </a:solidFill>
+                <a:latin typeface="Malgun Gothic"/>
+                <a:ea typeface="Malgun Gothic"/>
+              </a:rPr>
+              <a:t>010010</a:t>
+            </a:r>
+            <a:endParaRPr lang="ko-KR" sz="1100"/>
+          </a:p>
+        </p:txBody>
+      </p:sp>
+      <p:sp>
+        <p:nvSpPr>
+          <p:cNvPr id="108" name="Panel 108"/>
+          <p:cNvSpPr/>
+          <p:nvPr/>
+        </p:nvSpPr>
+        <p:spPr>
+          <a:xfrm>
+            <a:off x="6924675" y="4562475"/>
+            <a:ext cx="1143000" cy="361950"/>
+          </a:xfrm>
+          <a:prstGeom prst="rect">
+            <a:avLst/>
+          </a:prstGeom>
+          <a:solidFill>
+            <a:srgbClr val="101318"/>
+          </a:solidFill>
+          <a:ln w="9525">
+            <a:solidFill>
+              <a:srgbClr val="2A3038"/>
+            </a:solidFill>
+          </a:ln>
+        </p:spPr>
+        <p:txBody>
+          <a:bodyPr/>
+          <a:lstStyle/>
+          <a:p/>
+        </p:txBody>
+      </p:sp>
+      <p:sp>
+        <p:nvSpPr>
+          <p:cNvPr id="109" name="Text 109"/>
+          <p:cNvSpPr txBox="1"/>
+          <p:nvPr/>
+        </p:nvSpPr>
+        <p:spPr>
+          <a:xfrm>
+            <a:off x="6991350" y="4648200"/>
+            <a:ext cx="1009650" cy="171450"/>
+          </a:xfrm>
+          <a:prstGeom prst="rect">
+            <a:avLst/>
+          </a:prstGeom>
+          <a:noFill/>
+          <a:ln>
+            <a:noFill/>
+          </a:ln>
+        </p:spPr>
+        <p:txBody>
+          <a:bodyPr wrap="square" anchor="t">
+            <a:spAutoFit/>
+          </a:bodyPr>
+          <a:lstStyle/>
+          <a:p>
+            <a:pPr algn="r"/>
+            <a:r>
+              <a:rPr lang="ko-KR" sz="1100">
+                <a:solidFill>
+                  <a:srgbClr val="F2F5F8"/>
+                </a:solidFill>
+                <a:latin typeface="Malgun Gothic"/>
+                <a:ea typeface="Malgun Gothic"/>
+              </a:rPr>
+              <a:t>0.27%</a:t>
+            </a:r>
+            <a:endParaRPr lang="ko-KR" sz="1100"/>
+          </a:p>
+        </p:txBody>
+      </p:sp>
+      <p:sp>
+        <p:nvSpPr>
+          <p:cNvPr id="110" name="Panel 110"/>
+          <p:cNvSpPr/>
+          <p:nvPr/>
+        </p:nvSpPr>
+        <p:spPr>
+          <a:xfrm>
+            <a:off x="8067675" y="4562475"/>
+            <a:ext cx="1143000" cy="361950"/>
+          </a:xfrm>
+          <a:prstGeom prst="rect">
+            <a:avLst/>
+          </a:prstGeom>
+          <a:solidFill>
+            <a:srgbClr val="101318"/>
+          </a:solidFill>
+          <a:ln w="9525">
+            <a:solidFill>
+              <a:srgbClr val="2A3038"/>
+            </a:solidFill>
+          </a:ln>
+        </p:spPr>
+        <p:txBody>
+          <a:bodyPr/>
+          <a:lstStyle/>
+          <a:p/>
+        </p:txBody>
+      </p:sp>
+      <p:sp>
+        <p:nvSpPr>
+          <p:cNvPr id="111" name="Text 111"/>
+          <p:cNvSpPr txBox="1"/>
+          <p:nvPr/>
+        </p:nvSpPr>
+        <p:spPr>
+          <a:xfrm>
+            <a:off x="8134350" y="4648200"/>
+            <a:ext cx="1009650" cy="171450"/>
+          </a:xfrm>
+          <a:prstGeom prst="rect">
+            <a:avLst/>
+          </a:prstGeom>
+          <a:noFill/>
+          <a:ln>
+            <a:noFill/>
+          </a:ln>
+        </p:spPr>
+        <p:txBody>
+          <a:bodyPr wrap="square" anchor="t">
+            <a:spAutoFit/>
+          </a:bodyPr>
+          <a:lstStyle/>
+          <a:p>
+            <a:pPr algn="r"/>
+            <a:r>
+              <a:rPr lang="ko-KR" sz="1100">
+                <a:solidFill>
+                  <a:srgbClr val="F2F5F8"/>
+                </a:solidFill>
+                <a:latin typeface="Malgun Gothic"/>
+                <a:ea typeface="Malgun Gothic"/>
+              </a:rPr>
+              <a:t>100.00%</a:t>
+            </a:r>
+            <a:endParaRPr lang="ko-KR" sz="1100"/>
+          </a:p>
+        </p:txBody>
+      </p:sp>
+      <p:sp>
+        <p:nvSpPr>
+          <p:cNvPr id="112" name="Panel 112"/>
+          <p:cNvSpPr/>
+          <p:nvPr/>
+        </p:nvSpPr>
+        <p:spPr>
+          <a:xfrm>
+            <a:off x="9210675" y="4562475"/>
+            <a:ext cx="1285875" cy="361950"/>
+          </a:xfrm>
+          <a:prstGeom prst="rect">
+            <a:avLst/>
+          </a:prstGeom>
+          <a:solidFill>
+            <a:srgbClr val="101318"/>
+          </a:solidFill>
+          <a:ln w="9525">
+            <a:solidFill>
+              <a:srgbClr val="2A3038"/>
+            </a:solidFill>
+          </a:ln>
+        </p:spPr>
+        <p:txBody>
+          <a:bodyPr/>
+          <a:lstStyle/>
+          <a:p/>
+        </p:txBody>
+      </p:sp>
+      <p:sp>
+        <p:nvSpPr>
+          <p:cNvPr id="113" name="Text 113"/>
+          <p:cNvSpPr txBox="1"/>
+          <p:nvPr/>
+        </p:nvSpPr>
+        <p:spPr>
+          <a:xfrm>
+            <a:off x="9277350" y="4648200"/>
+            <a:ext cx="1152525" cy="171450"/>
+          </a:xfrm>
+          <a:prstGeom prst="rect">
+            <a:avLst/>
+          </a:prstGeom>
+          <a:noFill/>
+          <a:ln>
+            <a:noFill/>
+          </a:ln>
+        </p:spPr>
+        <p:txBody>
+          <a:bodyPr wrap="square" anchor="t">
+            <a:spAutoFit/>
+          </a:bodyPr>
+          <a:lstStyle/>
+          <a:p>
+            <a:pPr algn="r"/>
+            <a:r>
+              <a:rPr lang="ko-KR" sz="1100" b="1">
+                <a:solidFill>
+                  <a:srgbClr val="19C37D"/>
+                </a:solidFill>
+                <a:latin typeface="Malgun Gothic"/>
+                <a:ea typeface="Malgun Gothic"/>
+              </a:rPr>
+              <a:t>+99.73pp</a:t>
+            </a:r>
+            <a:endParaRPr lang="ko-KR" sz="1100"/>
+          </a:p>
+        </p:txBody>
+      </p:sp>
+      <p:sp>
+        <p:nvSpPr>
+          <p:cNvPr id="114" name="Panel 114"/>
+          <p:cNvSpPr/>
+          <p:nvPr/>
+        </p:nvSpPr>
+        <p:spPr>
+          <a:xfrm>
+            <a:off x="400050" y="4924425"/>
+            <a:ext cx="2381250" cy="361950"/>
+          </a:xfrm>
+          <a:prstGeom prst="rect">
+            <a:avLst/>
+          </a:prstGeom>
+          <a:solidFill>
+            <a:srgbClr val="0B0E12"/>
+          </a:solidFill>
+          <a:ln w="9525">
+            <a:solidFill>
+              <a:srgbClr val="2A3038"/>
+            </a:solidFill>
+          </a:ln>
+        </p:spPr>
+        <p:txBody>
+          <a:bodyPr/>
+          <a:lstStyle/>
+          <a:p/>
+        </p:txBody>
+      </p:sp>
+      <p:sp>
+        <p:nvSpPr>
+          <p:cNvPr id="115" name="Text 115"/>
+          <p:cNvSpPr txBox="1"/>
+          <p:nvPr/>
+        </p:nvSpPr>
+        <p:spPr>
+          <a:xfrm>
+            <a:off x="466725" y="5010150"/>
+            <a:ext cx="2247900" cy="171450"/>
+          </a:xfrm>
+          <a:prstGeom prst="rect">
+            <a:avLst/>
+          </a:prstGeom>
+          <a:noFill/>
+          <a:ln>
+            <a:noFill/>
+          </a:ln>
+        </p:spPr>
+        <p:txBody>
+          <a:bodyPr wrap="square" anchor="t">
+            <a:spAutoFit/>
+          </a:bodyPr>
+          <a:lstStyle/>
+          <a:p>
+            <a:pPr algn="l"/>
+            <a:r>
+              <a:rPr lang="ko-KR" sz="1100">
+                <a:solidFill>
+                  <a:srgbClr val="F2F5F8"/>
+                </a:solidFill>
+                <a:latin typeface="Malgun Gothic"/>
+                <a:ea typeface="Malgun Gothic"/>
+              </a:rPr>
+              <a:t>KoAct K수출핵심기업TOP30</a:t>
+            </a:r>
+            <a:endParaRPr lang="ko-KR" sz="1100"/>
+          </a:p>
+        </p:txBody>
+      </p:sp>
+      <p:sp>
+        <p:nvSpPr>
+          <p:cNvPr id="116" name="Panel 116"/>
+          <p:cNvSpPr/>
+          <p:nvPr/>
+        </p:nvSpPr>
+        <p:spPr>
+          <a:xfrm>
+            <a:off x="2781300" y="4924425"/>
+            <a:ext cx="3095625" cy="361950"/>
+          </a:xfrm>
+          <a:prstGeom prst="rect">
+            <a:avLst/>
+          </a:prstGeom>
+          <a:solidFill>
+            <a:srgbClr val="0B0E12"/>
+          </a:solidFill>
+          <a:ln w="9525">
+            <a:solidFill>
+              <a:srgbClr val="2A3038"/>
+            </a:solidFill>
+          </a:ln>
+        </p:spPr>
+        <p:txBody>
+          <a:bodyPr/>
+          <a:lstStyle/>
+          <a:p/>
+        </p:txBody>
+      </p:sp>
+      <p:sp>
+        <p:nvSpPr>
+          <p:cNvPr id="117" name="Text 117"/>
+          <p:cNvSpPr txBox="1"/>
+          <p:nvPr/>
+        </p:nvSpPr>
+        <p:spPr>
+          <a:xfrm>
+            <a:off x="2847975" y="5010150"/>
+            <a:ext cx="2962275" cy="171450"/>
+          </a:xfrm>
+          <a:prstGeom prst="rect">
+            <a:avLst/>
+          </a:prstGeom>
+          <a:noFill/>
+          <a:ln>
+            <a:noFill/>
+          </a:ln>
+        </p:spPr>
+        <p:txBody>
+          <a:bodyPr wrap="square" anchor="t">
+            <a:spAutoFit/>
+          </a:bodyPr>
+          <a:lstStyle/>
+          <a:p>
+            <a:pPr algn="l"/>
+            <a:r>
+              <a:rPr lang="ko-KR" sz="1100">
+                <a:solidFill>
+                  <a:srgbClr val="F2F5F8"/>
+                </a:solidFill>
+                <a:latin typeface="Malgun Gothic"/>
+                <a:ea typeface="Malgun Gothic"/>
+              </a:rPr>
+              <a:t>증가 원화현금</a:t>
+            </a:r>
+            <a:endParaRPr lang="ko-KR" sz="1100"/>
+          </a:p>
+        </p:txBody>
+      </p:sp>
+      <p:sp>
+        <p:nvSpPr>
+          <p:cNvPr id="118" name="Panel 118"/>
+          <p:cNvSpPr/>
+          <p:nvPr/>
+        </p:nvSpPr>
+        <p:spPr>
+          <a:xfrm>
+            <a:off x="5876925" y="4924425"/>
+            <a:ext cx="1047750" cy="361950"/>
+          </a:xfrm>
+          <a:prstGeom prst="rect">
+            <a:avLst/>
+          </a:prstGeom>
+          <a:solidFill>
+            <a:srgbClr val="0B0E12"/>
+          </a:solidFill>
+          <a:ln w="9525">
+            <a:solidFill>
+              <a:srgbClr val="2A3038"/>
+            </a:solidFill>
+          </a:ln>
+        </p:spPr>
+        <p:txBody>
+          <a:bodyPr/>
+          <a:lstStyle/>
+          <a:p/>
+        </p:txBody>
+      </p:sp>
+      <p:sp>
+        <p:nvSpPr>
+          <p:cNvPr id="119" name="Text 119"/>
+          <p:cNvSpPr txBox="1"/>
+          <p:nvPr/>
+        </p:nvSpPr>
+        <p:spPr>
+          <a:xfrm>
+            <a:off x="5943600" y="5010150"/>
+            <a:ext cx="914400" cy="171450"/>
+          </a:xfrm>
+          <a:prstGeom prst="rect">
+            <a:avLst/>
+          </a:prstGeom>
+          <a:noFill/>
+          <a:ln>
+            <a:noFill/>
+          </a:ln>
+        </p:spPr>
+        <p:txBody>
+          <a:bodyPr wrap="square" anchor="t">
+            <a:spAutoFit/>
+          </a:bodyPr>
+          <a:lstStyle/>
+          <a:p>
+            <a:pPr algn="l"/>
+            <a:r>
+              <a:rPr lang="ko-KR" sz="1100">
+                <a:solidFill>
+                  <a:srgbClr val="F2F5F8"/>
+                </a:solidFill>
+                <a:latin typeface="Malgun Gothic"/>
+                <a:ea typeface="Malgun Gothic"/>
+              </a:rPr>
+              <a:t>010010</a:t>
+            </a:r>
+            <a:endParaRPr lang="ko-KR" sz="1100"/>
+          </a:p>
+        </p:txBody>
+      </p:sp>
+      <p:sp>
+        <p:nvSpPr>
+          <p:cNvPr id="120" name="Panel 120"/>
+          <p:cNvSpPr/>
+          <p:nvPr/>
+        </p:nvSpPr>
+        <p:spPr>
+          <a:xfrm>
+            <a:off x="6924675" y="4924425"/>
+            <a:ext cx="1143000" cy="361950"/>
+          </a:xfrm>
+          <a:prstGeom prst="rect">
+            <a:avLst/>
+          </a:prstGeom>
+          <a:solidFill>
+            <a:srgbClr val="0B0E12"/>
+          </a:solidFill>
+          <a:ln w="9525">
+            <a:solidFill>
+              <a:srgbClr val="2A3038"/>
+            </a:solidFill>
+          </a:ln>
+        </p:spPr>
+        <p:txBody>
+          <a:bodyPr/>
+          <a:lstStyle/>
+          <a:p/>
+        </p:txBody>
+      </p:sp>
+      <p:sp>
+        <p:nvSpPr>
+          <p:cNvPr id="121" name="Text 121"/>
+          <p:cNvSpPr txBox="1"/>
+          <p:nvPr/>
+        </p:nvSpPr>
+        <p:spPr>
+          <a:xfrm>
+            <a:off x="6991350" y="5010150"/>
+            <a:ext cx="1009650" cy="171450"/>
+          </a:xfrm>
+          <a:prstGeom prst="rect">
+            <a:avLst/>
+          </a:prstGeom>
+          <a:noFill/>
+          <a:ln>
+            <a:noFill/>
+          </a:ln>
+        </p:spPr>
+        <p:txBody>
+          <a:bodyPr wrap="square" anchor="t">
+            <a:spAutoFit/>
+          </a:bodyPr>
+          <a:lstStyle/>
+          <a:p>
+            <a:pPr algn="r"/>
+            <a:r>
+              <a:rPr lang="ko-KR" sz="1100">
+                <a:solidFill>
+                  <a:srgbClr val="F2F5F8"/>
+                </a:solidFill>
+                <a:latin typeface="Malgun Gothic"/>
+                <a:ea typeface="Malgun Gothic"/>
+              </a:rPr>
+              <a:t>0.29%</a:t>
+            </a:r>
+            <a:endParaRPr lang="ko-KR" sz="1100"/>
+          </a:p>
+        </p:txBody>
+      </p:sp>
+      <p:sp>
+        <p:nvSpPr>
+          <p:cNvPr id="122" name="Panel 122"/>
+          <p:cNvSpPr/>
+          <p:nvPr/>
+        </p:nvSpPr>
+        <p:spPr>
+          <a:xfrm>
+            <a:off x="8067675" y="4924425"/>
+            <a:ext cx="1143000" cy="361950"/>
+          </a:xfrm>
+          <a:prstGeom prst="rect">
+            <a:avLst/>
+          </a:prstGeom>
+          <a:solidFill>
+            <a:srgbClr val="0B0E12"/>
+          </a:solidFill>
+          <a:ln w="9525">
+            <a:solidFill>
+              <a:srgbClr val="2A3038"/>
+            </a:solidFill>
+          </a:ln>
+        </p:spPr>
+        <p:txBody>
+          <a:bodyPr/>
+          <a:lstStyle/>
+          <a:p/>
+        </p:txBody>
+      </p:sp>
+      <p:sp>
+        <p:nvSpPr>
+          <p:cNvPr id="123" name="Text 123"/>
+          <p:cNvSpPr txBox="1"/>
+          <p:nvPr/>
+        </p:nvSpPr>
+        <p:spPr>
+          <a:xfrm>
+            <a:off x="8134350" y="5010150"/>
+            <a:ext cx="1009650" cy="171450"/>
+          </a:xfrm>
+          <a:prstGeom prst="rect">
+            <a:avLst/>
+          </a:prstGeom>
+          <a:noFill/>
+          <a:ln>
+            <a:noFill/>
+          </a:ln>
+        </p:spPr>
+        <p:txBody>
+          <a:bodyPr wrap="square" anchor="t">
+            <a:spAutoFit/>
+          </a:bodyPr>
+          <a:lstStyle/>
+          <a:p>
+            <a:pPr algn="r"/>
+            <a:r>
+              <a:rPr lang="ko-KR" sz="1100">
+                <a:solidFill>
+                  <a:srgbClr val="F2F5F8"/>
+                </a:solidFill>
+                <a:latin typeface="Malgun Gothic"/>
+                <a:ea typeface="Malgun Gothic"/>
+              </a:rPr>
+              <a:t>100.00%</a:t>
+            </a:r>
+            <a:endParaRPr lang="ko-KR" sz="1100"/>
+          </a:p>
+        </p:txBody>
+      </p:sp>
+      <p:sp>
+        <p:nvSpPr>
+          <p:cNvPr id="124" name="Panel 124"/>
+          <p:cNvSpPr/>
+          <p:nvPr/>
+        </p:nvSpPr>
+        <p:spPr>
+          <a:xfrm>
+            <a:off x="9210675" y="4924425"/>
+            <a:ext cx="1285875" cy="361950"/>
+          </a:xfrm>
+          <a:prstGeom prst="rect">
+            <a:avLst/>
+          </a:prstGeom>
+          <a:solidFill>
+            <a:srgbClr val="0B0E12"/>
+          </a:solidFill>
+          <a:ln w="9525">
+            <a:solidFill>
+              <a:srgbClr val="2A3038"/>
+            </a:solidFill>
+          </a:ln>
+        </p:spPr>
+        <p:txBody>
+          <a:bodyPr/>
+          <a:lstStyle/>
+          <a:p/>
+        </p:txBody>
+      </p:sp>
+      <p:sp>
+        <p:nvSpPr>
+          <p:cNvPr id="125" name="Text 125"/>
+          <p:cNvSpPr txBox="1"/>
+          <p:nvPr/>
+        </p:nvSpPr>
+        <p:spPr>
+          <a:xfrm>
+            <a:off x="9277350" y="5010150"/>
+            <a:ext cx="1152525" cy="171450"/>
+          </a:xfrm>
+          <a:prstGeom prst="rect">
+            <a:avLst/>
+          </a:prstGeom>
+          <a:noFill/>
+          <a:ln>
+            <a:noFill/>
+          </a:ln>
+        </p:spPr>
+        <p:txBody>
+          <a:bodyPr wrap="square" anchor="t">
+            <a:spAutoFit/>
+          </a:bodyPr>
+          <a:lstStyle/>
+          <a:p>
+            <a:pPr algn="r"/>
+            <a:r>
+              <a:rPr lang="ko-KR" sz="1100" b="1">
+                <a:solidFill>
+                  <a:srgbClr val="19C37D"/>
+                </a:solidFill>
+                <a:latin typeface="Malgun Gothic"/>
+                <a:ea typeface="Malgun Gothic"/>
+              </a:rPr>
+              <a:t>+99.71pp</a:t>
+            </a:r>
+            <a:endParaRPr lang="ko-KR" sz="1100"/>
+          </a:p>
+        </p:txBody>
+      </p:sp>
+      <p:sp>
+        <p:nvSpPr>
+          <p:cNvPr id="126" name="Panel 126"/>
+          <p:cNvSpPr/>
+          <p:nvPr/>
+        </p:nvSpPr>
+        <p:spPr>
+          <a:xfrm>
+            <a:off x="400050" y="5286375"/>
+            <a:ext cx="2381250" cy="361950"/>
+          </a:xfrm>
+          <a:prstGeom prst="rect">
+            <a:avLst/>
+          </a:prstGeom>
+          <a:solidFill>
+            <a:srgbClr val="101318"/>
+          </a:solidFill>
+          <a:ln w="9525">
+            <a:solidFill>
+              <a:srgbClr val="2A3038"/>
+            </a:solidFill>
+          </a:ln>
+        </p:spPr>
+        <p:txBody>
+          <a:bodyPr/>
+          <a:lstStyle/>
+          <a:p/>
+        </p:txBody>
+      </p:sp>
+      <p:sp>
+        <p:nvSpPr>
+          <p:cNvPr id="127" name="Text 127"/>
+          <p:cNvSpPr txBox="1"/>
+          <p:nvPr/>
+        </p:nvSpPr>
+        <p:spPr>
+          <a:xfrm>
+            <a:off x="466725" y="5372100"/>
+            <a:ext cx="2247900" cy="171450"/>
+          </a:xfrm>
+          <a:prstGeom prst="rect">
+            <a:avLst/>
+          </a:prstGeom>
+          <a:noFill/>
+          <a:ln>
+            <a:noFill/>
+          </a:ln>
+        </p:spPr>
+        <p:txBody>
+          <a:bodyPr wrap="square" anchor="t">
+            <a:spAutoFit/>
+          </a:bodyPr>
+          <a:lstStyle/>
+          <a:p>
+            <a:pPr algn="l"/>
+            <a:r>
+              <a:rPr lang="ko-KR" sz="1100">
+                <a:solidFill>
+                  <a:srgbClr val="F2F5F8"/>
+                </a:solidFill>
+                <a:latin typeface="Malgun Gothic"/>
+                <a:ea typeface="Malgun Gothic"/>
+              </a:rPr>
+              <a:t>마이티 다이나믹퀀트액티브</a:t>
+            </a:r>
+            <a:endParaRPr lang="ko-KR" sz="1100"/>
+          </a:p>
+        </p:txBody>
+      </p:sp>
+      <p:sp>
+        <p:nvSpPr>
+          <p:cNvPr id="128" name="Panel 128"/>
+          <p:cNvSpPr/>
+          <p:nvPr/>
+        </p:nvSpPr>
+        <p:spPr>
+          <a:xfrm>
+            <a:off x="2781300" y="5286375"/>
+            <a:ext cx="3095625" cy="361950"/>
+          </a:xfrm>
+          <a:prstGeom prst="rect">
+            <a:avLst/>
+          </a:prstGeom>
+          <a:solidFill>
+            <a:srgbClr val="101318"/>
+          </a:solidFill>
+          <a:ln w="9525">
+            <a:solidFill>
+              <a:srgbClr val="2A3038"/>
+            </a:solidFill>
+          </a:ln>
+        </p:spPr>
+        <p:txBody>
+          <a:bodyPr/>
+          <a:lstStyle/>
+          <a:p/>
+        </p:txBody>
+      </p:sp>
+      <p:sp>
+        <p:nvSpPr>
+          <p:cNvPr id="129" name="Text 129"/>
+          <p:cNvSpPr txBox="1"/>
+          <p:nvPr/>
+        </p:nvSpPr>
+        <p:spPr>
+          <a:xfrm>
+            <a:off x="2847975" y="5372100"/>
+            <a:ext cx="2962275" cy="171450"/>
+          </a:xfrm>
+          <a:prstGeom prst="rect">
+            <a:avLst/>
+          </a:prstGeom>
+          <a:noFill/>
+          <a:ln>
+            <a:noFill/>
+          </a:ln>
+        </p:spPr>
+        <p:txBody>
+          <a:bodyPr wrap="square" anchor="t">
+            <a:spAutoFit/>
+          </a:bodyPr>
+          <a:lstStyle/>
+          <a:p>
+            <a:pPr algn="l"/>
+            <a:r>
+              <a:rPr lang="ko-KR" sz="1100">
+                <a:solidFill>
+                  <a:srgbClr val="F2F5F8"/>
+                </a:solidFill>
+                <a:latin typeface="Malgun Gothic"/>
+                <a:ea typeface="Malgun Gothic"/>
+              </a:rPr>
+              <a:t>증가 원화현금</a:t>
+            </a:r>
+            <a:endParaRPr lang="ko-KR" sz="1100"/>
+          </a:p>
+        </p:txBody>
+      </p:sp>
+      <p:sp>
+        <p:nvSpPr>
+          <p:cNvPr id="130" name="Panel 130"/>
+          <p:cNvSpPr/>
+          <p:nvPr/>
+        </p:nvSpPr>
+        <p:spPr>
+          <a:xfrm>
+            <a:off x="5876925" y="5286375"/>
+            <a:ext cx="1047750" cy="361950"/>
+          </a:xfrm>
+          <a:prstGeom prst="rect">
+            <a:avLst/>
+          </a:prstGeom>
+          <a:solidFill>
+            <a:srgbClr val="101318"/>
+          </a:solidFill>
+          <a:ln w="9525">
+            <a:solidFill>
+              <a:srgbClr val="2A3038"/>
+            </a:solidFill>
+          </a:ln>
+        </p:spPr>
+        <p:txBody>
+          <a:bodyPr/>
+          <a:lstStyle/>
+          <a:p/>
+        </p:txBody>
+      </p:sp>
+      <p:sp>
+        <p:nvSpPr>
+          <p:cNvPr id="131" name="Text 131"/>
+          <p:cNvSpPr txBox="1"/>
+          <p:nvPr/>
+        </p:nvSpPr>
+        <p:spPr>
+          <a:xfrm>
+            <a:off x="5943600" y="5372100"/>
+            <a:ext cx="914400" cy="171450"/>
+          </a:xfrm>
+          <a:prstGeom prst="rect">
+            <a:avLst/>
+          </a:prstGeom>
+          <a:noFill/>
+          <a:ln>
+            <a:noFill/>
+          </a:ln>
+        </p:spPr>
+        <p:txBody>
+          <a:bodyPr wrap="square" anchor="t">
+            <a:spAutoFit/>
+          </a:bodyPr>
+          <a:lstStyle/>
+          <a:p>
+            <a:pPr algn="l"/>
+            <a:r>
+              <a:rPr lang="ko-KR" sz="1100">
+                <a:solidFill>
+                  <a:srgbClr val="F2F5F8"/>
+                </a:solidFill>
+                <a:latin typeface="Malgun Gothic"/>
+                <a:ea typeface="Malgun Gothic"/>
+              </a:rPr>
+              <a:t>010010</a:t>
+            </a:r>
+            <a:endParaRPr lang="ko-KR" sz="1100"/>
+          </a:p>
+        </p:txBody>
+      </p:sp>
+      <p:sp>
+        <p:nvSpPr>
+          <p:cNvPr id="132" name="Panel 132"/>
+          <p:cNvSpPr/>
+          <p:nvPr/>
+        </p:nvSpPr>
+        <p:spPr>
+          <a:xfrm>
+            <a:off x="6924675" y="5286375"/>
+            <a:ext cx="1143000" cy="361950"/>
+          </a:xfrm>
+          <a:prstGeom prst="rect">
+            <a:avLst/>
+          </a:prstGeom>
+          <a:solidFill>
+            <a:srgbClr val="101318"/>
+          </a:solidFill>
+          <a:ln w="9525">
+            <a:solidFill>
+              <a:srgbClr val="2A3038"/>
+            </a:solidFill>
+          </a:ln>
+        </p:spPr>
+        <p:txBody>
+          <a:bodyPr/>
+          <a:lstStyle/>
+          <a:p/>
+        </p:txBody>
+      </p:sp>
+      <p:sp>
+        <p:nvSpPr>
+          <p:cNvPr id="133" name="Text 133"/>
+          <p:cNvSpPr txBox="1"/>
+          <p:nvPr/>
+        </p:nvSpPr>
+        <p:spPr>
+          <a:xfrm>
+            <a:off x="6991350" y="5372100"/>
+            <a:ext cx="1009650" cy="171450"/>
+          </a:xfrm>
+          <a:prstGeom prst="rect">
+            <a:avLst/>
+          </a:prstGeom>
+          <a:noFill/>
+          <a:ln>
+            <a:noFill/>
+          </a:ln>
+        </p:spPr>
+        <p:txBody>
+          <a:bodyPr wrap="square" anchor="t">
+            <a:spAutoFit/>
+          </a:bodyPr>
+          <a:lstStyle/>
+          <a:p>
+            <a:pPr algn="r"/>
+            <a:r>
+              <a:rPr lang="ko-KR" sz="1100">
+                <a:solidFill>
+                  <a:srgbClr val="F2F5F8"/>
+                </a:solidFill>
+                <a:latin typeface="Malgun Gothic"/>
+                <a:ea typeface="Malgun Gothic"/>
+              </a:rPr>
+              <a:t>0.29%</a:t>
+            </a:r>
+            <a:endParaRPr lang="ko-KR" sz="1100"/>
+          </a:p>
+        </p:txBody>
+      </p:sp>
+      <p:sp>
+        <p:nvSpPr>
+          <p:cNvPr id="134" name="Panel 134"/>
+          <p:cNvSpPr/>
+          <p:nvPr/>
+        </p:nvSpPr>
+        <p:spPr>
+          <a:xfrm>
+            <a:off x="8067675" y="5286375"/>
+            <a:ext cx="1143000" cy="361950"/>
+          </a:xfrm>
+          <a:prstGeom prst="rect">
+            <a:avLst/>
+          </a:prstGeom>
+          <a:solidFill>
+            <a:srgbClr val="101318"/>
+          </a:solidFill>
+          <a:ln w="9525">
+            <a:solidFill>
+              <a:srgbClr val="2A3038"/>
+            </a:solidFill>
+          </a:ln>
+        </p:spPr>
+        <p:txBody>
+          <a:bodyPr/>
+          <a:lstStyle/>
+          <a:p/>
+        </p:txBody>
+      </p:sp>
+      <p:sp>
+        <p:nvSpPr>
+          <p:cNvPr id="135" name="Text 135"/>
+          <p:cNvSpPr txBox="1"/>
+          <p:nvPr/>
+        </p:nvSpPr>
+        <p:spPr>
+          <a:xfrm>
+            <a:off x="8134350" y="5372100"/>
+            <a:ext cx="1009650" cy="171450"/>
+          </a:xfrm>
+          <a:prstGeom prst="rect">
+            <a:avLst/>
+          </a:prstGeom>
+          <a:noFill/>
+          <a:ln>
+            <a:noFill/>
+          </a:ln>
+        </p:spPr>
+        <p:txBody>
+          <a:bodyPr wrap="square" anchor="t">
+            <a:spAutoFit/>
+          </a:bodyPr>
+          <a:lstStyle/>
+          <a:p>
+            <a:pPr algn="r"/>
+            <a:r>
+              <a:rPr lang="ko-KR" sz="1100">
+                <a:solidFill>
+                  <a:srgbClr val="F2F5F8"/>
+                </a:solidFill>
+                <a:latin typeface="Malgun Gothic"/>
+                <a:ea typeface="Malgun Gothic"/>
+              </a:rPr>
+              <a:t>100.00%</a:t>
+            </a:r>
+            <a:endParaRPr lang="ko-KR" sz="1100"/>
+          </a:p>
+        </p:txBody>
+      </p:sp>
+      <p:sp>
+        <p:nvSpPr>
+          <p:cNvPr id="136" name="Panel 136"/>
+          <p:cNvSpPr/>
+          <p:nvPr/>
+        </p:nvSpPr>
+        <p:spPr>
+          <a:xfrm>
+            <a:off x="9210675" y="5286375"/>
+            <a:ext cx="1285875" cy="361950"/>
+          </a:xfrm>
+          <a:prstGeom prst="rect">
+            <a:avLst/>
+          </a:prstGeom>
+          <a:solidFill>
+            <a:srgbClr val="101318"/>
+          </a:solidFill>
+          <a:ln w="9525">
+            <a:solidFill>
+              <a:srgbClr val="2A3038"/>
+            </a:solidFill>
+          </a:ln>
+        </p:spPr>
+        <p:txBody>
+          <a:bodyPr/>
+          <a:lstStyle/>
+          <a:p/>
+        </p:txBody>
+      </p:sp>
+      <p:sp>
+        <p:nvSpPr>
+          <p:cNvPr id="137" name="Text 137"/>
+          <p:cNvSpPr txBox="1"/>
+          <p:nvPr/>
+        </p:nvSpPr>
+        <p:spPr>
+          <a:xfrm>
+            <a:off x="9277350" y="5372100"/>
+            <a:ext cx="1152525" cy="171450"/>
+          </a:xfrm>
+          <a:prstGeom prst="rect">
+            <a:avLst/>
+          </a:prstGeom>
+          <a:noFill/>
+          <a:ln>
+            <a:noFill/>
+          </a:ln>
+        </p:spPr>
+        <p:txBody>
+          <a:bodyPr wrap="square" anchor="t">
+            <a:spAutoFit/>
+          </a:bodyPr>
+          <a:lstStyle/>
+          <a:p>
+            <a:pPr algn="r"/>
+            <a:r>
+              <a:rPr lang="ko-KR" sz="1100" b="1">
+                <a:solidFill>
+                  <a:srgbClr val="19C37D"/>
+                </a:solidFill>
+                <a:latin typeface="Malgun Gothic"/>
+                <a:ea typeface="Malgun Gothic"/>
+              </a:rPr>
+              <a:t>+99.71pp</a:t>
             </a:r>
             <a:endParaRPr lang="ko-KR" sz="1100"/>
           </a:p>
@@ -2935,7 +7552,7 @@
                 <a:latin typeface="Malgun Gothic"/>
                 <a:ea typeface="Malgun Gothic"/>
               </a:rPr>
-              <a:t>-</a:t>
+              <a:t>KODEX 200액티브</a:t>
             </a:r>
             <a:endParaRPr lang="ko-KR" sz="1100"/>
           </a:p>
@@ -3004,7 +7621,7 @@
                 <a:latin typeface="Malgun Gothic"/>
                 <a:ea typeface="Malgun Gothic"/>
               </a:rPr>
-              <a:t>해당 변화 없음</a:t>
+              <a:t>감소 삼성전자</a:t>
             </a:r>
             <a:endParaRPr lang="ko-KR" sz="1100"/>
           </a:p>
@@ -3073,7 +7690,7 @@
                 <a:latin typeface="Malgun Gothic"/>
                 <a:ea typeface="Malgun Gothic"/>
               </a:rPr>
-              <a:t>-</a:t>
+              <a:t>005930</a:t>
             </a:r>
             <a:endParaRPr lang="ko-KR" sz="1100"/>
           </a:p>
@@ -3142,7 +7759,7 @@
                 <a:latin typeface="Malgun Gothic"/>
                 <a:ea typeface="Malgun Gothic"/>
               </a:rPr>
-              <a:t>-</a:t>
+              <a:t>31.85%</a:t>
             </a:r>
             <a:endParaRPr lang="ko-KR" sz="1100"/>
           </a:p>
@@ -3211,7 +7828,7 @@
                 <a:latin typeface="Malgun Gothic"/>
                 <a:ea typeface="Malgun Gothic"/>
               </a:rPr>
-              <a:t>-</a:t>
+              <a:t>0.00%</a:t>
             </a:r>
             <a:endParaRPr lang="ko-KR" sz="1100"/>
           </a:p>
@@ -3280,7 +7897,3733 @@
                 <a:latin typeface="Malgun Gothic"/>
                 <a:ea typeface="Malgun Gothic"/>
               </a:rPr>
-              <a:t>-</a:t>
+              <a:t>-31.85pp</a:t>
+            </a:r>
+            <a:endParaRPr lang="ko-KR" sz="1100"/>
+          </a:p>
+        </p:txBody>
+      </p:sp>
+      <p:sp>
+        <p:nvSpPr>
+          <p:cNvPr id="30" name="Panel 30"/>
+          <p:cNvSpPr/>
+          <p:nvPr/>
+        </p:nvSpPr>
+        <p:spPr>
+          <a:xfrm>
+            <a:off x="400050" y="2390775"/>
+            <a:ext cx="2381250" cy="361950"/>
+          </a:xfrm>
+          <a:prstGeom prst="rect">
+            <a:avLst/>
+          </a:prstGeom>
+          <a:solidFill>
+            <a:srgbClr val="101318"/>
+          </a:solidFill>
+          <a:ln w="9525">
+            <a:solidFill>
+              <a:srgbClr val="2A3038"/>
+            </a:solidFill>
+          </a:ln>
+        </p:spPr>
+        <p:txBody>
+          <a:bodyPr/>
+          <a:lstStyle/>
+          <a:p/>
+        </p:txBody>
+      </p:sp>
+      <p:sp>
+        <p:nvSpPr>
+          <p:cNvPr id="31" name="Text 31"/>
+          <p:cNvSpPr txBox="1"/>
+          <p:nvPr/>
+        </p:nvSpPr>
+        <p:spPr>
+          <a:xfrm>
+            <a:off x="466725" y="2476500"/>
+            <a:ext cx="2247900" cy="171450"/>
+          </a:xfrm>
+          <a:prstGeom prst="rect">
+            <a:avLst/>
+          </a:prstGeom>
+          <a:noFill/>
+          <a:ln>
+            <a:noFill/>
+          </a:ln>
+        </p:spPr>
+        <p:txBody>
+          <a:bodyPr wrap="square" anchor="t">
+            <a:spAutoFit/>
+          </a:bodyPr>
+          <a:lstStyle/>
+          <a:p>
+            <a:pPr algn="l"/>
+            <a:r>
+              <a:rPr lang="ko-KR" sz="1100">
+                <a:solidFill>
+                  <a:srgbClr val="F2F5F8"/>
+                </a:solidFill>
+                <a:latin typeface="Malgun Gothic"/>
+                <a:ea typeface="Malgun Gothic"/>
+              </a:rPr>
+              <a:t>1Q 200액티브</a:t>
+            </a:r>
+            <a:endParaRPr lang="ko-KR" sz="1100"/>
+          </a:p>
+        </p:txBody>
+      </p:sp>
+      <p:sp>
+        <p:nvSpPr>
+          <p:cNvPr id="32" name="Panel 32"/>
+          <p:cNvSpPr/>
+          <p:nvPr/>
+        </p:nvSpPr>
+        <p:spPr>
+          <a:xfrm>
+            <a:off x="2781300" y="2390775"/>
+            <a:ext cx="3095625" cy="361950"/>
+          </a:xfrm>
+          <a:prstGeom prst="rect">
+            <a:avLst/>
+          </a:prstGeom>
+          <a:solidFill>
+            <a:srgbClr val="101318"/>
+          </a:solidFill>
+          <a:ln w="9525">
+            <a:solidFill>
+              <a:srgbClr val="2A3038"/>
+            </a:solidFill>
+          </a:ln>
+        </p:spPr>
+        <p:txBody>
+          <a:bodyPr/>
+          <a:lstStyle/>
+          <a:p/>
+        </p:txBody>
+      </p:sp>
+      <p:sp>
+        <p:nvSpPr>
+          <p:cNvPr id="33" name="Text 33"/>
+          <p:cNvSpPr txBox="1"/>
+          <p:nvPr/>
+        </p:nvSpPr>
+        <p:spPr>
+          <a:xfrm>
+            <a:off x="2847975" y="2476500"/>
+            <a:ext cx="2962275" cy="171450"/>
+          </a:xfrm>
+          <a:prstGeom prst="rect">
+            <a:avLst/>
+          </a:prstGeom>
+          <a:noFill/>
+          <a:ln>
+            <a:noFill/>
+          </a:ln>
+        </p:spPr>
+        <p:txBody>
+          <a:bodyPr wrap="square" anchor="t">
+            <a:spAutoFit/>
+          </a:bodyPr>
+          <a:lstStyle/>
+          <a:p>
+            <a:pPr algn="l"/>
+            <a:r>
+              <a:rPr lang="ko-KR" sz="1100">
+                <a:solidFill>
+                  <a:srgbClr val="F2F5F8"/>
+                </a:solidFill>
+                <a:latin typeface="Malgun Gothic"/>
+                <a:ea typeface="Malgun Gothic"/>
+              </a:rPr>
+              <a:t>감소 삼성전자</a:t>
+            </a:r>
+            <a:endParaRPr lang="ko-KR" sz="1100"/>
+          </a:p>
+        </p:txBody>
+      </p:sp>
+      <p:sp>
+        <p:nvSpPr>
+          <p:cNvPr id="34" name="Panel 34"/>
+          <p:cNvSpPr/>
+          <p:nvPr/>
+        </p:nvSpPr>
+        <p:spPr>
+          <a:xfrm>
+            <a:off x="5876925" y="2390775"/>
+            <a:ext cx="1047750" cy="361950"/>
+          </a:xfrm>
+          <a:prstGeom prst="rect">
+            <a:avLst/>
+          </a:prstGeom>
+          <a:solidFill>
+            <a:srgbClr val="101318"/>
+          </a:solidFill>
+          <a:ln w="9525">
+            <a:solidFill>
+              <a:srgbClr val="2A3038"/>
+            </a:solidFill>
+          </a:ln>
+        </p:spPr>
+        <p:txBody>
+          <a:bodyPr/>
+          <a:lstStyle/>
+          <a:p/>
+        </p:txBody>
+      </p:sp>
+      <p:sp>
+        <p:nvSpPr>
+          <p:cNvPr id="35" name="Text 35"/>
+          <p:cNvSpPr txBox="1"/>
+          <p:nvPr/>
+        </p:nvSpPr>
+        <p:spPr>
+          <a:xfrm>
+            <a:off x="5943600" y="2476500"/>
+            <a:ext cx="914400" cy="171450"/>
+          </a:xfrm>
+          <a:prstGeom prst="rect">
+            <a:avLst/>
+          </a:prstGeom>
+          <a:noFill/>
+          <a:ln>
+            <a:noFill/>
+          </a:ln>
+        </p:spPr>
+        <p:txBody>
+          <a:bodyPr wrap="square" anchor="t">
+            <a:spAutoFit/>
+          </a:bodyPr>
+          <a:lstStyle/>
+          <a:p>
+            <a:pPr algn="l"/>
+            <a:r>
+              <a:rPr lang="ko-KR" sz="1100">
+                <a:solidFill>
+                  <a:srgbClr val="F2F5F8"/>
+                </a:solidFill>
+                <a:latin typeface="Malgun Gothic"/>
+                <a:ea typeface="Malgun Gothic"/>
+              </a:rPr>
+              <a:t>005930</a:t>
+            </a:r>
+            <a:endParaRPr lang="ko-KR" sz="1100"/>
+          </a:p>
+        </p:txBody>
+      </p:sp>
+      <p:sp>
+        <p:nvSpPr>
+          <p:cNvPr id="36" name="Panel 36"/>
+          <p:cNvSpPr/>
+          <p:nvPr/>
+        </p:nvSpPr>
+        <p:spPr>
+          <a:xfrm>
+            <a:off x="6924675" y="2390775"/>
+            <a:ext cx="1143000" cy="361950"/>
+          </a:xfrm>
+          <a:prstGeom prst="rect">
+            <a:avLst/>
+          </a:prstGeom>
+          <a:solidFill>
+            <a:srgbClr val="101318"/>
+          </a:solidFill>
+          <a:ln w="9525">
+            <a:solidFill>
+              <a:srgbClr val="2A3038"/>
+            </a:solidFill>
+          </a:ln>
+        </p:spPr>
+        <p:txBody>
+          <a:bodyPr/>
+          <a:lstStyle/>
+          <a:p/>
+        </p:txBody>
+      </p:sp>
+      <p:sp>
+        <p:nvSpPr>
+          <p:cNvPr id="37" name="Text 37"/>
+          <p:cNvSpPr txBox="1"/>
+          <p:nvPr/>
+        </p:nvSpPr>
+        <p:spPr>
+          <a:xfrm>
+            <a:off x="6991350" y="2476500"/>
+            <a:ext cx="1009650" cy="171450"/>
+          </a:xfrm>
+          <a:prstGeom prst="rect">
+            <a:avLst/>
+          </a:prstGeom>
+          <a:noFill/>
+          <a:ln>
+            <a:noFill/>
+          </a:ln>
+        </p:spPr>
+        <p:txBody>
+          <a:bodyPr wrap="square" anchor="t">
+            <a:spAutoFit/>
+          </a:bodyPr>
+          <a:lstStyle/>
+          <a:p>
+            <a:pPr algn="r"/>
+            <a:r>
+              <a:rPr lang="ko-KR" sz="1100">
+                <a:solidFill>
+                  <a:srgbClr val="F2F5F8"/>
+                </a:solidFill>
+                <a:latin typeface="Malgun Gothic"/>
+                <a:ea typeface="Malgun Gothic"/>
+              </a:rPr>
+              <a:t>31.62%</a:t>
+            </a:r>
+            <a:endParaRPr lang="ko-KR" sz="1100"/>
+          </a:p>
+        </p:txBody>
+      </p:sp>
+      <p:sp>
+        <p:nvSpPr>
+          <p:cNvPr id="38" name="Panel 38"/>
+          <p:cNvSpPr/>
+          <p:nvPr/>
+        </p:nvSpPr>
+        <p:spPr>
+          <a:xfrm>
+            <a:off x="8067675" y="2390775"/>
+            <a:ext cx="1143000" cy="361950"/>
+          </a:xfrm>
+          <a:prstGeom prst="rect">
+            <a:avLst/>
+          </a:prstGeom>
+          <a:solidFill>
+            <a:srgbClr val="101318"/>
+          </a:solidFill>
+          <a:ln w="9525">
+            <a:solidFill>
+              <a:srgbClr val="2A3038"/>
+            </a:solidFill>
+          </a:ln>
+        </p:spPr>
+        <p:txBody>
+          <a:bodyPr/>
+          <a:lstStyle/>
+          <a:p/>
+        </p:txBody>
+      </p:sp>
+      <p:sp>
+        <p:nvSpPr>
+          <p:cNvPr id="39" name="Text 39"/>
+          <p:cNvSpPr txBox="1"/>
+          <p:nvPr/>
+        </p:nvSpPr>
+        <p:spPr>
+          <a:xfrm>
+            <a:off x="8134350" y="2476500"/>
+            <a:ext cx="1009650" cy="171450"/>
+          </a:xfrm>
+          <a:prstGeom prst="rect">
+            <a:avLst/>
+          </a:prstGeom>
+          <a:noFill/>
+          <a:ln>
+            <a:noFill/>
+          </a:ln>
+        </p:spPr>
+        <p:txBody>
+          <a:bodyPr wrap="square" anchor="t">
+            <a:spAutoFit/>
+          </a:bodyPr>
+          <a:lstStyle/>
+          <a:p>
+            <a:pPr algn="r"/>
+            <a:r>
+              <a:rPr lang="ko-KR" sz="1100">
+                <a:solidFill>
+                  <a:srgbClr val="F2F5F8"/>
+                </a:solidFill>
+                <a:latin typeface="Malgun Gothic"/>
+                <a:ea typeface="Malgun Gothic"/>
+              </a:rPr>
+              <a:t>0.00%</a:t>
+            </a:r>
+            <a:endParaRPr lang="ko-KR" sz="1100"/>
+          </a:p>
+        </p:txBody>
+      </p:sp>
+      <p:sp>
+        <p:nvSpPr>
+          <p:cNvPr id="40" name="Panel 40"/>
+          <p:cNvSpPr/>
+          <p:nvPr/>
+        </p:nvSpPr>
+        <p:spPr>
+          <a:xfrm>
+            <a:off x="9210675" y="2390775"/>
+            <a:ext cx="1285875" cy="361950"/>
+          </a:xfrm>
+          <a:prstGeom prst="rect">
+            <a:avLst/>
+          </a:prstGeom>
+          <a:solidFill>
+            <a:srgbClr val="101318"/>
+          </a:solidFill>
+          <a:ln w="9525">
+            <a:solidFill>
+              <a:srgbClr val="2A3038"/>
+            </a:solidFill>
+          </a:ln>
+        </p:spPr>
+        <p:txBody>
+          <a:bodyPr/>
+          <a:lstStyle/>
+          <a:p/>
+        </p:txBody>
+      </p:sp>
+      <p:sp>
+        <p:nvSpPr>
+          <p:cNvPr id="41" name="Text 41"/>
+          <p:cNvSpPr txBox="1"/>
+          <p:nvPr/>
+        </p:nvSpPr>
+        <p:spPr>
+          <a:xfrm>
+            <a:off x="9277350" y="2476500"/>
+            <a:ext cx="1152525" cy="171450"/>
+          </a:xfrm>
+          <a:prstGeom prst="rect">
+            <a:avLst/>
+          </a:prstGeom>
+          <a:noFill/>
+          <a:ln>
+            <a:noFill/>
+          </a:ln>
+        </p:spPr>
+        <p:txBody>
+          <a:bodyPr wrap="square" anchor="t">
+            <a:spAutoFit/>
+          </a:bodyPr>
+          <a:lstStyle/>
+          <a:p>
+            <a:pPr algn="r"/>
+            <a:r>
+              <a:rPr lang="ko-KR" sz="1100" b="1">
+                <a:solidFill>
+                  <a:srgbClr val="FF4D5E"/>
+                </a:solidFill>
+                <a:latin typeface="Malgun Gothic"/>
+                <a:ea typeface="Malgun Gothic"/>
+              </a:rPr>
+              <a:t>-31.62pp</a:t>
+            </a:r>
+            <a:endParaRPr lang="ko-KR" sz="1100"/>
+          </a:p>
+        </p:txBody>
+      </p:sp>
+      <p:sp>
+        <p:nvSpPr>
+          <p:cNvPr id="42" name="Panel 42"/>
+          <p:cNvSpPr/>
+          <p:nvPr/>
+        </p:nvSpPr>
+        <p:spPr>
+          <a:xfrm>
+            <a:off x="400050" y="2752725"/>
+            <a:ext cx="2381250" cy="361950"/>
+          </a:xfrm>
+          <a:prstGeom prst="rect">
+            <a:avLst/>
+          </a:prstGeom>
+          <a:solidFill>
+            <a:srgbClr val="0B0E12"/>
+          </a:solidFill>
+          <a:ln w="9525">
+            <a:solidFill>
+              <a:srgbClr val="2A3038"/>
+            </a:solidFill>
+          </a:ln>
+        </p:spPr>
+        <p:txBody>
+          <a:bodyPr/>
+          <a:lstStyle/>
+          <a:p/>
+        </p:txBody>
+      </p:sp>
+      <p:sp>
+        <p:nvSpPr>
+          <p:cNvPr id="43" name="Text 43"/>
+          <p:cNvSpPr txBox="1"/>
+          <p:nvPr/>
+        </p:nvSpPr>
+        <p:spPr>
+          <a:xfrm>
+            <a:off x="466725" y="2838450"/>
+            <a:ext cx="2247900" cy="171450"/>
+          </a:xfrm>
+          <a:prstGeom prst="rect">
+            <a:avLst/>
+          </a:prstGeom>
+          <a:noFill/>
+          <a:ln>
+            <a:noFill/>
+          </a:ln>
+        </p:spPr>
+        <p:txBody>
+          <a:bodyPr wrap="square" anchor="t">
+            <a:spAutoFit/>
+          </a:bodyPr>
+          <a:lstStyle/>
+          <a:p>
+            <a:pPr algn="l"/>
+            <a:r>
+              <a:rPr lang="ko-KR" sz="1100">
+                <a:solidFill>
+                  <a:srgbClr val="F2F5F8"/>
+                </a:solidFill>
+                <a:latin typeface="Malgun Gothic"/>
+                <a:ea typeface="Malgun Gothic"/>
+              </a:rPr>
+              <a:t>TIGER 반도체TOP10커버드콜</a:t>
+            </a:r>
+            <a:endParaRPr lang="ko-KR" sz="1100"/>
+          </a:p>
+        </p:txBody>
+      </p:sp>
+      <p:sp>
+        <p:nvSpPr>
+          <p:cNvPr id="44" name="Panel 44"/>
+          <p:cNvSpPr/>
+          <p:nvPr/>
+        </p:nvSpPr>
+        <p:spPr>
+          <a:xfrm>
+            <a:off x="2781300" y="2752725"/>
+            <a:ext cx="3095625" cy="361950"/>
+          </a:xfrm>
+          <a:prstGeom prst="rect">
+            <a:avLst/>
+          </a:prstGeom>
+          <a:solidFill>
+            <a:srgbClr val="0B0E12"/>
+          </a:solidFill>
+          <a:ln w="9525">
+            <a:solidFill>
+              <a:srgbClr val="2A3038"/>
+            </a:solidFill>
+          </a:ln>
+        </p:spPr>
+        <p:txBody>
+          <a:bodyPr/>
+          <a:lstStyle/>
+          <a:p/>
+        </p:txBody>
+      </p:sp>
+      <p:sp>
+        <p:nvSpPr>
+          <p:cNvPr id="45" name="Text 45"/>
+          <p:cNvSpPr txBox="1"/>
+          <p:nvPr/>
+        </p:nvSpPr>
+        <p:spPr>
+          <a:xfrm>
+            <a:off x="2847975" y="2838450"/>
+            <a:ext cx="2962275" cy="171450"/>
+          </a:xfrm>
+          <a:prstGeom prst="rect">
+            <a:avLst/>
+          </a:prstGeom>
+          <a:noFill/>
+          <a:ln>
+            <a:noFill/>
+          </a:ln>
+        </p:spPr>
+        <p:txBody>
+          <a:bodyPr wrap="square" anchor="t">
+            <a:spAutoFit/>
+          </a:bodyPr>
+          <a:lstStyle/>
+          <a:p>
+            <a:pPr algn="l"/>
+            <a:r>
+              <a:rPr lang="ko-KR" sz="1100">
+                <a:solidFill>
+                  <a:srgbClr val="F2F5F8"/>
+                </a:solidFill>
+                <a:latin typeface="Malgun Gothic"/>
+                <a:ea typeface="Malgun Gothic"/>
+              </a:rPr>
+              <a:t>감소 SK하이닉스</a:t>
+            </a:r>
+            <a:endParaRPr lang="ko-KR" sz="1100"/>
+          </a:p>
+        </p:txBody>
+      </p:sp>
+      <p:sp>
+        <p:nvSpPr>
+          <p:cNvPr id="46" name="Panel 46"/>
+          <p:cNvSpPr/>
+          <p:nvPr/>
+        </p:nvSpPr>
+        <p:spPr>
+          <a:xfrm>
+            <a:off x="5876925" y="2752725"/>
+            <a:ext cx="1047750" cy="361950"/>
+          </a:xfrm>
+          <a:prstGeom prst="rect">
+            <a:avLst/>
+          </a:prstGeom>
+          <a:solidFill>
+            <a:srgbClr val="0B0E12"/>
+          </a:solidFill>
+          <a:ln w="9525">
+            <a:solidFill>
+              <a:srgbClr val="2A3038"/>
+            </a:solidFill>
+          </a:ln>
+        </p:spPr>
+        <p:txBody>
+          <a:bodyPr/>
+          <a:lstStyle/>
+          <a:p/>
+        </p:txBody>
+      </p:sp>
+      <p:sp>
+        <p:nvSpPr>
+          <p:cNvPr id="47" name="Text 47"/>
+          <p:cNvSpPr txBox="1"/>
+          <p:nvPr/>
+        </p:nvSpPr>
+        <p:spPr>
+          <a:xfrm>
+            <a:off x="5943600" y="2838450"/>
+            <a:ext cx="914400" cy="171450"/>
+          </a:xfrm>
+          <a:prstGeom prst="rect">
+            <a:avLst/>
+          </a:prstGeom>
+          <a:noFill/>
+          <a:ln>
+            <a:noFill/>
+          </a:ln>
+        </p:spPr>
+        <p:txBody>
+          <a:bodyPr wrap="square" anchor="t">
+            <a:spAutoFit/>
+          </a:bodyPr>
+          <a:lstStyle/>
+          <a:p>
+            <a:pPr algn="l"/>
+            <a:r>
+              <a:rPr lang="ko-KR" sz="1100">
+                <a:solidFill>
+                  <a:srgbClr val="F2F5F8"/>
+                </a:solidFill>
+                <a:latin typeface="Malgun Gothic"/>
+                <a:ea typeface="Malgun Gothic"/>
+              </a:rPr>
+              <a:t>000660</a:t>
+            </a:r>
+            <a:endParaRPr lang="ko-KR" sz="1100"/>
+          </a:p>
+        </p:txBody>
+      </p:sp>
+      <p:sp>
+        <p:nvSpPr>
+          <p:cNvPr id="48" name="Panel 48"/>
+          <p:cNvSpPr/>
+          <p:nvPr/>
+        </p:nvSpPr>
+        <p:spPr>
+          <a:xfrm>
+            <a:off x="6924675" y="2752725"/>
+            <a:ext cx="1143000" cy="361950"/>
+          </a:xfrm>
+          <a:prstGeom prst="rect">
+            <a:avLst/>
+          </a:prstGeom>
+          <a:solidFill>
+            <a:srgbClr val="0B0E12"/>
+          </a:solidFill>
+          <a:ln w="9525">
+            <a:solidFill>
+              <a:srgbClr val="2A3038"/>
+            </a:solidFill>
+          </a:ln>
+        </p:spPr>
+        <p:txBody>
+          <a:bodyPr/>
+          <a:lstStyle/>
+          <a:p/>
+        </p:txBody>
+      </p:sp>
+      <p:sp>
+        <p:nvSpPr>
+          <p:cNvPr id="49" name="Text 49"/>
+          <p:cNvSpPr txBox="1"/>
+          <p:nvPr/>
+        </p:nvSpPr>
+        <p:spPr>
+          <a:xfrm>
+            <a:off x="6991350" y="2838450"/>
+            <a:ext cx="1009650" cy="171450"/>
+          </a:xfrm>
+          <a:prstGeom prst="rect">
+            <a:avLst/>
+          </a:prstGeom>
+          <a:noFill/>
+          <a:ln>
+            <a:noFill/>
+          </a:ln>
+        </p:spPr>
+        <p:txBody>
+          <a:bodyPr wrap="square" anchor="t">
+            <a:spAutoFit/>
+          </a:bodyPr>
+          <a:lstStyle/>
+          <a:p>
+            <a:pPr algn="r"/>
+            <a:r>
+              <a:rPr lang="ko-KR" sz="1100">
+                <a:solidFill>
+                  <a:srgbClr val="F2F5F8"/>
+                </a:solidFill>
+                <a:latin typeface="Malgun Gothic"/>
+                <a:ea typeface="Malgun Gothic"/>
+              </a:rPr>
+              <a:t>28.53%</a:t>
+            </a:r>
+            <a:endParaRPr lang="ko-KR" sz="1100"/>
+          </a:p>
+        </p:txBody>
+      </p:sp>
+      <p:sp>
+        <p:nvSpPr>
+          <p:cNvPr id="50" name="Panel 50"/>
+          <p:cNvSpPr/>
+          <p:nvPr/>
+        </p:nvSpPr>
+        <p:spPr>
+          <a:xfrm>
+            <a:off x="8067675" y="2752725"/>
+            <a:ext cx="1143000" cy="361950"/>
+          </a:xfrm>
+          <a:prstGeom prst="rect">
+            <a:avLst/>
+          </a:prstGeom>
+          <a:solidFill>
+            <a:srgbClr val="0B0E12"/>
+          </a:solidFill>
+          <a:ln w="9525">
+            <a:solidFill>
+              <a:srgbClr val="2A3038"/>
+            </a:solidFill>
+          </a:ln>
+        </p:spPr>
+        <p:txBody>
+          <a:bodyPr/>
+          <a:lstStyle/>
+          <a:p/>
+        </p:txBody>
+      </p:sp>
+      <p:sp>
+        <p:nvSpPr>
+          <p:cNvPr id="51" name="Text 51"/>
+          <p:cNvSpPr txBox="1"/>
+          <p:nvPr/>
+        </p:nvSpPr>
+        <p:spPr>
+          <a:xfrm>
+            <a:off x="8134350" y="2838450"/>
+            <a:ext cx="1009650" cy="171450"/>
+          </a:xfrm>
+          <a:prstGeom prst="rect">
+            <a:avLst/>
+          </a:prstGeom>
+          <a:noFill/>
+          <a:ln>
+            <a:noFill/>
+          </a:ln>
+        </p:spPr>
+        <p:txBody>
+          <a:bodyPr wrap="square" anchor="t">
+            <a:spAutoFit/>
+          </a:bodyPr>
+          <a:lstStyle/>
+          <a:p>
+            <a:pPr algn="r"/>
+            <a:r>
+              <a:rPr lang="ko-KR" sz="1100">
+                <a:solidFill>
+                  <a:srgbClr val="F2F5F8"/>
+                </a:solidFill>
+                <a:latin typeface="Malgun Gothic"/>
+                <a:ea typeface="Malgun Gothic"/>
+              </a:rPr>
+              <a:t>0.00%</a:t>
+            </a:r>
+            <a:endParaRPr lang="ko-KR" sz="1100"/>
+          </a:p>
+        </p:txBody>
+      </p:sp>
+      <p:sp>
+        <p:nvSpPr>
+          <p:cNvPr id="52" name="Panel 52"/>
+          <p:cNvSpPr/>
+          <p:nvPr/>
+        </p:nvSpPr>
+        <p:spPr>
+          <a:xfrm>
+            <a:off x="9210675" y="2752725"/>
+            <a:ext cx="1285875" cy="361950"/>
+          </a:xfrm>
+          <a:prstGeom prst="rect">
+            <a:avLst/>
+          </a:prstGeom>
+          <a:solidFill>
+            <a:srgbClr val="0B0E12"/>
+          </a:solidFill>
+          <a:ln w="9525">
+            <a:solidFill>
+              <a:srgbClr val="2A3038"/>
+            </a:solidFill>
+          </a:ln>
+        </p:spPr>
+        <p:txBody>
+          <a:bodyPr/>
+          <a:lstStyle/>
+          <a:p/>
+        </p:txBody>
+      </p:sp>
+      <p:sp>
+        <p:nvSpPr>
+          <p:cNvPr id="53" name="Text 53"/>
+          <p:cNvSpPr txBox="1"/>
+          <p:nvPr/>
+        </p:nvSpPr>
+        <p:spPr>
+          <a:xfrm>
+            <a:off x="9277350" y="2838450"/>
+            <a:ext cx="1152525" cy="171450"/>
+          </a:xfrm>
+          <a:prstGeom prst="rect">
+            <a:avLst/>
+          </a:prstGeom>
+          <a:noFill/>
+          <a:ln>
+            <a:noFill/>
+          </a:ln>
+        </p:spPr>
+        <p:txBody>
+          <a:bodyPr wrap="square" anchor="t">
+            <a:spAutoFit/>
+          </a:bodyPr>
+          <a:lstStyle/>
+          <a:p>
+            <a:pPr algn="r"/>
+            <a:r>
+              <a:rPr lang="ko-KR" sz="1100" b="1">
+                <a:solidFill>
+                  <a:srgbClr val="FF4D5E"/>
+                </a:solidFill>
+                <a:latin typeface="Malgun Gothic"/>
+                <a:ea typeface="Malgun Gothic"/>
+              </a:rPr>
+              <a:t>-28.53pp</a:t>
+            </a:r>
+            <a:endParaRPr lang="ko-KR" sz="1100"/>
+          </a:p>
+        </p:txBody>
+      </p:sp>
+      <p:sp>
+        <p:nvSpPr>
+          <p:cNvPr id="54" name="Panel 54"/>
+          <p:cNvSpPr/>
+          <p:nvPr/>
+        </p:nvSpPr>
+        <p:spPr>
+          <a:xfrm>
+            <a:off x="400050" y="3114675"/>
+            <a:ext cx="2381250" cy="361950"/>
+          </a:xfrm>
+          <a:prstGeom prst="rect">
+            <a:avLst/>
+          </a:prstGeom>
+          <a:solidFill>
+            <a:srgbClr val="101318"/>
+          </a:solidFill>
+          <a:ln w="9525">
+            <a:solidFill>
+              <a:srgbClr val="2A3038"/>
+            </a:solidFill>
+          </a:ln>
+        </p:spPr>
+        <p:txBody>
+          <a:bodyPr/>
+          <a:lstStyle/>
+          <a:p/>
+        </p:txBody>
+      </p:sp>
+      <p:sp>
+        <p:nvSpPr>
+          <p:cNvPr id="55" name="Text 55"/>
+          <p:cNvSpPr txBox="1"/>
+          <p:nvPr/>
+        </p:nvSpPr>
+        <p:spPr>
+          <a:xfrm>
+            <a:off x="466725" y="3200400"/>
+            <a:ext cx="2247900" cy="171450"/>
+          </a:xfrm>
+          <a:prstGeom prst="rect">
+            <a:avLst/>
+          </a:prstGeom>
+          <a:noFill/>
+          <a:ln>
+            <a:noFill/>
+          </a:ln>
+        </p:spPr>
+        <p:txBody>
+          <a:bodyPr wrap="square" anchor="t">
+            <a:spAutoFit/>
+          </a:bodyPr>
+          <a:lstStyle/>
+          <a:p>
+            <a:pPr algn="l"/>
+            <a:r>
+              <a:rPr lang="ko-KR" sz="1100">
+                <a:solidFill>
+                  <a:srgbClr val="F2F5F8"/>
+                </a:solidFill>
+                <a:latin typeface="Malgun Gothic"/>
+                <a:ea typeface="Malgun Gothic"/>
+              </a:rPr>
+              <a:t>HK 베스트일레븐액티브</a:t>
+            </a:r>
+            <a:endParaRPr lang="ko-KR" sz="1100"/>
+          </a:p>
+        </p:txBody>
+      </p:sp>
+      <p:sp>
+        <p:nvSpPr>
+          <p:cNvPr id="56" name="Panel 56"/>
+          <p:cNvSpPr/>
+          <p:nvPr/>
+        </p:nvSpPr>
+        <p:spPr>
+          <a:xfrm>
+            <a:off x="2781300" y="3114675"/>
+            <a:ext cx="3095625" cy="361950"/>
+          </a:xfrm>
+          <a:prstGeom prst="rect">
+            <a:avLst/>
+          </a:prstGeom>
+          <a:solidFill>
+            <a:srgbClr val="101318"/>
+          </a:solidFill>
+          <a:ln w="9525">
+            <a:solidFill>
+              <a:srgbClr val="2A3038"/>
+            </a:solidFill>
+          </a:ln>
+        </p:spPr>
+        <p:txBody>
+          <a:bodyPr/>
+          <a:lstStyle/>
+          <a:p/>
+        </p:txBody>
+      </p:sp>
+      <p:sp>
+        <p:nvSpPr>
+          <p:cNvPr id="57" name="Text 57"/>
+          <p:cNvSpPr txBox="1"/>
+          <p:nvPr/>
+        </p:nvSpPr>
+        <p:spPr>
+          <a:xfrm>
+            <a:off x="2847975" y="3200400"/>
+            <a:ext cx="2962275" cy="171450"/>
+          </a:xfrm>
+          <a:prstGeom prst="rect">
+            <a:avLst/>
+          </a:prstGeom>
+          <a:noFill/>
+          <a:ln>
+            <a:noFill/>
+          </a:ln>
+        </p:spPr>
+        <p:txBody>
+          <a:bodyPr wrap="square" anchor="t">
+            <a:spAutoFit/>
+          </a:bodyPr>
+          <a:lstStyle/>
+          <a:p>
+            <a:pPr algn="l"/>
+            <a:r>
+              <a:rPr lang="ko-KR" sz="1100">
+                <a:solidFill>
+                  <a:srgbClr val="F2F5F8"/>
+                </a:solidFill>
+                <a:latin typeface="Malgun Gothic"/>
+                <a:ea typeface="Malgun Gothic"/>
+              </a:rPr>
+              <a:t>감소 삼성전자</a:t>
+            </a:r>
+            <a:endParaRPr lang="ko-KR" sz="1100"/>
+          </a:p>
+        </p:txBody>
+      </p:sp>
+      <p:sp>
+        <p:nvSpPr>
+          <p:cNvPr id="58" name="Panel 58"/>
+          <p:cNvSpPr/>
+          <p:nvPr/>
+        </p:nvSpPr>
+        <p:spPr>
+          <a:xfrm>
+            <a:off x="5876925" y="3114675"/>
+            <a:ext cx="1047750" cy="361950"/>
+          </a:xfrm>
+          <a:prstGeom prst="rect">
+            <a:avLst/>
+          </a:prstGeom>
+          <a:solidFill>
+            <a:srgbClr val="101318"/>
+          </a:solidFill>
+          <a:ln w="9525">
+            <a:solidFill>
+              <a:srgbClr val="2A3038"/>
+            </a:solidFill>
+          </a:ln>
+        </p:spPr>
+        <p:txBody>
+          <a:bodyPr/>
+          <a:lstStyle/>
+          <a:p/>
+        </p:txBody>
+      </p:sp>
+      <p:sp>
+        <p:nvSpPr>
+          <p:cNvPr id="59" name="Text 59"/>
+          <p:cNvSpPr txBox="1"/>
+          <p:nvPr/>
+        </p:nvSpPr>
+        <p:spPr>
+          <a:xfrm>
+            <a:off x="5943600" y="3200400"/>
+            <a:ext cx="914400" cy="171450"/>
+          </a:xfrm>
+          <a:prstGeom prst="rect">
+            <a:avLst/>
+          </a:prstGeom>
+          <a:noFill/>
+          <a:ln>
+            <a:noFill/>
+          </a:ln>
+        </p:spPr>
+        <p:txBody>
+          <a:bodyPr wrap="square" anchor="t">
+            <a:spAutoFit/>
+          </a:bodyPr>
+          <a:lstStyle/>
+          <a:p>
+            <a:pPr algn="l"/>
+            <a:r>
+              <a:rPr lang="ko-KR" sz="1100">
+                <a:solidFill>
+                  <a:srgbClr val="F2F5F8"/>
+                </a:solidFill>
+                <a:latin typeface="Malgun Gothic"/>
+                <a:ea typeface="Malgun Gothic"/>
+              </a:rPr>
+              <a:t>005930</a:t>
+            </a:r>
+            <a:endParaRPr lang="ko-KR" sz="1100"/>
+          </a:p>
+        </p:txBody>
+      </p:sp>
+      <p:sp>
+        <p:nvSpPr>
+          <p:cNvPr id="60" name="Panel 60"/>
+          <p:cNvSpPr/>
+          <p:nvPr/>
+        </p:nvSpPr>
+        <p:spPr>
+          <a:xfrm>
+            <a:off x="6924675" y="3114675"/>
+            <a:ext cx="1143000" cy="361950"/>
+          </a:xfrm>
+          <a:prstGeom prst="rect">
+            <a:avLst/>
+          </a:prstGeom>
+          <a:solidFill>
+            <a:srgbClr val="101318"/>
+          </a:solidFill>
+          <a:ln w="9525">
+            <a:solidFill>
+              <a:srgbClr val="2A3038"/>
+            </a:solidFill>
+          </a:ln>
+        </p:spPr>
+        <p:txBody>
+          <a:bodyPr/>
+          <a:lstStyle/>
+          <a:p/>
+        </p:txBody>
+      </p:sp>
+      <p:sp>
+        <p:nvSpPr>
+          <p:cNvPr id="61" name="Text 61"/>
+          <p:cNvSpPr txBox="1"/>
+          <p:nvPr/>
+        </p:nvSpPr>
+        <p:spPr>
+          <a:xfrm>
+            <a:off x="6991350" y="3200400"/>
+            <a:ext cx="1009650" cy="171450"/>
+          </a:xfrm>
+          <a:prstGeom prst="rect">
+            <a:avLst/>
+          </a:prstGeom>
+          <a:noFill/>
+          <a:ln>
+            <a:noFill/>
+          </a:ln>
+        </p:spPr>
+        <p:txBody>
+          <a:bodyPr wrap="square" anchor="t">
+            <a:spAutoFit/>
+          </a:bodyPr>
+          <a:lstStyle/>
+          <a:p>
+            <a:pPr algn="r"/>
+            <a:r>
+              <a:rPr lang="ko-KR" sz="1100">
+                <a:solidFill>
+                  <a:srgbClr val="F2F5F8"/>
+                </a:solidFill>
+                <a:latin typeface="Malgun Gothic"/>
+                <a:ea typeface="Malgun Gothic"/>
+              </a:rPr>
+              <a:t>27.63%</a:t>
+            </a:r>
+            <a:endParaRPr lang="ko-KR" sz="1100"/>
+          </a:p>
+        </p:txBody>
+      </p:sp>
+      <p:sp>
+        <p:nvSpPr>
+          <p:cNvPr id="62" name="Panel 62"/>
+          <p:cNvSpPr/>
+          <p:nvPr/>
+        </p:nvSpPr>
+        <p:spPr>
+          <a:xfrm>
+            <a:off x="8067675" y="3114675"/>
+            <a:ext cx="1143000" cy="361950"/>
+          </a:xfrm>
+          <a:prstGeom prst="rect">
+            <a:avLst/>
+          </a:prstGeom>
+          <a:solidFill>
+            <a:srgbClr val="101318"/>
+          </a:solidFill>
+          <a:ln w="9525">
+            <a:solidFill>
+              <a:srgbClr val="2A3038"/>
+            </a:solidFill>
+          </a:ln>
+        </p:spPr>
+        <p:txBody>
+          <a:bodyPr/>
+          <a:lstStyle/>
+          <a:p/>
+        </p:txBody>
+      </p:sp>
+      <p:sp>
+        <p:nvSpPr>
+          <p:cNvPr id="63" name="Text 63"/>
+          <p:cNvSpPr txBox="1"/>
+          <p:nvPr/>
+        </p:nvSpPr>
+        <p:spPr>
+          <a:xfrm>
+            <a:off x="8134350" y="3200400"/>
+            <a:ext cx="1009650" cy="171450"/>
+          </a:xfrm>
+          <a:prstGeom prst="rect">
+            <a:avLst/>
+          </a:prstGeom>
+          <a:noFill/>
+          <a:ln>
+            <a:noFill/>
+          </a:ln>
+        </p:spPr>
+        <p:txBody>
+          <a:bodyPr wrap="square" anchor="t">
+            <a:spAutoFit/>
+          </a:bodyPr>
+          <a:lstStyle/>
+          <a:p>
+            <a:pPr algn="r"/>
+            <a:r>
+              <a:rPr lang="ko-KR" sz="1100">
+                <a:solidFill>
+                  <a:srgbClr val="F2F5F8"/>
+                </a:solidFill>
+                <a:latin typeface="Malgun Gothic"/>
+                <a:ea typeface="Malgun Gothic"/>
+              </a:rPr>
+              <a:t>0.00%</a:t>
+            </a:r>
+            <a:endParaRPr lang="ko-KR" sz="1100"/>
+          </a:p>
+        </p:txBody>
+      </p:sp>
+      <p:sp>
+        <p:nvSpPr>
+          <p:cNvPr id="64" name="Panel 64"/>
+          <p:cNvSpPr/>
+          <p:nvPr/>
+        </p:nvSpPr>
+        <p:spPr>
+          <a:xfrm>
+            <a:off x="9210675" y="3114675"/>
+            <a:ext cx="1285875" cy="361950"/>
+          </a:xfrm>
+          <a:prstGeom prst="rect">
+            <a:avLst/>
+          </a:prstGeom>
+          <a:solidFill>
+            <a:srgbClr val="101318"/>
+          </a:solidFill>
+          <a:ln w="9525">
+            <a:solidFill>
+              <a:srgbClr val="2A3038"/>
+            </a:solidFill>
+          </a:ln>
+        </p:spPr>
+        <p:txBody>
+          <a:bodyPr/>
+          <a:lstStyle/>
+          <a:p/>
+        </p:txBody>
+      </p:sp>
+      <p:sp>
+        <p:nvSpPr>
+          <p:cNvPr id="65" name="Text 65"/>
+          <p:cNvSpPr txBox="1"/>
+          <p:nvPr/>
+        </p:nvSpPr>
+        <p:spPr>
+          <a:xfrm>
+            <a:off x="9277350" y="3200400"/>
+            <a:ext cx="1152525" cy="171450"/>
+          </a:xfrm>
+          <a:prstGeom prst="rect">
+            <a:avLst/>
+          </a:prstGeom>
+          <a:noFill/>
+          <a:ln>
+            <a:noFill/>
+          </a:ln>
+        </p:spPr>
+        <p:txBody>
+          <a:bodyPr wrap="square" anchor="t">
+            <a:spAutoFit/>
+          </a:bodyPr>
+          <a:lstStyle/>
+          <a:p>
+            <a:pPr algn="r"/>
+            <a:r>
+              <a:rPr lang="ko-KR" sz="1100" b="1">
+                <a:solidFill>
+                  <a:srgbClr val="FF4D5E"/>
+                </a:solidFill>
+                <a:latin typeface="Malgun Gothic"/>
+                <a:ea typeface="Malgun Gothic"/>
+              </a:rPr>
+              <a:t>-27.63pp</a:t>
+            </a:r>
+            <a:endParaRPr lang="ko-KR" sz="1100"/>
+          </a:p>
+        </p:txBody>
+      </p:sp>
+      <p:sp>
+        <p:nvSpPr>
+          <p:cNvPr id="66" name="Panel 66"/>
+          <p:cNvSpPr/>
+          <p:nvPr/>
+        </p:nvSpPr>
+        <p:spPr>
+          <a:xfrm>
+            <a:off x="400050" y="3476625"/>
+            <a:ext cx="2381250" cy="361950"/>
+          </a:xfrm>
+          <a:prstGeom prst="rect">
+            <a:avLst/>
+          </a:prstGeom>
+          <a:solidFill>
+            <a:srgbClr val="0B0E12"/>
+          </a:solidFill>
+          <a:ln w="9525">
+            <a:solidFill>
+              <a:srgbClr val="2A3038"/>
+            </a:solidFill>
+          </a:ln>
+        </p:spPr>
+        <p:txBody>
+          <a:bodyPr/>
+          <a:lstStyle/>
+          <a:p/>
+        </p:txBody>
+      </p:sp>
+      <p:sp>
+        <p:nvSpPr>
+          <p:cNvPr id="67" name="Text 67"/>
+          <p:cNvSpPr txBox="1"/>
+          <p:nvPr/>
+        </p:nvSpPr>
+        <p:spPr>
+          <a:xfrm>
+            <a:off x="466725" y="3562350"/>
+            <a:ext cx="2247900" cy="171450"/>
+          </a:xfrm>
+          <a:prstGeom prst="rect">
+            <a:avLst/>
+          </a:prstGeom>
+          <a:noFill/>
+          <a:ln>
+            <a:noFill/>
+          </a:ln>
+        </p:spPr>
+        <p:txBody>
+          <a:bodyPr wrap="square" anchor="t">
+            <a:spAutoFit/>
+          </a:bodyPr>
+          <a:lstStyle/>
+          <a:p>
+            <a:pPr algn="l"/>
+            <a:r>
+              <a:rPr lang="ko-KR" sz="1100">
+                <a:solidFill>
+                  <a:srgbClr val="F2F5F8"/>
+                </a:solidFill>
+                <a:latin typeface="Malgun Gothic"/>
+                <a:ea typeface="Malgun Gothic"/>
+              </a:rPr>
+              <a:t>TIME 코리아밸류업액티브</a:t>
+            </a:r>
+            <a:endParaRPr lang="ko-KR" sz="1100"/>
+          </a:p>
+        </p:txBody>
+      </p:sp>
+      <p:sp>
+        <p:nvSpPr>
+          <p:cNvPr id="68" name="Panel 68"/>
+          <p:cNvSpPr/>
+          <p:nvPr/>
+        </p:nvSpPr>
+        <p:spPr>
+          <a:xfrm>
+            <a:off x="2781300" y="3476625"/>
+            <a:ext cx="3095625" cy="361950"/>
+          </a:xfrm>
+          <a:prstGeom prst="rect">
+            <a:avLst/>
+          </a:prstGeom>
+          <a:solidFill>
+            <a:srgbClr val="0B0E12"/>
+          </a:solidFill>
+          <a:ln w="9525">
+            <a:solidFill>
+              <a:srgbClr val="2A3038"/>
+            </a:solidFill>
+          </a:ln>
+        </p:spPr>
+        <p:txBody>
+          <a:bodyPr/>
+          <a:lstStyle/>
+          <a:p/>
+        </p:txBody>
+      </p:sp>
+      <p:sp>
+        <p:nvSpPr>
+          <p:cNvPr id="69" name="Text 69"/>
+          <p:cNvSpPr txBox="1"/>
+          <p:nvPr/>
+        </p:nvSpPr>
+        <p:spPr>
+          <a:xfrm>
+            <a:off x="2847975" y="3562350"/>
+            <a:ext cx="2962275" cy="171450"/>
+          </a:xfrm>
+          <a:prstGeom prst="rect">
+            <a:avLst/>
+          </a:prstGeom>
+          <a:noFill/>
+          <a:ln>
+            <a:noFill/>
+          </a:ln>
+        </p:spPr>
+        <p:txBody>
+          <a:bodyPr wrap="square" anchor="t">
+            <a:spAutoFit/>
+          </a:bodyPr>
+          <a:lstStyle/>
+          <a:p>
+            <a:pPr algn="l"/>
+            <a:r>
+              <a:rPr lang="ko-KR" sz="1100">
+                <a:solidFill>
+                  <a:srgbClr val="F2F5F8"/>
+                </a:solidFill>
+                <a:latin typeface="Malgun Gothic"/>
+                <a:ea typeface="Malgun Gothic"/>
+              </a:rPr>
+              <a:t>감소 SK하이닉스</a:t>
+            </a:r>
+            <a:endParaRPr lang="ko-KR" sz="1100"/>
+          </a:p>
+        </p:txBody>
+      </p:sp>
+      <p:sp>
+        <p:nvSpPr>
+          <p:cNvPr id="70" name="Panel 70"/>
+          <p:cNvSpPr/>
+          <p:nvPr/>
+        </p:nvSpPr>
+        <p:spPr>
+          <a:xfrm>
+            <a:off x="5876925" y="3476625"/>
+            <a:ext cx="1047750" cy="361950"/>
+          </a:xfrm>
+          <a:prstGeom prst="rect">
+            <a:avLst/>
+          </a:prstGeom>
+          <a:solidFill>
+            <a:srgbClr val="0B0E12"/>
+          </a:solidFill>
+          <a:ln w="9525">
+            <a:solidFill>
+              <a:srgbClr val="2A3038"/>
+            </a:solidFill>
+          </a:ln>
+        </p:spPr>
+        <p:txBody>
+          <a:bodyPr/>
+          <a:lstStyle/>
+          <a:p/>
+        </p:txBody>
+      </p:sp>
+      <p:sp>
+        <p:nvSpPr>
+          <p:cNvPr id="71" name="Text 71"/>
+          <p:cNvSpPr txBox="1"/>
+          <p:nvPr/>
+        </p:nvSpPr>
+        <p:spPr>
+          <a:xfrm>
+            <a:off x="5943600" y="3562350"/>
+            <a:ext cx="914400" cy="171450"/>
+          </a:xfrm>
+          <a:prstGeom prst="rect">
+            <a:avLst/>
+          </a:prstGeom>
+          <a:noFill/>
+          <a:ln>
+            <a:noFill/>
+          </a:ln>
+        </p:spPr>
+        <p:txBody>
+          <a:bodyPr wrap="square" anchor="t">
+            <a:spAutoFit/>
+          </a:bodyPr>
+          <a:lstStyle/>
+          <a:p>
+            <a:pPr algn="l"/>
+            <a:r>
+              <a:rPr lang="ko-KR" sz="1100">
+                <a:solidFill>
+                  <a:srgbClr val="F2F5F8"/>
+                </a:solidFill>
+                <a:latin typeface="Malgun Gothic"/>
+                <a:ea typeface="Malgun Gothic"/>
+              </a:rPr>
+              <a:t>000660</a:t>
+            </a:r>
+            <a:endParaRPr lang="ko-KR" sz="1100"/>
+          </a:p>
+        </p:txBody>
+      </p:sp>
+      <p:sp>
+        <p:nvSpPr>
+          <p:cNvPr id="72" name="Panel 72"/>
+          <p:cNvSpPr/>
+          <p:nvPr/>
+        </p:nvSpPr>
+        <p:spPr>
+          <a:xfrm>
+            <a:off x="6924675" y="3476625"/>
+            <a:ext cx="1143000" cy="361950"/>
+          </a:xfrm>
+          <a:prstGeom prst="rect">
+            <a:avLst/>
+          </a:prstGeom>
+          <a:solidFill>
+            <a:srgbClr val="0B0E12"/>
+          </a:solidFill>
+          <a:ln w="9525">
+            <a:solidFill>
+              <a:srgbClr val="2A3038"/>
+            </a:solidFill>
+          </a:ln>
+        </p:spPr>
+        <p:txBody>
+          <a:bodyPr/>
+          <a:lstStyle/>
+          <a:p/>
+        </p:txBody>
+      </p:sp>
+      <p:sp>
+        <p:nvSpPr>
+          <p:cNvPr id="73" name="Text 73"/>
+          <p:cNvSpPr txBox="1"/>
+          <p:nvPr/>
+        </p:nvSpPr>
+        <p:spPr>
+          <a:xfrm>
+            <a:off x="6991350" y="3562350"/>
+            <a:ext cx="1009650" cy="171450"/>
+          </a:xfrm>
+          <a:prstGeom prst="rect">
+            <a:avLst/>
+          </a:prstGeom>
+          <a:noFill/>
+          <a:ln>
+            <a:noFill/>
+          </a:ln>
+        </p:spPr>
+        <p:txBody>
+          <a:bodyPr wrap="square" anchor="t">
+            <a:spAutoFit/>
+          </a:bodyPr>
+          <a:lstStyle/>
+          <a:p>
+            <a:pPr algn="r"/>
+            <a:r>
+              <a:rPr lang="ko-KR" sz="1100">
+                <a:solidFill>
+                  <a:srgbClr val="F2F5F8"/>
+                </a:solidFill>
+                <a:latin typeface="Malgun Gothic"/>
+                <a:ea typeface="Malgun Gothic"/>
+              </a:rPr>
+              <a:t>27.01%</a:t>
+            </a:r>
+            <a:endParaRPr lang="ko-KR" sz="1100"/>
+          </a:p>
+        </p:txBody>
+      </p:sp>
+      <p:sp>
+        <p:nvSpPr>
+          <p:cNvPr id="74" name="Panel 74"/>
+          <p:cNvSpPr/>
+          <p:nvPr/>
+        </p:nvSpPr>
+        <p:spPr>
+          <a:xfrm>
+            <a:off x="8067675" y="3476625"/>
+            <a:ext cx="1143000" cy="361950"/>
+          </a:xfrm>
+          <a:prstGeom prst="rect">
+            <a:avLst/>
+          </a:prstGeom>
+          <a:solidFill>
+            <a:srgbClr val="0B0E12"/>
+          </a:solidFill>
+          <a:ln w="9525">
+            <a:solidFill>
+              <a:srgbClr val="2A3038"/>
+            </a:solidFill>
+          </a:ln>
+        </p:spPr>
+        <p:txBody>
+          <a:bodyPr/>
+          <a:lstStyle/>
+          <a:p/>
+        </p:txBody>
+      </p:sp>
+      <p:sp>
+        <p:nvSpPr>
+          <p:cNvPr id="75" name="Text 75"/>
+          <p:cNvSpPr txBox="1"/>
+          <p:nvPr/>
+        </p:nvSpPr>
+        <p:spPr>
+          <a:xfrm>
+            <a:off x="8134350" y="3562350"/>
+            <a:ext cx="1009650" cy="171450"/>
+          </a:xfrm>
+          <a:prstGeom prst="rect">
+            <a:avLst/>
+          </a:prstGeom>
+          <a:noFill/>
+          <a:ln>
+            <a:noFill/>
+          </a:ln>
+        </p:spPr>
+        <p:txBody>
+          <a:bodyPr wrap="square" anchor="t">
+            <a:spAutoFit/>
+          </a:bodyPr>
+          <a:lstStyle/>
+          <a:p>
+            <a:pPr algn="r"/>
+            <a:r>
+              <a:rPr lang="ko-KR" sz="1100">
+                <a:solidFill>
+                  <a:srgbClr val="F2F5F8"/>
+                </a:solidFill>
+                <a:latin typeface="Malgun Gothic"/>
+                <a:ea typeface="Malgun Gothic"/>
+              </a:rPr>
+              <a:t>0.00%</a:t>
+            </a:r>
+            <a:endParaRPr lang="ko-KR" sz="1100"/>
+          </a:p>
+        </p:txBody>
+      </p:sp>
+      <p:sp>
+        <p:nvSpPr>
+          <p:cNvPr id="76" name="Panel 76"/>
+          <p:cNvSpPr/>
+          <p:nvPr/>
+        </p:nvSpPr>
+        <p:spPr>
+          <a:xfrm>
+            <a:off x="9210675" y="3476625"/>
+            <a:ext cx="1285875" cy="361950"/>
+          </a:xfrm>
+          <a:prstGeom prst="rect">
+            <a:avLst/>
+          </a:prstGeom>
+          <a:solidFill>
+            <a:srgbClr val="0B0E12"/>
+          </a:solidFill>
+          <a:ln w="9525">
+            <a:solidFill>
+              <a:srgbClr val="2A3038"/>
+            </a:solidFill>
+          </a:ln>
+        </p:spPr>
+        <p:txBody>
+          <a:bodyPr/>
+          <a:lstStyle/>
+          <a:p/>
+        </p:txBody>
+      </p:sp>
+      <p:sp>
+        <p:nvSpPr>
+          <p:cNvPr id="77" name="Text 77"/>
+          <p:cNvSpPr txBox="1"/>
+          <p:nvPr/>
+        </p:nvSpPr>
+        <p:spPr>
+          <a:xfrm>
+            <a:off x="9277350" y="3562350"/>
+            <a:ext cx="1152525" cy="171450"/>
+          </a:xfrm>
+          <a:prstGeom prst="rect">
+            <a:avLst/>
+          </a:prstGeom>
+          <a:noFill/>
+          <a:ln>
+            <a:noFill/>
+          </a:ln>
+        </p:spPr>
+        <p:txBody>
+          <a:bodyPr wrap="square" anchor="t">
+            <a:spAutoFit/>
+          </a:bodyPr>
+          <a:lstStyle/>
+          <a:p>
+            <a:pPr algn="r"/>
+            <a:r>
+              <a:rPr lang="ko-KR" sz="1100" b="1">
+                <a:solidFill>
+                  <a:srgbClr val="FF4D5E"/>
+                </a:solidFill>
+                <a:latin typeface="Malgun Gothic"/>
+                <a:ea typeface="Malgun Gothic"/>
+              </a:rPr>
+              <a:t>-27.01pp</a:t>
+            </a:r>
+            <a:endParaRPr lang="ko-KR" sz="1100"/>
+          </a:p>
+        </p:txBody>
+      </p:sp>
+      <p:sp>
+        <p:nvSpPr>
+          <p:cNvPr id="78" name="Panel 78"/>
+          <p:cNvSpPr/>
+          <p:nvPr/>
+        </p:nvSpPr>
+        <p:spPr>
+          <a:xfrm>
+            <a:off x="400050" y="3838575"/>
+            <a:ext cx="2381250" cy="361950"/>
+          </a:xfrm>
+          <a:prstGeom prst="rect">
+            <a:avLst/>
+          </a:prstGeom>
+          <a:solidFill>
+            <a:srgbClr val="101318"/>
+          </a:solidFill>
+          <a:ln w="9525">
+            <a:solidFill>
+              <a:srgbClr val="2A3038"/>
+            </a:solidFill>
+          </a:ln>
+        </p:spPr>
+        <p:txBody>
+          <a:bodyPr/>
+          <a:lstStyle/>
+          <a:p/>
+        </p:txBody>
+      </p:sp>
+      <p:sp>
+        <p:nvSpPr>
+          <p:cNvPr id="79" name="Text 79"/>
+          <p:cNvSpPr txBox="1"/>
+          <p:nvPr/>
+        </p:nvSpPr>
+        <p:spPr>
+          <a:xfrm>
+            <a:off x="466725" y="3924300"/>
+            <a:ext cx="2247900" cy="171450"/>
+          </a:xfrm>
+          <a:prstGeom prst="rect">
+            <a:avLst/>
+          </a:prstGeom>
+          <a:noFill/>
+          <a:ln>
+            <a:noFill/>
+          </a:ln>
+        </p:spPr>
+        <p:txBody>
+          <a:bodyPr wrap="square" anchor="t">
+            <a:spAutoFit/>
+          </a:bodyPr>
+          <a:lstStyle/>
+          <a:p>
+            <a:pPr algn="l"/>
+            <a:r>
+              <a:rPr lang="ko-KR" sz="1100">
+                <a:solidFill>
+                  <a:srgbClr val="F2F5F8"/>
+                </a:solidFill>
+                <a:latin typeface="Malgun Gothic"/>
+                <a:ea typeface="Malgun Gothic"/>
+              </a:rPr>
+              <a:t>마이티 다이나믹퀀트액티브</a:t>
+            </a:r>
+            <a:endParaRPr lang="ko-KR" sz="1100"/>
+          </a:p>
+        </p:txBody>
+      </p:sp>
+      <p:sp>
+        <p:nvSpPr>
+          <p:cNvPr id="80" name="Panel 80"/>
+          <p:cNvSpPr/>
+          <p:nvPr/>
+        </p:nvSpPr>
+        <p:spPr>
+          <a:xfrm>
+            <a:off x="2781300" y="3838575"/>
+            <a:ext cx="3095625" cy="361950"/>
+          </a:xfrm>
+          <a:prstGeom prst="rect">
+            <a:avLst/>
+          </a:prstGeom>
+          <a:solidFill>
+            <a:srgbClr val="101318"/>
+          </a:solidFill>
+          <a:ln w="9525">
+            <a:solidFill>
+              <a:srgbClr val="2A3038"/>
+            </a:solidFill>
+          </a:ln>
+        </p:spPr>
+        <p:txBody>
+          <a:bodyPr/>
+          <a:lstStyle/>
+          <a:p/>
+        </p:txBody>
+      </p:sp>
+      <p:sp>
+        <p:nvSpPr>
+          <p:cNvPr id="81" name="Text 81"/>
+          <p:cNvSpPr txBox="1"/>
+          <p:nvPr/>
+        </p:nvSpPr>
+        <p:spPr>
+          <a:xfrm>
+            <a:off x="2847975" y="3924300"/>
+            <a:ext cx="2962275" cy="171450"/>
+          </a:xfrm>
+          <a:prstGeom prst="rect">
+            <a:avLst/>
+          </a:prstGeom>
+          <a:noFill/>
+          <a:ln>
+            <a:noFill/>
+          </a:ln>
+        </p:spPr>
+        <p:txBody>
+          <a:bodyPr wrap="square" anchor="t">
+            <a:spAutoFit/>
+          </a:bodyPr>
+          <a:lstStyle/>
+          <a:p>
+            <a:pPr algn="l"/>
+            <a:r>
+              <a:rPr lang="ko-KR" sz="1100">
+                <a:solidFill>
+                  <a:srgbClr val="F2F5F8"/>
+                </a:solidFill>
+                <a:latin typeface="Malgun Gothic"/>
+                <a:ea typeface="Malgun Gothic"/>
+              </a:rPr>
+              <a:t>감소 삼성전자</a:t>
+            </a:r>
+            <a:endParaRPr lang="ko-KR" sz="1100"/>
+          </a:p>
+        </p:txBody>
+      </p:sp>
+      <p:sp>
+        <p:nvSpPr>
+          <p:cNvPr id="82" name="Panel 82"/>
+          <p:cNvSpPr/>
+          <p:nvPr/>
+        </p:nvSpPr>
+        <p:spPr>
+          <a:xfrm>
+            <a:off x="5876925" y="3838575"/>
+            <a:ext cx="1047750" cy="361950"/>
+          </a:xfrm>
+          <a:prstGeom prst="rect">
+            <a:avLst/>
+          </a:prstGeom>
+          <a:solidFill>
+            <a:srgbClr val="101318"/>
+          </a:solidFill>
+          <a:ln w="9525">
+            <a:solidFill>
+              <a:srgbClr val="2A3038"/>
+            </a:solidFill>
+          </a:ln>
+        </p:spPr>
+        <p:txBody>
+          <a:bodyPr/>
+          <a:lstStyle/>
+          <a:p/>
+        </p:txBody>
+      </p:sp>
+      <p:sp>
+        <p:nvSpPr>
+          <p:cNvPr id="83" name="Text 83"/>
+          <p:cNvSpPr txBox="1"/>
+          <p:nvPr/>
+        </p:nvSpPr>
+        <p:spPr>
+          <a:xfrm>
+            <a:off x="5943600" y="3924300"/>
+            <a:ext cx="914400" cy="171450"/>
+          </a:xfrm>
+          <a:prstGeom prst="rect">
+            <a:avLst/>
+          </a:prstGeom>
+          <a:noFill/>
+          <a:ln>
+            <a:noFill/>
+          </a:ln>
+        </p:spPr>
+        <p:txBody>
+          <a:bodyPr wrap="square" anchor="t">
+            <a:spAutoFit/>
+          </a:bodyPr>
+          <a:lstStyle/>
+          <a:p>
+            <a:pPr algn="l"/>
+            <a:r>
+              <a:rPr lang="ko-KR" sz="1100">
+                <a:solidFill>
+                  <a:srgbClr val="F2F5F8"/>
+                </a:solidFill>
+                <a:latin typeface="Malgun Gothic"/>
+                <a:ea typeface="Malgun Gothic"/>
+              </a:rPr>
+              <a:t>005930</a:t>
+            </a:r>
+            <a:endParaRPr lang="ko-KR" sz="1100"/>
+          </a:p>
+        </p:txBody>
+      </p:sp>
+      <p:sp>
+        <p:nvSpPr>
+          <p:cNvPr id="84" name="Panel 84"/>
+          <p:cNvSpPr/>
+          <p:nvPr/>
+        </p:nvSpPr>
+        <p:spPr>
+          <a:xfrm>
+            <a:off x="6924675" y="3838575"/>
+            <a:ext cx="1143000" cy="361950"/>
+          </a:xfrm>
+          <a:prstGeom prst="rect">
+            <a:avLst/>
+          </a:prstGeom>
+          <a:solidFill>
+            <a:srgbClr val="101318"/>
+          </a:solidFill>
+          <a:ln w="9525">
+            <a:solidFill>
+              <a:srgbClr val="2A3038"/>
+            </a:solidFill>
+          </a:ln>
+        </p:spPr>
+        <p:txBody>
+          <a:bodyPr/>
+          <a:lstStyle/>
+          <a:p/>
+        </p:txBody>
+      </p:sp>
+      <p:sp>
+        <p:nvSpPr>
+          <p:cNvPr id="85" name="Text 85"/>
+          <p:cNvSpPr txBox="1"/>
+          <p:nvPr/>
+        </p:nvSpPr>
+        <p:spPr>
+          <a:xfrm>
+            <a:off x="6991350" y="3924300"/>
+            <a:ext cx="1009650" cy="171450"/>
+          </a:xfrm>
+          <a:prstGeom prst="rect">
+            <a:avLst/>
+          </a:prstGeom>
+          <a:noFill/>
+          <a:ln>
+            <a:noFill/>
+          </a:ln>
+        </p:spPr>
+        <p:txBody>
+          <a:bodyPr wrap="square" anchor="t">
+            <a:spAutoFit/>
+          </a:bodyPr>
+          <a:lstStyle/>
+          <a:p>
+            <a:pPr algn="r"/>
+            <a:r>
+              <a:rPr lang="ko-KR" sz="1100">
+                <a:solidFill>
+                  <a:srgbClr val="F2F5F8"/>
+                </a:solidFill>
+                <a:latin typeface="Malgun Gothic"/>
+                <a:ea typeface="Malgun Gothic"/>
+              </a:rPr>
+              <a:t>26.25%</a:t>
+            </a:r>
+            <a:endParaRPr lang="ko-KR" sz="1100"/>
+          </a:p>
+        </p:txBody>
+      </p:sp>
+      <p:sp>
+        <p:nvSpPr>
+          <p:cNvPr id="86" name="Panel 86"/>
+          <p:cNvSpPr/>
+          <p:nvPr/>
+        </p:nvSpPr>
+        <p:spPr>
+          <a:xfrm>
+            <a:off x="8067675" y="3838575"/>
+            <a:ext cx="1143000" cy="361950"/>
+          </a:xfrm>
+          <a:prstGeom prst="rect">
+            <a:avLst/>
+          </a:prstGeom>
+          <a:solidFill>
+            <a:srgbClr val="101318"/>
+          </a:solidFill>
+          <a:ln w="9525">
+            <a:solidFill>
+              <a:srgbClr val="2A3038"/>
+            </a:solidFill>
+          </a:ln>
+        </p:spPr>
+        <p:txBody>
+          <a:bodyPr/>
+          <a:lstStyle/>
+          <a:p/>
+        </p:txBody>
+      </p:sp>
+      <p:sp>
+        <p:nvSpPr>
+          <p:cNvPr id="87" name="Text 87"/>
+          <p:cNvSpPr txBox="1"/>
+          <p:nvPr/>
+        </p:nvSpPr>
+        <p:spPr>
+          <a:xfrm>
+            <a:off x="8134350" y="3924300"/>
+            <a:ext cx="1009650" cy="171450"/>
+          </a:xfrm>
+          <a:prstGeom prst="rect">
+            <a:avLst/>
+          </a:prstGeom>
+          <a:noFill/>
+          <a:ln>
+            <a:noFill/>
+          </a:ln>
+        </p:spPr>
+        <p:txBody>
+          <a:bodyPr wrap="square" anchor="t">
+            <a:spAutoFit/>
+          </a:bodyPr>
+          <a:lstStyle/>
+          <a:p>
+            <a:pPr algn="r"/>
+            <a:r>
+              <a:rPr lang="ko-KR" sz="1100">
+                <a:solidFill>
+                  <a:srgbClr val="F2F5F8"/>
+                </a:solidFill>
+                <a:latin typeface="Malgun Gothic"/>
+                <a:ea typeface="Malgun Gothic"/>
+              </a:rPr>
+              <a:t>0.00%</a:t>
+            </a:r>
+            <a:endParaRPr lang="ko-KR" sz="1100"/>
+          </a:p>
+        </p:txBody>
+      </p:sp>
+      <p:sp>
+        <p:nvSpPr>
+          <p:cNvPr id="88" name="Panel 88"/>
+          <p:cNvSpPr/>
+          <p:nvPr/>
+        </p:nvSpPr>
+        <p:spPr>
+          <a:xfrm>
+            <a:off x="9210675" y="3838575"/>
+            <a:ext cx="1285875" cy="361950"/>
+          </a:xfrm>
+          <a:prstGeom prst="rect">
+            <a:avLst/>
+          </a:prstGeom>
+          <a:solidFill>
+            <a:srgbClr val="101318"/>
+          </a:solidFill>
+          <a:ln w="9525">
+            <a:solidFill>
+              <a:srgbClr val="2A3038"/>
+            </a:solidFill>
+          </a:ln>
+        </p:spPr>
+        <p:txBody>
+          <a:bodyPr/>
+          <a:lstStyle/>
+          <a:p/>
+        </p:txBody>
+      </p:sp>
+      <p:sp>
+        <p:nvSpPr>
+          <p:cNvPr id="89" name="Text 89"/>
+          <p:cNvSpPr txBox="1"/>
+          <p:nvPr/>
+        </p:nvSpPr>
+        <p:spPr>
+          <a:xfrm>
+            <a:off x="9277350" y="3924300"/>
+            <a:ext cx="1152525" cy="171450"/>
+          </a:xfrm>
+          <a:prstGeom prst="rect">
+            <a:avLst/>
+          </a:prstGeom>
+          <a:noFill/>
+          <a:ln>
+            <a:noFill/>
+          </a:ln>
+        </p:spPr>
+        <p:txBody>
+          <a:bodyPr wrap="square" anchor="t">
+            <a:spAutoFit/>
+          </a:bodyPr>
+          <a:lstStyle/>
+          <a:p>
+            <a:pPr algn="r"/>
+            <a:r>
+              <a:rPr lang="ko-KR" sz="1100" b="1">
+                <a:solidFill>
+                  <a:srgbClr val="FF4D5E"/>
+                </a:solidFill>
+                <a:latin typeface="Malgun Gothic"/>
+                <a:ea typeface="Malgun Gothic"/>
+              </a:rPr>
+              <a:t>-26.25pp</a:t>
+            </a:r>
+            <a:endParaRPr lang="ko-KR" sz="1100"/>
+          </a:p>
+        </p:txBody>
+      </p:sp>
+      <p:sp>
+        <p:nvSpPr>
+          <p:cNvPr id="90" name="Panel 90"/>
+          <p:cNvSpPr/>
+          <p:nvPr/>
+        </p:nvSpPr>
+        <p:spPr>
+          <a:xfrm>
+            <a:off x="400050" y="4200525"/>
+            <a:ext cx="2381250" cy="361950"/>
+          </a:xfrm>
+          <a:prstGeom prst="rect">
+            <a:avLst/>
+          </a:prstGeom>
+          <a:solidFill>
+            <a:srgbClr val="0B0E12"/>
+          </a:solidFill>
+          <a:ln w="9525">
+            <a:solidFill>
+              <a:srgbClr val="2A3038"/>
+            </a:solidFill>
+          </a:ln>
+        </p:spPr>
+        <p:txBody>
+          <a:bodyPr/>
+          <a:lstStyle/>
+          <a:p/>
+        </p:txBody>
+      </p:sp>
+      <p:sp>
+        <p:nvSpPr>
+          <p:cNvPr id="91" name="Text 91"/>
+          <p:cNvSpPr txBox="1"/>
+          <p:nvPr/>
+        </p:nvSpPr>
+        <p:spPr>
+          <a:xfrm>
+            <a:off x="466725" y="4286250"/>
+            <a:ext cx="2247900" cy="171450"/>
+          </a:xfrm>
+          <a:prstGeom prst="rect">
+            <a:avLst/>
+          </a:prstGeom>
+          <a:noFill/>
+          <a:ln>
+            <a:noFill/>
+          </a:ln>
+        </p:spPr>
+        <p:txBody>
+          <a:bodyPr wrap="square" anchor="t">
+            <a:spAutoFit/>
+          </a:bodyPr>
+          <a:lstStyle/>
+          <a:p>
+            <a:pPr algn="l"/>
+            <a:r>
+              <a:rPr lang="ko-KR" sz="1100">
+                <a:solidFill>
+                  <a:srgbClr val="F2F5F8"/>
+                </a:solidFill>
+                <a:latin typeface="Malgun Gothic"/>
+                <a:ea typeface="Malgun Gothic"/>
+              </a:rPr>
+              <a:t>TIGER AI코리아그로스액티브</a:t>
+            </a:r>
+            <a:endParaRPr lang="ko-KR" sz="1100"/>
+          </a:p>
+        </p:txBody>
+      </p:sp>
+      <p:sp>
+        <p:nvSpPr>
+          <p:cNvPr id="92" name="Panel 92"/>
+          <p:cNvSpPr/>
+          <p:nvPr/>
+        </p:nvSpPr>
+        <p:spPr>
+          <a:xfrm>
+            <a:off x="2781300" y="4200525"/>
+            <a:ext cx="3095625" cy="361950"/>
+          </a:xfrm>
+          <a:prstGeom prst="rect">
+            <a:avLst/>
+          </a:prstGeom>
+          <a:solidFill>
+            <a:srgbClr val="0B0E12"/>
+          </a:solidFill>
+          <a:ln w="9525">
+            <a:solidFill>
+              <a:srgbClr val="2A3038"/>
+            </a:solidFill>
+          </a:ln>
+        </p:spPr>
+        <p:txBody>
+          <a:bodyPr/>
+          <a:lstStyle/>
+          <a:p/>
+        </p:txBody>
+      </p:sp>
+      <p:sp>
+        <p:nvSpPr>
+          <p:cNvPr id="93" name="Text 93"/>
+          <p:cNvSpPr txBox="1"/>
+          <p:nvPr/>
+        </p:nvSpPr>
+        <p:spPr>
+          <a:xfrm>
+            <a:off x="2847975" y="4286250"/>
+            <a:ext cx="2962275" cy="171450"/>
+          </a:xfrm>
+          <a:prstGeom prst="rect">
+            <a:avLst/>
+          </a:prstGeom>
+          <a:noFill/>
+          <a:ln>
+            <a:noFill/>
+          </a:ln>
+        </p:spPr>
+        <p:txBody>
+          <a:bodyPr wrap="square" anchor="t">
+            <a:spAutoFit/>
+          </a:bodyPr>
+          <a:lstStyle/>
+          <a:p>
+            <a:pPr algn="l"/>
+            <a:r>
+              <a:rPr lang="ko-KR" sz="1100">
+                <a:solidFill>
+                  <a:srgbClr val="F2F5F8"/>
+                </a:solidFill>
+                <a:latin typeface="Malgun Gothic"/>
+                <a:ea typeface="Malgun Gothic"/>
+              </a:rPr>
+              <a:t>감소 삼성전자</a:t>
+            </a:r>
+            <a:endParaRPr lang="ko-KR" sz="1100"/>
+          </a:p>
+        </p:txBody>
+      </p:sp>
+      <p:sp>
+        <p:nvSpPr>
+          <p:cNvPr id="94" name="Panel 94"/>
+          <p:cNvSpPr/>
+          <p:nvPr/>
+        </p:nvSpPr>
+        <p:spPr>
+          <a:xfrm>
+            <a:off x="5876925" y="4200525"/>
+            <a:ext cx="1047750" cy="361950"/>
+          </a:xfrm>
+          <a:prstGeom prst="rect">
+            <a:avLst/>
+          </a:prstGeom>
+          <a:solidFill>
+            <a:srgbClr val="0B0E12"/>
+          </a:solidFill>
+          <a:ln w="9525">
+            <a:solidFill>
+              <a:srgbClr val="2A3038"/>
+            </a:solidFill>
+          </a:ln>
+        </p:spPr>
+        <p:txBody>
+          <a:bodyPr/>
+          <a:lstStyle/>
+          <a:p/>
+        </p:txBody>
+      </p:sp>
+      <p:sp>
+        <p:nvSpPr>
+          <p:cNvPr id="95" name="Text 95"/>
+          <p:cNvSpPr txBox="1"/>
+          <p:nvPr/>
+        </p:nvSpPr>
+        <p:spPr>
+          <a:xfrm>
+            <a:off x="5943600" y="4286250"/>
+            <a:ext cx="914400" cy="171450"/>
+          </a:xfrm>
+          <a:prstGeom prst="rect">
+            <a:avLst/>
+          </a:prstGeom>
+          <a:noFill/>
+          <a:ln>
+            <a:noFill/>
+          </a:ln>
+        </p:spPr>
+        <p:txBody>
+          <a:bodyPr wrap="square" anchor="t">
+            <a:spAutoFit/>
+          </a:bodyPr>
+          <a:lstStyle/>
+          <a:p>
+            <a:pPr algn="l"/>
+            <a:r>
+              <a:rPr lang="ko-KR" sz="1100">
+                <a:solidFill>
+                  <a:srgbClr val="F2F5F8"/>
+                </a:solidFill>
+                <a:latin typeface="Malgun Gothic"/>
+                <a:ea typeface="Malgun Gothic"/>
+              </a:rPr>
+              <a:t>005930</a:t>
+            </a:r>
+            <a:endParaRPr lang="ko-KR" sz="1100"/>
+          </a:p>
+        </p:txBody>
+      </p:sp>
+      <p:sp>
+        <p:nvSpPr>
+          <p:cNvPr id="96" name="Panel 96"/>
+          <p:cNvSpPr/>
+          <p:nvPr/>
+        </p:nvSpPr>
+        <p:spPr>
+          <a:xfrm>
+            <a:off x="6924675" y="4200525"/>
+            <a:ext cx="1143000" cy="361950"/>
+          </a:xfrm>
+          <a:prstGeom prst="rect">
+            <a:avLst/>
+          </a:prstGeom>
+          <a:solidFill>
+            <a:srgbClr val="0B0E12"/>
+          </a:solidFill>
+          <a:ln w="9525">
+            <a:solidFill>
+              <a:srgbClr val="2A3038"/>
+            </a:solidFill>
+          </a:ln>
+        </p:spPr>
+        <p:txBody>
+          <a:bodyPr/>
+          <a:lstStyle/>
+          <a:p/>
+        </p:txBody>
+      </p:sp>
+      <p:sp>
+        <p:nvSpPr>
+          <p:cNvPr id="97" name="Text 97"/>
+          <p:cNvSpPr txBox="1"/>
+          <p:nvPr/>
+        </p:nvSpPr>
+        <p:spPr>
+          <a:xfrm>
+            <a:off x="6991350" y="4286250"/>
+            <a:ext cx="1009650" cy="171450"/>
+          </a:xfrm>
+          <a:prstGeom prst="rect">
+            <a:avLst/>
+          </a:prstGeom>
+          <a:noFill/>
+          <a:ln>
+            <a:noFill/>
+          </a:ln>
+        </p:spPr>
+        <p:txBody>
+          <a:bodyPr wrap="square" anchor="t">
+            <a:spAutoFit/>
+          </a:bodyPr>
+          <a:lstStyle/>
+          <a:p>
+            <a:pPr algn="r"/>
+            <a:r>
+              <a:rPr lang="ko-KR" sz="1100">
+                <a:solidFill>
+                  <a:srgbClr val="F2F5F8"/>
+                </a:solidFill>
+                <a:latin typeface="Malgun Gothic"/>
+                <a:ea typeface="Malgun Gothic"/>
+              </a:rPr>
+              <a:t>25.73%</a:t>
+            </a:r>
+            <a:endParaRPr lang="ko-KR" sz="1100"/>
+          </a:p>
+        </p:txBody>
+      </p:sp>
+      <p:sp>
+        <p:nvSpPr>
+          <p:cNvPr id="98" name="Panel 98"/>
+          <p:cNvSpPr/>
+          <p:nvPr/>
+        </p:nvSpPr>
+        <p:spPr>
+          <a:xfrm>
+            <a:off x="8067675" y="4200525"/>
+            <a:ext cx="1143000" cy="361950"/>
+          </a:xfrm>
+          <a:prstGeom prst="rect">
+            <a:avLst/>
+          </a:prstGeom>
+          <a:solidFill>
+            <a:srgbClr val="0B0E12"/>
+          </a:solidFill>
+          <a:ln w="9525">
+            <a:solidFill>
+              <a:srgbClr val="2A3038"/>
+            </a:solidFill>
+          </a:ln>
+        </p:spPr>
+        <p:txBody>
+          <a:bodyPr/>
+          <a:lstStyle/>
+          <a:p/>
+        </p:txBody>
+      </p:sp>
+      <p:sp>
+        <p:nvSpPr>
+          <p:cNvPr id="99" name="Text 99"/>
+          <p:cNvSpPr txBox="1"/>
+          <p:nvPr/>
+        </p:nvSpPr>
+        <p:spPr>
+          <a:xfrm>
+            <a:off x="8134350" y="4286250"/>
+            <a:ext cx="1009650" cy="171450"/>
+          </a:xfrm>
+          <a:prstGeom prst="rect">
+            <a:avLst/>
+          </a:prstGeom>
+          <a:noFill/>
+          <a:ln>
+            <a:noFill/>
+          </a:ln>
+        </p:spPr>
+        <p:txBody>
+          <a:bodyPr wrap="square" anchor="t">
+            <a:spAutoFit/>
+          </a:bodyPr>
+          <a:lstStyle/>
+          <a:p>
+            <a:pPr algn="r"/>
+            <a:r>
+              <a:rPr lang="ko-KR" sz="1100">
+                <a:solidFill>
+                  <a:srgbClr val="F2F5F8"/>
+                </a:solidFill>
+                <a:latin typeface="Malgun Gothic"/>
+                <a:ea typeface="Malgun Gothic"/>
+              </a:rPr>
+              <a:t>0.00%</a:t>
+            </a:r>
+            <a:endParaRPr lang="ko-KR" sz="1100"/>
+          </a:p>
+        </p:txBody>
+      </p:sp>
+      <p:sp>
+        <p:nvSpPr>
+          <p:cNvPr id="100" name="Panel 100"/>
+          <p:cNvSpPr/>
+          <p:nvPr/>
+        </p:nvSpPr>
+        <p:spPr>
+          <a:xfrm>
+            <a:off x="9210675" y="4200525"/>
+            <a:ext cx="1285875" cy="361950"/>
+          </a:xfrm>
+          <a:prstGeom prst="rect">
+            <a:avLst/>
+          </a:prstGeom>
+          <a:solidFill>
+            <a:srgbClr val="0B0E12"/>
+          </a:solidFill>
+          <a:ln w="9525">
+            <a:solidFill>
+              <a:srgbClr val="2A3038"/>
+            </a:solidFill>
+          </a:ln>
+        </p:spPr>
+        <p:txBody>
+          <a:bodyPr/>
+          <a:lstStyle/>
+          <a:p/>
+        </p:txBody>
+      </p:sp>
+      <p:sp>
+        <p:nvSpPr>
+          <p:cNvPr id="101" name="Text 101"/>
+          <p:cNvSpPr txBox="1"/>
+          <p:nvPr/>
+        </p:nvSpPr>
+        <p:spPr>
+          <a:xfrm>
+            <a:off x="9277350" y="4286250"/>
+            <a:ext cx="1152525" cy="171450"/>
+          </a:xfrm>
+          <a:prstGeom prst="rect">
+            <a:avLst/>
+          </a:prstGeom>
+          <a:noFill/>
+          <a:ln>
+            <a:noFill/>
+          </a:ln>
+        </p:spPr>
+        <p:txBody>
+          <a:bodyPr wrap="square" anchor="t">
+            <a:spAutoFit/>
+          </a:bodyPr>
+          <a:lstStyle/>
+          <a:p>
+            <a:pPr algn="r"/>
+            <a:r>
+              <a:rPr lang="ko-KR" sz="1100" b="1">
+                <a:solidFill>
+                  <a:srgbClr val="FF4D5E"/>
+                </a:solidFill>
+                <a:latin typeface="Malgun Gothic"/>
+                <a:ea typeface="Malgun Gothic"/>
+              </a:rPr>
+              <a:t>-25.73pp</a:t>
+            </a:r>
+            <a:endParaRPr lang="ko-KR" sz="1100"/>
+          </a:p>
+        </p:txBody>
+      </p:sp>
+      <p:sp>
+        <p:nvSpPr>
+          <p:cNvPr id="102" name="Panel 102"/>
+          <p:cNvSpPr/>
+          <p:nvPr/>
+        </p:nvSpPr>
+        <p:spPr>
+          <a:xfrm>
+            <a:off x="400050" y="4562475"/>
+            <a:ext cx="2381250" cy="361950"/>
+          </a:xfrm>
+          <a:prstGeom prst="rect">
+            <a:avLst/>
+          </a:prstGeom>
+          <a:solidFill>
+            <a:srgbClr val="101318"/>
+          </a:solidFill>
+          <a:ln w="9525">
+            <a:solidFill>
+              <a:srgbClr val="2A3038"/>
+            </a:solidFill>
+          </a:ln>
+        </p:spPr>
+        <p:txBody>
+          <a:bodyPr/>
+          <a:lstStyle/>
+          <a:p/>
+        </p:txBody>
+      </p:sp>
+      <p:sp>
+        <p:nvSpPr>
+          <p:cNvPr id="103" name="Text 103"/>
+          <p:cNvSpPr txBox="1"/>
+          <p:nvPr/>
+        </p:nvSpPr>
+        <p:spPr>
+          <a:xfrm>
+            <a:off x="466725" y="4648200"/>
+            <a:ext cx="2247900" cy="171450"/>
+          </a:xfrm>
+          <a:prstGeom prst="rect">
+            <a:avLst/>
+          </a:prstGeom>
+          <a:noFill/>
+          <a:ln>
+            <a:noFill/>
+          </a:ln>
+        </p:spPr>
+        <p:txBody>
+          <a:bodyPr wrap="square" anchor="t">
+            <a:spAutoFit/>
+          </a:bodyPr>
+          <a:lstStyle/>
+          <a:p>
+            <a:pPr algn="l"/>
+            <a:r>
+              <a:rPr lang="ko-KR" sz="1100">
+                <a:solidFill>
+                  <a:srgbClr val="F2F5F8"/>
+                </a:solidFill>
+                <a:latin typeface="Malgun Gothic"/>
+                <a:ea typeface="Malgun Gothic"/>
+              </a:rPr>
+              <a:t>마이다스 코스피액티브</a:t>
+            </a:r>
+            <a:endParaRPr lang="ko-KR" sz="1100"/>
+          </a:p>
+        </p:txBody>
+      </p:sp>
+      <p:sp>
+        <p:nvSpPr>
+          <p:cNvPr id="104" name="Panel 104"/>
+          <p:cNvSpPr/>
+          <p:nvPr/>
+        </p:nvSpPr>
+        <p:spPr>
+          <a:xfrm>
+            <a:off x="2781300" y="4562475"/>
+            <a:ext cx="3095625" cy="361950"/>
+          </a:xfrm>
+          <a:prstGeom prst="rect">
+            <a:avLst/>
+          </a:prstGeom>
+          <a:solidFill>
+            <a:srgbClr val="101318"/>
+          </a:solidFill>
+          <a:ln w="9525">
+            <a:solidFill>
+              <a:srgbClr val="2A3038"/>
+            </a:solidFill>
+          </a:ln>
+        </p:spPr>
+        <p:txBody>
+          <a:bodyPr/>
+          <a:lstStyle/>
+          <a:p/>
+        </p:txBody>
+      </p:sp>
+      <p:sp>
+        <p:nvSpPr>
+          <p:cNvPr id="105" name="Text 105"/>
+          <p:cNvSpPr txBox="1"/>
+          <p:nvPr/>
+        </p:nvSpPr>
+        <p:spPr>
+          <a:xfrm>
+            <a:off x="2847975" y="4648200"/>
+            <a:ext cx="2962275" cy="171450"/>
+          </a:xfrm>
+          <a:prstGeom prst="rect">
+            <a:avLst/>
+          </a:prstGeom>
+          <a:noFill/>
+          <a:ln>
+            <a:noFill/>
+          </a:ln>
+        </p:spPr>
+        <p:txBody>
+          <a:bodyPr wrap="square" anchor="t">
+            <a:spAutoFit/>
+          </a:bodyPr>
+          <a:lstStyle/>
+          <a:p>
+            <a:pPr algn="l"/>
+            <a:r>
+              <a:rPr lang="ko-KR" sz="1100">
+                <a:solidFill>
+                  <a:srgbClr val="F2F5F8"/>
+                </a:solidFill>
+                <a:latin typeface="Malgun Gothic"/>
+                <a:ea typeface="Malgun Gothic"/>
+              </a:rPr>
+              <a:t>감소 삼성전자</a:t>
+            </a:r>
+            <a:endParaRPr lang="ko-KR" sz="1100"/>
+          </a:p>
+        </p:txBody>
+      </p:sp>
+      <p:sp>
+        <p:nvSpPr>
+          <p:cNvPr id="106" name="Panel 106"/>
+          <p:cNvSpPr/>
+          <p:nvPr/>
+        </p:nvSpPr>
+        <p:spPr>
+          <a:xfrm>
+            <a:off x="5876925" y="4562475"/>
+            <a:ext cx="1047750" cy="361950"/>
+          </a:xfrm>
+          <a:prstGeom prst="rect">
+            <a:avLst/>
+          </a:prstGeom>
+          <a:solidFill>
+            <a:srgbClr val="101318"/>
+          </a:solidFill>
+          <a:ln w="9525">
+            <a:solidFill>
+              <a:srgbClr val="2A3038"/>
+            </a:solidFill>
+          </a:ln>
+        </p:spPr>
+        <p:txBody>
+          <a:bodyPr/>
+          <a:lstStyle/>
+          <a:p/>
+        </p:txBody>
+      </p:sp>
+      <p:sp>
+        <p:nvSpPr>
+          <p:cNvPr id="107" name="Text 107"/>
+          <p:cNvSpPr txBox="1"/>
+          <p:nvPr/>
+        </p:nvSpPr>
+        <p:spPr>
+          <a:xfrm>
+            <a:off x="5943600" y="4648200"/>
+            <a:ext cx="914400" cy="171450"/>
+          </a:xfrm>
+          <a:prstGeom prst="rect">
+            <a:avLst/>
+          </a:prstGeom>
+          <a:noFill/>
+          <a:ln>
+            <a:noFill/>
+          </a:ln>
+        </p:spPr>
+        <p:txBody>
+          <a:bodyPr wrap="square" anchor="t">
+            <a:spAutoFit/>
+          </a:bodyPr>
+          <a:lstStyle/>
+          <a:p>
+            <a:pPr algn="l"/>
+            <a:r>
+              <a:rPr lang="ko-KR" sz="1100">
+                <a:solidFill>
+                  <a:srgbClr val="F2F5F8"/>
+                </a:solidFill>
+                <a:latin typeface="Malgun Gothic"/>
+                <a:ea typeface="Malgun Gothic"/>
+              </a:rPr>
+              <a:t>005930</a:t>
+            </a:r>
+            <a:endParaRPr lang="ko-KR" sz="1100"/>
+          </a:p>
+        </p:txBody>
+      </p:sp>
+      <p:sp>
+        <p:nvSpPr>
+          <p:cNvPr id="108" name="Panel 108"/>
+          <p:cNvSpPr/>
+          <p:nvPr/>
+        </p:nvSpPr>
+        <p:spPr>
+          <a:xfrm>
+            <a:off x="6924675" y="4562475"/>
+            <a:ext cx="1143000" cy="361950"/>
+          </a:xfrm>
+          <a:prstGeom prst="rect">
+            <a:avLst/>
+          </a:prstGeom>
+          <a:solidFill>
+            <a:srgbClr val="101318"/>
+          </a:solidFill>
+          <a:ln w="9525">
+            <a:solidFill>
+              <a:srgbClr val="2A3038"/>
+            </a:solidFill>
+          </a:ln>
+        </p:spPr>
+        <p:txBody>
+          <a:bodyPr/>
+          <a:lstStyle/>
+          <a:p/>
+        </p:txBody>
+      </p:sp>
+      <p:sp>
+        <p:nvSpPr>
+          <p:cNvPr id="109" name="Text 109"/>
+          <p:cNvSpPr txBox="1"/>
+          <p:nvPr/>
+        </p:nvSpPr>
+        <p:spPr>
+          <a:xfrm>
+            <a:off x="6991350" y="4648200"/>
+            <a:ext cx="1009650" cy="171450"/>
+          </a:xfrm>
+          <a:prstGeom prst="rect">
+            <a:avLst/>
+          </a:prstGeom>
+          <a:noFill/>
+          <a:ln>
+            <a:noFill/>
+          </a:ln>
+        </p:spPr>
+        <p:txBody>
+          <a:bodyPr wrap="square" anchor="t">
+            <a:spAutoFit/>
+          </a:bodyPr>
+          <a:lstStyle/>
+          <a:p>
+            <a:pPr algn="r"/>
+            <a:r>
+              <a:rPr lang="ko-KR" sz="1100">
+                <a:solidFill>
+                  <a:srgbClr val="F2F5F8"/>
+                </a:solidFill>
+                <a:latin typeface="Malgun Gothic"/>
+                <a:ea typeface="Malgun Gothic"/>
+              </a:rPr>
+              <a:t>25.27%</a:t>
+            </a:r>
+            <a:endParaRPr lang="ko-KR" sz="1100"/>
+          </a:p>
+        </p:txBody>
+      </p:sp>
+      <p:sp>
+        <p:nvSpPr>
+          <p:cNvPr id="110" name="Panel 110"/>
+          <p:cNvSpPr/>
+          <p:nvPr/>
+        </p:nvSpPr>
+        <p:spPr>
+          <a:xfrm>
+            <a:off x="8067675" y="4562475"/>
+            <a:ext cx="1143000" cy="361950"/>
+          </a:xfrm>
+          <a:prstGeom prst="rect">
+            <a:avLst/>
+          </a:prstGeom>
+          <a:solidFill>
+            <a:srgbClr val="101318"/>
+          </a:solidFill>
+          <a:ln w="9525">
+            <a:solidFill>
+              <a:srgbClr val="2A3038"/>
+            </a:solidFill>
+          </a:ln>
+        </p:spPr>
+        <p:txBody>
+          <a:bodyPr/>
+          <a:lstStyle/>
+          <a:p/>
+        </p:txBody>
+      </p:sp>
+      <p:sp>
+        <p:nvSpPr>
+          <p:cNvPr id="111" name="Text 111"/>
+          <p:cNvSpPr txBox="1"/>
+          <p:nvPr/>
+        </p:nvSpPr>
+        <p:spPr>
+          <a:xfrm>
+            <a:off x="8134350" y="4648200"/>
+            <a:ext cx="1009650" cy="171450"/>
+          </a:xfrm>
+          <a:prstGeom prst="rect">
+            <a:avLst/>
+          </a:prstGeom>
+          <a:noFill/>
+          <a:ln>
+            <a:noFill/>
+          </a:ln>
+        </p:spPr>
+        <p:txBody>
+          <a:bodyPr wrap="square" anchor="t">
+            <a:spAutoFit/>
+          </a:bodyPr>
+          <a:lstStyle/>
+          <a:p>
+            <a:pPr algn="r"/>
+            <a:r>
+              <a:rPr lang="ko-KR" sz="1100">
+                <a:solidFill>
+                  <a:srgbClr val="F2F5F8"/>
+                </a:solidFill>
+                <a:latin typeface="Malgun Gothic"/>
+                <a:ea typeface="Malgun Gothic"/>
+              </a:rPr>
+              <a:t>0.00%</a:t>
+            </a:r>
+            <a:endParaRPr lang="ko-KR" sz="1100"/>
+          </a:p>
+        </p:txBody>
+      </p:sp>
+      <p:sp>
+        <p:nvSpPr>
+          <p:cNvPr id="112" name="Panel 112"/>
+          <p:cNvSpPr/>
+          <p:nvPr/>
+        </p:nvSpPr>
+        <p:spPr>
+          <a:xfrm>
+            <a:off x="9210675" y="4562475"/>
+            <a:ext cx="1285875" cy="361950"/>
+          </a:xfrm>
+          <a:prstGeom prst="rect">
+            <a:avLst/>
+          </a:prstGeom>
+          <a:solidFill>
+            <a:srgbClr val="101318"/>
+          </a:solidFill>
+          <a:ln w="9525">
+            <a:solidFill>
+              <a:srgbClr val="2A3038"/>
+            </a:solidFill>
+          </a:ln>
+        </p:spPr>
+        <p:txBody>
+          <a:bodyPr/>
+          <a:lstStyle/>
+          <a:p/>
+        </p:txBody>
+      </p:sp>
+      <p:sp>
+        <p:nvSpPr>
+          <p:cNvPr id="113" name="Text 113"/>
+          <p:cNvSpPr txBox="1"/>
+          <p:nvPr/>
+        </p:nvSpPr>
+        <p:spPr>
+          <a:xfrm>
+            <a:off x="9277350" y="4648200"/>
+            <a:ext cx="1152525" cy="171450"/>
+          </a:xfrm>
+          <a:prstGeom prst="rect">
+            <a:avLst/>
+          </a:prstGeom>
+          <a:noFill/>
+          <a:ln>
+            <a:noFill/>
+          </a:ln>
+        </p:spPr>
+        <p:txBody>
+          <a:bodyPr wrap="square" anchor="t">
+            <a:spAutoFit/>
+          </a:bodyPr>
+          <a:lstStyle/>
+          <a:p>
+            <a:pPr algn="r"/>
+            <a:r>
+              <a:rPr lang="ko-KR" sz="1100" b="1">
+                <a:solidFill>
+                  <a:srgbClr val="FF4D5E"/>
+                </a:solidFill>
+                <a:latin typeface="Malgun Gothic"/>
+                <a:ea typeface="Malgun Gothic"/>
+              </a:rPr>
+              <a:t>-25.27pp</a:t>
+            </a:r>
+            <a:endParaRPr lang="ko-KR" sz="1100"/>
+          </a:p>
+        </p:txBody>
+      </p:sp>
+      <p:sp>
+        <p:nvSpPr>
+          <p:cNvPr id="114" name="Panel 114"/>
+          <p:cNvSpPr/>
+          <p:nvPr/>
+        </p:nvSpPr>
+        <p:spPr>
+          <a:xfrm>
+            <a:off x="400050" y="4924425"/>
+            <a:ext cx="2381250" cy="361950"/>
+          </a:xfrm>
+          <a:prstGeom prst="rect">
+            <a:avLst/>
+          </a:prstGeom>
+          <a:solidFill>
+            <a:srgbClr val="0B0E12"/>
+          </a:solidFill>
+          <a:ln w="9525">
+            <a:solidFill>
+              <a:srgbClr val="2A3038"/>
+            </a:solidFill>
+          </a:ln>
+        </p:spPr>
+        <p:txBody>
+          <a:bodyPr/>
+          <a:lstStyle/>
+          <a:p/>
+        </p:txBody>
+      </p:sp>
+      <p:sp>
+        <p:nvSpPr>
+          <p:cNvPr id="115" name="Text 115"/>
+          <p:cNvSpPr txBox="1"/>
+          <p:nvPr/>
+        </p:nvSpPr>
+        <p:spPr>
+          <a:xfrm>
+            <a:off x="466725" y="5010150"/>
+            <a:ext cx="2247900" cy="171450"/>
+          </a:xfrm>
+          <a:prstGeom prst="rect">
+            <a:avLst/>
+          </a:prstGeom>
+          <a:noFill/>
+          <a:ln>
+            <a:noFill/>
+          </a:ln>
+        </p:spPr>
+        <p:txBody>
+          <a:bodyPr wrap="square" anchor="t">
+            <a:spAutoFit/>
+          </a:bodyPr>
+          <a:lstStyle/>
+          <a:p>
+            <a:pPr algn="l"/>
+            <a:r>
+              <a:rPr lang="ko-KR" sz="1100">
+                <a:solidFill>
+                  <a:srgbClr val="F2F5F8"/>
+                </a:solidFill>
+                <a:latin typeface="Malgun Gothic"/>
+                <a:ea typeface="Malgun Gothic"/>
+              </a:rPr>
+              <a:t>ACE 라이프자산주주가치액티브</a:t>
+            </a:r>
+            <a:endParaRPr lang="ko-KR" sz="1100"/>
+          </a:p>
+        </p:txBody>
+      </p:sp>
+      <p:sp>
+        <p:nvSpPr>
+          <p:cNvPr id="116" name="Panel 116"/>
+          <p:cNvSpPr/>
+          <p:nvPr/>
+        </p:nvSpPr>
+        <p:spPr>
+          <a:xfrm>
+            <a:off x="2781300" y="4924425"/>
+            <a:ext cx="3095625" cy="361950"/>
+          </a:xfrm>
+          <a:prstGeom prst="rect">
+            <a:avLst/>
+          </a:prstGeom>
+          <a:solidFill>
+            <a:srgbClr val="0B0E12"/>
+          </a:solidFill>
+          <a:ln w="9525">
+            <a:solidFill>
+              <a:srgbClr val="2A3038"/>
+            </a:solidFill>
+          </a:ln>
+        </p:spPr>
+        <p:txBody>
+          <a:bodyPr/>
+          <a:lstStyle/>
+          <a:p/>
+        </p:txBody>
+      </p:sp>
+      <p:sp>
+        <p:nvSpPr>
+          <p:cNvPr id="117" name="Text 117"/>
+          <p:cNvSpPr txBox="1"/>
+          <p:nvPr/>
+        </p:nvSpPr>
+        <p:spPr>
+          <a:xfrm>
+            <a:off x="2847975" y="5010150"/>
+            <a:ext cx="2962275" cy="171450"/>
+          </a:xfrm>
+          <a:prstGeom prst="rect">
+            <a:avLst/>
+          </a:prstGeom>
+          <a:noFill/>
+          <a:ln>
+            <a:noFill/>
+          </a:ln>
+        </p:spPr>
+        <p:txBody>
+          <a:bodyPr wrap="square" anchor="t">
+            <a:spAutoFit/>
+          </a:bodyPr>
+          <a:lstStyle/>
+          <a:p>
+            <a:pPr algn="l"/>
+            <a:r>
+              <a:rPr lang="ko-KR" sz="1100">
+                <a:solidFill>
+                  <a:srgbClr val="F2F5F8"/>
+                </a:solidFill>
+                <a:latin typeface="Malgun Gothic"/>
+                <a:ea typeface="Malgun Gothic"/>
+              </a:rPr>
+              <a:t>감소 삼성전자</a:t>
+            </a:r>
+            <a:endParaRPr lang="ko-KR" sz="1100"/>
+          </a:p>
+        </p:txBody>
+      </p:sp>
+      <p:sp>
+        <p:nvSpPr>
+          <p:cNvPr id="118" name="Panel 118"/>
+          <p:cNvSpPr/>
+          <p:nvPr/>
+        </p:nvSpPr>
+        <p:spPr>
+          <a:xfrm>
+            <a:off x="5876925" y="4924425"/>
+            <a:ext cx="1047750" cy="361950"/>
+          </a:xfrm>
+          <a:prstGeom prst="rect">
+            <a:avLst/>
+          </a:prstGeom>
+          <a:solidFill>
+            <a:srgbClr val="0B0E12"/>
+          </a:solidFill>
+          <a:ln w="9525">
+            <a:solidFill>
+              <a:srgbClr val="2A3038"/>
+            </a:solidFill>
+          </a:ln>
+        </p:spPr>
+        <p:txBody>
+          <a:bodyPr/>
+          <a:lstStyle/>
+          <a:p/>
+        </p:txBody>
+      </p:sp>
+      <p:sp>
+        <p:nvSpPr>
+          <p:cNvPr id="119" name="Text 119"/>
+          <p:cNvSpPr txBox="1"/>
+          <p:nvPr/>
+        </p:nvSpPr>
+        <p:spPr>
+          <a:xfrm>
+            <a:off x="5943600" y="5010150"/>
+            <a:ext cx="914400" cy="171450"/>
+          </a:xfrm>
+          <a:prstGeom prst="rect">
+            <a:avLst/>
+          </a:prstGeom>
+          <a:noFill/>
+          <a:ln>
+            <a:noFill/>
+          </a:ln>
+        </p:spPr>
+        <p:txBody>
+          <a:bodyPr wrap="square" anchor="t">
+            <a:spAutoFit/>
+          </a:bodyPr>
+          <a:lstStyle/>
+          <a:p>
+            <a:pPr algn="l"/>
+            <a:r>
+              <a:rPr lang="ko-KR" sz="1100">
+                <a:solidFill>
+                  <a:srgbClr val="F2F5F8"/>
+                </a:solidFill>
+                <a:latin typeface="Malgun Gothic"/>
+                <a:ea typeface="Malgun Gothic"/>
+              </a:rPr>
+              <a:t>005930</a:t>
+            </a:r>
+            <a:endParaRPr lang="ko-KR" sz="1100"/>
+          </a:p>
+        </p:txBody>
+      </p:sp>
+      <p:sp>
+        <p:nvSpPr>
+          <p:cNvPr id="120" name="Panel 120"/>
+          <p:cNvSpPr/>
+          <p:nvPr/>
+        </p:nvSpPr>
+        <p:spPr>
+          <a:xfrm>
+            <a:off x="6924675" y="4924425"/>
+            <a:ext cx="1143000" cy="361950"/>
+          </a:xfrm>
+          <a:prstGeom prst="rect">
+            <a:avLst/>
+          </a:prstGeom>
+          <a:solidFill>
+            <a:srgbClr val="0B0E12"/>
+          </a:solidFill>
+          <a:ln w="9525">
+            <a:solidFill>
+              <a:srgbClr val="2A3038"/>
+            </a:solidFill>
+          </a:ln>
+        </p:spPr>
+        <p:txBody>
+          <a:bodyPr/>
+          <a:lstStyle/>
+          <a:p/>
+        </p:txBody>
+      </p:sp>
+      <p:sp>
+        <p:nvSpPr>
+          <p:cNvPr id="121" name="Text 121"/>
+          <p:cNvSpPr txBox="1"/>
+          <p:nvPr/>
+        </p:nvSpPr>
+        <p:spPr>
+          <a:xfrm>
+            <a:off x="6991350" y="5010150"/>
+            <a:ext cx="1009650" cy="171450"/>
+          </a:xfrm>
+          <a:prstGeom prst="rect">
+            <a:avLst/>
+          </a:prstGeom>
+          <a:noFill/>
+          <a:ln>
+            <a:noFill/>
+          </a:ln>
+        </p:spPr>
+        <p:txBody>
+          <a:bodyPr wrap="square" anchor="t">
+            <a:spAutoFit/>
+          </a:bodyPr>
+          <a:lstStyle/>
+          <a:p>
+            <a:pPr algn="r"/>
+            <a:r>
+              <a:rPr lang="ko-KR" sz="1100">
+                <a:solidFill>
+                  <a:srgbClr val="F2F5F8"/>
+                </a:solidFill>
+                <a:latin typeface="Malgun Gothic"/>
+                <a:ea typeface="Malgun Gothic"/>
+              </a:rPr>
+              <a:t>25.13%</a:t>
+            </a:r>
+            <a:endParaRPr lang="ko-KR" sz="1100"/>
+          </a:p>
+        </p:txBody>
+      </p:sp>
+      <p:sp>
+        <p:nvSpPr>
+          <p:cNvPr id="122" name="Panel 122"/>
+          <p:cNvSpPr/>
+          <p:nvPr/>
+        </p:nvSpPr>
+        <p:spPr>
+          <a:xfrm>
+            <a:off x="8067675" y="4924425"/>
+            <a:ext cx="1143000" cy="361950"/>
+          </a:xfrm>
+          <a:prstGeom prst="rect">
+            <a:avLst/>
+          </a:prstGeom>
+          <a:solidFill>
+            <a:srgbClr val="0B0E12"/>
+          </a:solidFill>
+          <a:ln w="9525">
+            <a:solidFill>
+              <a:srgbClr val="2A3038"/>
+            </a:solidFill>
+          </a:ln>
+        </p:spPr>
+        <p:txBody>
+          <a:bodyPr/>
+          <a:lstStyle/>
+          <a:p/>
+        </p:txBody>
+      </p:sp>
+      <p:sp>
+        <p:nvSpPr>
+          <p:cNvPr id="123" name="Text 123"/>
+          <p:cNvSpPr txBox="1"/>
+          <p:nvPr/>
+        </p:nvSpPr>
+        <p:spPr>
+          <a:xfrm>
+            <a:off x="8134350" y="5010150"/>
+            <a:ext cx="1009650" cy="171450"/>
+          </a:xfrm>
+          <a:prstGeom prst="rect">
+            <a:avLst/>
+          </a:prstGeom>
+          <a:noFill/>
+          <a:ln>
+            <a:noFill/>
+          </a:ln>
+        </p:spPr>
+        <p:txBody>
+          <a:bodyPr wrap="square" anchor="t">
+            <a:spAutoFit/>
+          </a:bodyPr>
+          <a:lstStyle/>
+          <a:p>
+            <a:pPr algn="r"/>
+            <a:r>
+              <a:rPr lang="ko-KR" sz="1100">
+                <a:solidFill>
+                  <a:srgbClr val="F2F5F8"/>
+                </a:solidFill>
+                <a:latin typeface="Malgun Gothic"/>
+                <a:ea typeface="Malgun Gothic"/>
+              </a:rPr>
+              <a:t>0.00%</a:t>
+            </a:r>
+            <a:endParaRPr lang="ko-KR" sz="1100"/>
+          </a:p>
+        </p:txBody>
+      </p:sp>
+      <p:sp>
+        <p:nvSpPr>
+          <p:cNvPr id="124" name="Panel 124"/>
+          <p:cNvSpPr/>
+          <p:nvPr/>
+        </p:nvSpPr>
+        <p:spPr>
+          <a:xfrm>
+            <a:off x="9210675" y="4924425"/>
+            <a:ext cx="1285875" cy="361950"/>
+          </a:xfrm>
+          <a:prstGeom prst="rect">
+            <a:avLst/>
+          </a:prstGeom>
+          <a:solidFill>
+            <a:srgbClr val="0B0E12"/>
+          </a:solidFill>
+          <a:ln w="9525">
+            <a:solidFill>
+              <a:srgbClr val="2A3038"/>
+            </a:solidFill>
+          </a:ln>
+        </p:spPr>
+        <p:txBody>
+          <a:bodyPr/>
+          <a:lstStyle/>
+          <a:p/>
+        </p:txBody>
+      </p:sp>
+      <p:sp>
+        <p:nvSpPr>
+          <p:cNvPr id="125" name="Text 125"/>
+          <p:cNvSpPr txBox="1"/>
+          <p:nvPr/>
+        </p:nvSpPr>
+        <p:spPr>
+          <a:xfrm>
+            <a:off x="9277350" y="5010150"/>
+            <a:ext cx="1152525" cy="171450"/>
+          </a:xfrm>
+          <a:prstGeom prst="rect">
+            <a:avLst/>
+          </a:prstGeom>
+          <a:noFill/>
+          <a:ln>
+            <a:noFill/>
+          </a:ln>
+        </p:spPr>
+        <p:txBody>
+          <a:bodyPr wrap="square" anchor="t">
+            <a:spAutoFit/>
+          </a:bodyPr>
+          <a:lstStyle/>
+          <a:p>
+            <a:pPr algn="r"/>
+            <a:r>
+              <a:rPr lang="ko-KR" sz="1100" b="1">
+                <a:solidFill>
+                  <a:srgbClr val="FF4D5E"/>
+                </a:solidFill>
+                <a:latin typeface="Malgun Gothic"/>
+                <a:ea typeface="Malgun Gothic"/>
+              </a:rPr>
+              <a:t>-25.13pp</a:t>
+            </a:r>
+            <a:endParaRPr lang="ko-KR" sz="1100"/>
+          </a:p>
+        </p:txBody>
+      </p:sp>
+      <p:sp>
+        <p:nvSpPr>
+          <p:cNvPr id="126" name="Panel 126"/>
+          <p:cNvSpPr/>
+          <p:nvPr/>
+        </p:nvSpPr>
+        <p:spPr>
+          <a:xfrm>
+            <a:off x="400050" y="5286375"/>
+            <a:ext cx="2381250" cy="361950"/>
+          </a:xfrm>
+          <a:prstGeom prst="rect">
+            <a:avLst/>
+          </a:prstGeom>
+          <a:solidFill>
+            <a:srgbClr val="101318"/>
+          </a:solidFill>
+          <a:ln w="9525">
+            <a:solidFill>
+              <a:srgbClr val="2A3038"/>
+            </a:solidFill>
+          </a:ln>
+        </p:spPr>
+        <p:txBody>
+          <a:bodyPr/>
+          <a:lstStyle/>
+          <a:p/>
+        </p:txBody>
+      </p:sp>
+      <p:sp>
+        <p:nvSpPr>
+          <p:cNvPr id="127" name="Text 127"/>
+          <p:cNvSpPr txBox="1"/>
+          <p:nvPr/>
+        </p:nvSpPr>
+        <p:spPr>
+          <a:xfrm>
+            <a:off x="466725" y="5372100"/>
+            <a:ext cx="2247900" cy="171450"/>
+          </a:xfrm>
+          <a:prstGeom prst="rect">
+            <a:avLst/>
+          </a:prstGeom>
+          <a:noFill/>
+          <a:ln>
+            <a:noFill/>
+          </a:ln>
+        </p:spPr>
+        <p:txBody>
+          <a:bodyPr wrap="square" anchor="t">
+            <a:spAutoFit/>
+          </a:bodyPr>
+          <a:lstStyle/>
+          <a:p>
+            <a:pPr algn="l"/>
+            <a:r>
+              <a:rPr lang="ko-KR" sz="1100">
+                <a:solidFill>
+                  <a:srgbClr val="F2F5F8"/>
+                </a:solidFill>
+                <a:latin typeface="Malgun Gothic"/>
+                <a:ea typeface="Malgun Gothic"/>
+              </a:rPr>
+              <a:t>KoAct 코리아밸류업액티브</a:t>
+            </a:r>
+            <a:endParaRPr lang="ko-KR" sz="1100"/>
+          </a:p>
+        </p:txBody>
+      </p:sp>
+      <p:sp>
+        <p:nvSpPr>
+          <p:cNvPr id="128" name="Panel 128"/>
+          <p:cNvSpPr/>
+          <p:nvPr/>
+        </p:nvSpPr>
+        <p:spPr>
+          <a:xfrm>
+            <a:off x="2781300" y="5286375"/>
+            <a:ext cx="3095625" cy="361950"/>
+          </a:xfrm>
+          <a:prstGeom prst="rect">
+            <a:avLst/>
+          </a:prstGeom>
+          <a:solidFill>
+            <a:srgbClr val="101318"/>
+          </a:solidFill>
+          <a:ln w="9525">
+            <a:solidFill>
+              <a:srgbClr val="2A3038"/>
+            </a:solidFill>
+          </a:ln>
+        </p:spPr>
+        <p:txBody>
+          <a:bodyPr/>
+          <a:lstStyle/>
+          <a:p/>
+        </p:txBody>
+      </p:sp>
+      <p:sp>
+        <p:nvSpPr>
+          <p:cNvPr id="129" name="Text 129"/>
+          <p:cNvSpPr txBox="1"/>
+          <p:nvPr/>
+        </p:nvSpPr>
+        <p:spPr>
+          <a:xfrm>
+            <a:off x="2847975" y="5372100"/>
+            <a:ext cx="2962275" cy="171450"/>
+          </a:xfrm>
+          <a:prstGeom prst="rect">
+            <a:avLst/>
+          </a:prstGeom>
+          <a:noFill/>
+          <a:ln>
+            <a:noFill/>
+          </a:ln>
+        </p:spPr>
+        <p:txBody>
+          <a:bodyPr wrap="square" anchor="t">
+            <a:spAutoFit/>
+          </a:bodyPr>
+          <a:lstStyle/>
+          <a:p>
+            <a:pPr algn="l"/>
+            <a:r>
+              <a:rPr lang="ko-KR" sz="1100">
+                <a:solidFill>
+                  <a:srgbClr val="F2F5F8"/>
+                </a:solidFill>
+                <a:latin typeface="Malgun Gothic"/>
+                <a:ea typeface="Malgun Gothic"/>
+              </a:rPr>
+              <a:t>감소 SK하이닉스</a:t>
+            </a:r>
+            <a:endParaRPr lang="ko-KR" sz="1100"/>
+          </a:p>
+        </p:txBody>
+      </p:sp>
+      <p:sp>
+        <p:nvSpPr>
+          <p:cNvPr id="130" name="Panel 130"/>
+          <p:cNvSpPr/>
+          <p:nvPr/>
+        </p:nvSpPr>
+        <p:spPr>
+          <a:xfrm>
+            <a:off x="5876925" y="5286375"/>
+            <a:ext cx="1047750" cy="361950"/>
+          </a:xfrm>
+          <a:prstGeom prst="rect">
+            <a:avLst/>
+          </a:prstGeom>
+          <a:solidFill>
+            <a:srgbClr val="101318"/>
+          </a:solidFill>
+          <a:ln w="9525">
+            <a:solidFill>
+              <a:srgbClr val="2A3038"/>
+            </a:solidFill>
+          </a:ln>
+        </p:spPr>
+        <p:txBody>
+          <a:bodyPr/>
+          <a:lstStyle/>
+          <a:p/>
+        </p:txBody>
+      </p:sp>
+      <p:sp>
+        <p:nvSpPr>
+          <p:cNvPr id="131" name="Text 131"/>
+          <p:cNvSpPr txBox="1"/>
+          <p:nvPr/>
+        </p:nvSpPr>
+        <p:spPr>
+          <a:xfrm>
+            <a:off x="5943600" y="5372100"/>
+            <a:ext cx="914400" cy="171450"/>
+          </a:xfrm>
+          <a:prstGeom prst="rect">
+            <a:avLst/>
+          </a:prstGeom>
+          <a:noFill/>
+          <a:ln>
+            <a:noFill/>
+          </a:ln>
+        </p:spPr>
+        <p:txBody>
+          <a:bodyPr wrap="square" anchor="t">
+            <a:spAutoFit/>
+          </a:bodyPr>
+          <a:lstStyle/>
+          <a:p>
+            <a:pPr algn="l"/>
+            <a:r>
+              <a:rPr lang="ko-KR" sz="1100">
+                <a:solidFill>
+                  <a:srgbClr val="F2F5F8"/>
+                </a:solidFill>
+                <a:latin typeface="Malgun Gothic"/>
+                <a:ea typeface="Malgun Gothic"/>
+              </a:rPr>
+              <a:t>000660</a:t>
+            </a:r>
+            <a:endParaRPr lang="ko-KR" sz="1100"/>
+          </a:p>
+        </p:txBody>
+      </p:sp>
+      <p:sp>
+        <p:nvSpPr>
+          <p:cNvPr id="132" name="Panel 132"/>
+          <p:cNvSpPr/>
+          <p:nvPr/>
+        </p:nvSpPr>
+        <p:spPr>
+          <a:xfrm>
+            <a:off x="6924675" y="5286375"/>
+            <a:ext cx="1143000" cy="361950"/>
+          </a:xfrm>
+          <a:prstGeom prst="rect">
+            <a:avLst/>
+          </a:prstGeom>
+          <a:solidFill>
+            <a:srgbClr val="101318"/>
+          </a:solidFill>
+          <a:ln w="9525">
+            <a:solidFill>
+              <a:srgbClr val="2A3038"/>
+            </a:solidFill>
+          </a:ln>
+        </p:spPr>
+        <p:txBody>
+          <a:bodyPr/>
+          <a:lstStyle/>
+          <a:p/>
+        </p:txBody>
+      </p:sp>
+      <p:sp>
+        <p:nvSpPr>
+          <p:cNvPr id="133" name="Text 133"/>
+          <p:cNvSpPr txBox="1"/>
+          <p:nvPr/>
+        </p:nvSpPr>
+        <p:spPr>
+          <a:xfrm>
+            <a:off x="6991350" y="5372100"/>
+            <a:ext cx="1009650" cy="171450"/>
+          </a:xfrm>
+          <a:prstGeom prst="rect">
+            <a:avLst/>
+          </a:prstGeom>
+          <a:noFill/>
+          <a:ln>
+            <a:noFill/>
+          </a:ln>
+        </p:spPr>
+        <p:txBody>
+          <a:bodyPr wrap="square" anchor="t">
+            <a:spAutoFit/>
+          </a:bodyPr>
+          <a:lstStyle/>
+          <a:p>
+            <a:pPr algn="r"/>
+            <a:r>
+              <a:rPr lang="ko-KR" sz="1100">
+                <a:solidFill>
+                  <a:srgbClr val="F2F5F8"/>
+                </a:solidFill>
+                <a:latin typeface="Malgun Gothic"/>
+                <a:ea typeface="Malgun Gothic"/>
+              </a:rPr>
+              <a:t>25.01%</a:t>
+            </a:r>
+            <a:endParaRPr lang="ko-KR" sz="1100"/>
+          </a:p>
+        </p:txBody>
+      </p:sp>
+      <p:sp>
+        <p:nvSpPr>
+          <p:cNvPr id="134" name="Panel 134"/>
+          <p:cNvSpPr/>
+          <p:nvPr/>
+        </p:nvSpPr>
+        <p:spPr>
+          <a:xfrm>
+            <a:off x="8067675" y="5286375"/>
+            <a:ext cx="1143000" cy="361950"/>
+          </a:xfrm>
+          <a:prstGeom prst="rect">
+            <a:avLst/>
+          </a:prstGeom>
+          <a:solidFill>
+            <a:srgbClr val="101318"/>
+          </a:solidFill>
+          <a:ln w="9525">
+            <a:solidFill>
+              <a:srgbClr val="2A3038"/>
+            </a:solidFill>
+          </a:ln>
+        </p:spPr>
+        <p:txBody>
+          <a:bodyPr/>
+          <a:lstStyle/>
+          <a:p/>
+        </p:txBody>
+      </p:sp>
+      <p:sp>
+        <p:nvSpPr>
+          <p:cNvPr id="135" name="Text 135"/>
+          <p:cNvSpPr txBox="1"/>
+          <p:nvPr/>
+        </p:nvSpPr>
+        <p:spPr>
+          <a:xfrm>
+            <a:off x="8134350" y="5372100"/>
+            <a:ext cx="1009650" cy="171450"/>
+          </a:xfrm>
+          <a:prstGeom prst="rect">
+            <a:avLst/>
+          </a:prstGeom>
+          <a:noFill/>
+          <a:ln>
+            <a:noFill/>
+          </a:ln>
+        </p:spPr>
+        <p:txBody>
+          <a:bodyPr wrap="square" anchor="t">
+            <a:spAutoFit/>
+          </a:bodyPr>
+          <a:lstStyle/>
+          <a:p>
+            <a:pPr algn="r"/>
+            <a:r>
+              <a:rPr lang="ko-KR" sz="1100">
+                <a:solidFill>
+                  <a:srgbClr val="F2F5F8"/>
+                </a:solidFill>
+                <a:latin typeface="Malgun Gothic"/>
+                <a:ea typeface="Malgun Gothic"/>
+              </a:rPr>
+              <a:t>0.00%</a:t>
+            </a:r>
+            <a:endParaRPr lang="ko-KR" sz="1100"/>
+          </a:p>
+        </p:txBody>
+      </p:sp>
+      <p:sp>
+        <p:nvSpPr>
+          <p:cNvPr id="136" name="Panel 136"/>
+          <p:cNvSpPr/>
+          <p:nvPr/>
+        </p:nvSpPr>
+        <p:spPr>
+          <a:xfrm>
+            <a:off x="9210675" y="5286375"/>
+            <a:ext cx="1285875" cy="361950"/>
+          </a:xfrm>
+          <a:prstGeom prst="rect">
+            <a:avLst/>
+          </a:prstGeom>
+          <a:solidFill>
+            <a:srgbClr val="101318"/>
+          </a:solidFill>
+          <a:ln w="9525">
+            <a:solidFill>
+              <a:srgbClr val="2A3038"/>
+            </a:solidFill>
+          </a:ln>
+        </p:spPr>
+        <p:txBody>
+          <a:bodyPr/>
+          <a:lstStyle/>
+          <a:p/>
+        </p:txBody>
+      </p:sp>
+      <p:sp>
+        <p:nvSpPr>
+          <p:cNvPr id="137" name="Text 137"/>
+          <p:cNvSpPr txBox="1"/>
+          <p:nvPr/>
+        </p:nvSpPr>
+        <p:spPr>
+          <a:xfrm>
+            <a:off x="9277350" y="5372100"/>
+            <a:ext cx="1152525" cy="171450"/>
+          </a:xfrm>
+          <a:prstGeom prst="rect">
+            <a:avLst/>
+          </a:prstGeom>
+          <a:noFill/>
+          <a:ln>
+            <a:noFill/>
+          </a:ln>
+        </p:spPr>
+        <p:txBody>
+          <a:bodyPr wrap="square" anchor="t">
+            <a:spAutoFit/>
+          </a:bodyPr>
+          <a:lstStyle/>
+          <a:p>
+            <a:pPr algn="r"/>
+            <a:r>
+              <a:rPr lang="ko-KR" sz="1100" b="1">
+                <a:solidFill>
+                  <a:srgbClr val="FF4D5E"/>
+                </a:solidFill>
+                <a:latin typeface="Malgun Gothic"/>
+                <a:ea typeface="Malgun Gothic"/>
+              </a:rPr>
+              <a:t>-25.01pp</a:t>
             </a:r>
             <a:endParaRPr lang="ko-KR" sz="1100"/>
           </a:p>
@@ -3506,7 +11849,7 @@
                 <a:latin typeface="Malgun Gothic"/>
                 <a:ea typeface="Malgun Gothic"/>
               </a:rPr>
-              <a:t>1. 오늘 변화 ETF는 0개, 전체 변화는 0건입니다.</a:t>
+              <a:t>1. 오늘 변화 ETF는 105개, 전체 변화는 5165건입니다.</a:t>
             </a:r>
             <a:endParaRPr lang="ko-KR" sz="2400"/>
           </a:p>
@@ -3520,7 +11863,7 @@
                 <a:latin typeface="Malgun Gothic"/>
                 <a:ea typeface="Malgun Gothic"/>
               </a:rPr>
-              <a:t>2. 매수/비중증가 0건, 매도/비중감소 0건을 확인했습니다.</a:t>
+              <a:t>2. 매수/비중증가 71건, 매도/비중감소 3474건을 확인했습니다.</a:t>
             </a:r>
             <a:endParaRPr lang="ko-KR" sz="2400"/>
           </a:p>

--- a/docs/latest_changes.pptx
+++ b/docs/latest_changes.pptx
@@ -374,7 +374,7 @@
                 <a:latin typeface="Malgun Gothic"/>
                 <a:ea typeface="Malgun Gothic"/>
               </a:rPr>
-              <a:t>301</a:t>
+              <a:t>300</a:t>
             </a:r>
             <a:endParaRPr lang="ko-KR" sz="3000"/>
           </a:p>
@@ -512,7 +512,7 @@
                 <a:latin typeface="Malgun Gothic"/>
                 <a:ea typeface="Malgun Gothic"/>
               </a:rPr>
-              <a:t>105</a:t>
+              <a:t>252</a:t>
             </a:r>
             <a:endParaRPr lang="ko-KR" sz="3000"/>
           </a:p>
@@ -650,7 +650,7 @@
                 <a:latin typeface="Malgun Gothic"/>
                 <a:ea typeface="Malgun Gothic"/>
               </a:rPr>
-              <a:t>5165</a:t>
+              <a:t>20877</a:t>
             </a:r>
             <a:endParaRPr lang="ko-KR" sz="3000"/>
           </a:p>
@@ -788,7 +788,7 @@
                 <a:latin typeface="Malgun Gothic"/>
                 <a:ea typeface="Malgun Gothic"/>
               </a:rPr>
-              <a:t>71</a:t>
+              <a:t>107</a:t>
             </a:r>
             <a:endParaRPr lang="ko-KR" sz="3000"/>
           </a:p>
@@ -926,7 +926,7 @@
                 <a:latin typeface="Malgun Gothic"/>
                 <a:ea typeface="Malgun Gothic"/>
               </a:rPr>
-              <a:t>3474</a:t>
+              <a:t>2301</a:t>
             </a:r>
             <a:endParaRPr lang="ko-KR" sz="3000"/>
           </a:p>
@@ -1395,7 +1395,7 @@
                 <a:latin typeface="Malgun Gothic"/>
                 <a:ea typeface="Malgun Gothic"/>
               </a:rPr>
-              <a:t>충격도 200.35pp</a:t>
+              <a:t>충격도 100.35pp</a:t>
             </a:r>
             <a:endParaRPr lang="ko-KR" sz="1800"/>
           </a:p>
@@ -1504,7 +1504,7 @@
                 <a:latin typeface="Malgun Gothic"/>
                 <a:ea typeface="Malgun Gothic"/>
               </a:rPr>
-              <a:t>RISE 2차전지액티브 (422420)</a:t>
+              <a:t>ACE 주주환원가치주액티브 (447430)</a:t>
             </a:r>
             <a:endParaRPr lang="ko-KR" sz="1800"/>
           </a:p>
@@ -1544,7 +1544,7 @@
                 <a:latin typeface="Malgun Gothic"/>
                 <a:ea typeface="Malgun Gothic"/>
               </a:rPr>
-              <a:t>변화 17건 | 매수/증가 1건 | 매도/감소 16건</a:t>
+              <a:t>변화 28건 | 매수/증가 0건 | 매도/감소 27건</a:t>
             </a:r>
             <a:endParaRPr lang="ko-KR" sz="1300"/>
           </a:p>
@@ -1584,7 +1584,7 @@
                 <a:latin typeface="Malgun Gothic"/>
                 <a:ea typeface="Malgun Gothic"/>
               </a:rPr>
-              <a:t>충격도 200.02pp</a:t>
+              <a:t>충격도 100.02pp</a:t>
             </a:r>
             <a:endParaRPr lang="ko-KR" sz="1800"/>
           </a:p>
@@ -1693,7 +1693,7 @@
                 <a:latin typeface="Malgun Gothic"/>
                 <a:ea typeface="Malgun Gothic"/>
               </a:rPr>
-              <a:t>PLUS K제조업핵심기업액티브 (0166S0)</a:t>
+              <a:t>KODEX 로봇액티브 (445290)</a:t>
             </a:r>
             <a:endParaRPr lang="ko-KR" sz="1800"/>
           </a:p>
@@ -1733,7 +1733,7 @@
                 <a:latin typeface="Malgun Gothic"/>
                 <a:ea typeface="Malgun Gothic"/>
               </a:rPr>
-              <a:t>변화 38건 | 매수/증가 1건 | 매도/감소 37건</a:t>
+              <a:t>변화 33건 | 매수/증가 0건 | 매도/감소 33건</a:t>
             </a:r>
             <a:endParaRPr lang="ko-KR" sz="1300"/>
           </a:p>
@@ -1773,7 +1773,7 @@
                 <a:latin typeface="Malgun Gothic"/>
                 <a:ea typeface="Malgun Gothic"/>
               </a:rPr>
-              <a:t>충격도 200.01pp</a:t>
+              <a:t>충격도 100.02pp</a:t>
             </a:r>
             <a:endParaRPr lang="ko-KR" sz="1800"/>
           </a:p>
@@ -1882,7 +1882,7 @@
                 <a:latin typeface="Malgun Gothic"/>
                 <a:ea typeface="Malgun Gothic"/>
               </a:rPr>
-              <a:t>TIME 코스피액티브 (385720)</a:t>
+              <a:t>KoAct K수출핵심기업TOP30액티브 (0074K0)</a:t>
             </a:r>
             <a:endParaRPr lang="ko-KR" sz="1800"/>
           </a:p>
@@ -1922,7 +1922,7 @@
                 <a:latin typeface="Malgun Gothic"/>
                 <a:ea typeface="Malgun Gothic"/>
               </a:rPr>
-              <a:t>변화 27건 | 매수/증가 1건 | 매도/감소 25건</a:t>
+              <a:t>변화 38건 | 매수/증가 0건 | 매도/감소 38건</a:t>
             </a:r>
             <a:endParaRPr lang="ko-KR" sz="1300"/>
           </a:p>
@@ -1962,7 +1962,7 @@
                 <a:latin typeface="Malgun Gothic"/>
                 <a:ea typeface="Malgun Gothic"/>
               </a:rPr>
-              <a:t>충격도 199.90pp</a:t>
+              <a:t>충격도 100.02pp</a:t>
             </a:r>
             <a:endParaRPr lang="ko-KR" sz="1800"/>
           </a:p>
@@ -2071,7 +2071,7 @@
                 <a:latin typeface="Malgun Gothic"/>
                 <a:ea typeface="Malgun Gothic"/>
               </a:rPr>
-              <a:t>TIGER AI코리아그로스액티브 (365040)</a:t>
+              <a:t>KoAct 코리아밸류업액티브 (495230)</a:t>
             </a:r>
             <a:endParaRPr lang="ko-KR" sz="1800"/>
           </a:p>
@@ -2111,7 +2111,7 @@
                 <a:latin typeface="Malgun Gothic"/>
                 <a:ea typeface="Malgun Gothic"/>
               </a:rPr>
-              <a:t>변화 182건 | 매수/증가 1건 | 매도/감소 181건</a:t>
+              <a:t>변화 80건 | 매수/증가 0건 | 매도/감소 78건</a:t>
             </a:r>
             <a:endParaRPr lang="ko-KR" sz="1300"/>
           </a:p>
@@ -2151,7 +2151,7 @@
                 <a:latin typeface="Malgun Gothic"/>
                 <a:ea typeface="Malgun Gothic"/>
               </a:rPr>
-              <a:t>충격도 199.89pp</a:t>
+              <a:t>충격도 100.02pp</a:t>
             </a:r>
             <a:endParaRPr lang="ko-KR" sz="1800"/>
           </a:p>
@@ -2816,7 +2816,7 @@
                 <a:latin typeface="Malgun Gothic"/>
                 <a:ea typeface="Malgun Gothic"/>
               </a:rPr>
-              <a:t>KoAct 코스닥액티브</a:t>
+              <a:t>VITA MZ소비액티브</a:t>
             </a:r>
             <a:endParaRPr lang="ko-KR" sz="1100"/>
           </a:p>
@@ -3023,7 +3023,7 @@
                 <a:latin typeface="Malgun Gothic"/>
                 <a:ea typeface="Malgun Gothic"/>
               </a:rPr>
-              <a:t>-0.18%</a:t>
+              <a:t>2.34%</a:t>
             </a:r>
             <a:endParaRPr lang="ko-KR" sz="1100"/>
           </a:p>
@@ -3092,7 +3092,7 @@
                 <a:latin typeface="Malgun Gothic"/>
                 <a:ea typeface="Malgun Gothic"/>
               </a:rPr>
-              <a:t>100.00%</a:t>
+              <a:t>13.75%</a:t>
             </a:r>
             <a:endParaRPr lang="ko-KR" sz="1100"/>
           </a:p>
@@ -3161,7 +3161,7 @@
                 <a:latin typeface="Malgun Gothic"/>
                 <a:ea typeface="Malgun Gothic"/>
               </a:rPr>
-              <a:t>+100.18pp</a:t>
+              <a:t>+11.41pp</a:t>
             </a:r>
             <a:endParaRPr lang="ko-KR" sz="1100"/>
           </a:p>
@@ -3230,7 +3230,7 @@
                 <a:latin typeface="Malgun Gothic"/>
                 <a:ea typeface="Malgun Gothic"/>
               </a:rPr>
-              <a:t>TIGER AI코리아그로스액티브</a:t>
+              <a:t>VITA 밸류알파액티브</a:t>
             </a:r>
             <a:endParaRPr lang="ko-KR" sz="1100"/>
           </a:p>
@@ -3437,7 +3437,7 @@
                 <a:latin typeface="Malgun Gothic"/>
                 <a:ea typeface="Malgun Gothic"/>
               </a:rPr>
-              <a:t>-0.08%</a:t>
+              <a:t>8.52%</a:t>
             </a:r>
             <a:endParaRPr lang="ko-KR" sz="1100"/>
           </a:p>
@@ -3506,7 +3506,7 @@
                 <a:latin typeface="Malgun Gothic"/>
                 <a:ea typeface="Malgun Gothic"/>
               </a:rPr>
-              <a:t>100.00%</a:t>
+              <a:t>18.11%</a:t>
             </a:r>
             <a:endParaRPr lang="ko-KR" sz="1100"/>
           </a:p>
@@ -3575,7 +3575,7 @@
                 <a:latin typeface="Malgun Gothic"/>
                 <a:ea typeface="Malgun Gothic"/>
               </a:rPr>
-              <a:t>+100.08pp</a:t>
+              <a:t>+9.59pp</a:t>
             </a:r>
             <a:endParaRPr lang="ko-KR" sz="1100"/>
           </a:p>
@@ -3644,7 +3644,7 @@
                 <a:latin typeface="Malgun Gothic"/>
                 <a:ea typeface="Malgun Gothic"/>
               </a:rPr>
-              <a:t>KODEX 200액티브</a:t>
+              <a:t>TIGER 퓨처모빌리티액티브</a:t>
             </a:r>
             <a:endParaRPr lang="ko-KR" sz="1100"/>
           </a:p>
@@ -3713,7 +3713,7 @@
                 <a:latin typeface="Malgun Gothic"/>
                 <a:ea typeface="Malgun Gothic"/>
               </a:rPr>
-              <a:t>증가 원화현금</a:t>
+              <a:t>신규 POSCO홀딩스</a:t>
             </a:r>
             <a:endParaRPr lang="ko-KR" sz="1100"/>
           </a:p>
@@ -3782,7 +3782,7 @@
                 <a:latin typeface="Malgun Gothic"/>
                 <a:ea typeface="Malgun Gothic"/>
               </a:rPr>
-              <a:t>010010</a:t>
+              <a:t>005490</a:t>
             </a:r>
             <a:endParaRPr lang="ko-KR" sz="1100"/>
           </a:p>
@@ -3851,7 +3851,7 @@
                 <a:latin typeface="Malgun Gothic"/>
                 <a:ea typeface="Malgun Gothic"/>
               </a:rPr>
-              <a:t>-0.07%</a:t>
+              <a:t>-</a:t>
             </a:r>
             <a:endParaRPr lang="ko-KR" sz="1100"/>
           </a:p>
@@ -3920,7 +3920,7 @@
                 <a:latin typeface="Malgun Gothic"/>
                 <a:ea typeface="Malgun Gothic"/>
               </a:rPr>
-              <a:t>100.00%</a:t>
+              <a:t>4.00%</a:t>
             </a:r>
             <a:endParaRPr lang="ko-KR" sz="1100"/>
           </a:p>
@@ -3989,7 +3989,7 @@
                 <a:latin typeface="Malgun Gothic"/>
                 <a:ea typeface="Malgun Gothic"/>
               </a:rPr>
-              <a:t>+100.07pp</a:t>
+              <a:t>+4.00pp</a:t>
             </a:r>
             <a:endParaRPr lang="ko-KR" sz="1100"/>
           </a:p>
@@ -4058,7 +4058,7 @@
                 <a:latin typeface="Malgun Gothic"/>
                 <a:ea typeface="Malgun Gothic"/>
               </a:rPr>
-              <a:t>RISE 2차전지액티브</a:t>
+              <a:t>에셋플러스 코리아대장장이액티브</a:t>
             </a:r>
             <a:endParaRPr lang="ko-KR" sz="1100"/>
           </a:p>
@@ -4265,7 +4265,7 @@
                 <a:latin typeface="Malgun Gothic"/>
                 <a:ea typeface="Malgun Gothic"/>
               </a:rPr>
-              <a:t>-0.01%</a:t>
+              <a:t>7.62%</a:t>
             </a:r>
             <a:endParaRPr lang="ko-KR" sz="1100"/>
           </a:p>
@@ -4334,7 +4334,7 @@
                 <a:latin typeface="Malgun Gothic"/>
                 <a:ea typeface="Malgun Gothic"/>
               </a:rPr>
-              <a:t>100.00%</a:t>
+              <a:t>10.82%</a:t>
             </a:r>
             <a:endParaRPr lang="ko-KR" sz="1100"/>
           </a:p>
@@ -4403,7 +4403,7 @@
                 <a:latin typeface="Malgun Gothic"/>
                 <a:ea typeface="Malgun Gothic"/>
               </a:rPr>
-              <a:t>+100.01pp</a:t>
+              <a:t>+3.20pp</a:t>
             </a:r>
             <a:endParaRPr lang="ko-KR" sz="1100"/>
           </a:p>
@@ -4472,7 +4472,7 @@
                 <a:latin typeface="Malgun Gothic"/>
                 <a:ea typeface="Malgun Gothic"/>
               </a:rPr>
-              <a:t>PLUS K제조업핵심기업액티브</a:t>
+              <a:t>TIME K바이오액티브</a:t>
             </a:r>
             <a:endParaRPr lang="ko-KR" sz="1100"/>
           </a:p>
@@ -4679,7 +4679,7 @@
                 <a:latin typeface="Malgun Gothic"/>
                 <a:ea typeface="Malgun Gothic"/>
               </a:rPr>
-              <a:t>0.00%</a:t>
+              <a:t>0.79%</a:t>
             </a:r>
             <a:endParaRPr lang="ko-KR" sz="1100"/>
           </a:p>
@@ -4748,7 +4748,7 @@
                 <a:latin typeface="Malgun Gothic"/>
                 <a:ea typeface="Malgun Gothic"/>
               </a:rPr>
-              <a:t>100.00%</a:t>
+              <a:t>2.72%</a:t>
             </a:r>
             <a:endParaRPr lang="ko-KR" sz="1100"/>
           </a:p>
@@ -4817,7 +4817,7 @@
                 <a:latin typeface="Malgun Gothic"/>
                 <a:ea typeface="Malgun Gothic"/>
               </a:rPr>
-              <a:t>+100.00pp</a:t>
+              <a:t>+1.93pp</a:t>
             </a:r>
             <a:endParaRPr lang="ko-KR" sz="1100"/>
           </a:p>
@@ -4886,7 +4886,7 @@
                 <a:latin typeface="Malgun Gothic"/>
                 <a:ea typeface="Malgun Gothic"/>
               </a:rPr>
-              <a:t>1Q 200액티브</a:t>
+              <a:t>TIME 코스피액티브</a:t>
             </a:r>
             <a:endParaRPr lang="ko-KR" sz="1100"/>
           </a:p>
@@ -4955,7 +4955,7 @@
                 <a:latin typeface="Malgun Gothic"/>
                 <a:ea typeface="Malgun Gothic"/>
               </a:rPr>
-              <a:t>증가 원화현금</a:t>
+              <a:t>신규 신세계</a:t>
             </a:r>
             <a:endParaRPr lang="ko-KR" sz="1100"/>
           </a:p>
@@ -5024,7 +5024,7 @@
                 <a:latin typeface="Malgun Gothic"/>
                 <a:ea typeface="Malgun Gothic"/>
               </a:rPr>
-              <a:t>010010</a:t>
+              <a:t>004170</a:t>
             </a:r>
             <a:endParaRPr lang="ko-KR" sz="1100"/>
           </a:p>
@@ -5093,7 +5093,7 @@
                 <a:latin typeface="Malgun Gothic"/>
                 <a:ea typeface="Malgun Gothic"/>
               </a:rPr>
-              <a:t>0.04%</a:t>
+              <a:t>-</a:t>
             </a:r>
             <a:endParaRPr lang="ko-KR" sz="1100"/>
           </a:p>
@@ -5162,7 +5162,7 @@
                 <a:latin typeface="Malgun Gothic"/>
                 <a:ea typeface="Malgun Gothic"/>
               </a:rPr>
-              <a:t>100.00%</a:t>
+              <a:t>1.61%</a:t>
             </a:r>
             <a:endParaRPr lang="ko-KR" sz="1100"/>
           </a:p>
@@ -5231,7 +5231,7 @@
                 <a:latin typeface="Malgun Gothic"/>
                 <a:ea typeface="Malgun Gothic"/>
               </a:rPr>
-              <a:t>+99.96pp</a:t>
+              <a:t>+1.61pp</a:t>
             </a:r>
             <a:endParaRPr lang="ko-KR" sz="1100"/>
           </a:p>
@@ -5300,7 +5300,7 @@
                 <a:latin typeface="Malgun Gothic"/>
                 <a:ea typeface="Malgun Gothic"/>
               </a:rPr>
-              <a:t>TIME 코스피액티브</a:t>
+              <a:t>TIGER 코리아테크액티브</a:t>
             </a:r>
             <a:endParaRPr lang="ko-KR" sz="1100"/>
           </a:p>
@@ -5369,7 +5369,7 @@
                 <a:latin typeface="Malgun Gothic"/>
                 <a:ea typeface="Malgun Gothic"/>
               </a:rPr>
-              <a:t>증가 원화현금</a:t>
+              <a:t>신규 주성엔지니어링</a:t>
             </a:r>
             <a:endParaRPr lang="ko-KR" sz="1100"/>
           </a:p>
@@ -5438,7 +5438,7 @@
                 <a:latin typeface="Malgun Gothic"/>
                 <a:ea typeface="Malgun Gothic"/>
               </a:rPr>
-              <a:t>010010</a:t>
+              <a:t>036930</a:t>
             </a:r>
             <a:endParaRPr lang="ko-KR" sz="1100"/>
           </a:p>
@@ -5507,7 +5507,7 @@
                 <a:latin typeface="Malgun Gothic"/>
                 <a:ea typeface="Malgun Gothic"/>
               </a:rPr>
-              <a:t>0.06%</a:t>
+              <a:t>-</a:t>
             </a:r>
             <a:endParaRPr lang="ko-KR" sz="1100"/>
           </a:p>
@@ -5576,7 +5576,7 @@
                 <a:latin typeface="Malgun Gothic"/>
                 <a:ea typeface="Malgun Gothic"/>
               </a:rPr>
-              <a:t>100.00%</a:t>
+              <a:t>1.29%</a:t>
             </a:r>
             <a:endParaRPr lang="ko-KR" sz="1100"/>
           </a:p>
@@ -5645,7 +5645,7 @@
                 <a:latin typeface="Malgun Gothic"/>
                 <a:ea typeface="Malgun Gothic"/>
               </a:rPr>
-              <a:t>+99.94pp</a:t>
+              <a:t>+1.29pp</a:t>
             </a:r>
             <a:endParaRPr lang="ko-KR" sz="1100"/>
           </a:p>
@@ -5714,7 +5714,7 @@
                 <a:latin typeface="Malgun Gothic"/>
                 <a:ea typeface="Malgun Gothic"/>
               </a:rPr>
-              <a:t>ACE K수출핵심TOP10산업액티</a:t>
+              <a:t>TIGER 퓨처모빌리티액티브</a:t>
             </a:r>
             <a:endParaRPr lang="ko-KR" sz="1100"/>
           </a:p>
@@ -5783,7 +5783,7 @@
                 <a:latin typeface="Malgun Gothic"/>
                 <a:ea typeface="Malgun Gothic"/>
               </a:rPr>
-              <a:t>증가 원화현금</a:t>
+              <a:t>증가 LG에너지솔루션</a:t>
             </a:r>
             <a:endParaRPr lang="ko-KR" sz="1100"/>
           </a:p>
@@ -5852,7 +5852,7 @@
                 <a:latin typeface="Malgun Gothic"/>
                 <a:ea typeface="Malgun Gothic"/>
               </a:rPr>
-              <a:t>010010</a:t>
+              <a:t>373220</a:t>
             </a:r>
             <a:endParaRPr lang="ko-KR" sz="1100"/>
           </a:p>
@@ -5921,7 +5921,7 @@
                 <a:latin typeface="Malgun Gothic"/>
                 <a:ea typeface="Malgun Gothic"/>
               </a:rPr>
-              <a:t>0.27%</a:t>
+              <a:t>5.96%</a:t>
             </a:r>
             <a:endParaRPr lang="ko-KR" sz="1100"/>
           </a:p>
@@ -5990,7 +5990,7 @@
                 <a:latin typeface="Malgun Gothic"/>
                 <a:ea typeface="Malgun Gothic"/>
               </a:rPr>
-              <a:t>100.00%</a:t>
+              <a:t>7.16%</a:t>
             </a:r>
             <a:endParaRPr lang="ko-KR" sz="1100"/>
           </a:p>
@@ -6059,7 +6059,7 @@
                 <a:latin typeface="Malgun Gothic"/>
                 <a:ea typeface="Malgun Gothic"/>
               </a:rPr>
-              <a:t>+99.73pp</a:t>
+              <a:t>+1.20pp</a:t>
             </a:r>
             <a:endParaRPr lang="ko-KR" sz="1100"/>
           </a:p>
@@ -6128,7 +6128,7 @@
                 <a:latin typeface="Malgun Gothic"/>
                 <a:ea typeface="Malgun Gothic"/>
               </a:rPr>
-              <a:t>KoAct K수출핵심기업TOP30</a:t>
+              <a:t>TIGER 퓨처모빌리티액티브</a:t>
             </a:r>
             <a:endParaRPr lang="ko-KR" sz="1100"/>
           </a:p>
@@ -6197,7 +6197,7 @@
                 <a:latin typeface="Malgun Gothic"/>
                 <a:ea typeface="Malgun Gothic"/>
               </a:rPr>
-              <a:t>증가 원화현금</a:t>
+              <a:t>증가 에코프로비엠</a:t>
             </a:r>
             <a:endParaRPr lang="ko-KR" sz="1100"/>
           </a:p>
@@ -6266,7 +6266,7 @@
                 <a:latin typeface="Malgun Gothic"/>
                 <a:ea typeface="Malgun Gothic"/>
               </a:rPr>
-              <a:t>010010</a:t>
+              <a:t>247540</a:t>
             </a:r>
             <a:endParaRPr lang="ko-KR" sz="1100"/>
           </a:p>
@@ -6335,7 +6335,7 @@
                 <a:latin typeface="Malgun Gothic"/>
                 <a:ea typeface="Malgun Gothic"/>
               </a:rPr>
-              <a:t>0.29%</a:t>
+              <a:t>3.88%</a:t>
             </a:r>
             <a:endParaRPr lang="ko-KR" sz="1100"/>
           </a:p>
@@ -6404,7 +6404,7 @@
                 <a:latin typeface="Malgun Gothic"/>
                 <a:ea typeface="Malgun Gothic"/>
               </a:rPr>
-              <a:t>100.00%</a:t>
+              <a:t>4.86%</a:t>
             </a:r>
             <a:endParaRPr lang="ko-KR" sz="1100"/>
           </a:p>
@@ -6473,7 +6473,7 @@
                 <a:latin typeface="Malgun Gothic"/>
                 <a:ea typeface="Malgun Gothic"/>
               </a:rPr>
-              <a:t>+99.71pp</a:t>
+              <a:t>+0.98pp</a:t>
             </a:r>
             <a:endParaRPr lang="ko-KR" sz="1100"/>
           </a:p>
@@ -6542,7 +6542,7 @@
                 <a:latin typeface="Malgun Gothic"/>
                 <a:ea typeface="Malgun Gothic"/>
               </a:rPr>
-              <a:t>마이티 다이나믹퀀트액티브</a:t>
+              <a:t>TIGER 코리아테크액티브</a:t>
             </a:r>
             <a:endParaRPr lang="ko-KR" sz="1100"/>
           </a:p>
@@ -6611,7 +6611,7 @@
                 <a:latin typeface="Malgun Gothic"/>
                 <a:ea typeface="Malgun Gothic"/>
               </a:rPr>
-              <a:t>증가 원화현금</a:t>
+              <a:t>증가 나노신소재</a:t>
             </a:r>
             <a:endParaRPr lang="ko-KR" sz="1100"/>
           </a:p>
@@ -6680,7 +6680,7 @@
                 <a:latin typeface="Malgun Gothic"/>
                 <a:ea typeface="Malgun Gothic"/>
               </a:rPr>
-              <a:t>010010</a:t>
+              <a:t>121600</a:t>
             </a:r>
             <a:endParaRPr lang="ko-KR" sz="1100"/>
           </a:p>
@@ -6749,7 +6749,7 @@
                 <a:latin typeface="Malgun Gothic"/>
                 <a:ea typeface="Malgun Gothic"/>
               </a:rPr>
-              <a:t>0.29%</a:t>
+              <a:t>1.00%</a:t>
             </a:r>
             <a:endParaRPr lang="ko-KR" sz="1100"/>
           </a:p>
@@ -6818,7 +6818,7 @@
                 <a:latin typeface="Malgun Gothic"/>
                 <a:ea typeface="Malgun Gothic"/>
               </a:rPr>
-              <a:t>100.00%</a:t>
+              <a:t>1.97%</a:t>
             </a:r>
             <a:endParaRPr lang="ko-KR" sz="1100"/>
           </a:p>
@@ -6887,7 +6887,7 @@
                 <a:latin typeface="Malgun Gothic"/>
                 <a:ea typeface="Malgun Gothic"/>
               </a:rPr>
-              <a:t>+99.71pp</a:t>
+              <a:t>+0.97pp</a:t>
             </a:r>
             <a:endParaRPr lang="ko-KR" sz="1100"/>
           </a:p>
@@ -7552,7 +7552,7 @@
                 <a:latin typeface="Malgun Gothic"/>
                 <a:ea typeface="Malgun Gothic"/>
               </a:rPr>
-              <a:t>KODEX 200액티브</a:t>
+              <a:t>1Q CD금리액티브(합성)</a:t>
             </a:r>
             <a:endParaRPr lang="ko-KR" sz="1100"/>
           </a:p>
@@ -7621,7 +7621,7 @@
                 <a:latin typeface="Malgun Gothic"/>
                 <a:ea typeface="Malgun Gothic"/>
               </a:rPr>
-              <a:t>감소 삼성전자</a:t>
+              <a:t>감소 원화현금</a:t>
             </a:r>
             <a:endParaRPr lang="ko-KR" sz="1100"/>
           </a:p>
@@ -7690,7 +7690,7 @@
                 <a:latin typeface="Malgun Gothic"/>
                 <a:ea typeface="Malgun Gothic"/>
               </a:rPr>
-              <a:t>005930</a:t>
+              <a:t>010010</a:t>
             </a:r>
             <a:endParaRPr lang="ko-KR" sz="1100"/>
           </a:p>
@@ -7759,7 +7759,7 @@
                 <a:latin typeface="Malgun Gothic"/>
                 <a:ea typeface="Malgun Gothic"/>
               </a:rPr>
-              <a:t>31.85%</a:t>
+              <a:t>100.00%</a:t>
             </a:r>
             <a:endParaRPr lang="ko-KR" sz="1100"/>
           </a:p>
@@ -7828,7 +7828,7 @@
                 <a:latin typeface="Malgun Gothic"/>
                 <a:ea typeface="Malgun Gothic"/>
               </a:rPr>
-              <a:t>0.00%</a:t>
+              <a:t>-</a:t>
             </a:r>
             <a:endParaRPr lang="ko-KR" sz="1100"/>
           </a:p>
@@ -7897,7 +7897,7 @@
                 <a:latin typeface="Malgun Gothic"/>
                 <a:ea typeface="Malgun Gothic"/>
               </a:rPr>
-              <a:t>-31.85pp</a:t>
+              <a:t>-100.00pp</a:t>
             </a:r>
             <a:endParaRPr lang="ko-KR" sz="1100"/>
           </a:p>
@@ -7966,7 +7966,7 @@
                 <a:latin typeface="Malgun Gothic"/>
                 <a:ea typeface="Malgun Gothic"/>
               </a:rPr>
-              <a:t>1Q 200액티브</a:t>
+              <a:t>HANARO KOFR금리액티브(합</a:t>
             </a:r>
             <a:endParaRPr lang="ko-KR" sz="1100"/>
           </a:p>
@@ -8035,7 +8035,7 @@
                 <a:latin typeface="Malgun Gothic"/>
                 <a:ea typeface="Malgun Gothic"/>
               </a:rPr>
-              <a:t>감소 삼성전자</a:t>
+              <a:t>감소 원화현금</a:t>
             </a:r>
             <a:endParaRPr lang="ko-KR" sz="1100"/>
           </a:p>
@@ -8104,7 +8104,7 @@
                 <a:latin typeface="Malgun Gothic"/>
                 <a:ea typeface="Malgun Gothic"/>
               </a:rPr>
-              <a:t>005930</a:t>
+              <a:t>010010</a:t>
             </a:r>
             <a:endParaRPr lang="ko-KR" sz="1100"/>
           </a:p>
@@ -8173,7 +8173,7 @@
                 <a:latin typeface="Malgun Gothic"/>
                 <a:ea typeface="Malgun Gothic"/>
               </a:rPr>
-              <a:t>31.62%</a:t>
+              <a:t>100.00%</a:t>
             </a:r>
             <a:endParaRPr lang="ko-KR" sz="1100"/>
           </a:p>
@@ -8242,7 +8242,7 @@
                 <a:latin typeface="Malgun Gothic"/>
                 <a:ea typeface="Malgun Gothic"/>
               </a:rPr>
-              <a:t>0.00%</a:t>
+              <a:t>-</a:t>
             </a:r>
             <a:endParaRPr lang="ko-KR" sz="1100"/>
           </a:p>
@@ -8311,7 +8311,7 @@
                 <a:latin typeface="Malgun Gothic"/>
                 <a:ea typeface="Malgun Gothic"/>
               </a:rPr>
-              <a:t>-31.62pp</a:t>
+              <a:t>-100.00pp</a:t>
             </a:r>
             <a:endParaRPr lang="ko-KR" sz="1100"/>
           </a:p>
@@ -8380,7 +8380,7 @@
                 <a:latin typeface="Malgun Gothic"/>
                 <a:ea typeface="Malgun Gothic"/>
               </a:rPr>
-              <a:t>TIGER 반도체TOP10커버드콜</a:t>
+              <a:t>KIWOOM CD금리액티브(합성)</a:t>
             </a:r>
             <a:endParaRPr lang="ko-KR" sz="1100"/>
           </a:p>
@@ -8449,7 +8449,7 @@
                 <a:latin typeface="Malgun Gothic"/>
                 <a:ea typeface="Malgun Gothic"/>
               </a:rPr>
-              <a:t>감소 SK하이닉스</a:t>
+              <a:t>감소 원화현금</a:t>
             </a:r>
             <a:endParaRPr lang="ko-KR" sz="1100"/>
           </a:p>
@@ -8518,7 +8518,7 @@
                 <a:latin typeface="Malgun Gothic"/>
                 <a:ea typeface="Malgun Gothic"/>
               </a:rPr>
-              <a:t>000660</a:t>
+              <a:t>010010</a:t>
             </a:r>
             <a:endParaRPr lang="ko-KR" sz="1100"/>
           </a:p>
@@ -8587,7 +8587,7 @@
                 <a:latin typeface="Malgun Gothic"/>
                 <a:ea typeface="Malgun Gothic"/>
               </a:rPr>
-              <a:t>28.53%</a:t>
+              <a:t>100.00%</a:t>
             </a:r>
             <a:endParaRPr lang="ko-KR" sz="1100"/>
           </a:p>
@@ -8656,7 +8656,7 @@
                 <a:latin typeface="Malgun Gothic"/>
                 <a:ea typeface="Malgun Gothic"/>
               </a:rPr>
-              <a:t>0.00%</a:t>
+              <a:t>-</a:t>
             </a:r>
             <a:endParaRPr lang="ko-KR" sz="1100"/>
           </a:p>
@@ -8725,7 +8725,7 @@
                 <a:latin typeface="Malgun Gothic"/>
                 <a:ea typeface="Malgun Gothic"/>
               </a:rPr>
-              <a:t>-28.53pp</a:t>
+              <a:t>-100.00pp</a:t>
             </a:r>
             <a:endParaRPr lang="ko-KR" sz="1100"/>
           </a:p>
@@ -8794,7 +8794,7 @@
                 <a:latin typeface="Malgun Gothic"/>
                 <a:ea typeface="Malgun Gothic"/>
               </a:rPr>
-              <a:t>HK 베스트일레븐액티브</a:t>
+              <a:t>KODEX CD1년금리플러스액티브</a:t>
             </a:r>
             <a:endParaRPr lang="ko-KR" sz="1100"/>
           </a:p>
@@ -8863,7 +8863,7 @@
                 <a:latin typeface="Malgun Gothic"/>
                 <a:ea typeface="Malgun Gothic"/>
               </a:rPr>
-              <a:t>감소 삼성전자</a:t>
+              <a:t>감소 원화현금</a:t>
             </a:r>
             <a:endParaRPr lang="ko-KR" sz="1100"/>
           </a:p>
@@ -8932,7 +8932,7 @@
                 <a:latin typeface="Malgun Gothic"/>
                 <a:ea typeface="Malgun Gothic"/>
               </a:rPr>
-              <a:t>005930</a:t>
+              <a:t>010010</a:t>
             </a:r>
             <a:endParaRPr lang="ko-KR" sz="1100"/>
           </a:p>
@@ -9001,7 +9001,7 @@
                 <a:latin typeface="Malgun Gothic"/>
                 <a:ea typeface="Malgun Gothic"/>
               </a:rPr>
-              <a:t>27.63%</a:t>
+              <a:t>100.00%</a:t>
             </a:r>
             <a:endParaRPr lang="ko-KR" sz="1100"/>
           </a:p>
@@ -9070,7 +9070,7 @@
                 <a:latin typeface="Malgun Gothic"/>
                 <a:ea typeface="Malgun Gothic"/>
               </a:rPr>
-              <a:t>0.00%</a:t>
+              <a:t>-</a:t>
             </a:r>
             <a:endParaRPr lang="ko-KR" sz="1100"/>
           </a:p>
@@ -9139,7 +9139,7 @@
                 <a:latin typeface="Malgun Gothic"/>
                 <a:ea typeface="Malgun Gothic"/>
               </a:rPr>
-              <a:t>-27.63pp</a:t>
+              <a:t>-100.00pp</a:t>
             </a:r>
             <a:endParaRPr lang="ko-KR" sz="1100"/>
           </a:p>
@@ -9208,7 +9208,7 @@
                 <a:latin typeface="Malgun Gothic"/>
                 <a:ea typeface="Malgun Gothic"/>
               </a:rPr>
-              <a:t>TIME 코리아밸류업액티브</a:t>
+              <a:t>KODEX KOFR금리액티브(합성</a:t>
             </a:r>
             <a:endParaRPr lang="ko-KR" sz="1100"/>
           </a:p>
@@ -9277,7 +9277,7 @@
                 <a:latin typeface="Malgun Gothic"/>
                 <a:ea typeface="Malgun Gothic"/>
               </a:rPr>
-              <a:t>감소 SK하이닉스</a:t>
+              <a:t>감소 원화현금</a:t>
             </a:r>
             <a:endParaRPr lang="ko-KR" sz="1100"/>
           </a:p>
@@ -9346,7 +9346,7 @@
                 <a:latin typeface="Malgun Gothic"/>
                 <a:ea typeface="Malgun Gothic"/>
               </a:rPr>
-              <a:t>000660</a:t>
+              <a:t>010010</a:t>
             </a:r>
             <a:endParaRPr lang="ko-KR" sz="1100"/>
           </a:p>
@@ -9415,7 +9415,7 @@
                 <a:latin typeface="Malgun Gothic"/>
                 <a:ea typeface="Malgun Gothic"/>
               </a:rPr>
-              <a:t>27.01%</a:t>
+              <a:t>100.00%</a:t>
             </a:r>
             <a:endParaRPr lang="ko-KR" sz="1100"/>
           </a:p>
@@ -9484,7 +9484,7 @@
                 <a:latin typeface="Malgun Gothic"/>
                 <a:ea typeface="Malgun Gothic"/>
               </a:rPr>
-              <a:t>0.00%</a:t>
+              <a:t>-</a:t>
             </a:r>
             <a:endParaRPr lang="ko-KR" sz="1100"/>
           </a:p>
@@ -9553,7 +9553,7 @@
                 <a:latin typeface="Malgun Gothic"/>
                 <a:ea typeface="Malgun Gothic"/>
               </a:rPr>
-              <a:t>-27.01pp</a:t>
+              <a:t>-100.00pp</a:t>
             </a:r>
             <a:endParaRPr lang="ko-KR" sz="1100"/>
           </a:p>
@@ -9622,7 +9622,7 @@
                 <a:latin typeface="Malgun Gothic"/>
                 <a:ea typeface="Malgun Gothic"/>
               </a:rPr>
-              <a:t>마이티 다이나믹퀀트액티브</a:t>
+              <a:t>RISE CD금리액티브(합성)</a:t>
             </a:r>
             <a:endParaRPr lang="ko-KR" sz="1100"/>
           </a:p>
@@ -9691,7 +9691,7 @@
                 <a:latin typeface="Malgun Gothic"/>
                 <a:ea typeface="Malgun Gothic"/>
               </a:rPr>
-              <a:t>감소 삼성전자</a:t>
+              <a:t>감소 원화현금</a:t>
             </a:r>
             <a:endParaRPr lang="ko-KR" sz="1100"/>
           </a:p>
@@ -9760,7 +9760,7 @@
                 <a:latin typeface="Malgun Gothic"/>
                 <a:ea typeface="Malgun Gothic"/>
               </a:rPr>
-              <a:t>005930</a:t>
+              <a:t>010010</a:t>
             </a:r>
             <a:endParaRPr lang="ko-KR" sz="1100"/>
           </a:p>
@@ -9829,7 +9829,7 @@
                 <a:latin typeface="Malgun Gothic"/>
                 <a:ea typeface="Malgun Gothic"/>
               </a:rPr>
-              <a:t>26.25%</a:t>
+              <a:t>100.00%</a:t>
             </a:r>
             <a:endParaRPr lang="ko-KR" sz="1100"/>
           </a:p>
@@ -9898,7 +9898,7 @@
                 <a:latin typeface="Malgun Gothic"/>
                 <a:ea typeface="Malgun Gothic"/>
               </a:rPr>
-              <a:t>0.00%</a:t>
+              <a:t>-</a:t>
             </a:r>
             <a:endParaRPr lang="ko-KR" sz="1100"/>
           </a:p>
@@ -9967,7 +9967,7 @@
                 <a:latin typeface="Malgun Gothic"/>
                 <a:ea typeface="Malgun Gothic"/>
               </a:rPr>
-              <a:t>-26.25pp</a:t>
+              <a:t>-100.00pp</a:t>
             </a:r>
             <a:endParaRPr lang="ko-KR" sz="1100"/>
           </a:p>
@@ -10036,7 +10036,7 @@
                 <a:latin typeface="Malgun Gothic"/>
                 <a:ea typeface="Malgun Gothic"/>
               </a:rPr>
-              <a:t>TIGER AI코리아그로스액티브</a:t>
+              <a:t>RISE KOFR금리액티브(합성)</a:t>
             </a:r>
             <a:endParaRPr lang="ko-KR" sz="1100"/>
           </a:p>
@@ -10105,7 +10105,7 @@
                 <a:latin typeface="Malgun Gothic"/>
                 <a:ea typeface="Malgun Gothic"/>
               </a:rPr>
-              <a:t>감소 삼성전자</a:t>
+              <a:t>감소 원화현금</a:t>
             </a:r>
             <a:endParaRPr lang="ko-KR" sz="1100"/>
           </a:p>
@@ -10174,7 +10174,7 @@
                 <a:latin typeface="Malgun Gothic"/>
                 <a:ea typeface="Malgun Gothic"/>
               </a:rPr>
-              <a:t>005930</a:t>
+              <a:t>010010</a:t>
             </a:r>
             <a:endParaRPr lang="ko-KR" sz="1100"/>
           </a:p>
@@ -10243,7 +10243,7 @@
                 <a:latin typeface="Malgun Gothic"/>
                 <a:ea typeface="Malgun Gothic"/>
               </a:rPr>
-              <a:t>25.73%</a:t>
+              <a:t>100.00%</a:t>
             </a:r>
             <a:endParaRPr lang="ko-KR" sz="1100"/>
           </a:p>
@@ -10312,7 +10312,7 @@
                 <a:latin typeface="Malgun Gothic"/>
                 <a:ea typeface="Malgun Gothic"/>
               </a:rPr>
-              <a:t>0.00%</a:t>
+              <a:t>-</a:t>
             </a:r>
             <a:endParaRPr lang="ko-KR" sz="1100"/>
           </a:p>
@@ -10381,7 +10381,7 @@
                 <a:latin typeface="Malgun Gothic"/>
                 <a:ea typeface="Malgun Gothic"/>
               </a:rPr>
-              <a:t>-25.73pp</a:t>
+              <a:t>-100.00pp</a:t>
             </a:r>
             <a:endParaRPr lang="ko-KR" sz="1100"/>
           </a:p>
@@ -10450,7 +10450,7 @@
                 <a:latin typeface="Malgun Gothic"/>
                 <a:ea typeface="Malgun Gothic"/>
               </a:rPr>
-              <a:t>마이다스 코스피액티브</a:t>
+              <a:t>TIGER CD1년금리액티브(합성</a:t>
             </a:r>
             <a:endParaRPr lang="ko-KR" sz="1100"/>
           </a:p>
@@ -10519,7 +10519,7 @@
                 <a:latin typeface="Malgun Gothic"/>
                 <a:ea typeface="Malgun Gothic"/>
               </a:rPr>
-              <a:t>감소 삼성전자</a:t>
+              <a:t>감소 원화현금</a:t>
             </a:r>
             <a:endParaRPr lang="ko-KR" sz="1100"/>
           </a:p>
@@ -10588,7 +10588,7 @@
                 <a:latin typeface="Malgun Gothic"/>
                 <a:ea typeface="Malgun Gothic"/>
               </a:rPr>
-              <a:t>005930</a:t>
+              <a:t>010010</a:t>
             </a:r>
             <a:endParaRPr lang="ko-KR" sz="1100"/>
           </a:p>
@@ -10657,7 +10657,7 @@
                 <a:latin typeface="Malgun Gothic"/>
                 <a:ea typeface="Malgun Gothic"/>
               </a:rPr>
-              <a:t>25.27%</a:t>
+              <a:t>100.00%</a:t>
             </a:r>
             <a:endParaRPr lang="ko-KR" sz="1100"/>
           </a:p>
@@ -10726,7 +10726,7 @@
                 <a:latin typeface="Malgun Gothic"/>
                 <a:ea typeface="Malgun Gothic"/>
               </a:rPr>
-              <a:t>0.00%</a:t>
+              <a:t>-</a:t>
             </a:r>
             <a:endParaRPr lang="ko-KR" sz="1100"/>
           </a:p>
@@ -10795,7 +10795,7 @@
                 <a:latin typeface="Malgun Gothic"/>
                 <a:ea typeface="Malgun Gothic"/>
               </a:rPr>
-              <a:t>-25.27pp</a:t>
+              <a:t>-100.00pp</a:t>
             </a:r>
             <a:endParaRPr lang="ko-KR" sz="1100"/>
           </a:p>
@@ -10864,7 +10864,7 @@
                 <a:latin typeface="Malgun Gothic"/>
                 <a:ea typeface="Malgun Gothic"/>
               </a:rPr>
-              <a:t>ACE 라이프자산주주가치액티브</a:t>
+              <a:t>TIGER CD금리플러스액티브(합</a:t>
             </a:r>
             <a:endParaRPr lang="ko-KR" sz="1100"/>
           </a:p>
@@ -10933,7 +10933,7 @@
                 <a:latin typeface="Malgun Gothic"/>
                 <a:ea typeface="Malgun Gothic"/>
               </a:rPr>
-              <a:t>감소 삼성전자</a:t>
+              <a:t>감소 원화현금</a:t>
             </a:r>
             <a:endParaRPr lang="ko-KR" sz="1100"/>
           </a:p>
@@ -11002,7 +11002,7 @@
                 <a:latin typeface="Malgun Gothic"/>
                 <a:ea typeface="Malgun Gothic"/>
               </a:rPr>
-              <a:t>005930</a:t>
+              <a:t>010010</a:t>
             </a:r>
             <a:endParaRPr lang="ko-KR" sz="1100"/>
           </a:p>
@@ -11071,7 +11071,7 @@
                 <a:latin typeface="Malgun Gothic"/>
                 <a:ea typeface="Malgun Gothic"/>
               </a:rPr>
-              <a:t>25.13%</a:t>
+              <a:t>100.00%</a:t>
             </a:r>
             <a:endParaRPr lang="ko-KR" sz="1100"/>
           </a:p>
@@ -11140,7 +11140,7 @@
                 <a:latin typeface="Malgun Gothic"/>
                 <a:ea typeface="Malgun Gothic"/>
               </a:rPr>
-              <a:t>0.00%</a:t>
+              <a:t>-</a:t>
             </a:r>
             <a:endParaRPr lang="ko-KR" sz="1100"/>
           </a:p>
@@ -11209,7 +11209,7 @@
                 <a:latin typeface="Malgun Gothic"/>
                 <a:ea typeface="Malgun Gothic"/>
               </a:rPr>
-              <a:t>-25.13pp</a:t>
+              <a:t>-100.00pp</a:t>
             </a:r>
             <a:endParaRPr lang="ko-KR" sz="1100"/>
           </a:p>
@@ -11278,7 +11278,7 @@
                 <a:latin typeface="Malgun Gothic"/>
                 <a:ea typeface="Malgun Gothic"/>
               </a:rPr>
-              <a:t>KoAct 코리아밸류업액티브</a:t>
+              <a:t>TIGER KOFR금리액티브(합성</a:t>
             </a:r>
             <a:endParaRPr lang="ko-KR" sz="1100"/>
           </a:p>
@@ -11347,7 +11347,7 @@
                 <a:latin typeface="Malgun Gothic"/>
                 <a:ea typeface="Malgun Gothic"/>
               </a:rPr>
-              <a:t>감소 SK하이닉스</a:t>
+              <a:t>감소 원화현금</a:t>
             </a:r>
             <a:endParaRPr lang="ko-KR" sz="1100"/>
           </a:p>
@@ -11416,7 +11416,7 @@
                 <a:latin typeface="Malgun Gothic"/>
                 <a:ea typeface="Malgun Gothic"/>
               </a:rPr>
-              <a:t>000660</a:t>
+              <a:t>010010</a:t>
             </a:r>
             <a:endParaRPr lang="ko-KR" sz="1100"/>
           </a:p>
@@ -11485,7 +11485,7 @@
                 <a:latin typeface="Malgun Gothic"/>
                 <a:ea typeface="Malgun Gothic"/>
               </a:rPr>
-              <a:t>25.01%</a:t>
+              <a:t>100.00%</a:t>
             </a:r>
             <a:endParaRPr lang="ko-KR" sz="1100"/>
           </a:p>
@@ -11554,7 +11554,7 @@
                 <a:latin typeface="Malgun Gothic"/>
                 <a:ea typeface="Malgun Gothic"/>
               </a:rPr>
-              <a:t>0.00%</a:t>
+              <a:t>-</a:t>
             </a:r>
             <a:endParaRPr lang="ko-KR" sz="1100"/>
           </a:p>
@@ -11623,7 +11623,7 @@
                 <a:latin typeface="Malgun Gothic"/>
                 <a:ea typeface="Malgun Gothic"/>
               </a:rPr>
-              <a:t>-25.01pp</a:t>
+              <a:t>-100.00pp</a:t>
             </a:r>
             <a:endParaRPr lang="ko-KR" sz="1100"/>
           </a:p>
@@ -11849,7 +11849,7 @@
                 <a:latin typeface="Malgun Gothic"/>
                 <a:ea typeface="Malgun Gothic"/>
               </a:rPr>
-              <a:t>1. 오늘 변화 ETF는 105개, 전체 변화는 5165건입니다.</a:t>
+              <a:t>1. 오늘 변화 ETF는 252개, 전체 변화는 20877건입니다.</a:t>
             </a:r>
             <a:endParaRPr lang="ko-KR" sz="2400"/>
           </a:p>
@@ -11863,7 +11863,7 @@
                 <a:latin typeface="Malgun Gothic"/>
                 <a:ea typeface="Malgun Gothic"/>
               </a:rPr>
-              <a:t>2. 매수/비중증가 71건, 매도/비중감소 3474건을 확인했습니다.</a:t>
+              <a:t>2. 매수/비중증가 107건, 매도/비중감소 2301건을 확인했습니다.</a:t>
             </a:r>
             <a:endParaRPr lang="ko-KR" sz="2400"/>
           </a:p>

--- a/docs/latest_changes.pptx
+++ b/docs/latest_changes.pptx
@@ -512,7 +512,7 @@
                 <a:latin typeface="Malgun Gothic"/>
                 <a:ea typeface="Malgun Gothic"/>
               </a:rPr>
-              <a:t>252</a:t>
+              <a:t>251</a:t>
             </a:r>
             <a:endParaRPr lang="ko-KR" sz="3000"/>
           </a:p>
@@ -650,7 +650,7 @@
                 <a:latin typeface="Malgun Gothic"/>
                 <a:ea typeface="Malgun Gothic"/>
               </a:rPr>
-              <a:t>20877</a:t>
+              <a:t>19361</a:t>
             </a:r>
             <a:endParaRPr lang="ko-KR" sz="3000"/>
           </a:p>
@@ -788,7 +788,7 @@
                 <a:latin typeface="Malgun Gothic"/>
                 <a:ea typeface="Malgun Gothic"/>
               </a:rPr>
-              <a:t>107</a:t>
+              <a:t>317</a:t>
             </a:r>
             <a:endParaRPr lang="ko-KR" sz="3000"/>
           </a:p>
@@ -926,7 +926,7 @@
                 <a:latin typeface="Malgun Gothic"/>
                 <a:ea typeface="Malgun Gothic"/>
               </a:rPr>
-              <a:t>2301</a:t>
+              <a:t>587</a:t>
             </a:r>
             <a:endParaRPr lang="ko-KR" sz="3000"/>
           </a:p>
@@ -1315,7 +1315,7 @@
                 <a:latin typeface="Malgun Gothic"/>
                 <a:ea typeface="Malgun Gothic"/>
               </a:rPr>
-              <a:t>KoAct 코스닥액티브 (0163Y0)</a:t>
+              <a:t>ACE 2차전지&amp;친환경차액티브 (385600)</a:t>
             </a:r>
             <a:endParaRPr lang="ko-KR" sz="1800"/>
           </a:p>
@@ -1355,7 +1355,7 @@
                 <a:latin typeface="Malgun Gothic"/>
                 <a:ea typeface="Malgun Gothic"/>
               </a:rPr>
-              <a:t>변화 90건 | 매수/증가 1건 | 매도/감소 87건</a:t>
+              <a:t>변화 51건 | 매수/증가 0건 | 매도/감소 51건</a:t>
             </a:r>
             <a:endParaRPr lang="ko-KR" sz="1300"/>
           </a:p>
@@ -1395,7 +1395,7 @@
                 <a:latin typeface="Malgun Gothic"/>
                 <a:ea typeface="Malgun Gothic"/>
               </a:rPr>
-              <a:t>충격도 100.35pp</a:t>
+              <a:t>충격도 100.01pp</a:t>
             </a:r>
             <a:endParaRPr lang="ko-KR" sz="1800"/>
           </a:p>
@@ -1504,7 +1504,7 @@
                 <a:latin typeface="Malgun Gothic"/>
                 <a:ea typeface="Malgun Gothic"/>
               </a:rPr>
-              <a:t>ACE 주주환원가치주액티브 (447430)</a:t>
+              <a:t>ACE ESG액티브 (385590)</a:t>
             </a:r>
             <a:endParaRPr lang="ko-KR" sz="1800"/>
           </a:p>
@@ -1544,7 +1544,7 @@
                 <a:latin typeface="Malgun Gothic"/>
                 <a:ea typeface="Malgun Gothic"/>
               </a:rPr>
-              <a:t>변화 28건 | 매수/증가 0건 | 매도/감소 27건</a:t>
+              <a:t>변화 27건 | 매수/증가 0건 | 매도/감소 27건</a:t>
             </a:r>
             <a:endParaRPr lang="ko-KR" sz="1300"/>
           </a:p>
@@ -1584,7 +1584,7 @@
                 <a:latin typeface="Malgun Gothic"/>
                 <a:ea typeface="Malgun Gothic"/>
               </a:rPr>
-              <a:t>충격도 100.02pp</a:t>
+              <a:t>충격도 100.00pp</a:t>
             </a:r>
             <a:endParaRPr lang="ko-KR" sz="1800"/>
           </a:p>
@@ -1693,7 +1693,7 @@
                 <a:latin typeface="Malgun Gothic"/>
                 <a:ea typeface="Malgun Gothic"/>
               </a:rPr>
-              <a:t>KODEX 로봇액티브 (445290)</a:t>
+              <a:t>1Q CD금리액티브(합성) (491610)</a:t>
             </a:r>
             <a:endParaRPr lang="ko-KR" sz="1800"/>
           </a:p>
@@ -1733,7 +1733,7 @@
                 <a:latin typeface="Malgun Gothic"/>
                 <a:ea typeface="Malgun Gothic"/>
               </a:rPr>
-              <a:t>변화 33건 | 매수/증가 0건 | 매도/감소 33건</a:t>
+              <a:t>변화 7건 | 매수/증가 0건 | 매도/감소 1건</a:t>
             </a:r>
             <a:endParaRPr lang="ko-KR" sz="1300"/>
           </a:p>
@@ -1773,7 +1773,7 @@
                 <a:latin typeface="Malgun Gothic"/>
                 <a:ea typeface="Malgun Gothic"/>
               </a:rPr>
-              <a:t>충격도 100.02pp</a:t>
+              <a:t>충격도 100.00pp</a:t>
             </a:r>
             <a:endParaRPr lang="ko-KR" sz="1800"/>
           </a:p>
@@ -1882,7 +1882,7 @@
                 <a:latin typeface="Malgun Gothic"/>
                 <a:ea typeface="Malgun Gothic"/>
               </a:rPr>
-              <a:t>KoAct K수출핵심기업TOP30액티브 (0074K0)</a:t>
+              <a:t>ACE 라이프자산주주가치액티브 (494330)</a:t>
             </a:r>
             <a:endParaRPr lang="ko-KR" sz="1800"/>
           </a:p>
@@ -1922,7 +1922,7 @@
                 <a:latin typeface="Malgun Gothic"/>
                 <a:ea typeface="Malgun Gothic"/>
               </a:rPr>
-              <a:t>변화 38건 | 매수/증가 0건 | 매도/감소 38건</a:t>
+              <a:t>변화 31건 | 매수/증가 0건 | 매도/감소 31건</a:t>
             </a:r>
             <a:endParaRPr lang="ko-KR" sz="1300"/>
           </a:p>
@@ -1962,7 +1962,7 @@
                 <a:latin typeface="Malgun Gothic"/>
                 <a:ea typeface="Malgun Gothic"/>
               </a:rPr>
-              <a:t>충격도 100.02pp</a:t>
+              <a:t>충격도 100.00pp</a:t>
             </a:r>
             <a:endParaRPr lang="ko-KR" sz="1800"/>
           </a:p>
@@ -2071,7 +2071,7 @@
                 <a:latin typeface="Malgun Gothic"/>
                 <a:ea typeface="Malgun Gothic"/>
               </a:rPr>
-              <a:t>KoAct 코리아밸류업액티브 (495230)</a:t>
+              <a:t>ACE K수출핵심TOP10산업액티브 (0172Y0)</a:t>
             </a:r>
             <a:endParaRPr lang="ko-KR" sz="1800"/>
           </a:p>
@@ -2111,7 +2111,7 @@
                 <a:latin typeface="Malgun Gothic"/>
                 <a:ea typeface="Malgun Gothic"/>
               </a:rPr>
-              <a:t>변화 80건 | 매수/증가 0건 | 매도/감소 78건</a:t>
+              <a:t>변화 13건 | 매수/증가 0건 | 매도/감소 13건</a:t>
             </a:r>
             <a:endParaRPr lang="ko-KR" sz="1300"/>
           </a:p>
@@ -2151,7 +2151,7 @@
                 <a:latin typeface="Malgun Gothic"/>
                 <a:ea typeface="Malgun Gothic"/>
               </a:rPr>
-              <a:t>충격도 100.02pp</a:t>
+              <a:t>충격도 99.99pp</a:t>
             </a:r>
             <a:endParaRPr lang="ko-KR" sz="1800"/>
           </a:p>
@@ -3092,7 +3092,7 @@
                 <a:latin typeface="Malgun Gothic"/>
                 <a:ea typeface="Malgun Gothic"/>
               </a:rPr>
-              <a:t>13.75%</a:t>
+              <a:t>13.73%</a:t>
             </a:r>
             <a:endParaRPr lang="ko-KR" sz="1100"/>
           </a:p>
@@ -3161,7 +3161,7 @@
                 <a:latin typeface="Malgun Gothic"/>
                 <a:ea typeface="Malgun Gothic"/>
               </a:rPr>
-              <a:t>+11.41pp</a:t>
+              <a:t>+11.39pp</a:t>
             </a:r>
             <a:endParaRPr lang="ko-KR" sz="1100"/>
           </a:p>
@@ -3506,7 +3506,7 @@
                 <a:latin typeface="Malgun Gothic"/>
                 <a:ea typeface="Malgun Gothic"/>
               </a:rPr>
-              <a:t>18.11%</a:t>
+              <a:t>18.08%</a:t>
             </a:r>
             <a:endParaRPr lang="ko-KR" sz="1100"/>
           </a:p>
@@ -3575,7 +3575,7 @@
                 <a:latin typeface="Malgun Gothic"/>
                 <a:ea typeface="Malgun Gothic"/>
               </a:rPr>
-              <a:t>+9.59pp</a:t>
+              <a:t>+9.56pp</a:t>
             </a:r>
             <a:endParaRPr lang="ko-KR" sz="1100"/>
           </a:p>
@@ -4058,7 +4058,7 @@
                 <a:latin typeface="Malgun Gothic"/>
                 <a:ea typeface="Malgun Gothic"/>
               </a:rPr>
-              <a:t>에셋플러스 코리아대장장이액티브</a:t>
+              <a:t>TIME K바이오액티브</a:t>
             </a:r>
             <a:endParaRPr lang="ko-KR" sz="1100"/>
           </a:p>
@@ -4265,7 +4265,7 @@
                 <a:latin typeface="Malgun Gothic"/>
                 <a:ea typeface="Malgun Gothic"/>
               </a:rPr>
-              <a:t>7.62%</a:t>
+              <a:t>0.79%</a:t>
             </a:r>
             <a:endParaRPr lang="ko-KR" sz="1100"/>
           </a:p>
@@ -4334,7 +4334,7 @@
                 <a:latin typeface="Malgun Gothic"/>
                 <a:ea typeface="Malgun Gothic"/>
               </a:rPr>
-              <a:t>10.82%</a:t>
+              <a:t>2.71%</a:t>
             </a:r>
             <a:endParaRPr lang="ko-KR" sz="1100"/>
           </a:p>
@@ -4403,7 +4403,7 @@
                 <a:latin typeface="Malgun Gothic"/>
                 <a:ea typeface="Malgun Gothic"/>
               </a:rPr>
-              <a:t>+3.20pp</a:t>
+              <a:t>+1.92pp</a:t>
             </a:r>
             <a:endParaRPr lang="ko-KR" sz="1100"/>
           </a:p>
@@ -4472,7 +4472,7 @@
                 <a:latin typeface="Malgun Gothic"/>
                 <a:ea typeface="Malgun Gothic"/>
               </a:rPr>
-              <a:t>TIME K바이오액티브</a:t>
+              <a:t>RISE 바이오TOP10액티브</a:t>
             </a:r>
             <a:endParaRPr lang="ko-KR" sz="1100"/>
           </a:p>
@@ -4541,7 +4541,7 @@
                 <a:latin typeface="Malgun Gothic"/>
                 <a:ea typeface="Malgun Gothic"/>
               </a:rPr>
-              <a:t>증가 원화현금</a:t>
+              <a:t>신규 토모큐브</a:t>
             </a:r>
             <a:endParaRPr lang="ko-KR" sz="1100"/>
           </a:p>
@@ -4610,7 +4610,7 @@
                 <a:latin typeface="Malgun Gothic"/>
                 <a:ea typeface="Malgun Gothic"/>
               </a:rPr>
-              <a:t>010010</a:t>
+              <a:t>475960</a:t>
             </a:r>
             <a:endParaRPr lang="ko-KR" sz="1100"/>
           </a:p>
@@ -4679,7 +4679,7 @@
                 <a:latin typeface="Malgun Gothic"/>
                 <a:ea typeface="Malgun Gothic"/>
               </a:rPr>
-              <a:t>0.79%</a:t>
+              <a:t>-</a:t>
             </a:r>
             <a:endParaRPr lang="ko-KR" sz="1100"/>
           </a:p>
@@ -4748,7 +4748,7 @@
                 <a:latin typeface="Malgun Gothic"/>
                 <a:ea typeface="Malgun Gothic"/>
               </a:rPr>
-              <a:t>2.72%</a:t>
+              <a:t>1.77%</a:t>
             </a:r>
             <a:endParaRPr lang="ko-KR" sz="1100"/>
           </a:p>
@@ -4817,7 +4817,7 @@
                 <a:latin typeface="Malgun Gothic"/>
                 <a:ea typeface="Malgun Gothic"/>
               </a:rPr>
-              <a:t>+1.93pp</a:t>
+              <a:t>+1.77pp</a:t>
             </a:r>
             <a:endParaRPr lang="ko-KR" sz="1100"/>
           </a:p>
@@ -5162,7 +5162,7 @@
                 <a:latin typeface="Malgun Gothic"/>
                 <a:ea typeface="Malgun Gothic"/>
               </a:rPr>
-              <a:t>1.61%</a:t>
+              <a:t>1.60%</a:t>
             </a:r>
             <a:endParaRPr lang="ko-KR" sz="1100"/>
           </a:p>
@@ -5231,7 +5231,7 @@
                 <a:latin typeface="Malgun Gothic"/>
                 <a:ea typeface="Malgun Gothic"/>
               </a:rPr>
-              <a:t>+1.61pp</a:t>
+              <a:t>+1.60pp</a:t>
             </a:r>
             <a:endParaRPr lang="ko-KR" sz="1100"/>
           </a:p>
@@ -5300,7 +5300,7 @@
                 <a:latin typeface="Malgun Gothic"/>
                 <a:ea typeface="Malgun Gothic"/>
               </a:rPr>
-              <a:t>TIGER 코리아테크액티브</a:t>
+              <a:t>KoAct AI인프라액티브</a:t>
             </a:r>
             <a:endParaRPr lang="ko-KR" sz="1100"/>
           </a:p>
@@ -5369,7 +5369,7 @@
                 <a:latin typeface="Malgun Gothic"/>
                 <a:ea typeface="Malgun Gothic"/>
               </a:rPr>
-              <a:t>신규 주성엔지니어링</a:t>
+              <a:t>신규 프로텍</a:t>
             </a:r>
             <a:endParaRPr lang="ko-KR" sz="1100"/>
           </a:p>
@@ -5438,7 +5438,7 @@
                 <a:latin typeface="Malgun Gothic"/>
                 <a:ea typeface="Malgun Gothic"/>
               </a:rPr>
-              <a:t>036930</a:t>
+              <a:t>053610</a:t>
             </a:r>
             <a:endParaRPr lang="ko-KR" sz="1100"/>
           </a:p>
@@ -5576,7 +5576,7 @@
                 <a:latin typeface="Malgun Gothic"/>
                 <a:ea typeface="Malgun Gothic"/>
               </a:rPr>
-              <a:t>1.29%</a:t>
+              <a:t>1.59%</a:t>
             </a:r>
             <a:endParaRPr lang="ko-KR" sz="1100"/>
           </a:p>
@@ -5645,7 +5645,7 @@
                 <a:latin typeface="Malgun Gothic"/>
                 <a:ea typeface="Malgun Gothic"/>
               </a:rPr>
-              <a:t>+1.29pp</a:t>
+              <a:t>+1.59pp</a:t>
             </a:r>
             <a:endParaRPr lang="ko-KR" sz="1100"/>
           </a:p>
@@ -5714,7 +5714,7 @@
                 <a:latin typeface="Malgun Gothic"/>
                 <a:ea typeface="Malgun Gothic"/>
               </a:rPr>
-              <a:t>TIGER 퓨처모빌리티액티브</a:t>
+              <a:t>RISE 바이오TOP10액티브</a:t>
             </a:r>
             <a:endParaRPr lang="ko-KR" sz="1100"/>
           </a:p>
@@ -5783,7 +5783,7 @@
                 <a:latin typeface="Malgun Gothic"/>
                 <a:ea typeface="Malgun Gothic"/>
               </a:rPr>
-              <a:t>증가 LG에너지솔루션</a:t>
+              <a:t>증가 알테오젠</a:t>
             </a:r>
             <a:endParaRPr lang="ko-KR" sz="1100"/>
           </a:p>
@@ -5852,7 +5852,7 @@
                 <a:latin typeface="Malgun Gothic"/>
                 <a:ea typeface="Malgun Gothic"/>
               </a:rPr>
-              <a:t>373220</a:t>
+              <a:t>196170</a:t>
             </a:r>
             <a:endParaRPr lang="ko-KR" sz="1100"/>
           </a:p>
@@ -5921,7 +5921,7 @@
                 <a:latin typeface="Malgun Gothic"/>
                 <a:ea typeface="Malgun Gothic"/>
               </a:rPr>
-              <a:t>5.96%</a:t>
+              <a:t>6.21%</a:t>
             </a:r>
             <a:endParaRPr lang="ko-KR" sz="1100"/>
           </a:p>
@@ -5990,7 +5990,7 @@
                 <a:latin typeface="Malgun Gothic"/>
                 <a:ea typeface="Malgun Gothic"/>
               </a:rPr>
-              <a:t>7.16%</a:t>
+              <a:t>7.68%</a:t>
             </a:r>
             <a:endParaRPr lang="ko-KR" sz="1100"/>
           </a:p>
@@ -6059,7 +6059,7 @@
                 <a:latin typeface="Malgun Gothic"/>
                 <a:ea typeface="Malgun Gothic"/>
               </a:rPr>
-              <a:t>+1.20pp</a:t>
+              <a:t>+1.47pp</a:t>
             </a:r>
             <a:endParaRPr lang="ko-KR" sz="1100"/>
           </a:p>
@@ -6128,7 +6128,7 @@
                 <a:latin typeface="Malgun Gothic"/>
                 <a:ea typeface="Malgun Gothic"/>
               </a:rPr>
-              <a:t>TIGER 퓨처모빌리티액티브</a:t>
+              <a:t>KoAct AI인프라액티브</a:t>
             </a:r>
             <a:endParaRPr lang="ko-KR" sz="1100"/>
           </a:p>
@@ -6197,7 +6197,7 @@
                 <a:latin typeface="Malgun Gothic"/>
                 <a:ea typeface="Malgun Gothic"/>
               </a:rPr>
-              <a:t>증가 에코프로비엠</a:t>
+              <a:t>증가 삼성SDI</a:t>
             </a:r>
             <a:endParaRPr lang="ko-KR" sz="1100"/>
           </a:p>
@@ -6266,7 +6266,7 @@
                 <a:latin typeface="Malgun Gothic"/>
                 <a:ea typeface="Malgun Gothic"/>
               </a:rPr>
-              <a:t>247540</a:t>
+              <a:t>006400</a:t>
             </a:r>
             <a:endParaRPr lang="ko-KR" sz="1100"/>
           </a:p>
@@ -6335,7 +6335,7 @@
                 <a:latin typeface="Malgun Gothic"/>
                 <a:ea typeface="Malgun Gothic"/>
               </a:rPr>
-              <a:t>3.88%</a:t>
+              <a:t>6.49%</a:t>
             </a:r>
             <a:endParaRPr lang="ko-KR" sz="1100"/>
           </a:p>
@@ -6404,7 +6404,7 @@
                 <a:latin typeface="Malgun Gothic"/>
                 <a:ea typeface="Malgun Gothic"/>
               </a:rPr>
-              <a:t>4.86%</a:t>
+              <a:t>7.77%</a:t>
             </a:r>
             <a:endParaRPr lang="ko-KR" sz="1100"/>
           </a:p>
@@ -6473,7 +6473,7 @@
                 <a:latin typeface="Malgun Gothic"/>
                 <a:ea typeface="Malgun Gothic"/>
               </a:rPr>
-              <a:t>+0.98pp</a:t>
+              <a:t>+1.28pp</a:t>
             </a:r>
             <a:endParaRPr lang="ko-KR" sz="1100"/>
           </a:p>
@@ -6542,7 +6542,7 @@
                 <a:latin typeface="Malgun Gothic"/>
                 <a:ea typeface="Malgun Gothic"/>
               </a:rPr>
-              <a:t>TIGER 코리아테크액티브</a:t>
+              <a:t>TIGER 기술이전바이오액티브</a:t>
             </a:r>
             <a:endParaRPr lang="ko-KR" sz="1100"/>
           </a:p>
@@ -6611,7 +6611,7 @@
                 <a:latin typeface="Malgun Gothic"/>
                 <a:ea typeface="Malgun Gothic"/>
               </a:rPr>
-              <a:t>증가 나노신소재</a:t>
+              <a:t>증가 원화현금</a:t>
             </a:r>
             <a:endParaRPr lang="ko-KR" sz="1100"/>
           </a:p>
@@ -6680,7 +6680,7 @@
                 <a:latin typeface="Malgun Gothic"/>
                 <a:ea typeface="Malgun Gothic"/>
               </a:rPr>
-              <a:t>121600</a:t>
+              <a:t>010010</a:t>
             </a:r>
             <a:endParaRPr lang="ko-KR" sz="1100"/>
           </a:p>
@@ -6749,7 +6749,7 @@
                 <a:latin typeface="Malgun Gothic"/>
                 <a:ea typeface="Malgun Gothic"/>
               </a:rPr>
-              <a:t>1.00%</a:t>
+              <a:t>2.91%</a:t>
             </a:r>
             <a:endParaRPr lang="ko-KR" sz="1100"/>
           </a:p>
@@ -6818,7 +6818,7 @@
                 <a:latin typeface="Malgun Gothic"/>
                 <a:ea typeface="Malgun Gothic"/>
               </a:rPr>
-              <a:t>1.97%</a:t>
+              <a:t>4.14%</a:t>
             </a:r>
             <a:endParaRPr lang="ko-KR" sz="1100"/>
           </a:p>
@@ -6887,7 +6887,7 @@
                 <a:latin typeface="Malgun Gothic"/>
                 <a:ea typeface="Malgun Gothic"/>
               </a:rPr>
-              <a:t>+0.97pp</a:t>
+              <a:t>+1.23pp</a:t>
             </a:r>
             <a:endParaRPr lang="ko-KR" sz="1100"/>
           </a:p>
@@ -7966,7 +7966,7 @@
                 <a:latin typeface="Malgun Gothic"/>
                 <a:ea typeface="Malgun Gothic"/>
               </a:rPr>
-              <a:t>HANARO KOFR금리액티브(합</a:t>
+              <a:t>1Q 200액티브</a:t>
             </a:r>
             <a:endParaRPr lang="ko-KR" sz="1100"/>
           </a:p>
@@ -8035,7 +8035,7 @@
                 <a:latin typeface="Malgun Gothic"/>
                 <a:ea typeface="Malgun Gothic"/>
               </a:rPr>
-              <a:t>감소 원화현금</a:t>
+              <a:t>감소 삼성전자</a:t>
             </a:r>
             <a:endParaRPr lang="ko-KR" sz="1100"/>
           </a:p>
@@ -8104,7 +8104,7 @@
                 <a:latin typeface="Malgun Gothic"/>
                 <a:ea typeface="Malgun Gothic"/>
               </a:rPr>
-              <a:t>010010</a:t>
+              <a:t>005930</a:t>
             </a:r>
             <a:endParaRPr lang="ko-KR" sz="1100"/>
           </a:p>
@@ -8173,7 +8173,7 @@
                 <a:latin typeface="Malgun Gothic"/>
                 <a:ea typeface="Malgun Gothic"/>
               </a:rPr>
-              <a:t>100.00%</a:t>
+              <a:t>31.62%</a:t>
             </a:r>
             <a:endParaRPr lang="ko-KR" sz="1100"/>
           </a:p>
@@ -8311,7 +8311,7 @@
                 <a:latin typeface="Malgun Gothic"/>
                 <a:ea typeface="Malgun Gothic"/>
               </a:rPr>
-              <a:t>-100.00pp</a:t>
+              <a:t>-31.62pp</a:t>
             </a:r>
             <a:endParaRPr lang="ko-KR" sz="1100"/>
           </a:p>
@@ -8380,7 +8380,7 @@
                 <a:latin typeface="Malgun Gothic"/>
                 <a:ea typeface="Malgun Gothic"/>
               </a:rPr>
-              <a:t>KIWOOM CD금리액티브(합성)</a:t>
+              <a:t>ACE 라이프자산주주가치액티브</a:t>
             </a:r>
             <a:endParaRPr lang="ko-KR" sz="1100"/>
           </a:p>
@@ -8449,7 +8449,7 @@
                 <a:latin typeface="Malgun Gothic"/>
                 <a:ea typeface="Malgun Gothic"/>
               </a:rPr>
-              <a:t>감소 원화현금</a:t>
+              <a:t>감소 삼성전자</a:t>
             </a:r>
             <a:endParaRPr lang="ko-KR" sz="1100"/>
           </a:p>
@@ -8518,7 +8518,7 @@
                 <a:latin typeface="Malgun Gothic"/>
                 <a:ea typeface="Malgun Gothic"/>
               </a:rPr>
-              <a:t>010010</a:t>
+              <a:t>005930</a:t>
             </a:r>
             <a:endParaRPr lang="ko-KR" sz="1100"/>
           </a:p>
@@ -8587,7 +8587,7 @@
                 <a:latin typeface="Malgun Gothic"/>
                 <a:ea typeface="Malgun Gothic"/>
               </a:rPr>
-              <a:t>100.00%</a:t>
+              <a:t>25.13%</a:t>
             </a:r>
             <a:endParaRPr lang="ko-KR" sz="1100"/>
           </a:p>
@@ -8725,7 +8725,7 @@
                 <a:latin typeface="Malgun Gothic"/>
                 <a:ea typeface="Malgun Gothic"/>
               </a:rPr>
-              <a:t>-100.00pp</a:t>
+              <a:t>-25.13pp</a:t>
             </a:r>
             <a:endParaRPr lang="ko-KR" sz="1100"/>
           </a:p>
@@ -8794,7 +8794,7 @@
                 <a:latin typeface="Malgun Gothic"/>
                 <a:ea typeface="Malgun Gothic"/>
               </a:rPr>
-              <a:t>KODEX CD1년금리플러스액티브</a:t>
+              <a:t>ACE ESG액티브</a:t>
             </a:r>
             <a:endParaRPr lang="ko-KR" sz="1100"/>
           </a:p>
@@ -8863,7 +8863,7 @@
                 <a:latin typeface="Malgun Gothic"/>
                 <a:ea typeface="Malgun Gothic"/>
               </a:rPr>
-              <a:t>감소 원화현금</a:t>
+              <a:t>감소 삼성전자</a:t>
             </a:r>
             <a:endParaRPr lang="ko-KR" sz="1100"/>
           </a:p>
@@ -8932,7 +8932,7 @@
                 <a:latin typeface="Malgun Gothic"/>
                 <a:ea typeface="Malgun Gothic"/>
               </a:rPr>
-              <a:t>010010</a:t>
+              <a:t>005930</a:t>
             </a:r>
             <a:endParaRPr lang="ko-KR" sz="1100"/>
           </a:p>
@@ -9001,7 +9001,7 @@
                 <a:latin typeface="Malgun Gothic"/>
                 <a:ea typeface="Malgun Gothic"/>
               </a:rPr>
-              <a:t>100.00%</a:t>
+              <a:t>22.53%</a:t>
             </a:r>
             <a:endParaRPr lang="ko-KR" sz="1100"/>
           </a:p>
@@ -9139,7 +9139,7 @@
                 <a:latin typeface="Malgun Gothic"/>
                 <a:ea typeface="Malgun Gothic"/>
               </a:rPr>
-              <a:t>-100.00pp</a:t>
+              <a:t>-22.53pp</a:t>
             </a:r>
             <a:endParaRPr lang="ko-KR" sz="1100"/>
           </a:p>
@@ -9208,7 +9208,7 @@
                 <a:latin typeface="Malgun Gothic"/>
                 <a:ea typeface="Malgun Gothic"/>
               </a:rPr>
-              <a:t>KODEX KOFR금리액티브(합성</a:t>
+              <a:t>1Q 200액티브</a:t>
             </a:r>
             <a:endParaRPr lang="ko-KR" sz="1100"/>
           </a:p>
@@ -9277,7 +9277,7 @@
                 <a:latin typeface="Malgun Gothic"/>
                 <a:ea typeface="Malgun Gothic"/>
               </a:rPr>
-              <a:t>감소 원화현금</a:t>
+              <a:t>감소 SK하이닉스</a:t>
             </a:r>
             <a:endParaRPr lang="ko-KR" sz="1100"/>
           </a:p>
@@ -9346,7 +9346,7 @@
                 <a:latin typeface="Malgun Gothic"/>
                 <a:ea typeface="Malgun Gothic"/>
               </a:rPr>
-              <a:t>010010</a:t>
+              <a:t>000660</a:t>
             </a:r>
             <a:endParaRPr lang="ko-KR" sz="1100"/>
           </a:p>
@@ -9415,7 +9415,7 @@
                 <a:latin typeface="Malgun Gothic"/>
                 <a:ea typeface="Malgun Gothic"/>
               </a:rPr>
-              <a:t>100.00%</a:t>
+              <a:t>21.03%</a:t>
             </a:r>
             <a:endParaRPr lang="ko-KR" sz="1100"/>
           </a:p>
@@ -9553,7 +9553,7 @@
                 <a:latin typeface="Malgun Gothic"/>
                 <a:ea typeface="Malgun Gothic"/>
               </a:rPr>
-              <a:t>-100.00pp</a:t>
+              <a:t>-21.03pp</a:t>
             </a:r>
             <a:endParaRPr lang="ko-KR" sz="1100"/>
           </a:p>
@@ -9622,7 +9622,7 @@
                 <a:latin typeface="Malgun Gothic"/>
                 <a:ea typeface="Malgun Gothic"/>
               </a:rPr>
-              <a:t>RISE CD금리액티브(합성)</a:t>
+              <a:t>ACE ESG액티브</a:t>
             </a:r>
             <a:endParaRPr lang="ko-KR" sz="1100"/>
           </a:p>
@@ -9691,7 +9691,7 @@
                 <a:latin typeface="Malgun Gothic"/>
                 <a:ea typeface="Malgun Gothic"/>
               </a:rPr>
-              <a:t>감소 원화현금</a:t>
+              <a:t>감소 SK하이닉스</a:t>
             </a:r>
             <a:endParaRPr lang="ko-KR" sz="1100"/>
           </a:p>
@@ -9760,7 +9760,7 @@
                 <a:latin typeface="Malgun Gothic"/>
                 <a:ea typeface="Malgun Gothic"/>
               </a:rPr>
-              <a:t>010010</a:t>
+              <a:t>000660</a:t>
             </a:r>
             <a:endParaRPr lang="ko-KR" sz="1100"/>
           </a:p>
@@ -9829,7 +9829,7 @@
                 <a:latin typeface="Malgun Gothic"/>
                 <a:ea typeface="Malgun Gothic"/>
               </a:rPr>
-              <a:t>100.00%</a:t>
+              <a:t>14.22%</a:t>
             </a:r>
             <a:endParaRPr lang="ko-KR" sz="1100"/>
           </a:p>
@@ -9967,7 +9967,7 @@
                 <a:latin typeface="Malgun Gothic"/>
                 <a:ea typeface="Malgun Gothic"/>
               </a:rPr>
-              <a:t>-100.00pp</a:t>
+              <a:t>-14.22pp</a:t>
             </a:r>
             <a:endParaRPr lang="ko-KR" sz="1100"/>
           </a:p>
@@ -10036,7 +10036,7 @@
                 <a:latin typeface="Malgun Gothic"/>
                 <a:ea typeface="Malgun Gothic"/>
               </a:rPr>
-              <a:t>RISE KOFR금리액티브(합성)</a:t>
+              <a:t>ACE 2차전지&amp;친환경차액티브</a:t>
             </a:r>
             <a:endParaRPr lang="ko-KR" sz="1100"/>
           </a:p>
@@ -10105,7 +10105,7 @@
                 <a:latin typeface="Malgun Gothic"/>
                 <a:ea typeface="Malgun Gothic"/>
               </a:rPr>
-              <a:t>감소 원화현금</a:t>
+              <a:t>감소 삼성전기</a:t>
             </a:r>
             <a:endParaRPr lang="ko-KR" sz="1100"/>
           </a:p>
@@ -10174,7 +10174,7 @@
                 <a:latin typeface="Malgun Gothic"/>
                 <a:ea typeface="Malgun Gothic"/>
               </a:rPr>
-              <a:t>010010</a:t>
+              <a:t>009150</a:t>
             </a:r>
             <a:endParaRPr lang="ko-KR" sz="1100"/>
           </a:p>
@@ -10243,7 +10243,7 @@
                 <a:latin typeface="Malgun Gothic"/>
                 <a:ea typeface="Malgun Gothic"/>
               </a:rPr>
-              <a:t>100.00%</a:t>
+              <a:t>12.44%</a:t>
             </a:r>
             <a:endParaRPr lang="ko-KR" sz="1100"/>
           </a:p>
@@ -10381,7 +10381,7 @@
                 <a:latin typeface="Malgun Gothic"/>
                 <a:ea typeface="Malgun Gothic"/>
               </a:rPr>
-              <a:t>-100.00pp</a:t>
+              <a:t>-12.44pp</a:t>
             </a:r>
             <a:endParaRPr lang="ko-KR" sz="1100"/>
           </a:p>
@@ -10450,7 +10450,7 @@
                 <a:latin typeface="Malgun Gothic"/>
                 <a:ea typeface="Malgun Gothic"/>
               </a:rPr>
-              <a:t>TIGER CD1년금리액티브(합성</a:t>
+              <a:t>ACE K수출핵심TOP10산업액티</a:t>
             </a:r>
             <a:endParaRPr lang="ko-KR" sz="1100"/>
           </a:p>
@@ -10519,7 +10519,7 @@
                 <a:latin typeface="Malgun Gothic"/>
                 <a:ea typeface="Malgun Gothic"/>
               </a:rPr>
-              <a:t>감소 원화현금</a:t>
+              <a:t>감소 에이피알</a:t>
             </a:r>
             <a:endParaRPr lang="ko-KR" sz="1100"/>
           </a:p>
@@ -10588,7 +10588,7 @@
                 <a:latin typeface="Malgun Gothic"/>
                 <a:ea typeface="Malgun Gothic"/>
               </a:rPr>
-              <a:t>010010</a:t>
+              <a:t>278470</a:t>
             </a:r>
             <a:endParaRPr lang="ko-KR" sz="1100"/>
           </a:p>
@@ -10657,7 +10657,7 @@
                 <a:latin typeface="Malgun Gothic"/>
                 <a:ea typeface="Malgun Gothic"/>
               </a:rPr>
-              <a:t>100.00%</a:t>
+              <a:t>10.41%</a:t>
             </a:r>
             <a:endParaRPr lang="ko-KR" sz="1100"/>
           </a:p>
@@ -10795,7 +10795,7 @@
                 <a:latin typeface="Malgun Gothic"/>
                 <a:ea typeface="Malgun Gothic"/>
               </a:rPr>
-              <a:t>-100.00pp</a:t>
+              <a:t>-10.41pp</a:t>
             </a:r>
             <a:endParaRPr lang="ko-KR" sz="1100"/>
           </a:p>
@@ -10864,7 +10864,7 @@
                 <a:latin typeface="Malgun Gothic"/>
                 <a:ea typeface="Malgun Gothic"/>
               </a:rPr>
-              <a:t>TIGER CD금리플러스액티브(합</a:t>
+              <a:t>ACE 2차전지&amp;친환경차액티브</a:t>
             </a:r>
             <a:endParaRPr lang="ko-KR" sz="1100"/>
           </a:p>
@@ -10933,7 +10933,7 @@
                 <a:latin typeface="Malgun Gothic"/>
                 <a:ea typeface="Malgun Gothic"/>
               </a:rPr>
-              <a:t>감소 원화현금</a:t>
+              <a:t>감소 삼성SDI</a:t>
             </a:r>
             <a:endParaRPr lang="ko-KR" sz="1100"/>
           </a:p>
@@ -11002,7 +11002,7 @@
                 <a:latin typeface="Malgun Gothic"/>
                 <a:ea typeface="Malgun Gothic"/>
               </a:rPr>
-              <a:t>010010</a:t>
+              <a:t>006400</a:t>
             </a:r>
             <a:endParaRPr lang="ko-KR" sz="1100"/>
           </a:p>
@@ -11071,7 +11071,7 @@
                 <a:latin typeface="Malgun Gothic"/>
                 <a:ea typeface="Malgun Gothic"/>
               </a:rPr>
-              <a:t>100.00%</a:t>
+              <a:t>10.30%</a:t>
             </a:r>
             <a:endParaRPr lang="ko-KR" sz="1100"/>
           </a:p>
@@ -11209,7 +11209,7 @@
                 <a:latin typeface="Malgun Gothic"/>
                 <a:ea typeface="Malgun Gothic"/>
               </a:rPr>
-              <a:t>-100.00pp</a:t>
+              <a:t>-10.30pp</a:t>
             </a:r>
             <a:endParaRPr lang="ko-KR" sz="1100"/>
           </a:p>
@@ -11278,7 +11278,7 @@
                 <a:latin typeface="Malgun Gothic"/>
                 <a:ea typeface="Malgun Gothic"/>
               </a:rPr>
-              <a:t>TIGER KOFR금리액티브(합성</a:t>
+              <a:t>ACE K수출핵심TOP10산업액티</a:t>
             </a:r>
             <a:endParaRPr lang="ko-KR" sz="1100"/>
           </a:p>
@@ -11347,7 +11347,7 @@
                 <a:latin typeface="Malgun Gothic"/>
                 <a:ea typeface="Malgun Gothic"/>
               </a:rPr>
-              <a:t>감소 원화현금</a:t>
+              <a:t>감소 HD현대일렉트릭</a:t>
             </a:r>
             <a:endParaRPr lang="ko-KR" sz="1100"/>
           </a:p>
@@ -11416,7 +11416,7 @@
                 <a:latin typeface="Malgun Gothic"/>
                 <a:ea typeface="Malgun Gothic"/>
               </a:rPr>
-              <a:t>010010</a:t>
+              <a:t>267260</a:t>
             </a:r>
             <a:endParaRPr lang="ko-KR" sz="1100"/>
           </a:p>
@@ -11485,7 +11485,7 @@
                 <a:latin typeface="Malgun Gothic"/>
                 <a:ea typeface="Malgun Gothic"/>
               </a:rPr>
-              <a:t>100.00%</a:t>
+              <a:t>9.78%</a:t>
             </a:r>
             <a:endParaRPr lang="ko-KR" sz="1100"/>
           </a:p>
@@ -11623,7 +11623,7 @@
                 <a:latin typeface="Malgun Gothic"/>
                 <a:ea typeface="Malgun Gothic"/>
               </a:rPr>
-              <a:t>-100.00pp</a:t>
+              <a:t>-9.78pp</a:t>
             </a:r>
             <a:endParaRPr lang="ko-KR" sz="1100"/>
           </a:p>
@@ -11849,7 +11849,7 @@
                 <a:latin typeface="Malgun Gothic"/>
                 <a:ea typeface="Malgun Gothic"/>
               </a:rPr>
-              <a:t>1. 오늘 변화 ETF는 252개, 전체 변화는 20877건입니다.</a:t>
+              <a:t>1. 오늘 변화 ETF는 251개, 전체 변화는 19361건입니다.</a:t>
             </a:r>
             <a:endParaRPr lang="ko-KR" sz="2400"/>
           </a:p>
@@ -11863,7 +11863,7 @@
                 <a:latin typeface="Malgun Gothic"/>
                 <a:ea typeface="Malgun Gothic"/>
               </a:rPr>
-              <a:t>2. 매수/비중증가 107건, 매도/비중감소 2301건을 확인했습니다.</a:t>
+              <a:t>2. 매수/비중증가 317건, 매도/비중감소 587건을 확인했습니다.</a:t>
             </a:r>
             <a:endParaRPr lang="ko-KR" sz="2400"/>
           </a:p>

--- a/docs/latest_changes.pptx
+++ b/docs/latest_changes.pptx
@@ -374,7 +374,7 @@
                 <a:latin typeface="Malgun Gothic"/>
                 <a:ea typeface="Malgun Gothic"/>
               </a:rPr>
-              <a:t>300</a:t>
+              <a:t>215</a:t>
             </a:r>
             <a:endParaRPr lang="ko-KR" sz="3000"/>
           </a:p>
@@ -512,7 +512,7 @@
                 <a:latin typeface="Malgun Gothic"/>
                 <a:ea typeface="Malgun Gothic"/>
               </a:rPr>
-              <a:t>251</a:t>
+              <a:t>72</a:t>
             </a:r>
             <a:endParaRPr lang="ko-KR" sz="3000"/>
           </a:p>
@@ -650,7 +650,7 @@
                 <a:latin typeface="Malgun Gothic"/>
                 <a:ea typeface="Malgun Gothic"/>
               </a:rPr>
-              <a:t>19361</a:t>
+              <a:t>994</a:t>
             </a:r>
             <a:endParaRPr lang="ko-KR" sz="3000"/>
           </a:p>
@@ -788,7 +788,7 @@
                 <a:latin typeface="Malgun Gothic"/>
                 <a:ea typeface="Malgun Gothic"/>
               </a:rPr>
-              <a:t>317</a:t>
+              <a:t>438</a:t>
             </a:r>
             <a:endParaRPr lang="ko-KR" sz="3000"/>
           </a:p>
@@ -926,7 +926,7 @@
                 <a:latin typeface="Malgun Gothic"/>
                 <a:ea typeface="Malgun Gothic"/>
               </a:rPr>
-              <a:t>587</a:t>
+              <a:t>540</a:t>
             </a:r>
             <a:endParaRPr lang="ko-KR" sz="3000"/>
           </a:p>
@@ -1315,7 +1315,7 @@
                 <a:latin typeface="Malgun Gothic"/>
                 <a:ea typeface="Malgun Gothic"/>
               </a:rPr>
-              <a:t>ACE 2차전지&amp;친환경차액티브 (385600)</a:t>
+              <a:t>VITA MZ소비액티브 (422260)</a:t>
             </a:r>
             <a:endParaRPr lang="ko-KR" sz="1800"/>
           </a:p>
@@ -1355,7 +1355,7 @@
                 <a:latin typeface="Malgun Gothic"/>
                 <a:ea typeface="Malgun Gothic"/>
               </a:rPr>
-              <a:t>변화 51건 | 매수/증가 0건 | 매도/감소 51건</a:t>
+              <a:t>변화 15건 | 매수/증가 4건 | 매도/감소 11건</a:t>
             </a:r>
             <a:endParaRPr lang="ko-KR" sz="1300"/>
           </a:p>
@@ -1395,7 +1395,7 @@
                 <a:latin typeface="Malgun Gothic"/>
                 <a:ea typeface="Malgun Gothic"/>
               </a:rPr>
-              <a:t>충격도 100.01pp</a:t>
+              <a:t>충격도 25.39pp</a:t>
             </a:r>
             <a:endParaRPr lang="ko-KR" sz="1800"/>
           </a:p>
@@ -1504,7 +1504,7 @@
                 <a:latin typeface="Malgun Gothic"/>
                 <a:ea typeface="Malgun Gothic"/>
               </a:rPr>
-              <a:t>ACE ESG액티브 (385590)</a:t>
+              <a:t>VITA 밸류알파액티브 (452440)</a:t>
             </a:r>
             <a:endParaRPr lang="ko-KR" sz="1800"/>
           </a:p>
@@ -1544,7 +1544,7 @@
                 <a:latin typeface="Malgun Gothic"/>
                 <a:ea typeface="Malgun Gothic"/>
               </a:rPr>
-              <a:t>변화 27건 | 매수/증가 0건 | 매도/감소 27건</a:t>
+              <a:t>변화 20건 | 매수/증가 4건 | 매도/감소 16건</a:t>
             </a:r>
             <a:endParaRPr lang="ko-KR" sz="1300"/>
           </a:p>
@@ -1584,7 +1584,7 @@
                 <a:latin typeface="Malgun Gothic"/>
                 <a:ea typeface="Malgun Gothic"/>
               </a:rPr>
-              <a:t>충격도 100.00pp</a:t>
+              <a:t>충격도 19.58pp</a:t>
             </a:r>
             <a:endParaRPr lang="ko-KR" sz="1800"/>
           </a:p>
@@ -1693,7 +1693,7 @@
                 <a:latin typeface="Malgun Gothic"/>
                 <a:ea typeface="Malgun Gothic"/>
               </a:rPr>
-              <a:t>1Q CD금리액티브(합성) (491610)</a:t>
+              <a:t>TIGER 퓨처모빌리티액티브 (387280)</a:t>
             </a:r>
             <a:endParaRPr lang="ko-KR" sz="1800"/>
           </a:p>
@@ -1733,7 +1733,7 @@
                 <a:latin typeface="Malgun Gothic"/>
                 <a:ea typeface="Malgun Gothic"/>
               </a:rPr>
-              <a:t>변화 7건 | 매수/증가 0건 | 매도/감소 1건</a:t>
+              <a:t>변화 21건 | 매수/증가 7건 | 매도/감소 14건</a:t>
             </a:r>
             <a:endParaRPr lang="ko-KR" sz="1300"/>
           </a:p>
@@ -1773,7 +1773,7 @@
                 <a:latin typeface="Malgun Gothic"/>
                 <a:ea typeface="Malgun Gothic"/>
               </a:rPr>
-              <a:t>충격도 100.00pp</a:t>
+              <a:t>충격도 15.48pp</a:t>
             </a:r>
             <a:endParaRPr lang="ko-KR" sz="1800"/>
           </a:p>
@@ -1882,7 +1882,7 @@
                 <a:latin typeface="Malgun Gothic"/>
                 <a:ea typeface="Malgun Gothic"/>
               </a:rPr>
-              <a:t>ACE 라이프자산주주가치액티브 (494330)</a:t>
+              <a:t>RISE 바이오TOP10액티브 (0000Z0)</a:t>
             </a:r>
             <a:endParaRPr lang="ko-KR" sz="1800"/>
           </a:p>
@@ -1922,7 +1922,7 @@
                 <a:latin typeface="Malgun Gothic"/>
                 <a:ea typeface="Malgun Gothic"/>
               </a:rPr>
-              <a:t>변화 31건 | 매수/증가 0건 | 매도/감소 31건</a:t>
+              <a:t>변화 18건 | 매수/증가 10건 | 매도/감소 8건</a:t>
             </a:r>
             <a:endParaRPr lang="ko-KR" sz="1300"/>
           </a:p>
@@ -1962,7 +1962,7 @@
                 <a:latin typeface="Malgun Gothic"/>
                 <a:ea typeface="Malgun Gothic"/>
               </a:rPr>
-              <a:t>충격도 100.00pp</a:t>
+              <a:t>충격도 12.44pp</a:t>
             </a:r>
             <a:endParaRPr lang="ko-KR" sz="1800"/>
           </a:p>
@@ -2071,7 +2071,7 @@
                 <a:latin typeface="Malgun Gothic"/>
                 <a:ea typeface="Malgun Gothic"/>
               </a:rPr>
-              <a:t>ACE K수출핵심TOP10산업액티브 (0172Y0)</a:t>
+              <a:t>KoAct AI인프라액티브 (487130)</a:t>
             </a:r>
             <a:endParaRPr lang="ko-KR" sz="1800"/>
           </a:p>
@@ -2111,7 +2111,7 @@
                 <a:latin typeface="Malgun Gothic"/>
                 <a:ea typeface="Malgun Gothic"/>
               </a:rPr>
-              <a:t>변화 13건 | 매수/증가 0건 | 매도/감소 13건</a:t>
+              <a:t>변화 23건 | 매수/증가 9건 | 매도/감소 14건</a:t>
             </a:r>
             <a:endParaRPr lang="ko-KR" sz="1300"/>
           </a:p>
@@ -2151,7 +2151,7 @@
                 <a:latin typeface="Malgun Gothic"/>
                 <a:ea typeface="Malgun Gothic"/>
               </a:rPr>
-              <a:t>충격도 99.99pp</a:t>
+              <a:t>충격도 10.74pp</a:t>
             </a:r>
             <a:endParaRPr lang="ko-KR" sz="1800"/>
           </a:p>
@@ -3092,7 +3092,7 @@
                 <a:latin typeface="Malgun Gothic"/>
                 <a:ea typeface="Malgun Gothic"/>
               </a:rPr>
-              <a:t>13.73%</a:t>
+              <a:t>13.76%</a:t>
             </a:r>
             <a:endParaRPr lang="ko-KR" sz="1100"/>
           </a:p>
@@ -3161,7 +3161,7 @@
                 <a:latin typeface="Malgun Gothic"/>
                 <a:ea typeface="Malgun Gothic"/>
               </a:rPr>
-              <a:t>+11.39pp</a:t>
+              <a:t>+11.42pp</a:t>
             </a:r>
             <a:endParaRPr lang="ko-KR" sz="1100"/>
           </a:p>
@@ -3506,7 +3506,7 @@
                 <a:latin typeface="Malgun Gothic"/>
                 <a:ea typeface="Malgun Gothic"/>
               </a:rPr>
-              <a:t>18.08%</a:t>
+              <a:t>18.03%</a:t>
             </a:r>
             <a:endParaRPr lang="ko-KR" sz="1100"/>
           </a:p>
@@ -3575,7 +3575,7 @@
                 <a:latin typeface="Malgun Gothic"/>
                 <a:ea typeface="Malgun Gothic"/>
               </a:rPr>
-              <a:t>+9.56pp</a:t>
+              <a:t>+9.51pp</a:t>
             </a:r>
             <a:endParaRPr lang="ko-KR" sz="1100"/>
           </a:p>
@@ -3851,7 +3851,7 @@
                 <a:latin typeface="Malgun Gothic"/>
                 <a:ea typeface="Malgun Gothic"/>
               </a:rPr>
-              <a:t>-</a:t>
+              <a:t>0.00%</a:t>
             </a:r>
             <a:endParaRPr lang="ko-KR" sz="1100"/>
           </a:p>
@@ -3920,7 +3920,7 @@
                 <a:latin typeface="Malgun Gothic"/>
                 <a:ea typeface="Malgun Gothic"/>
               </a:rPr>
-              <a:t>4.00%</a:t>
+              <a:t>3.97%</a:t>
             </a:r>
             <a:endParaRPr lang="ko-KR" sz="1100"/>
           </a:p>
@@ -3989,7 +3989,7 @@
                 <a:latin typeface="Malgun Gothic"/>
                 <a:ea typeface="Malgun Gothic"/>
               </a:rPr>
-              <a:t>+4.00pp</a:t>
+              <a:t>+3.97pp</a:t>
             </a:r>
             <a:endParaRPr lang="ko-KR" sz="1100"/>
           </a:p>
@@ -4058,7 +4058,7 @@
                 <a:latin typeface="Malgun Gothic"/>
                 <a:ea typeface="Malgun Gothic"/>
               </a:rPr>
-              <a:t>TIME K바이오액티브</a:t>
+              <a:t>에셋플러스 코리아대장장이액티브</a:t>
             </a:r>
             <a:endParaRPr lang="ko-KR" sz="1100"/>
           </a:p>
@@ -4265,7 +4265,7 @@
                 <a:latin typeface="Malgun Gothic"/>
                 <a:ea typeface="Malgun Gothic"/>
               </a:rPr>
-              <a:t>0.79%</a:t>
+              <a:t>7.62%</a:t>
             </a:r>
             <a:endParaRPr lang="ko-KR" sz="1100"/>
           </a:p>
@@ -4334,7 +4334,7 @@
                 <a:latin typeface="Malgun Gothic"/>
                 <a:ea typeface="Malgun Gothic"/>
               </a:rPr>
-              <a:t>2.71%</a:t>
+              <a:t>10.71%</a:t>
             </a:r>
             <a:endParaRPr lang="ko-KR" sz="1100"/>
           </a:p>
@@ -4403,7 +4403,7 @@
                 <a:latin typeface="Malgun Gothic"/>
                 <a:ea typeface="Malgun Gothic"/>
               </a:rPr>
-              <a:t>+1.92pp</a:t>
+              <a:t>+3.09pp</a:t>
             </a:r>
             <a:endParaRPr lang="ko-KR" sz="1100"/>
           </a:p>
@@ -4472,7 +4472,7 @@
                 <a:latin typeface="Malgun Gothic"/>
                 <a:ea typeface="Malgun Gothic"/>
               </a:rPr>
-              <a:t>RISE 바이오TOP10액티브</a:t>
+              <a:t>TIME K바이오액티브</a:t>
             </a:r>
             <a:endParaRPr lang="ko-KR" sz="1100"/>
           </a:p>
@@ -4541,7 +4541,7 @@
                 <a:latin typeface="Malgun Gothic"/>
                 <a:ea typeface="Malgun Gothic"/>
               </a:rPr>
-              <a:t>신규 토모큐브</a:t>
+              <a:t>증가 원화현금</a:t>
             </a:r>
             <a:endParaRPr lang="ko-KR" sz="1100"/>
           </a:p>
@@ -4610,7 +4610,7 @@
                 <a:latin typeface="Malgun Gothic"/>
                 <a:ea typeface="Malgun Gothic"/>
               </a:rPr>
-              <a:t>475960</a:t>
+              <a:t>010010</a:t>
             </a:r>
             <a:endParaRPr lang="ko-KR" sz="1100"/>
           </a:p>
@@ -4679,7 +4679,7 @@
                 <a:latin typeface="Malgun Gothic"/>
                 <a:ea typeface="Malgun Gothic"/>
               </a:rPr>
-              <a:t>-</a:t>
+              <a:t>0.79%</a:t>
             </a:r>
             <a:endParaRPr lang="ko-KR" sz="1100"/>
           </a:p>
@@ -4748,7 +4748,7 @@
                 <a:latin typeface="Malgun Gothic"/>
                 <a:ea typeface="Malgun Gothic"/>
               </a:rPr>
-              <a:t>1.77%</a:t>
+              <a:t>2.76%</a:t>
             </a:r>
             <a:endParaRPr lang="ko-KR" sz="1100"/>
           </a:p>
@@ -4817,7 +4817,7 @@
                 <a:latin typeface="Malgun Gothic"/>
                 <a:ea typeface="Malgun Gothic"/>
               </a:rPr>
-              <a:t>+1.77pp</a:t>
+              <a:t>+1.97pp</a:t>
             </a:r>
             <a:endParaRPr lang="ko-KR" sz="1100"/>
           </a:p>
@@ -4886,7 +4886,7 @@
                 <a:latin typeface="Malgun Gothic"/>
                 <a:ea typeface="Malgun Gothic"/>
               </a:rPr>
-              <a:t>TIME 코스피액티브</a:t>
+              <a:t>RISE 바이오TOP10액티브</a:t>
             </a:r>
             <a:endParaRPr lang="ko-KR" sz="1100"/>
           </a:p>
@@ -4955,7 +4955,7 @@
                 <a:latin typeface="Malgun Gothic"/>
                 <a:ea typeface="Malgun Gothic"/>
               </a:rPr>
-              <a:t>신규 신세계</a:t>
+              <a:t>신규 토모큐브</a:t>
             </a:r>
             <a:endParaRPr lang="ko-KR" sz="1100"/>
           </a:p>
@@ -5024,7 +5024,7 @@
                 <a:latin typeface="Malgun Gothic"/>
                 <a:ea typeface="Malgun Gothic"/>
               </a:rPr>
-              <a:t>004170</a:t>
+              <a:t>475960</a:t>
             </a:r>
             <a:endParaRPr lang="ko-KR" sz="1100"/>
           </a:p>
@@ -5093,7 +5093,7 @@
                 <a:latin typeface="Malgun Gothic"/>
                 <a:ea typeface="Malgun Gothic"/>
               </a:rPr>
-              <a:t>-</a:t>
+              <a:t>0.00%</a:t>
             </a:r>
             <a:endParaRPr lang="ko-KR" sz="1100"/>
           </a:p>
@@ -5162,7 +5162,7 @@
                 <a:latin typeface="Malgun Gothic"/>
                 <a:ea typeface="Malgun Gothic"/>
               </a:rPr>
-              <a:t>1.60%</a:t>
+              <a:t>1.80%</a:t>
             </a:r>
             <a:endParaRPr lang="ko-KR" sz="1100"/>
           </a:p>
@@ -5231,7 +5231,7 @@
                 <a:latin typeface="Malgun Gothic"/>
                 <a:ea typeface="Malgun Gothic"/>
               </a:rPr>
-              <a:t>+1.60pp</a:t>
+              <a:t>+1.80pp</a:t>
             </a:r>
             <a:endParaRPr lang="ko-KR" sz="1100"/>
           </a:p>
@@ -5300,7 +5300,7 @@
                 <a:latin typeface="Malgun Gothic"/>
                 <a:ea typeface="Malgun Gothic"/>
               </a:rPr>
-              <a:t>KoAct AI인프라액티브</a:t>
+              <a:t>RISE 바이오TOP10액티브</a:t>
             </a:r>
             <a:endParaRPr lang="ko-KR" sz="1100"/>
           </a:p>
@@ -5369,7 +5369,7 @@
                 <a:latin typeface="Malgun Gothic"/>
                 <a:ea typeface="Malgun Gothic"/>
               </a:rPr>
-              <a:t>신규 프로텍</a:t>
+              <a:t>증가 알테오젠</a:t>
             </a:r>
             <a:endParaRPr lang="ko-KR" sz="1100"/>
           </a:p>
@@ -5438,7 +5438,7 @@
                 <a:latin typeface="Malgun Gothic"/>
                 <a:ea typeface="Malgun Gothic"/>
               </a:rPr>
-              <a:t>053610</a:t>
+              <a:t>196170</a:t>
             </a:r>
             <a:endParaRPr lang="ko-KR" sz="1100"/>
           </a:p>
@@ -5507,7 +5507,7 @@
                 <a:latin typeface="Malgun Gothic"/>
                 <a:ea typeface="Malgun Gothic"/>
               </a:rPr>
-              <a:t>-</a:t>
+              <a:t>6.21%</a:t>
             </a:r>
             <a:endParaRPr lang="ko-KR" sz="1100"/>
           </a:p>
@@ -5576,7 +5576,7 @@
                 <a:latin typeface="Malgun Gothic"/>
                 <a:ea typeface="Malgun Gothic"/>
               </a:rPr>
-              <a:t>1.59%</a:t>
+              <a:t>7.80%</a:t>
             </a:r>
             <a:endParaRPr lang="ko-KR" sz="1100"/>
           </a:p>
@@ -5714,7 +5714,7 @@
                 <a:latin typeface="Malgun Gothic"/>
                 <a:ea typeface="Malgun Gothic"/>
               </a:rPr>
-              <a:t>RISE 바이오TOP10액티브</a:t>
+              <a:t>TIME 코스피액티브</a:t>
             </a:r>
             <a:endParaRPr lang="ko-KR" sz="1100"/>
           </a:p>
@@ -5783,7 +5783,7 @@
                 <a:latin typeface="Malgun Gothic"/>
                 <a:ea typeface="Malgun Gothic"/>
               </a:rPr>
-              <a:t>증가 알테오젠</a:t>
+              <a:t>신규 신세계</a:t>
             </a:r>
             <a:endParaRPr lang="ko-KR" sz="1100"/>
           </a:p>
@@ -5852,7 +5852,7 @@
                 <a:latin typeface="Malgun Gothic"/>
                 <a:ea typeface="Malgun Gothic"/>
               </a:rPr>
-              <a:t>196170</a:t>
+              <a:t>004170</a:t>
             </a:r>
             <a:endParaRPr lang="ko-KR" sz="1100"/>
           </a:p>
@@ -5921,7 +5921,7 @@
                 <a:latin typeface="Malgun Gothic"/>
                 <a:ea typeface="Malgun Gothic"/>
               </a:rPr>
-              <a:t>6.21%</a:t>
+              <a:t>0.00%</a:t>
             </a:r>
             <a:endParaRPr lang="ko-KR" sz="1100"/>
           </a:p>
@@ -5990,7 +5990,7 @@
                 <a:latin typeface="Malgun Gothic"/>
                 <a:ea typeface="Malgun Gothic"/>
               </a:rPr>
-              <a:t>7.68%</a:t>
+              <a:t>1.57%</a:t>
             </a:r>
             <a:endParaRPr lang="ko-KR" sz="1100"/>
           </a:p>
@@ -6059,7 +6059,7 @@
                 <a:latin typeface="Malgun Gothic"/>
                 <a:ea typeface="Malgun Gothic"/>
               </a:rPr>
-              <a:t>+1.47pp</a:t>
+              <a:t>+1.57pp</a:t>
             </a:r>
             <a:endParaRPr lang="ko-KR" sz="1100"/>
           </a:p>
@@ -6197,7 +6197,7 @@
                 <a:latin typeface="Malgun Gothic"/>
                 <a:ea typeface="Malgun Gothic"/>
               </a:rPr>
-              <a:t>증가 삼성SDI</a:t>
+              <a:t>신규 프로텍</a:t>
             </a:r>
             <a:endParaRPr lang="ko-KR" sz="1100"/>
           </a:p>
@@ -6266,7 +6266,7 @@
                 <a:latin typeface="Malgun Gothic"/>
                 <a:ea typeface="Malgun Gothic"/>
               </a:rPr>
-              <a:t>006400</a:t>
+              <a:t>053610</a:t>
             </a:r>
             <a:endParaRPr lang="ko-KR" sz="1100"/>
           </a:p>
@@ -6335,7 +6335,7 @@
                 <a:latin typeface="Malgun Gothic"/>
                 <a:ea typeface="Malgun Gothic"/>
               </a:rPr>
-              <a:t>6.49%</a:t>
+              <a:t>0.00%</a:t>
             </a:r>
             <a:endParaRPr lang="ko-KR" sz="1100"/>
           </a:p>
@@ -6404,7 +6404,7 @@
                 <a:latin typeface="Malgun Gothic"/>
                 <a:ea typeface="Malgun Gothic"/>
               </a:rPr>
-              <a:t>7.77%</a:t>
+              <a:t>1.55%</a:t>
             </a:r>
             <a:endParaRPr lang="ko-KR" sz="1100"/>
           </a:p>
@@ -6473,7 +6473,7 @@
                 <a:latin typeface="Malgun Gothic"/>
                 <a:ea typeface="Malgun Gothic"/>
               </a:rPr>
-              <a:t>+1.28pp</a:t>
+              <a:t>+1.55pp</a:t>
             </a:r>
             <a:endParaRPr lang="ko-KR" sz="1100"/>
           </a:p>
@@ -6818,7 +6818,7 @@
                 <a:latin typeface="Malgun Gothic"/>
                 <a:ea typeface="Malgun Gothic"/>
               </a:rPr>
-              <a:t>4.14%</a:t>
+              <a:t>4.27%</a:t>
             </a:r>
             <a:endParaRPr lang="ko-KR" sz="1100"/>
           </a:p>
@@ -6887,7 +6887,7 @@
                 <a:latin typeface="Malgun Gothic"/>
                 <a:ea typeface="Malgun Gothic"/>
               </a:rPr>
-              <a:t>+1.23pp</a:t>
+              <a:t>+1.36pp</a:t>
             </a:r>
             <a:endParaRPr lang="ko-KR" sz="1100"/>
           </a:p>
@@ -7552,7 +7552,7 @@
                 <a:latin typeface="Malgun Gothic"/>
                 <a:ea typeface="Malgun Gothic"/>
               </a:rPr>
-              <a:t>1Q CD금리액티브(합성)</a:t>
+              <a:t>VITA MZ소비액티브</a:t>
             </a:r>
             <a:endParaRPr lang="ko-KR" sz="1100"/>
           </a:p>
@@ -7621,7 +7621,7 @@
                 <a:latin typeface="Malgun Gothic"/>
                 <a:ea typeface="Malgun Gothic"/>
               </a:rPr>
-              <a:t>감소 원화현금</a:t>
+              <a:t>감소 에이피알</a:t>
             </a:r>
             <a:endParaRPr lang="ko-KR" sz="1100"/>
           </a:p>
@@ -7690,7 +7690,7 @@
                 <a:latin typeface="Malgun Gothic"/>
                 <a:ea typeface="Malgun Gothic"/>
               </a:rPr>
-              <a:t>010010</a:t>
+              <a:t>278470</a:t>
             </a:r>
             <a:endParaRPr lang="ko-KR" sz="1100"/>
           </a:p>
@@ -7759,7 +7759,7 @@
                 <a:latin typeface="Malgun Gothic"/>
                 <a:ea typeface="Malgun Gothic"/>
               </a:rPr>
-              <a:t>100.00%</a:t>
+              <a:t>9.94%</a:t>
             </a:r>
             <a:endParaRPr lang="ko-KR" sz="1100"/>
           </a:p>
@@ -7828,7 +7828,7 @@
                 <a:latin typeface="Malgun Gothic"/>
                 <a:ea typeface="Malgun Gothic"/>
               </a:rPr>
-              <a:t>-</a:t>
+              <a:t>6.77%</a:t>
             </a:r>
             <a:endParaRPr lang="ko-KR" sz="1100"/>
           </a:p>
@@ -7897,7 +7897,7 @@
                 <a:latin typeface="Malgun Gothic"/>
                 <a:ea typeface="Malgun Gothic"/>
               </a:rPr>
-              <a:t>-100.00pp</a:t>
+              <a:t>-3.17pp</a:t>
             </a:r>
             <a:endParaRPr lang="ko-KR" sz="1100"/>
           </a:p>
@@ -7966,7 +7966,7 @@
                 <a:latin typeface="Malgun Gothic"/>
                 <a:ea typeface="Malgun Gothic"/>
               </a:rPr>
-              <a:t>1Q 200액티브</a:t>
+              <a:t>KODEX 코리아혁신성장액티브</a:t>
             </a:r>
             <a:endParaRPr lang="ko-KR" sz="1100"/>
           </a:p>
@@ -8035,7 +8035,7 @@
                 <a:latin typeface="Malgun Gothic"/>
                 <a:ea typeface="Malgun Gothic"/>
               </a:rPr>
-              <a:t>감소 삼성전자</a:t>
+              <a:t>감소 셀트리온</a:t>
             </a:r>
             <a:endParaRPr lang="ko-KR" sz="1100"/>
           </a:p>
@@ -8104,7 +8104,7 @@
                 <a:latin typeface="Malgun Gothic"/>
                 <a:ea typeface="Malgun Gothic"/>
               </a:rPr>
-              <a:t>005930</a:t>
+              <a:t>068270</a:t>
             </a:r>
             <a:endParaRPr lang="ko-KR" sz="1100"/>
           </a:p>
@@ -8173,7 +8173,7 @@
                 <a:latin typeface="Malgun Gothic"/>
                 <a:ea typeface="Malgun Gothic"/>
               </a:rPr>
-              <a:t>31.62%</a:t>
+              <a:t>4.30%</a:t>
             </a:r>
             <a:endParaRPr lang="ko-KR" sz="1100"/>
           </a:p>
@@ -8242,7 +8242,7 @@
                 <a:latin typeface="Malgun Gothic"/>
                 <a:ea typeface="Malgun Gothic"/>
               </a:rPr>
-              <a:t>-</a:t>
+              <a:t>1.42%</a:t>
             </a:r>
             <a:endParaRPr lang="ko-KR" sz="1100"/>
           </a:p>
@@ -8311,7 +8311,7 @@
                 <a:latin typeface="Malgun Gothic"/>
                 <a:ea typeface="Malgun Gothic"/>
               </a:rPr>
-              <a:t>-31.62pp</a:t>
+              <a:t>-2.88pp</a:t>
             </a:r>
             <a:endParaRPr lang="ko-KR" sz="1100"/>
           </a:p>
@@ -8380,7 +8380,7 @@
                 <a:latin typeface="Malgun Gothic"/>
                 <a:ea typeface="Malgun Gothic"/>
               </a:rPr>
-              <a:t>ACE 라이프자산주주가치액티브</a:t>
+              <a:t>KoAct 수소전력ESS인프라액티</a:t>
             </a:r>
             <a:endParaRPr lang="ko-KR" sz="1100"/>
           </a:p>
@@ -8449,7 +8449,7 @@
                 <a:latin typeface="Malgun Gothic"/>
                 <a:ea typeface="Malgun Gothic"/>
               </a:rPr>
-              <a:t>감소 삼성전자</a:t>
+              <a:t>감소 LS ELECTRIC</a:t>
             </a:r>
             <a:endParaRPr lang="ko-KR" sz="1100"/>
           </a:p>
@@ -8518,7 +8518,7 @@
                 <a:latin typeface="Malgun Gothic"/>
                 <a:ea typeface="Malgun Gothic"/>
               </a:rPr>
-              <a:t>005930</a:t>
+              <a:t>010120</a:t>
             </a:r>
             <a:endParaRPr lang="ko-KR" sz="1100"/>
           </a:p>
@@ -8587,7 +8587,7 @@
                 <a:latin typeface="Malgun Gothic"/>
                 <a:ea typeface="Malgun Gothic"/>
               </a:rPr>
-              <a:t>25.13%</a:t>
+              <a:t>2.49%</a:t>
             </a:r>
             <a:endParaRPr lang="ko-KR" sz="1100"/>
           </a:p>
@@ -8656,7 +8656,7 @@
                 <a:latin typeface="Malgun Gothic"/>
                 <a:ea typeface="Malgun Gothic"/>
               </a:rPr>
-              <a:t>-</a:t>
+              <a:t>0.12%</a:t>
             </a:r>
             <a:endParaRPr lang="ko-KR" sz="1100"/>
           </a:p>
@@ -8725,7 +8725,7 @@
                 <a:latin typeface="Malgun Gothic"/>
                 <a:ea typeface="Malgun Gothic"/>
               </a:rPr>
-              <a:t>-25.13pp</a:t>
+              <a:t>-2.37pp</a:t>
             </a:r>
             <a:endParaRPr lang="ko-KR" sz="1100"/>
           </a:p>
@@ -8794,7 +8794,7 @@
                 <a:latin typeface="Malgun Gothic"/>
                 <a:ea typeface="Malgun Gothic"/>
               </a:rPr>
-              <a:t>ACE ESG액티브</a:t>
+              <a:t>ACE 주주환원가치주액티브</a:t>
             </a:r>
             <a:endParaRPr lang="ko-KR" sz="1100"/>
           </a:p>
@@ -8863,7 +8863,7 @@
                 <a:latin typeface="Malgun Gothic"/>
                 <a:ea typeface="Malgun Gothic"/>
               </a:rPr>
-              <a:t>감소 삼성전자</a:t>
+              <a:t>감소 나이스정보통신</a:t>
             </a:r>
             <a:endParaRPr lang="ko-KR" sz="1100"/>
           </a:p>
@@ -8932,7 +8932,7 @@
                 <a:latin typeface="Malgun Gothic"/>
                 <a:ea typeface="Malgun Gothic"/>
               </a:rPr>
-              <a:t>005930</a:t>
+              <a:t>036800</a:t>
             </a:r>
             <a:endParaRPr lang="ko-KR" sz="1100"/>
           </a:p>
@@ -9001,7 +9001,7 @@
                 <a:latin typeface="Malgun Gothic"/>
                 <a:ea typeface="Malgun Gothic"/>
               </a:rPr>
-              <a:t>22.53%</a:t>
+              <a:t>2.37%</a:t>
             </a:r>
             <a:endParaRPr lang="ko-KR" sz="1100"/>
           </a:p>
@@ -9070,7 +9070,7 @@
                 <a:latin typeface="Malgun Gothic"/>
                 <a:ea typeface="Malgun Gothic"/>
               </a:rPr>
-              <a:t>-</a:t>
+              <a:t>0.17%</a:t>
             </a:r>
             <a:endParaRPr lang="ko-KR" sz="1100"/>
           </a:p>
@@ -9139,7 +9139,7 @@
                 <a:latin typeface="Malgun Gothic"/>
                 <a:ea typeface="Malgun Gothic"/>
               </a:rPr>
-              <a:t>-22.53pp</a:t>
+              <a:t>-2.20pp</a:t>
             </a:r>
             <a:endParaRPr lang="ko-KR" sz="1100"/>
           </a:p>
@@ -9208,7 +9208,7 @@
                 <a:latin typeface="Malgun Gothic"/>
                 <a:ea typeface="Malgun Gothic"/>
               </a:rPr>
-              <a:t>1Q 200액티브</a:t>
+              <a:t>VITA 밸류알파액티브</a:t>
             </a:r>
             <a:endParaRPr lang="ko-KR" sz="1100"/>
           </a:p>
@@ -9277,7 +9277,7 @@
                 <a:latin typeface="Malgun Gothic"/>
                 <a:ea typeface="Malgun Gothic"/>
               </a:rPr>
-              <a:t>감소 SK하이닉스</a:t>
+              <a:t>감소 신세계</a:t>
             </a:r>
             <a:endParaRPr lang="ko-KR" sz="1100"/>
           </a:p>
@@ -9346,7 +9346,7 @@
                 <a:latin typeface="Malgun Gothic"/>
                 <a:ea typeface="Malgun Gothic"/>
               </a:rPr>
-              <a:t>000660</a:t>
+              <a:t>004170</a:t>
             </a:r>
             <a:endParaRPr lang="ko-KR" sz="1100"/>
           </a:p>
@@ -9415,7 +9415,7 @@
                 <a:latin typeface="Malgun Gothic"/>
                 <a:ea typeface="Malgun Gothic"/>
               </a:rPr>
-              <a:t>21.03%</a:t>
+              <a:t>7.24%</a:t>
             </a:r>
             <a:endParaRPr lang="ko-KR" sz="1100"/>
           </a:p>
@@ -9484,7 +9484,7 @@
                 <a:latin typeface="Malgun Gothic"/>
                 <a:ea typeface="Malgun Gothic"/>
               </a:rPr>
-              <a:t>-</a:t>
+              <a:t>5.13%</a:t>
             </a:r>
             <a:endParaRPr lang="ko-KR" sz="1100"/>
           </a:p>
@@ -9553,7 +9553,7 @@
                 <a:latin typeface="Malgun Gothic"/>
                 <a:ea typeface="Malgun Gothic"/>
               </a:rPr>
-              <a:t>-21.03pp</a:t>
+              <a:t>-2.11pp</a:t>
             </a:r>
             <a:endParaRPr lang="ko-KR" sz="1100"/>
           </a:p>
@@ -9622,7 +9622,7 @@
                 <a:latin typeface="Malgun Gothic"/>
                 <a:ea typeface="Malgun Gothic"/>
               </a:rPr>
-              <a:t>ACE ESG액티브</a:t>
+              <a:t>ACE 주주환원가치주액티브</a:t>
             </a:r>
             <a:endParaRPr lang="ko-KR" sz="1100"/>
           </a:p>
@@ -9691,7 +9691,7 @@
                 <a:latin typeface="Malgun Gothic"/>
                 <a:ea typeface="Malgun Gothic"/>
               </a:rPr>
-              <a:t>감소 SK하이닉스</a:t>
+              <a:t>감소 현대홈쇼핑</a:t>
             </a:r>
             <a:endParaRPr lang="ko-KR" sz="1100"/>
           </a:p>
@@ -9760,7 +9760,7 @@
                 <a:latin typeface="Malgun Gothic"/>
                 <a:ea typeface="Malgun Gothic"/>
               </a:rPr>
-              <a:t>000660</a:t>
+              <a:t>057050</a:t>
             </a:r>
             <a:endParaRPr lang="ko-KR" sz="1100"/>
           </a:p>
@@ -9829,7 +9829,7 @@
                 <a:latin typeface="Malgun Gothic"/>
                 <a:ea typeface="Malgun Gothic"/>
               </a:rPr>
-              <a:t>14.22%</a:t>
+              <a:t>2.36%</a:t>
             </a:r>
             <a:endParaRPr lang="ko-KR" sz="1100"/>
           </a:p>
@@ -9898,7 +9898,7 @@
                 <a:latin typeface="Malgun Gothic"/>
                 <a:ea typeface="Malgun Gothic"/>
               </a:rPr>
-              <a:t>-</a:t>
+              <a:t>0.31%</a:t>
             </a:r>
             <a:endParaRPr lang="ko-KR" sz="1100"/>
           </a:p>
@@ -9967,7 +9967,7 @@
                 <a:latin typeface="Malgun Gothic"/>
                 <a:ea typeface="Malgun Gothic"/>
               </a:rPr>
-              <a:t>-14.22pp</a:t>
+              <a:t>-2.05pp</a:t>
             </a:r>
             <a:endParaRPr lang="ko-KR" sz="1100"/>
           </a:p>
@@ -10036,7 +10036,7 @@
                 <a:latin typeface="Malgun Gothic"/>
                 <a:ea typeface="Malgun Gothic"/>
               </a:rPr>
-              <a:t>ACE 2차전지&amp;친환경차액티브</a:t>
+              <a:t>VITA MZ소비액티브</a:t>
             </a:r>
             <a:endParaRPr lang="ko-KR" sz="1100"/>
           </a:p>
@@ -10105,7 +10105,7 @@
                 <a:latin typeface="Malgun Gothic"/>
                 <a:ea typeface="Malgun Gothic"/>
               </a:rPr>
-              <a:t>감소 삼성전기</a:t>
+              <a:t>감소 파라다이스</a:t>
             </a:r>
             <a:endParaRPr lang="ko-KR" sz="1100"/>
           </a:p>
@@ -10174,7 +10174,7 @@
                 <a:latin typeface="Malgun Gothic"/>
                 <a:ea typeface="Malgun Gothic"/>
               </a:rPr>
-              <a:t>009150</a:t>
+              <a:t>034230</a:t>
             </a:r>
             <a:endParaRPr lang="ko-KR" sz="1100"/>
           </a:p>
@@ -10243,7 +10243,7 @@
                 <a:latin typeface="Malgun Gothic"/>
                 <a:ea typeface="Malgun Gothic"/>
               </a:rPr>
-              <a:t>12.44%</a:t>
+              <a:t>7.00%</a:t>
             </a:r>
             <a:endParaRPr lang="ko-KR" sz="1100"/>
           </a:p>
@@ -10312,7 +10312,7 @@
                 <a:latin typeface="Malgun Gothic"/>
                 <a:ea typeface="Malgun Gothic"/>
               </a:rPr>
-              <a:t>-</a:t>
+              <a:t>4.96%</a:t>
             </a:r>
             <a:endParaRPr lang="ko-KR" sz="1100"/>
           </a:p>
@@ -10381,7 +10381,7 @@
                 <a:latin typeface="Malgun Gothic"/>
                 <a:ea typeface="Malgun Gothic"/>
               </a:rPr>
-              <a:t>-12.44pp</a:t>
+              <a:t>-2.04pp</a:t>
             </a:r>
             <a:endParaRPr lang="ko-KR" sz="1100"/>
           </a:p>
@@ -10450,7 +10450,7 @@
                 <a:latin typeface="Malgun Gothic"/>
                 <a:ea typeface="Malgun Gothic"/>
               </a:rPr>
-              <a:t>ACE K수출핵심TOP10산업액티</a:t>
+              <a:t>VITA MZ소비액티브</a:t>
             </a:r>
             <a:endParaRPr lang="ko-KR" sz="1100"/>
           </a:p>
@@ -10519,7 +10519,7 @@
                 <a:latin typeface="Malgun Gothic"/>
                 <a:ea typeface="Malgun Gothic"/>
               </a:rPr>
-              <a:t>감소 에이피알</a:t>
+              <a:t>감소 아모레퍼시픽</a:t>
             </a:r>
             <a:endParaRPr lang="ko-KR" sz="1100"/>
           </a:p>
@@ -10588,7 +10588,7 @@
                 <a:latin typeface="Malgun Gothic"/>
                 <a:ea typeface="Malgun Gothic"/>
               </a:rPr>
-              <a:t>278470</a:t>
+              <a:t>090430</a:t>
             </a:r>
             <a:endParaRPr lang="ko-KR" sz="1100"/>
           </a:p>
@@ -10657,7 +10657,7 @@
                 <a:latin typeface="Malgun Gothic"/>
                 <a:ea typeface="Malgun Gothic"/>
               </a:rPr>
-              <a:t>10.41%</a:t>
+              <a:t>8.10%</a:t>
             </a:r>
             <a:endParaRPr lang="ko-KR" sz="1100"/>
           </a:p>
@@ -10726,7 +10726,7 @@
                 <a:latin typeface="Malgun Gothic"/>
                 <a:ea typeface="Malgun Gothic"/>
               </a:rPr>
-              <a:t>-</a:t>
+              <a:t>6.07%</a:t>
             </a:r>
             <a:endParaRPr lang="ko-KR" sz="1100"/>
           </a:p>
@@ -10795,7 +10795,7 @@
                 <a:latin typeface="Malgun Gothic"/>
                 <a:ea typeface="Malgun Gothic"/>
               </a:rPr>
-              <a:t>-10.41pp</a:t>
+              <a:t>-2.03pp</a:t>
             </a:r>
             <a:endParaRPr lang="ko-KR" sz="1100"/>
           </a:p>
@@ -10864,7 +10864,7 @@
                 <a:latin typeface="Malgun Gothic"/>
                 <a:ea typeface="Malgun Gothic"/>
               </a:rPr>
-              <a:t>ACE 2차전지&amp;친환경차액티브</a:t>
+              <a:t>RISE 바이오TOP10액티브</a:t>
             </a:r>
             <a:endParaRPr lang="ko-KR" sz="1100"/>
           </a:p>
@@ -10933,7 +10933,7 @@
                 <a:latin typeface="Malgun Gothic"/>
                 <a:ea typeface="Malgun Gothic"/>
               </a:rPr>
-              <a:t>감소 삼성SDI</a:t>
+              <a:t>제외 지놈앤컴퍼니</a:t>
             </a:r>
             <a:endParaRPr lang="ko-KR" sz="1100"/>
           </a:p>
@@ -11002,7 +11002,7 @@
                 <a:latin typeface="Malgun Gothic"/>
                 <a:ea typeface="Malgun Gothic"/>
               </a:rPr>
-              <a:t>006400</a:t>
+              <a:t>314130</a:t>
             </a:r>
             <a:endParaRPr lang="ko-KR" sz="1100"/>
           </a:p>
@@ -11071,7 +11071,7 @@
                 <a:latin typeface="Malgun Gothic"/>
                 <a:ea typeface="Malgun Gothic"/>
               </a:rPr>
-              <a:t>10.30%</a:t>
+              <a:t>1.93%</a:t>
             </a:r>
             <a:endParaRPr lang="ko-KR" sz="1100"/>
           </a:p>
@@ -11140,7 +11140,7 @@
                 <a:latin typeface="Malgun Gothic"/>
                 <a:ea typeface="Malgun Gothic"/>
               </a:rPr>
-              <a:t>-</a:t>
+              <a:t>0.00%</a:t>
             </a:r>
             <a:endParaRPr lang="ko-KR" sz="1100"/>
           </a:p>
@@ -11209,7 +11209,7 @@
                 <a:latin typeface="Malgun Gothic"/>
                 <a:ea typeface="Malgun Gothic"/>
               </a:rPr>
-              <a:t>-10.30pp</a:t>
+              <a:t>-1.93pp</a:t>
             </a:r>
             <a:endParaRPr lang="ko-KR" sz="1100"/>
           </a:p>
@@ -11278,7 +11278,7 @@
                 <a:latin typeface="Malgun Gothic"/>
                 <a:ea typeface="Malgun Gothic"/>
               </a:rPr>
-              <a:t>ACE K수출핵심TOP10산업액티</a:t>
+              <a:t>VITA 밸류알파액티브</a:t>
             </a:r>
             <a:endParaRPr lang="ko-KR" sz="1100"/>
           </a:p>
@@ -11347,7 +11347,7 @@
                 <a:latin typeface="Malgun Gothic"/>
                 <a:ea typeface="Malgun Gothic"/>
               </a:rPr>
-              <a:t>감소 HD현대일렉트릭</a:t>
+              <a:t>감소 아모레퍼시픽</a:t>
             </a:r>
             <a:endParaRPr lang="ko-KR" sz="1100"/>
           </a:p>
@@ -11416,7 +11416,7 @@
                 <a:latin typeface="Malgun Gothic"/>
                 <a:ea typeface="Malgun Gothic"/>
               </a:rPr>
-              <a:t>267260</a:t>
+              <a:t>090430</a:t>
             </a:r>
             <a:endParaRPr lang="ko-KR" sz="1100"/>
           </a:p>
@@ -11485,7 +11485,7 @@
                 <a:latin typeface="Malgun Gothic"/>
                 <a:ea typeface="Malgun Gothic"/>
               </a:rPr>
-              <a:t>9.78%</a:t>
+              <a:t>6.79%</a:t>
             </a:r>
             <a:endParaRPr lang="ko-KR" sz="1100"/>
           </a:p>
@@ -11554,7 +11554,7 @@
                 <a:latin typeface="Malgun Gothic"/>
                 <a:ea typeface="Malgun Gothic"/>
               </a:rPr>
-              <a:t>-</a:t>
+              <a:t>5.02%</a:t>
             </a:r>
             <a:endParaRPr lang="ko-KR" sz="1100"/>
           </a:p>
@@ -11623,7 +11623,7 @@
                 <a:latin typeface="Malgun Gothic"/>
                 <a:ea typeface="Malgun Gothic"/>
               </a:rPr>
-              <a:t>-9.78pp</a:t>
+              <a:t>-1.77pp</a:t>
             </a:r>
             <a:endParaRPr lang="ko-KR" sz="1100"/>
           </a:p>
@@ -11849,7 +11849,7 @@
                 <a:latin typeface="Malgun Gothic"/>
                 <a:ea typeface="Malgun Gothic"/>
               </a:rPr>
-              <a:t>1. 오늘 변화 ETF는 251개, 전체 변화는 19361건입니다.</a:t>
+              <a:t>1. 오늘 변화 ETF는 72개, 전체 변화는 994건입니다.</a:t>
             </a:r>
             <a:endParaRPr lang="ko-KR" sz="2400"/>
           </a:p>
@@ -11863,7 +11863,7 @@
                 <a:latin typeface="Malgun Gothic"/>
                 <a:ea typeface="Malgun Gothic"/>
               </a:rPr>
-              <a:t>2. 매수/비중증가 317건, 매도/비중감소 587건을 확인했습니다.</a:t>
+              <a:t>2. 매수/비중증가 438건, 매도/비중감소 540건을 확인했습니다.</a:t>
             </a:r>
             <a:endParaRPr lang="ko-KR" sz="2400"/>
           </a:p>

--- a/docs/latest_changes.pptx
+++ b/docs/latest_changes.pptx
@@ -650,7 +650,7 @@
                 <a:latin typeface="Malgun Gothic"/>
                 <a:ea typeface="Malgun Gothic"/>
               </a:rPr>
-              <a:t>994</a:t>
+              <a:t>1018</a:t>
             </a:r>
             <a:endParaRPr lang="ko-KR" sz="3000"/>
           </a:p>
@@ -788,7 +788,7 @@
                 <a:latin typeface="Malgun Gothic"/>
                 <a:ea typeface="Malgun Gothic"/>
               </a:rPr>
-              <a:t>438</a:t>
+              <a:t>449</a:t>
             </a:r>
             <a:endParaRPr lang="ko-KR" sz="3000"/>
           </a:p>
@@ -926,7 +926,7 @@
                 <a:latin typeface="Malgun Gothic"/>
                 <a:ea typeface="Malgun Gothic"/>
               </a:rPr>
-              <a:t>540</a:t>
+              <a:t>553</a:t>
             </a:r>
             <a:endParaRPr lang="ko-KR" sz="3000"/>
           </a:p>
@@ -1544,7 +1544,7 @@
                 <a:latin typeface="Malgun Gothic"/>
                 <a:ea typeface="Malgun Gothic"/>
               </a:rPr>
-              <a:t>변화 20건 | 매수/증가 4건 | 매도/감소 16건</a:t>
+              <a:t>변화 19건 | 매수/증가 3건 | 매도/감소 16건</a:t>
             </a:r>
             <a:endParaRPr lang="ko-KR" sz="1300"/>
           </a:p>
@@ -1584,7 +1584,7 @@
                 <a:latin typeface="Malgun Gothic"/>
                 <a:ea typeface="Malgun Gothic"/>
               </a:rPr>
-              <a:t>충격도 19.58pp</a:t>
+              <a:t>충격도 19.42pp</a:t>
             </a:r>
             <a:endParaRPr lang="ko-KR" sz="1800"/>
           </a:p>
@@ -1922,7 +1922,7 @@
                 <a:latin typeface="Malgun Gothic"/>
                 <a:ea typeface="Malgun Gothic"/>
               </a:rPr>
-              <a:t>변화 18건 | 매수/증가 10건 | 매도/감소 8건</a:t>
+              <a:t>변화 19건 | 매수/증가 10건 | 매도/감소 9건</a:t>
             </a:r>
             <a:endParaRPr lang="ko-KR" sz="1300"/>
           </a:p>
@@ -1962,7 +1962,7 @@
                 <a:latin typeface="Malgun Gothic"/>
                 <a:ea typeface="Malgun Gothic"/>
               </a:rPr>
-              <a:t>충격도 12.44pp</a:t>
+              <a:t>충격도 12.36pp</a:t>
             </a:r>
             <a:endParaRPr lang="ko-KR" sz="1800"/>
           </a:p>
@@ -2111,7 +2111,7 @@
                 <a:latin typeface="Malgun Gothic"/>
                 <a:ea typeface="Malgun Gothic"/>
               </a:rPr>
-              <a:t>변화 23건 | 매수/증가 9건 | 매도/감소 14건</a:t>
+              <a:t>변화 24건 | 매수/증가 9건 | 매도/감소 15건</a:t>
             </a:r>
             <a:endParaRPr lang="ko-KR" sz="1300"/>
           </a:p>
@@ -2151,7 +2151,7 @@
                 <a:latin typeface="Malgun Gothic"/>
                 <a:ea typeface="Malgun Gothic"/>
               </a:rPr>
-              <a:t>충격도 10.74pp</a:t>
+              <a:t>충격도 10.75pp</a:t>
             </a:r>
             <a:endParaRPr lang="ko-KR" sz="1800"/>
           </a:p>
@@ -3092,7 +3092,7 @@
                 <a:latin typeface="Malgun Gothic"/>
                 <a:ea typeface="Malgun Gothic"/>
               </a:rPr>
-              <a:t>13.76%</a:t>
+              <a:t>13.72%</a:t>
             </a:r>
             <a:endParaRPr lang="ko-KR" sz="1100"/>
           </a:p>
@@ -3161,7 +3161,7 @@
                 <a:latin typeface="Malgun Gothic"/>
                 <a:ea typeface="Malgun Gothic"/>
               </a:rPr>
-              <a:t>+11.42pp</a:t>
+              <a:t>+11.38pp</a:t>
             </a:r>
             <a:endParaRPr lang="ko-KR" sz="1100"/>
           </a:p>
@@ -3506,7 +3506,7 @@
                 <a:latin typeface="Malgun Gothic"/>
                 <a:ea typeface="Malgun Gothic"/>
               </a:rPr>
-              <a:t>18.03%</a:t>
+              <a:t>17.99%</a:t>
             </a:r>
             <a:endParaRPr lang="ko-KR" sz="1100"/>
           </a:p>
@@ -3575,7 +3575,7 @@
                 <a:latin typeface="Malgun Gothic"/>
                 <a:ea typeface="Malgun Gothic"/>
               </a:rPr>
-              <a:t>+9.51pp</a:t>
+              <a:t>+9.47pp</a:t>
             </a:r>
             <a:endParaRPr lang="ko-KR" sz="1100"/>
           </a:p>
@@ -3920,7 +3920,7 @@
                 <a:latin typeface="Malgun Gothic"/>
                 <a:ea typeface="Malgun Gothic"/>
               </a:rPr>
-              <a:t>3.97%</a:t>
+              <a:t>3.96%</a:t>
             </a:r>
             <a:endParaRPr lang="ko-KR" sz="1100"/>
           </a:p>
@@ -3989,7 +3989,7 @@
                 <a:latin typeface="Malgun Gothic"/>
                 <a:ea typeface="Malgun Gothic"/>
               </a:rPr>
-              <a:t>+3.97pp</a:t>
+              <a:t>+3.96pp</a:t>
             </a:r>
             <a:endParaRPr lang="ko-KR" sz="1100"/>
           </a:p>
@@ -4334,7 +4334,7 @@
                 <a:latin typeface="Malgun Gothic"/>
                 <a:ea typeface="Malgun Gothic"/>
               </a:rPr>
-              <a:t>10.71%</a:t>
+              <a:t>10.66%</a:t>
             </a:r>
             <a:endParaRPr lang="ko-KR" sz="1100"/>
           </a:p>
@@ -4403,7 +4403,7 @@
                 <a:latin typeface="Malgun Gothic"/>
                 <a:ea typeface="Malgun Gothic"/>
               </a:rPr>
-              <a:t>+3.09pp</a:t>
+              <a:t>+3.04pp</a:t>
             </a:r>
             <a:endParaRPr lang="ko-KR" sz="1100"/>
           </a:p>
@@ -4748,7 +4748,7 @@
                 <a:latin typeface="Malgun Gothic"/>
                 <a:ea typeface="Malgun Gothic"/>
               </a:rPr>
-              <a:t>2.76%</a:t>
+              <a:t>2.75%</a:t>
             </a:r>
             <a:endParaRPr lang="ko-KR" sz="1100"/>
           </a:p>
@@ -4817,7 +4817,7 @@
                 <a:latin typeface="Malgun Gothic"/>
                 <a:ea typeface="Malgun Gothic"/>
               </a:rPr>
-              <a:t>+1.97pp</a:t>
+              <a:t>+1.96pp</a:t>
             </a:r>
             <a:endParaRPr lang="ko-KR" sz="1100"/>
           </a:p>
@@ -5162,7 +5162,7 @@
                 <a:latin typeface="Malgun Gothic"/>
                 <a:ea typeface="Malgun Gothic"/>
               </a:rPr>
-              <a:t>1.80%</a:t>
+              <a:t>1.79%</a:t>
             </a:r>
             <a:endParaRPr lang="ko-KR" sz="1100"/>
           </a:p>
@@ -5231,7 +5231,7 @@
                 <a:latin typeface="Malgun Gothic"/>
                 <a:ea typeface="Malgun Gothic"/>
               </a:rPr>
-              <a:t>+1.80pp</a:t>
+              <a:t>+1.79pp</a:t>
             </a:r>
             <a:endParaRPr lang="ko-KR" sz="1100"/>
           </a:p>
@@ -5300,7 +5300,7 @@
                 <a:latin typeface="Malgun Gothic"/>
                 <a:ea typeface="Malgun Gothic"/>
               </a:rPr>
-              <a:t>RISE 바이오TOP10액티브</a:t>
+              <a:t>TIME 코스피액티브</a:t>
             </a:r>
             <a:endParaRPr lang="ko-KR" sz="1100"/>
           </a:p>
@@ -5369,7 +5369,7 @@
                 <a:latin typeface="Malgun Gothic"/>
                 <a:ea typeface="Malgun Gothic"/>
               </a:rPr>
-              <a:t>증가 알테오젠</a:t>
+              <a:t>신규 신세계</a:t>
             </a:r>
             <a:endParaRPr lang="ko-KR" sz="1100"/>
           </a:p>
@@ -5438,7 +5438,7 @@
                 <a:latin typeface="Malgun Gothic"/>
                 <a:ea typeface="Malgun Gothic"/>
               </a:rPr>
-              <a:t>196170</a:t>
+              <a:t>004170</a:t>
             </a:r>
             <a:endParaRPr lang="ko-KR" sz="1100"/>
           </a:p>
@@ -5507,7 +5507,7 @@
                 <a:latin typeface="Malgun Gothic"/>
                 <a:ea typeface="Malgun Gothic"/>
               </a:rPr>
-              <a:t>6.21%</a:t>
+              <a:t>0.00%</a:t>
             </a:r>
             <a:endParaRPr lang="ko-KR" sz="1100"/>
           </a:p>
@@ -5576,7 +5576,7 @@
                 <a:latin typeface="Malgun Gothic"/>
                 <a:ea typeface="Malgun Gothic"/>
               </a:rPr>
-              <a:t>7.80%</a:t>
+              <a:t>1.56%</a:t>
             </a:r>
             <a:endParaRPr lang="ko-KR" sz="1100"/>
           </a:p>
@@ -5645,7 +5645,7 @@
                 <a:latin typeface="Malgun Gothic"/>
                 <a:ea typeface="Malgun Gothic"/>
               </a:rPr>
-              <a:t>+1.59pp</a:t>
+              <a:t>+1.56pp</a:t>
             </a:r>
             <a:endParaRPr lang="ko-KR" sz="1100"/>
           </a:p>
@@ -5714,7 +5714,7 @@
                 <a:latin typeface="Malgun Gothic"/>
                 <a:ea typeface="Malgun Gothic"/>
               </a:rPr>
-              <a:t>TIME 코스피액티브</a:t>
+              <a:t>KoAct AI인프라액티브</a:t>
             </a:r>
             <a:endParaRPr lang="ko-KR" sz="1100"/>
           </a:p>
@@ -5783,7 +5783,7 @@
                 <a:latin typeface="Malgun Gothic"/>
                 <a:ea typeface="Malgun Gothic"/>
               </a:rPr>
-              <a:t>신규 신세계</a:t>
+              <a:t>신규 프로텍</a:t>
             </a:r>
             <a:endParaRPr lang="ko-KR" sz="1100"/>
           </a:p>
@@ -5852,7 +5852,7 @@
                 <a:latin typeface="Malgun Gothic"/>
                 <a:ea typeface="Malgun Gothic"/>
               </a:rPr>
-              <a:t>004170</a:t>
+              <a:t>053610</a:t>
             </a:r>
             <a:endParaRPr lang="ko-KR" sz="1100"/>
           </a:p>
@@ -5990,7 +5990,7 @@
                 <a:latin typeface="Malgun Gothic"/>
                 <a:ea typeface="Malgun Gothic"/>
               </a:rPr>
-              <a:t>1.57%</a:t>
+              <a:t>1.54%</a:t>
             </a:r>
             <a:endParaRPr lang="ko-KR" sz="1100"/>
           </a:p>
@@ -6059,7 +6059,7 @@
                 <a:latin typeface="Malgun Gothic"/>
                 <a:ea typeface="Malgun Gothic"/>
               </a:rPr>
-              <a:t>+1.57pp</a:t>
+              <a:t>+1.54pp</a:t>
             </a:r>
             <a:endParaRPr lang="ko-KR" sz="1100"/>
           </a:p>
@@ -6128,7 +6128,7 @@
                 <a:latin typeface="Malgun Gothic"/>
                 <a:ea typeface="Malgun Gothic"/>
               </a:rPr>
-              <a:t>KoAct AI인프라액티브</a:t>
+              <a:t>RISE 바이오TOP10액티브</a:t>
             </a:r>
             <a:endParaRPr lang="ko-KR" sz="1100"/>
           </a:p>
@@ -6197,7 +6197,7 @@
                 <a:latin typeface="Malgun Gothic"/>
                 <a:ea typeface="Malgun Gothic"/>
               </a:rPr>
-              <a:t>신규 프로텍</a:t>
+              <a:t>증가 알테오젠</a:t>
             </a:r>
             <a:endParaRPr lang="ko-KR" sz="1100"/>
           </a:p>
@@ -6266,7 +6266,7 @@
                 <a:latin typeface="Malgun Gothic"/>
                 <a:ea typeface="Malgun Gothic"/>
               </a:rPr>
-              <a:t>053610</a:t>
+              <a:t>196170</a:t>
             </a:r>
             <a:endParaRPr lang="ko-KR" sz="1100"/>
           </a:p>
@@ -6335,7 +6335,7 @@
                 <a:latin typeface="Malgun Gothic"/>
                 <a:ea typeface="Malgun Gothic"/>
               </a:rPr>
-              <a:t>0.00%</a:t>
+              <a:t>6.21%</a:t>
             </a:r>
             <a:endParaRPr lang="ko-KR" sz="1100"/>
           </a:p>
@@ -6404,7 +6404,7 @@
                 <a:latin typeface="Malgun Gothic"/>
                 <a:ea typeface="Malgun Gothic"/>
               </a:rPr>
-              <a:t>1.55%</a:t>
+              <a:t>7.75%</a:t>
             </a:r>
             <a:endParaRPr lang="ko-KR" sz="1100"/>
           </a:p>
@@ -6473,7 +6473,7 @@
                 <a:latin typeface="Malgun Gothic"/>
                 <a:ea typeface="Malgun Gothic"/>
               </a:rPr>
-              <a:t>+1.55pp</a:t>
+              <a:t>+1.54pp</a:t>
             </a:r>
             <a:endParaRPr lang="ko-KR" sz="1100"/>
           </a:p>
@@ -6818,7 +6818,7 @@
                 <a:latin typeface="Malgun Gothic"/>
                 <a:ea typeface="Malgun Gothic"/>
               </a:rPr>
-              <a:t>4.27%</a:t>
+              <a:t>4.25%</a:t>
             </a:r>
             <a:endParaRPr lang="ko-KR" sz="1100"/>
           </a:p>
@@ -6887,7 +6887,7 @@
                 <a:latin typeface="Malgun Gothic"/>
                 <a:ea typeface="Malgun Gothic"/>
               </a:rPr>
-              <a:t>+1.36pp</a:t>
+              <a:t>+1.34pp</a:t>
             </a:r>
             <a:endParaRPr lang="ko-KR" sz="1100"/>
           </a:p>
@@ -7828,7 +7828,7 @@
                 <a:latin typeface="Malgun Gothic"/>
                 <a:ea typeface="Malgun Gothic"/>
               </a:rPr>
-              <a:t>6.77%</a:t>
+              <a:t>6.74%</a:t>
             </a:r>
             <a:endParaRPr lang="ko-KR" sz="1100"/>
           </a:p>
@@ -7897,7 +7897,7 @@
                 <a:latin typeface="Malgun Gothic"/>
                 <a:ea typeface="Malgun Gothic"/>
               </a:rPr>
-              <a:t>-3.17pp</a:t>
+              <a:t>-3.20pp</a:t>
             </a:r>
             <a:endParaRPr lang="ko-KR" sz="1100"/>
           </a:p>
@@ -8242,7 +8242,7 @@
                 <a:latin typeface="Malgun Gothic"/>
                 <a:ea typeface="Malgun Gothic"/>
               </a:rPr>
-              <a:t>1.42%</a:t>
+              <a:t>1.41%</a:t>
             </a:r>
             <a:endParaRPr lang="ko-KR" sz="1100"/>
           </a:p>
@@ -8311,7 +8311,7 @@
                 <a:latin typeface="Malgun Gothic"/>
                 <a:ea typeface="Malgun Gothic"/>
               </a:rPr>
-              <a:t>-2.88pp</a:t>
+              <a:t>-2.89pp</a:t>
             </a:r>
             <a:endParaRPr lang="ko-KR" sz="1100"/>
           </a:p>
@@ -10726,7 +10726,7 @@
                 <a:latin typeface="Malgun Gothic"/>
                 <a:ea typeface="Malgun Gothic"/>
               </a:rPr>
-              <a:t>6.07%</a:t>
+              <a:t>6.06%</a:t>
             </a:r>
             <a:endParaRPr lang="ko-KR" sz="1100"/>
           </a:p>
@@ -10795,7 +10795,7 @@
                 <a:latin typeface="Malgun Gothic"/>
                 <a:ea typeface="Malgun Gothic"/>
               </a:rPr>
-              <a:t>-2.03pp</a:t>
+              <a:t>-2.04pp</a:t>
             </a:r>
             <a:endParaRPr lang="ko-KR" sz="1100"/>
           </a:p>
@@ -11849,7 +11849,7 @@
                 <a:latin typeface="Malgun Gothic"/>
                 <a:ea typeface="Malgun Gothic"/>
               </a:rPr>
-              <a:t>1. 오늘 변화 ETF는 72개, 전체 변화는 994건입니다.</a:t>
+              <a:t>1. 오늘 변화 ETF는 72개, 전체 변화는 1018건입니다.</a:t>
             </a:r>
             <a:endParaRPr lang="ko-KR" sz="2400"/>
           </a:p>
@@ -11863,7 +11863,7 @@
                 <a:latin typeface="Malgun Gothic"/>
                 <a:ea typeface="Malgun Gothic"/>
               </a:rPr>
-              <a:t>2. 매수/비중증가 438건, 매도/비중감소 540건을 확인했습니다.</a:t>
+              <a:t>2. 매수/비중증가 449건, 매도/비중감소 553건을 확인했습니다.</a:t>
             </a:r>
             <a:endParaRPr lang="ko-KR" sz="2400"/>
           </a:p>

--- a/docs/latest_changes.pptx
+++ b/docs/latest_changes.pptx
@@ -374,7 +374,7 @@
                 <a:latin typeface="Malgun Gothic"/>
                 <a:ea typeface="Malgun Gothic"/>
               </a:rPr>
-              <a:t>215</a:t>
+              <a:t>71</a:t>
             </a:r>
             <a:endParaRPr lang="ko-KR" sz="3000"/>
           </a:p>
@@ -512,7 +512,7 @@
                 <a:latin typeface="Malgun Gothic"/>
                 <a:ea typeface="Malgun Gothic"/>
               </a:rPr>
-              <a:t>72</a:t>
+              <a:t>71</a:t>
             </a:r>
             <a:endParaRPr lang="ko-KR" sz="3000"/>
           </a:p>
@@ -650,7 +650,7 @@
                 <a:latin typeface="Malgun Gothic"/>
                 <a:ea typeface="Malgun Gothic"/>
               </a:rPr>
-              <a:t>1018</a:t>
+              <a:t>1012</a:t>
             </a:r>
             <a:endParaRPr lang="ko-KR" sz="3000"/>
           </a:p>
@@ -5714,7 +5714,7 @@
                 <a:latin typeface="Malgun Gothic"/>
                 <a:ea typeface="Malgun Gothic"/>
               </a:rPr>
-              <a:t>KoAct AI인프라액티브</a:t>
+              <a:t>RISE 바이오TOP10액티브</a:t>
             </a:r>
             <a:endParaRPr lang="ko-KR" sz="1100"/>
           </a:p>
@@ -5783,7 +5783,7 @@
                 <a:latin typeface="Malgun Gothic"/>
                 <a:ea typeface="Malgun Gothic"/>
               </a:rPr>
-              <a:t>신규 프로텍</a:t>
+              <a:t>증가 알테오젠</a:t>
             </a:r>
             <a:endParaRPr lang="ko-KR" sz="1100"/>
           </a:p>
@@ -5852,7 +5852,7 @@
                 <a:latin typeface="Malgun Gothic"/>
                 <a:ea typeface="Malgun Gothic"/>
               </a:rPr>
-              <a:t>053610</a:t>
+              <a:t>196170</a:t>
             </a:r>
             <a:endParaRPr lang="ko-KR" sz="1100"/>
           </a:p>
@@ -5921,7 +5921,7 @@
                 <a:latin typeface="Malgun Gothic"/>
                 <a:ea typeface="Malgun Gothic"/>
               </a:rPr>
-              <a:t>0.00%</a:t>
+              <a:t>6.21%</a:t>
             </a:r>
             <a:endParaRPr lang="ko-KR" sz="1100"/>
           </a:p>
@@ -5990,7 +5990,7 @@
                 <a:latin typeface="Malgun Gothic"/>
                 <a:ea typeface="Malgun Gothic"/>
               </a:rPr>
-              <a:t>1.54%</a:t>
+              <a:t>7.75%</a:t>
             </a:r>
             <a:endParaRPr lang="ko-KR" sz="1100"/>
           </a:p>
@@ -6128,7 +6128,7 @@
                 <a:latin typeface="Malgun Gothic"/>
                 <a:ea typeface="Malgun Gothic"/>
               </a:rPr>
-              <a:t>RISE 바이오TOP10액티브</a:t>
+              <a:t>KoAct AI인프라액티브</a:t>
             </a:r>
             <a:endParaRPr lang="ko-KR" sz="1100"/>
           </a:p>
@@ -6197,7 +6197,7 @@
                 <a:latin typeface="Malgun Gothic"/>
                 <a:ea typeface="Malgun Gothic"/>
               </a:rPr>
-              <a:t>증가 알테오젠</a:t>
+              <a:t>신규 프로텍</a:t>
             </a:r>
             <a:endParaRPr lang="ko-KR" sz="1100"/>
           </a:p>
@@ -6266,7 +6266,7 @@
                 <a:latin typeface="Malgun Gothic"/>
                 <a:ea typeface="Malgun Gothic"/>
               </a:rPr>
-              <a:t>196170</a:t>
+              <a:t>053610</a:t>
             </a:r>
             <a:endParaRPr lang="ko-KR" sz="1100"/>
           </a:p>
@@ -6335,7 +6335,7 @@
                 <a:latin typeface="Malgun Gothic"/>
                 <a:ea typeface="Malgun Gothic"/>
               </a:rPr>
-              <a:t>6.21%</a:t>
+              <a:t>0.00%</a:t>
             </a:r>
             <a:endParaRPr lang="ko-KR" sz="1100"/>
           </a:p>
@@ -6404,7 +6404,7 @@
                 <a:latin typeface="Malgun Gothic"/>
                 <a:ea typeface="Malgun Gothic"/>
               </a:rPr>
-              <a:t>7.75%</a:t>
+              <a:t>1.54%</a:t>
             </a:r>
             <a:endParaRPr lang="ko-KR" sz="1100"/>
           </a:p>
@@ -11849,7 +11849,7 @@
                 <a:latin typeface="Malgun Gothic"/>
                 <a:ea typeface="Malgun Gothic"/>
               </a:rPr>
-              <a:t>1. 오늘 변화 ETF는 72개, 전체 변화는 1018건입니다.</a:t>
+              <a:t>1. 오늘 변화 ETF는 71개, 전체 변화는 1012건입니다.</a:t>
             </a:r>
             <a:endParaRPr lang="ko-KR" sz="2400"/>
           </a:p>

--- a/docs/latest_changes.pptx
+++ b/docs/latest_changes.pptx
@@ -374,7 +374,7 @@
                 <a:latin typeface="Malgun Gothic"/>
                 <a:ea typeface="Malgun Gothic"/>
               </a:rPr>
-              <a:t>71</a:t>
+              <a:t>190</a:t>
             </a:r>
             <a:endParaRPr lang="ko-KR" sz="3000"/>
           </a:p>
@@ -650,7 +650,7 @@
                 <a:latin typeface="Malgun Gothic"/>
                 <a:ea typeface="Malgun Gothic"/>
               </a:rPr>
-              <a:t>1012</a:t>
+              <a:t>999</a:t>
             </a:r>
             <a:endParaRPr lang="ko-KR" sz="3000"/>
           </a:p>
@@ -788,7 +788,7 @@
                 <a:latin typeface="Malgun Gothic"/>
                 <a:ea typeface="Malgun Gothic"/>
               </a:rPr>
-              <a:t>449</a:t>
+              <a:t>454</a:t>
             </a:r>
             <a:endParaRPr lang="ko-KR" sz="3000"/>
           </a:p>
@@ -926,7 +926,7 @@
                 <a:latin typeface="Malgun Gothic"/>
                 <a:ea typeface="Malgun Gothic"/>
               </a:rPr>
-              <a:t>553</a:t>
+              <a:t>535</a:t>
             </a:r>
             <a:endParaRPr lang="ko-KR" sz="3000"/>
           </a:p>
@@ -1395,7 +1395,7 @@
                 <a:latin typeface="Malgun Gothic"/>
                 <a:ea typeface="Malgun Gothic"/>
               </a:rPr>
-              <a:t>충격도 25.39pp</a:t>
+              <a:t>충격도 25.40pp</a:t>
             </a:r>
             <a:endParaRPr lang="ko-KR" sz="1800"/>
           </a:p>
@@ -1584,7 +1584,7 @@
                 <a:latin typeface="Malgun Gothic"/>
                 <a:ea typeface="Malgun Gothic"/>
               </a:rPr>
-              <a:t>충격도 19.42pp</a:t>
+              <a:t>충격도 19.49pp</a:t>
             </a:r>
             <a:endParaRPr lang="ko-KR" sz="1800"/>
           </a:p>
@@ -1773,7 +1773,7 @@
                 <a:latin typeface="Malgun Gothic"/>
                 <a:ea typeface="Malgun Gothic"/>
               </a:rPr>
-              <a:t>충격도 15.48pp</a:t>
+              <a:t>충격도 15.14pp</a:t>
             </a:r>
             <a:endParaRPr lang="ko-KR" sz="1800"/>
           </a:p>
@@ -1922,7 +1922,7 @@
                 <a:latin typeface="Malgun Gothic"/>
                 <a:ea typeface="Malgun Gothic"/>
               </a:rPr>
-              <a:t>변화 19건 | 매수/증가 10건 | 매도/감소 9건</a:t>
+              <a:t>변화 18건 | 매수/증가 10건 | 매도/감소 8건</a:t>
             </a:r>
             <a:endParaRPr lang="ko-KR" sz="1300"/>
           </a:p>
@@ -1962,7 +1962,7 @@
                 <a:latin typeface="Malgun Gothic"/>
                 <a:ea typeface="Malgun Gothic"/>
               </a:rPr>
-              <a:t>충격도 12.36pp</a:t>
+              <a:t>충격도 12.48pp</a:t>
             </a:r>
             <a:endParaRPr lang="ko-KR" sz="1800"/>
           </a:p>
@@ -2111,7 +2111,7 @@
                 <a:latin typeface="Malgun Gothic"/>
                 <a:ea typeface="Malgun Gothic"/>
               </a:rPr>
-              <a:t>변화 24건 | 매수/증가 9건 | 매도/감소 15건</a:t>
+              <a:t>변화 25건 | 매수/증가 12건 | 매도/감소 13건</a:t>
             </a:r>
             <a:endParaRPr lang="ko-KR" sz="1300"/>
           </a:p>
@@ -3092,7 +3092,7 @@
                 <a:latin typeface="Malgun Gothic"/>
                 <a:ea typeface="Malgun Gothic"/>
               </a:rPr>
-              <a:t>13.72%</a:t>
+              <a:t>13.70%</a:t>
             </a:r>
             <a:endParaRPr lang="ko-KR" sz="1100"/>
           </a:p>
@@ -3161,7 +3161,7 @@
                 <a:latin typeface="Malgun Gothic"/>
                 <a:ea typeface="Malgun Gothic"/>
               </a:rPr>
-              <a:t>+11.38pp</a:t>
+              <a:t>+11.36pp</a:t>
             </a:r>
             <a:endParaRPr lang="ko-KR" sz="1100"/>
           </a:p>
@@ -3506,7 +3506,7 @@
                 <a:latin typeface="Malgun Gothic"/>
                 <a:ea typeface="Malgun Gothic"/>
               </a:rPr>
-              <a:t>17.99%</a:t>
+              <a:t>17.96%</a:t>
             </a:r>
             <a:endParaRPr lang="ko-KR" sz="1100"/>
           </a:p>
@@ -3575,7 +3575,7 @@
                 <a:latin typeface="Malgun Gothic"/>
                 <a:ea typeface="Malgun Gothic"/>
               </a:rPr>
-              <a:t>+9.47pp</a:t>
+              <a:t>+9.44pp</a:t>
             </a:r>
             <a:endParaRPr lang="ko-KR" sz="1100"/>
           </a:p>
@@ -4334,7 +4334,7 @@
                 <a:latin typeface="Malgun Gothic"/>
                 <a:ea typeface="Malgun Gothic"/>
               </a:rPr>
-              <a:t>10.66%</a:t>
+              <a:t>10.64%</a:t>
             </a:r>
             <a:endParaRPr lang="ko-KR" sz="1100"/>
           </a:p>
@@ -4403,7 +4403,7 @@
                 <a:latin typeface="Malgun Gothic"/>
                 <a:ea typeface="Malgun Gothic"/>
               </a:rPr>
-              <a:t>+3.04pp</a:t>
+              <a:t>+3.02pp</a:t>
             </a:r>
             <a:endParaRPr lang="ko-KR" sz="1100"/>
           </a:p>
@@ -4748,7 +4748,7 @@
                 <a:latin typeface="Malgun Gothic"/>
                 <a:ea typeface="Malgun Gothic"/>
               </a:rPr>
-              <a:t>2.75%</a:t>
+              <a:t>2.74%</a:t>
             </a:r>
             <a:endParaRPr lang="ko-KR" sz="1100"/>
           </a:p>
@@ -4817,7 +4817,7 @@
                 <a:latin typeface="Malgun Gothic"/>
                 <a:ea typeface="Malgun Gothic"/>
               </a:rPr>
-              <a:t>+1.96pp</a:t>
+              <a:t>+1.95pp</a:t>
             </a:r>
             <a:endParaRPr lang="ko-KR" sz="1100"/>
           </a:p>
@@ -5162,7 +5162,7 @@
                 <a:latin typeface="Malgun Gothic"/>
                 <a:ea typeface="Malgun Gothic"/>
               </a:rPr>
-              <a:t>1.79%</a:t>
+              <a:t>1.78%</a:t>
             </a:r>
             <a:endParaRPr lang="ko-KR" sz="1100"/>
           </a:p>
@@ -5231,7 +5231,7 @@
                 <a:latin typeface="Malgun Gothic"/>
                 <a:ea typeface="Malgun Gothic"/>
               </a:rPr>
-              <a:t>+1.79pp</a:t>
+              <a:t>+1.78pp</a:t>
             </a:r>
             <a:endParaRPr lang="ko-KR" sz="1100"/>
           </a:p>
@@ -5714,7 +5714,7 @@
                 <a:latin typeface="Malgun Gothic"/>
                 <a:ea typeface="Malgun Gothic"/>
               </a:rPr>
-              <a:t>RISE 바이오TOP10액티브</a:t>
+              <a:t>KoAct AI인프라액티브</a:t>
             </a:r>
             <a:endParaRPr lang="ko-KR" sz="1100"/>
           </a:p>
@@ -5783,7 +5783,7 @@
                 <a:latin typeface="Malgun Gothic"/>
                 <a:ea typeface="Malgun Gothic"/>
               </a:rPr>
-              <a:t>증가 알테오젠</a:t>
+              <a:t>신규 프로텍</a:t>
             </a:r>
             <a:endParaRPr lang="ko-KR" sz="1100"/>
           </a:p>
@@ -5852,7 +5852,7 @@
                 <a:latin typeface="Malgun Gothic"/>
                 <a:ea typeface="Malgun Gothic"/>
               </a:rPr>
-              <a:t>196170</a:t>
+              <a:t>053610</a:t>
             </a:r>
             <a:endParaRPr lang="ko-KR" sz="1100"/>
           </a:p>
@@ -5921,7 +5921,7 @@
                 <a:latin typeface="Malgun Gothic"/>
                 <a:ea typeface="Malgun Gothic"/>
               </a:rPr>
-              <a:t>6.21%</a:t>
+              <a:t>0.00%</a:t>
             </a:r>
             <a:endParaRPr lang="ko-KR" sz="1100"/>
           </a:p>
@@ -5990,7 +5990,7 @@
                 <a:latin typeface="Malgun Gothic"/>
                 <a:ea typeface="Malgun Gothic"/>
               </a:rPr>
-              <a:t>7.75%</a:t>
+              <a:t>1.54%</a:t>
             </a:r>
             <a:endParaRPr lang="ko-KR" sz="1100"/>
           </a:p>
@@ -6128,7 +6128,7 @@
                 <a:latin typeface="Malgun Gothic"/>
                 <a:ea typeface="Malgun Gothic"/>
               </a:rPr>
-              <a:t>KoAct AI인프라액티브</a:t>
+              <a:t>RISE 바이오TOP10액티브</a:t>
             </a:r>
             <a:endParaRPr lang="ko-KR" sz="1100"/>
           </a:p>
@@ -6197,7 +6197,7 @@
                 <a:latin typeface="Malgun Gothic"/>
                 <a:ea typeface="Malgun Gothic"/>
               </a:rPr>
-              <a:t>신규 프로텍</a:t>
+              <a:t>증가 알테오젠</a:t>
             </a:r>
             <a:endParaRPr lang="ko-KR" sz="1100"/>
           </a:p>
@@ -6266,7 +6266,7 @@
                 <a:latin typeface="Malgun Gothic"/>
                 <a:ea typeface="Malgun Gothic"/>
               </a:rPr>
-              <a:t>053610</a:t>
+              <a:t>196170</a:t>
             </a:r>
             <a:endParaRPr lang="ko-KR" sz="1100"/>
           </a:p>
@@ -6335,7 +6335,7 @@
                 <a:latin typeface="Malgun Gothic"/>
                 <a:ea typeface="Malgun Gothic"/>
               </a:rPr>
-              <a:t>0.00%</a:t>
+              <a:t>6.21%</a:t>
             </a:r>
             <a:endParaRPr lang="ko-KR" sz="1100"/>
           </a:p>
@@ -6404,7 +6404,7 @@
                 <a:latin typeface="Malgun Gothic"/>
                 <a:ea typeface="Malgun Gothic"/>
               </a:rPr>
-              <a:t>1.54%</a:t>
+              <a:t>7.72%</a:t>
             </a:r>
             <a:endParaRPr lang="ko-KR" sz="1100"/>
           </a:p>
@@ -6473,7 +6473,7 @@
                 <a:latin typeface="Malgun Gothic"/>
                 <a:ea typeface="Malgun Gothic"/>
               </a:rPr>
-              <a:t>+1.54pp</a:t>
+              <a:t>+1.51pp</a:t>
             </a:r>
             <a:endParaRPr lang="ko-KR" sz="1100"/>
           </a:p>
@@ -6818,7 +6818,7 @@
                 <a:latin typeface="Malgun Gothic"/>
                 <a:ea typeface="Malgun Gothic"/>
               </a:rPr>
-              <a:t>4.25%</a:t>
+              <a:t>4.21%</a:t>
             </a:r>
             <a:endParaRPr lang="ko-KR" sz="1100"/>
           </a:p>
@@ -6887,7 +6887,7 @@
                 <a:latin typeface="Malgun Gothic"/>
                 <a:ea typeface="Malgun Gothic"/>
               </a:rPr>
-              <a:t>+1.34pp</a:t>
+              <a:t>+1.30pp</a:t>
             </a:r>
             <a:endParaRPr lang="ko-KR" sz="1100"/>
           </a:p>
@@ -7828,7 +7828,7 @@
                 <a:latin typeface="Malgun Gothic"/>
                 <a:ea typeface="Malgun Gothic"/>
               </a:rPr>
-              <a:t>6.74%</a:t>
+              <a:t>6.72%</a:t>
             </a:r>
             <a:endParaRPr lang="ko-KR" sz="1100"/>
           </a:p>
@@ -7897,7 +7897,7 @@
                 <a:latin typeface="Malgun Gothic"/>
                 <a:ea typeface="Malgun Gothic"/>
               </a:rPr>
-              <a:t>-3.20pp</a:t>
+              <a:t>-3.22pp</a:t>
             </a:r>
             <a:endParaRPr lang="ko-KR" sz="1100"/>
           </a:p>
@@ -9484,7 +9484,7 @@
                 <a:latin typeface="Malgun Gothic"/>
                 <a:ea typeface="Malgun Gothic"/>
               </a:rPr>
-              <a:t>5.13%</a:t>
+              <a:t>5.16%</a:t>
             </a:r>
             <a:endParaRPr lang="ko-KR" sz="1100"/>
           </a:p>
@@ -9553,7 +9553,7 @@
                 <a:latin typeface="Malgun Gothic"/>
                 <a:ea typeface="Malgun Gothic"/>
               </a:rPr>
-              <a:t>-2.11pp</a:t>
+              <a:t>-2.08pp</a:t>
             </a:r>
             <a:endParaRPr lang="ko-KR" sz="1100"/>
           </a:p>
@@ -10105,7 +10105,7 @@
                 <a:latin typeface="Malgun Gothic"/>
                 <a:ea typeface="Malgun Gothic"/>
               </a:rPr>
-              <a:t>감소 파라다이스</a:t>
+              <a:t>감소 아모레퍼시픽</a:t>
             </a:r>
             <a:endParaRPr lang="ko-KR" sz="1100"/>
           </a:p>
@@ -10174,7 +10174,7 @@
                 <a:latin typeface="Malgun Gothic"/>
                 <a:ea typeface="Malgun Gothic"/>
               </a:rPr>
-              <a:t>034230</a:t>
+              <a:t>090430</a:t>
             </a:r>
             <a:endParaRPr lang="ko-KR" sz="1100"/>
           </a:p>
@@ -10243,7 +10243,7 @@
                 <a:latin typeface="Malgun Gothic"/>
                 <a:ea typeface="Malgun Gothic"/>
               </a:rPr>
-              <a:t>7.00%</a:t>
+              <a:t>8.10%</a:t>
             </a:r>
             <a:endParaRPr lang="ko-KR" sz="1100"/>
           </a:p>
@@ -10312,7 +10312,7 @@
                 <a:latin typeface="Malgun Gothic"/>
                 <a:ea typeface="Malgun Gothic"/>
               </a:rPr>
-              <a:t>4.96%</a:t>
+              <a:t>6.05%</a:t>
             </a:r>
             <a:endParaRPr lang="ko-KR" sz="1100"/>
           </a:p>
@@ -10381,7 +10381,7 @@
                 <a:latin typeface="Malgun Gothic"/>
                 <a:ea typeface="Malgun Gothic"/>
               </a:rPr>
-              <a:t>-2.04pp</a:t>
+              <a:t>-2.05pp</a:t>
             </a:r>
             <a:endParaRPr lang="ko-KR" sz="1100"/>
           </a:p>
@@ -10519,7 +10519,7 @@
                 <a:latin typeface="Malgun Gothic"/>
                 <a:ea typeface="Malgun Gothic"/>
               </a:rPr>
-              <a:t>감소 아모레퍼시픽</a:t>
+              <a:t>감소 파라다이스</a:t>
             </a:r>
             <a:endParaRPr lang="ko-KR" sz="1100"/>
           </a:p>
@@ -10588,7 +10588,7 @@
                 <a:latin typeface="Malgun Gothic"/>
                 <a:ea typeface="Malgun Gothic"/>
               </a:rPr>
-              <a:t>090430</a:t>
+              <a:t>034230</a:t>
             </a:r>
             <a:endParaRPr lang="ko-KR" sz="1100"/>
           </a:p>
@@ -10657,7 +10657,7 @@
                 <a:latin typeface="Malgun Gothic"/>
                 <a:ea typeface="Malgun Gothic"/>
               </a:rPr>
-              <a:t>8.10%</a:t>
+              <a:t>7.00%</a:t>
             </a:r>
             <a:endParaRPr lang="ko-KR" sz="1100"/>
           </a:p>
@@ -10726,7 +10726,7 @@
                 <a:latin typeface="Malgun Gothic"/>
                 <a:ea typeface="Malgun Gothic"/>
               </a:rPr>
-              <a:t>6.06%</a:t>
+              <a:t>4.96%</a:t>
             </a:r>
             <a:endParaRPr lang="ko-KR" sz="1100"/>
           </a:p>
@@ -11554,7 +11554,7 @@
                 <a:latin typeface="Malgun Gothic"/>
                 <a:ea typeface="Malgun Gothic"/>
               </a:rPr>
-              <a:t>5.02%</a:t>
+              <a:t>5.00%</a:t>
             </a:r>
             <a:endParaRPr lang="ko-KR" sz="1100"/>
           </a:p>
@@ -11623,7 +11623,7 @@
                 <a:latin typeface="Malgun Gothic"/>
                 <a:ea typeface="Malgun Gothic"/>
               </a:rPr>
-              <a:t>-1.77pp</a:t>
+              <a:t>-1.79pp</a:t>
             </a:r>
             <a:endParaRPr lang="ko-KR" sz="1100"/>
           </a:p>
@@ -11849,7 +11849,7 @@
                 <a:latin typeface="Malgun Gothic"/>
                 <a:ea typeface="Malgun Gothic"/>
               </a:rPr>
-              <a:t>1. 오늘 변화 ETF는 71개, 전체 변화는 1012건입니다.</a:t>
+              <a:t>1. 오늘 변화 ETF는 71개, 전체 변화는 999건입니다.</a:t>
             </a:r>
             <a:endParaRPr lang="ko-KR" sz="2400"/>
           </a:p>
@@ -11863,7 +11863,7 @@
                 <a:latin typeface="Malgun Gothic"/>
                 <a:ea typeface="Malgun Gothic"/>
               </a:rPr>
-              <a:t>2. 매수/비중증가 449건, 매도/비중감소 553건을 확인했습니다.</a:t>
+              <a:t>2. 매수/비중증가 454건, 매도/비중감소 535건을 확인했습니다.</a:t>
             </a:r>
             <a:endParaRPr lang="ko-KR" sz="2400"/>
           </a:p>

--- a/docs/latest_changes.pptx
+++ b/docs/latest_changes.pptx
@@ -650,7 +650,7 @@
                 <a:latin typeface="Malgun Gothic"/>
                 <a:ea typeface="Malgun Gothic"/>
               </a:rPr>
-              <a:t>999</a:t>
+              <a:t>1006</a:t>
             </a:r>
             <a:endParaRPr lang="ko-KR" sz="3000"/>
           </a:p>
@@ -788,7 +788,7 @@
                 <a:latin typeface="Malgun Gothic"/>
                 <a:ea typeface="Malgun Gothic"/>
               </a:rPr>
-              <a:t>454</a:t>
+              <a:t>453</a:t>
             </a:r>
             <a:endParaRPr lang="ko-KR" sz="3000"/>
           </a:p>
@@ -926,7 +926,7 @@
                 <a:latin typeface="Malgun Gothic"/>
                 <a:ea typeface="Malgun Gothic"/>
               </a:rPr>
-              <a:t>535</a:t>
+              <a:t>543</a:t>
             </a:r>
             <a:endParaRPr lang="ko-KR" sz="3000"/>
           </a:p>
@@ -1922,7 +1922,7 @@
                 <a:latin typeface="Malgun Gothic"/>
                 <a:ea typeface="Malgun Gothic"/>
               </a:rPr>
-              <a:t>변화 18건 | 매수/증가 10건 | 매도/감소 8건</a:t>
+              <a:t>변화 19건 | 매수/증가 10건 | 매도/감소 9건</a:t>
             </a:r>
             <a:endParaRPr lang="ko-KR" sz="1300"/>
           </a:p>
@@ -1962,7 +1962,7 @@
                 <a:latin typeface="Malgun Gothic"/>
                 <a:ea typeface="Malgun Gothic"/>
               </a:rPr>
-              <a:t>충격도 12.48pp</a:t>
+              <a:t>충격도 12.51pp</a:t>
             </a:r>
             <a:endParaRPr lang="ko-KR" sz="1800"/>
           </a:p>
@@ -2111,7 +2111,7 @@
                 <a:latin typeface="Malgun Gothic"/>
                 <a:ea typeface="Malgun Gothic"/>
               </a:rPr>
-              <a:t>변화 25건 | 매수/증가 12건 | 매도/감소 13건</a:t>
+              <a:t>변화 24건 | 매수/증가 12건 | 매도/감소 12건</a:t>
             </a:r>
             <a:endParaRPr lang="ko-KR" sz="1300"/>
           </a:p>
@@ -2151,7 +2151,7 @@
                 <a:latin typeface="Malgun Gothic"/>
                 <a:ea typeface="Malgun Gothic"/>
               </a:rPr>
-              <a:t>충격도 10.75pp</a:t>
+              <a:t>충격도 10.64pp</a:t>
             </a:r>
             <a:endParaRPr lang="ko-KR" sz="1800"/>
           </a:p>
@@ -5162,7 +5162,7 @@
                 <a:latin typeface="Malgun Gothic"/>
                 <a:ea typeface="Malgun Gothic"/>
               </a:rPr>
-              <a:t>1.78%</a:t>
+              <a:t>1.79%</a:t>
             </a:r>
             <a:endParaRPr lang="ko-KR" sz="1100"/>
           </a:p>
@@ -5231,7 +5231,7 @@
                 <a:latin typeface="Malgun Gothic"/>
                 <a:ea typeface="Malgun Gothic"/>
               </a:rPr>
-              <a:t>+1.78pp</a:t>
+              <a:t>+1.79pp</a:t>
             </a:r>
             <a:endParaRPr lang="ko-KR" sz="1100"/>
           </a:p>
@@ -11849,7 +11849,7 @@
                 <a:latin typeface="Malgun Gothic"/>
                 <a:ea typeface="Malgun Gothic"/>
               </a:rPr>
-              <a:t>1. 오늘 변화 ETF는 71개, 전체 변화는 999건입니다.</a:t>
+              <a:t>1. 오늘 변화 ETF는 71개, 전체 변화는 1006건입니다.</a:t>
             </a:r>
             <a:endParaRPr lang="ko-KR" sz="2400"/>
           </a:p>
@@ -11863,7 +11863,7 @@
                 <a:latin typeface="Malgun Gothic"/>
                 <a:ea typeface="Malgun Gothic"/>
               </a:rPr>
-              <a:t>2. 매수/비중증가 454건, 매도/비중감소 535건을 확인했습니다.</a:t>
+              <a:t>2. 매수/비중증가 453건, 매도/비중감소 543건을 확인했습니다.</a:t>
             </a:r>
             <a:endParaRPr lang="ko-KR" sz="2400"/>
           </a:p>
